--- a/docs/pptx/carbo/jx-carbo-linsubhr-ratio-hosp4.pptx
+++ b/docs/pptx/carbo/jx-carbo-linsubhr-ratio-hosp4.pptx
@@ -2271,7 +2271,7 @@
           </p:nvSpPr>
           <p:spPr>
             <a:xfrm>
-              <a:off x="817517" y="5114368"/>
+              <a:off x="817517" y="5142518"/>
               <a:ext cx="7799693" cy="0"/>
             </a:xfrm>
             <a:custGeom>
@@ -2314,7 +2314,7 @@
           </p:nvSpPr>
           <p:spPr>
             <a:xfrm>
-              <a:off x="817517" y="4244691"/>
+              <a:off x="817517" y="4313054"/>
               <a:ext cx="7799693" cy="0"/>
             </a:xfrm>
             <a:custGeom>
@@ -2357,7 +2357,7 @@
           </p:nvSpPr>
           <p:spPr>
             <a:xfrm>
-              <a:off x="817517" y="3375014"/>
+              <a:off x="817517" y="3483591"/>
               <a:ext cx="7799693" cy="0"/>
             </a:xfrm>
             <a:custGeom>
@@ -2400,7 +2400,7 @@
           </p:nvSpPr>
           <p:spPr>
             <a:xfrm>
-              <a:off x="817517" y="2505337"/>
+              <a:off x="817517" y="2654127"/>
               <a:ext cx="7799693" cy="0"/>
             </a:xfrm>
             <a:custGeom>
@@ -2443,15 +2443,15 @@
           </p:nvSpPr>
           <p:spPr>
             <a:xfrm>
-              <a:off x="1615213" y="1896563"/>
-              <a:ext cx="0" cy="3826579"/>
+              <a:off x="1615213" y="2073503"/>
+              <a:ext cx="0" cy="3649639"/>
             </a:xfrm>
             <a:custGeom>
               <a:avLst/>
               <a:pathLst>
-                <a:path w="0" h="3826579">
+                <a:path w="0" h="3649639">
                   <a:moveTo>
-                    <a:pt x="0" y="3826579"/>
+                    <a:pt x="0" y="3649639"/>
                   </a:moveTo>
                   <a:lnTo>
                     <a:pt x="0" y="0"/>
@@ -2486,15 +2486,15 @@
           </p:nvSpPr>
           <p:spPr>
             <a:xfrm>
-              <a:off x="3387871" y="1896563"/>
-              <a:ext cx="0" cy="3826579"/>
+              <a:off x="3387871" y="2073503"/>
+              <a:ext cx="0" cy="3649639"/>
             </a:xfrm>
             <a:custGeom>
               <a:avLst/>
               <a:pathLst>
-                <a:path w="0" h="3826579">
+                <a:path w="0" h="3649639">
                   <a:moveTo>
-                    <a:pt x="0" y="3826579"/>
+                    <a:pt x="0" y="3649639"/>
                   </a:moveTo>
                   <a:lnTo>
                     <a:pt x="0" y="0"/>
@@ -2529,15 +2529,15 @@
           </p:nvSpPr>
           <p:spPr>
             <a:xfrm>
-              <a:off x="5160528" y="1896563"/>
-              <a:ext cx="0" cy="3826579"/>
+              <a:off x="5160528" y="2073503"/>
+              <a:ext cx="0" cy="3649639"/>
             </a:xfrm>
             <a:custGeom>
               <a:avLst/>
               <a:pathLst>
-                <a:path w="0" h="3826579">
+                <a:path w="0" h="3649639">
                   <a:moveTo>
-                    <a:pt x="0" y="3826579"/>
+                    <a:pt x="0" y="3649639"/>
                   </a:moveTo>
                   <a:lnTo>
                     <a:pt x="0" y="0"/>
@@ -2572,15 +2572,15 @@
           </p:nvSpPr>
           <p:spPr>
             <a:xfrm>
-              <a:off x="6933186" y="1896563"/>
-              <a:ext cx="0" cy="3826579"/>
+              <a:off x="6933186" y="2073503"/>
+              <a:ext cx="0" cy="3649639"/>
             </a:xfrm>
             <a:custGeom>
               <a:avLst/>
               <a:pathLst>
-                <a:path w="0" h="3826579">
+                <a:path w="0" h="3649639">
                   <a:moveTo>
-                    <a:pt x="0" y="3826579"/>
+                    <a:pt x="0" y="3649639"/>
                   </a:moveTo>
                   <a:lnTo>
                     <a:pt x="0" y="0"/>
@@ -2615,7 +2615,7 @@
           </p:nvSpPr>
           <p:spPr>
             <a:xfrm>
-              <a:off x="817517" y="5549207"/>
+              <a:off x="817517" y="5557249"/>
               <a:ext cx="7799693" cy="0"/>
             </a:xfrm>
             <a:custGeom>
@@ -2658,7 +2658,7 @@
           </p:nvSpPr>
           <p:spPr>
             <a:xfrm>
-              <a:off x="817517" y="4679530"/>
+              <a:off x="817517" y="4727786"/>
               <a:ext cx="7799693" cy="0"/>
             </a:xfrm>
             <a:custGeom>
@@ -2701,7 +2701,7 @@
           </p:nvSpPr>
           <p:spPr>
             <a:xfrm>
-              <a:off x="817517" y="3809853"/>
+              <a:off x="817517" y="3898322"/>
               <a:ext cx="7799693" cy="0"/>
             </a:xfrm>
             <a:custGeom>
@@ -2744,7 +2744,7 @@
           </p:nvSpPr>
           <p:spPr>
             <a:xfrm>
-              <a:off x="817517" y="2940175"/>
+              <a:off x="817517" y="3068859"/>
               <a:ext cx="7799693" cy="0"/>
             </a:xfrm>
             <a:custGeom>
@@ -2787,7 +2787,7 @@
           </p:nvSpPr>
           <p:spPr>
             <a:xfrm>
-              <a:off x="817517" y="2070498"/>
+              <a:off x="817517" y="2239395"/>
               <a:ext cx="7799693" cy="0"/>
             </a:xfrm>
             <a:custGeom>
@@ -2830,15 +2830,15 @@
           </p:nvSpPr>
           <p:spPr>
             <a:xfrm>
-              <a:off x="2501542" y="1896563"/>
-              <a:ext cx="0" cy="3826579"/>
+              <a:off x="2501542" y="2073503"/>
+              <a:ext cx="0" cy="3649639"/>
             </a:xfrm>
             <a:custGeom>
               <a:avLst/>
               <a:pathLst>
-                <a:path w="0" h="3826579">
+                <a:path w="0" h="3649639">
                   <a:moveTo>
-                    <a:pt x="0" y="3826579"/>
+                    <a:pt x="0" y="3649639"/>
                   </a:moveTo>
                   <a:lnTo>
                     <a:pt x="0" y="0"/>
@@ -2873,15 +2873,15 @@
           </p:nvSpPr>
           <p:spPr>
             <a:xfrm>
-              <a:off x="4274200" y="1896563"/>
-              <a:ext cx="0" cy="3826579"/>
+              <a:off x="4274200" y="2073503"/>
+              <a:ext cx="0" cy="3649639"/>
             </a:xfrm>
             <a:custGeom>
               <a:avLst/>
               <a:pathLst>
-                <a:path w="0" h="3826579">
+                <a:path w="0" h="3649639">
                   <a:moveTo>
-                    <a:pt x="0" y="3826579"/>
+                    <a:pt x="0" y="3649639"/>
                   </a:moveTo>
                   <a:lnTo>
                     <a:pt x="0" y="0"/>
@@ -2916,15 +2916,15 @@
           </p:nvSpPr>
           <p:spPr>
             <a:xfrm>
-              <a:off x="6046857" y="1896563"/>
-              <a:ext cx="0" cy="3826579"/>
+              <a:off x="6046857" y="2073503"/>
+              <a:ext cx="0" cy="3649639"/>
             </a:xfrm>
             <a:custGeom>
               <a:avLst/>
               <a:pathLst>
-                <a:path w="0" h="3826579">
+                <a:path w="0" h="3649639">
                   <a:moveTo>
-                    <a:pt x="0" y="3826579"/>
+                    <a:pt x="0" y="3649639"/>
                   </a:moveTo>
                   <a:lnTo>
                     <a:pt x="0" y="0"/>
@@ -2959,15 +2959,15 @@
           </p:nvSpPr>
           <p:spPr>
             <a:xfrm>
-              <a:off x="7819515" y="1896563"/>
-              <a:ext cx="0" cy="3826579"/>
+              <a:off x="7819515" y="2073503"/>
+              <a:ext cx="0" cy="3649639"/>
             </a:xfrm>
             <a:custGeom>
               <a:avLst/>
               <a:pathLst>
-                <a:path w="0" h="3826579">
+                <a:path w="0" h="3649639">
                   <a:moveTo>
-                    <a:pt x="0" y="3826579"/>
+                    <a:pt x="0" y="3649639"/>
                   </a:moveTo>
                   <a:lnTo>
                     <a:pt x="0" y="0"/>
@@ -3002,525 +3002,525 @@
           </p:nvSpPr>
           <p:spPr>
             <a:xfrm>
-              <a:off x="817517" y="1896563"/>
-              <a:ext cx="7403783" cy="3635548"/>
+              <a:off x="817517" y="2073503"/>
+              <a:ext cx="7403783" cy="3467441"/>
             </a:xfrm>
             <a:custGeom>
               <a:avLst/>
               <a:pathLst>
-                <a:path w="7403783" h="3635548">
+                <a:path w="7403783" h="3467441">
                   <a:moveTo>
                     <a:pt x="1947393" y="0"/>
                   </a:moveTo>
                   <a:lnTo>
-                    <a:pt x="1962872" y="56827"/>
-                  </a:lnTo>
-                  <a:lnTo>
-                    <a:pt x="2039504" y="317762"/>
-                  </a:lnTo>
-                  <a:lnTo>
-                    <a:pt x="2116137" y="559762"/>
-                  </a:lnTo>
-                  <a:lnTo>
-                    <a:pt x="2192769" y="784201"/>
-                  </a:lnTo>
-                  <a:lnTo>
-                    <a:pt x="2269402" y="992353"/>
-                  </a:lnTo>
-                  <a:lnTo>
-                    <a:pt x="2346034" y="1185401"/>
-                  </a:lnTo>
-                  <a:lnTo>
-                    <a:pt x="2422667" y="1364439"/>
-                  </a:lnTo>
-                  <a:lnTo>
-                    <a:pt x="2499300" y="1530486"/>
-                  </a:lnTo>
-                  <a:lnTo>
-                    <a:pt x="2575932" y="1684483"/>
-                  </a:lnTo>
-                  <a:lnTo>
-                    <a:pt x="2652565" y="1827305"/>
-                  </a:lnTo>
-                  <a:lnTo>
-                    <a:pt x="2729197" y="1959763"/>
-                  </a:lnTo>
-                  <a:lnTo>
-                    <a:pt x="2805830" y="2082609"/>
-                  </a:lnTo>
-                  <a:lnTo>
-                    <a:pt x="2882462" y="2196541"/>
-                  </a:lnTo>
-                  <a:lnTo>
-                    <a:pt x="2959095" y="2302204"/>
-                  </a:lnTo>
-                  <a:lnTo>
-                    <a:pt x="3035727" y="2400201"/>
-                  </a:lnTo>
-                  <a:lnTo>
-                    <a:pt x="3112360" y="2491086"/>
-                  </a:lnTo>
-                  <a:lnTo>
-                    <a:pt x="3188993" y="2575376"/>
-                  </a:lnTo>
-                  <a:lnTo>
-                    <a:pt x="3265625" y="2653549"/>
-                  </a:lnTo>
-                  <a:lnTo>
-                    <a:pt x="3342258" y="2726050"/>
-                  </a:lnTo>
-                  <a:lnTo>
-                    <a:pt x="3418890" y="2781504"/>
-                  </a:lnTo>
-                  <a:lnTo>
-                    <a:pt x="3495523" y="2772220"/>
-                  </a:lnTo>
-                  <a:lnTo>
-                    <a:pt x="3572155" y="2762837"/>
-                  </a:lnTo>
-                  <a:lnTo>
-                    <a:pt x="3648788" y="2753354"/>
-                  </a:lnTo>
-                  <a:lnTo>
-                    <a:pt x="3725420" y="2743770"/>
-                  </a:lnTo>
-                  <a:lnTo>
-                    <a:pt x="3802053" y="2734084"/>
-                  </a:lnTo>
-                  <a:lnTo>
-                    <a:pt x="3878685" y="2724295"/>
-                  </a:lnTo>
-                  <a:lnTo>
-                    <a:pt x="3955318" y="2714401"/>
-                  </a:lnTo>
-                  <a:lnTo>
-                    <a:pt x="4031951" y="2704402"/>
-                  </a:lnTo>
-                  <a:lnTo>
-                    <a:pt x="4108583" y="2694297"/>
-                  </a:lnTo>
-                  <a:lnTo>
-                    <a:pt x="4185216" y="2684084"/>
-                  </a:lnTo>
-                  <a:lnTo>
-                    <a:pt x="4261848" y="2673761"/>
-                  </a:lnTo>
-                  <a:lnTo>
-                    <a:pt x="4338481" y="2663329"/>
-                  </a:lnTo>
-                  <a:lnTo>
-                    <a:pt x="4415113" y="2652786"/>
-                  </a:lnTo>
-                  <a:lnTo>
-                    <a:pt x="4491746" y="2642130"/>
-                  </a:lnTo>
-                  <a:lnTo>
-                    <a:pt x="4568378" y="2631361"/>
-                  </a:lnTo>
-                  <a:lnTo>
-                    <a:pt x="4645011" y="2620477"/>
-                  </a:lnTo>
-                  <a:lnTo>
-                    <a:pt x="4721644" y="2609477"/>
-                  </a:lnTo>
-                  <a:lnTo>
-                    <a:pt x="4798276" y="2598360"/>
-                  </a:lnTo>
-                  <a:lnTo>
-                    <a:pt x="4874909" y="2587124"/>
-                  </a:lnTo>
-                  <a:lnTo>
-                    <a:pt x="4951541" y="2575769"/>
-                  </a:lnTo>
-                  <a:lnTo>
-                    <a:pt x="5028174" y="2564292"/>
-                  </a:lnTo>
-                  <a:lnTo>
-                    <a:pt x="5104806" y="2552694"/>
-                  </a:lnTo>
-                  <a:lnTo>
-                    <a:pt x="5181439" y="2540971"/>
-                  </a:lnTo>
-                  <a:lnTo>
-                    <a:pt x="5258071" y="2529124"/>
-                  </a:lnTo>
-                  <a:lnTo>
-                    <a:pt x="5334704" y="2517150"/>
-                  </a:lnTo>
-                  <a:lnTo>
-                    <a:pt x="5411336" y="2505049"/>
-                  </a:lnTo>
-                  <a:lnTo>
-                    <a:pt x="5487969" y="2492819"/>
-                  </a:lnTo>
-                  <a:lnTo>
-                    <a:pt x="5564602" y="2480459"/>
-                  </a:lnTo>
-                  <a:lnTo>
-                    <a:pt x="5641234" y="2467967"/>
-                  </a:lnTo>
-                  <a:lnTo>
-                    <a:pt x="5717867" y="2455341"/>
-                  </a:lnTo>
-                  <a:lnTo>
-                    <a:pt x="5794499" y="2442581"/>
-                  </a:lnTo>
-                  <a:lnTo>
-                    <a:pt x="5871132" y="2429686"/>
-                  </a:lnTo>
-                  <a:lnTo>
-                    <a:pt x="5947764" y="2416652"/>
-                  </a:lnTo>
-                  <a:lnTo>
-                    <a:pt x="6024397" y="2403480"/>
-                  </a:lnTo>
-                  <a:lnTo>
-                    <a:pt x="6101029" y="2390167"/>
-                  </a:lnTo>
-                  <a:lnTo>
-                    <a:pt x="6177662" y="2376713"/>
-                  </a:lnTo>
-                  <a:lnTo>
-                    <a:pt x="6254294" y="2363115"/>
-                  </a:lnTo>
-                  <a:lnTo>
-                    <a:pt x="6330927" y="2349373"/>
-                  </a:lnTo>
-                  <a:lnTo>
-                    <a:pt x="6407560" y="2335483"/>
-                  </a:lnTo>
-                  <a:lnTo>
-                    <a:pt x="6484192" y="2321446"/>
-                  </a:lnTo>
-                  <a:lnTo>
-                    <a:pt x="6560825" y="2307259"/>
-                  </a:lnTo>
-                  <a:lnTo>
-                    <a:pt x="6637457" y="2292921"/>
-                  </a:lnTo>
-                  <a:lnTo>
-                    <a:pt x="6714090" y="2278431"/>
-                  </a:lnTo>
-                  <a:lnTo>
-                    <a:pt x="6790722" y="2263785"/>
-                  </a:lnTo>
-                  <a:lnTo>
-                    <a:pt x="6867355" y="2248984"/>
-                  </a:lnTo>
-                  <a:lnTo>
-                    <a:pt x="6943987" y="2234025"/>
-                  </a:lnTo>
-                  <a:lnTo>
-                    <a:pt x="7020620" y="2218906"/>
-                  </a:lnTo>
-                  <a:lnTo>
-                    <a:pt x="7097253" y="2203627"/>
-                  </a:lnTo>
-                  <a:lnTo>
-                    <a:pt x="7173885" y="2188184"/>
-                  </a:lnTo>
-                  <a:lnTo>
-                    <a:pt x="7250518" y="2172577"/>
-                  </a:lnTo>
-                  <a:lnTo>
-                    <a:pt x="7327150" y="2156804"/>
-                  </a:lnTo>
-                  <a:lnTo>
-                    <a:pt x="7403783" y="2140863"/>
-                  </a:lnTo>
-                  <a:lnTo>
-                    <a:pt x="7403783" y="3635548"/>
-                  </a:lnTo>
-                  <a:lnTo>
-                    <a:pt x="7327150" y="3634210"/>
-                  </a:lnTo>
-                  <a:lnTo>
-                    <a:pt x="7250518" y="3632768"/>
-                  </a:lnTo>
-                  <a:lnTo>
-                    <a:pt x="7173885" y="3631213"/>
-                  </a:lnTo>
-                  <a:lnTo>
-                    <a:pt x="7097253" y="3629536"/>
-                  </a:lnTo>
-                  <a:lnTo>
-                    <a:pt x="7020620" y="3627728"/>
-                  </a:lnTo>
-                  <a:lnTo>
-                    <a:pt x="6943987" y="3625778"/>
-                  </a:lnTo>
-                  <a:lnTo>
-                    <a:pt x="6867355" y="3623676"/>
-                  </a:lnTo>
-                  <a:lnTo>
-                    <a:pt x="6790722" y="3621410"/>
-                  </a:lnTo>
-                  <a:lnTo>
-                    <a:pt x="6714090" y="3618966"/>
-                  </a:lnTo>
-                  <a:lnTo>
-                    <a:pt x="6637457" y="3616331"/>
-                  </a:lnTo>
-                  <a:lnTo>
-                    <a:pt x="6560825" y="3613490"/>
-                  </a:lnTo>
-                  <a:lnTo>
-                    <a:pt x="6484192" y="3610426"/>
-                  </a:lnTo>
-                  <a:lnTo>
-                    <a:pt x="6407560" y="3607123"/>
-                  </a:lnTo>
-                  <a:lnTo>
-                    <a:pt x="6330927" y="3603561"/>
-                  </a:lnTo>
-                  <a:lnTo>
-                    <a:pt x="6254294" y="3599721"/>
-                  </a:lnTo>
-                  <a:lnTo>
-                    <a:pt x="6177662" y="3595580"/>
-                  </a:lnTo>
-                  <a:lnTo>
-                    <a:pt x="6101029" y="3591115"/>
-                  </a:lnTo>
-                  <a:lnTo>
-                    <a:pt x="6024397" y="3586301"/>
-                  </a:lnTo>
-                  <a:lnTo>
-                    <a:pt x="5947764" y="3581110"/>
-                  </a:lnTo>
-                  <a:lnTo>
-                    <a:pt x="5871132" y="3575513"/>
-                  </a:lnTo>
-                  <a:lnTo>
-                    <a:pt x="5794499" y="3569478"/>
-                  </a:lnTo>
-                  <a:lnTo>
-                    <a:pt x="5717867" y="3562971"/>
-                  </a:lnTo>
-                  <a:lnTo>
-                    <a:pt x="5641234" y="3555955"/>
-                  </a:lnTo>
-                  <a:lnTo>
-                    <a:pt x="5564602" y="3548389"/>
-                  </a:lnTo>
-                  <a:lnTo>
-                    <a:pt x="5487969" y="3540232"/>
-                  </a:lnTo>
-                  <a:lnTo>
-                    <a:pt x="5411336" y="3531436"/>
-                  </a:lnTo>
-                  <a:lnTo>
-                    <a:pt x="5334704" y="3521953"/>
-                  </a:lnTo>
-                  <a:lnTo>
-                    <a:pt x="5258071" y="3511727"/>
-                  </a:lnTo>
-                  <a:lnTo>
-                    <a:pt x="5181439" y="3500701"/>
-                  </a:lnTo>
-                  <a:lnTo>
-                    <a:pt x="5104806" y="3488813"/>
-                  </a:lnTo>
-                  <a:lnTo>
-                    <a:pt x="5028174" y="3475994"/>
-                  </a:lnTo>
-                  <a:lnTo>
-                    <a:pt x="4951541" y="3462172"/>
-                  </a:lnTo>
-                  <a:lnTo>
-                    <a:pt x="4874909" y="3447269"/>
-                  </a:lnTo>
-                  <a:lnTo>
-                    <a:pt x="4798276" y="3431199"/>
-                  </a:lnTo>
-                  <a:lnTo>
-                    <a:pt x="4721644" y="3413873"/>
-                  </a:lnTo>
-                  <a:lnTo>
-                    <a:pt x="4645011" y="3395190"/>
-                  </a:lnTo>
-                  <a:lnTo>
-                    <a:pt x="4568378" y="3375046"/>
-                  </a:lnTo>
-                  <a:lnTo>
-                    <a:pt x="4491746" y="3353326"/>
-                  </a:lnTo>
-                  <a:lnTo>
-                    <a:pt x="4415113" y="3329906"/>
-                  </a:lnTo>
-                  <a:lnTo>
-                    <a:pt x="4338481" y="3304653"/>
-                  </a:lnTo>
-                  <a:lnTo>
-                    <a:pt x="4261848" y="3277425"/>
-                  </a:lnTo>
-                  <a:lnTo>
-                    <a:pt x="4185216" y="3248067"/>
-                  </a:lnTo>
-                  <a:lnTo>
-                    <a:pt x="4108583" y="3216411"/>
-                  </a:lnTo>
-                  <a:lnTo>
-                    <a:pt x="4031951" y="3182278"/>
-                  </a:lnTo>
-                  <a:lnTo>
-                    <a:pt x="3955318" y="3145475"/>
-                  </a:lnTo>
-                  <a:lnTo>
-                    <a:pt x="3878685" y="3105792"/>
-                  </a:lnTo>
-                  <a:lnTo>
-                    <a:pt x="3802053" y="3063004"/>
-                  </a:lnTo>
-                  <a:lnTo>
-                    <a:pt x="3725420" y="3016868"/>
-                  </a:lnTo>
-                  <a:lnTo>
-                    <a:pt x="3648788" y="2967122"/>
-                  </a:lnTo>
-                  <a:lnTo>
-                    <a:pt x="3572155" y="2913484"/>
-                  </a:lnTo>
-                  <a:lnTo>
-                    <a:pt x="3495523" y="2855649"/>
-                  </a:lnTo>
-                  <a:lnTo>
-                    <a:pt x="3418890" y="2793289"/>
-                  </a:lnTo>
-                  <a:lnTo>
-                    <a:pt x="3342258" y="2790690"/>
-                  </a:lnTo>
-                  <a:lnTo>
-                    <a:pt x="3265625" y="2799779"/>
-                  </a:lnTo>
-                  <a:lnTo>
-                    <a:pt x="3188993" y="2808772"/>
-                  </a:lnTo>
-                  <a:lnTo>
-                    <a:pt x="3112360" y="2817671"/>
-                  </a:lnTo>
-                  <a:lnTo>
-                    <a:pt x="3035727" y="2826475"/>
-                  </a:lnTo>
-                  <a:lnTo>
-                    <a:pt x="2959095" y="2835187"/>
-                  </a:lnTo>
-                  <a:lnTo>
-                    <a:pt x="2882462" y="2843807"/>
-                  </a:lnTo>
-                  <a:lnTo>
-                    <a:pt x="2805830" y="2852336"/>
-                  </a:lnTo>
-                  <a:lnTo>
-                    <a:pt x="2729197" y="2860775"/>
-                  </a:lnTo>
-                  <a:lnTo>
-                    <a:pt x="2652565" y="2869125"/>
-                  </a:lnTo>
-                  <a:lnTo>
-                    <a:pt x="2575932" y="2877387"/>
-                  </a:lnTo>
-                  <a:lnTo>
-                    <a:pt x="2499300" y="2885562"/>
-                  </a:lnTo>
-                  <a:lnTo>
-                    <a:pt x="2422667" y="2893651"/>
-                  </a:lnTo>
-                  <a:lnTo>
-                    <a:pt x="2346034" y="2901654"/>
-                  </a:lnTo>
-                  <a:lnTo>
-                    <a:pt x="2269402" y="2909573"/>
-                  </a:lnTo>
-                  <a:lnTo>
-                    <a:pt x="2192769" y="2917409"/>
-                  </a:lnTo>
-                  <a:lnTo>
-                    <a:pt x="2116137" y="2925162"/>
-                  </a:lnTo>
-                  <a:lnTo>
-                    <a:pt x="2039504" y="2932833"/>
-                  </a:lnTo>
-                  <a:lnTo>
-                    <a:pt x="1962872" y="2940423"/>
-                  </a:lnTo>
-                  <a:lnTo>
-                    <a:pt x="1886239" y="2947933"/>
-                  </a:lnTo>
-                  <a:lnTo>
-                    <a:pt x="1809607" y="2955364"/>
-                  </a:lnTo>
-                  <a:lnTo>
-                    <a:pt x="1732974" y="2962717"/>
-                  </a:lnTo>
-                  <a:lnTo>
-                    <a:pt x="1656342" y="2969992"/>
-                  </a:lnTo>
-                  <a:lnTo>
-                    <a:pt x="1579709" y="2977191"/>
-                  </a:lnTo>
-                  <a:lnTo>
-                    <a:pt x="1503076" y="2984313"/>
-                  </a:lnTo>
-                  <a:lnTo>
-                    <a:pt x="1426444" y="2991360"/>
-                  </a:lnTo>
-                  <a:lnTo>
-                    <a:pt x="1349811" y="2998334"/>
-                  </a:lnTo>
-                  <a:lnTo>
-                    <a:pt x="1273179" y="3005233"/>
-                  </a:lnTo>
-                  <a:lnTo>
-                    <a:pt x="1196546" y="3012060"/>
-                  </a:lnTo>
-                  <a:lnTo>
-                    <a:pt x="1119914" y="3018815"/>
-                  </a:lnTo>
-                  <a:lnTo>
-                    <a:pt x="1043281" y="3025498"/>
-                  </a:lnTo>
-                  <a:lnTo>
-                    <a:pt x="966649" y="3032111"/>
-                  </a:lnTo>
-                  <a:lnTo>
-                    <a:pt x="890016" y="3038655"/>
-                  </a:lnTo>
-                  <a:lnTo>
-                    <a:pt x="813384" y="3045129"/>
-                  </a:lnTo>
-                  <a:lnTo>
-                    <a:pt x="736751" y="3051535"/>
-                  </a:lnTo>
-                  <a:lnTo>
-                    <a:pt x="660118" y="3057874"/>
-                  </a:lnTo>
-                  <a:lnTo>
-                    <a:pt x="583486" y="3064146"/>
-                  </a:lnTo>
-                  <a:lnTo>
-                    <a:pt x="506853" y="3070351"/>
-                  </a:lnTo>
-                  <a:lnTo>
-                    <a:pt x="430221" y="3076491"/>
-                  </a:lnTo>
-                  <a:lnTo>
-                    <a:pt x="353588" y="3082567"/>
-                  </a:lnTo>
-                  <a:lnTo>
-                    <a:pt x="276956" y="3088578"/>
-                  </a:lnTo>
-                  <a:lnTo>
-                    <a:pt x="200323" y="3094526"/>
-                  </a:lnTo>
-                  <a:lnTo>
-                    <a:pt x="123691" y="3100411"/>
-                  </a:lnTo>
-                  <a:lnTo>
-                    <a:pt x="47058" y="3106234"/>
-                  </a:lnTo>
-                  <a:lnTo>
-                    <a:pt x="0" y="3109773"/>
+                    <a:pt x="1962872" y="54199"/>
+                  </a:lnTo>
+                  <a:lnTo>
+                    <a:pt x="2039504" y="303069"/>
+                  </a:lnTo>
+                  <a:lnTo>
+                    <a:pt x="2116137" y="533879"/>
+                  </a:lnTo>
+                  <a:lnTo>
+                    <a:pt x="2192769" y="747940"/>
+                  </a:lnTo>
+                  <a:lnTo>
+                    <a:pt x="2269402" y="946467"/>
+                  </a:lnTo>
+                  <a:lnTo>
+                    <a:pt x="2346034" y="1130588"/>
+                  </a:lnTo>
+                  <a:lnTo>
+                    <a:pt x="2422667" y="1301348"/>
+                  </a:lnTo>
+                  <a:lnTo>
+                    <a:pt x="2499300" y="1459717"/>
+                  </a:lnTo>
+                  <a:lnTo>
+                    <a:pt x="2575932" y="1606593"/>
+                  </a:lnTo>
+                  <a:lnTo>
+                    <a:pt x="2652565" y="1742811"/>
+                  </a:lnTo>
+                  <a:lnTo>
+                    <a:pt x="2729197" y="1869144"/>
+                  </a:lnTo>
+                  <a:lnTo>
+                    <a:pt x="2805830" y="1986310"/>
+                  </a:lnTo>
+                  <a:lnTo>
+                    <a:pt x="2882462" y="2094973"/>
+                  </a:lnTo>
+                  <a:lnTo>
+                    <a:pt x="2959095" y="2195751"/>
+                  </a:lnTo>
+                  <a:lnTo>
+                    <a:pt x="3035727" y="2289216"/>
+                  </a:lnTo>
+                  <a:lnTo>
+                    <a:pt x="3112360" y="2375899"/>
+                  </a:lnTo>
+                  <a:lnTo>
+                    <a:pt x="3188993" y="2456291"/>
+                  </a:lnTo>
+                  <a:lnTo>
+                    <a:pt x="3265625" y="2530850"/>
+                  </a:lnTo>
+                  <a:lnTo>
+                    <a:pt x="3342258" y="2599998"/>
+                  </a:lnTo>
+                  <a:lnTo>
+                    <a:pt x="3418890" y="2652888"/>
+                  </a:lnTo>
+                  <a:lnTo>
+                    <a:pt x="3495523" y="2644033"/>
+                  </a:lnTo>
+                  <a:lnTo>
+                    <a:pt x="3572155" y="2635084"/>
+                  </a:lnTo>
+                  <a:lnTo>
+                    <a:pt x="3648788" y="2626040"/>
+                  </a:lnTo>
+                  <a:lnTo>
+                    <a:pt x="3725420" y="2616899"/>
+                  </a:lnTo>
+                  <a:lnTo>
+                    <a:pt x="3802053" y="2607661"/>
+                  </a:lnTo>
+                  <a:lnTo>
+                    <a:pt x="3878685" y="2598325"/>
+                  </a:lnTo>
+                  <a:lnTo>
+                    <a:pt x="3955318" y="2588888"/>
+                  </a:lnTo>
+                  <a:lnTo>
+                    <a:pt x="4031951" y="2579352"/>
+                  </a:lnTo>
+                  <a:lnTo>
+                    <a:pt x="4108583" y="2569713"/>
+                  </a:lnTo>
+                  <a:lnTo>
+                    <a:pt x="4185216" y="2559972"/>
+                  </a:lnTo>
+                  <a:lnTo>
+                    <a:pt x="4261848" y="2550128"/>
+                  </a:lnTo>
+                  <a:lnTo>
+                    <a:pt x="4338481" y="2540178"/>
+                  </a:lnTo>
+                  <a:lnTo>
+                    <a:pt x="4415113" y="2530122"/>
+                  </a:lnTo>
+                  <a:lnTo>
+                    <a:pt x="4491746" y="2519959"/>
+                  </a:lnTo>
+                  <a:lnTo>
+                    <a:pt x="4568378" y="2509688"/>
+                  </a:lnTo>
+                  <a:lnTo>
+                    <a:pt x="4645011" y="2499307"/>
+                  </a:lnTo>
+                  <a:lnTo>
+                    <a:pt x="4721644" y="2488816"/>
+                  </a:lnTo>
+                  <a:lnTo>
+                    <a:pt x="4798276" y="2478213"/>
+                  </a:lnTo>
+                  <a:lnTo>
+                    <a:pt x="4874909" y="2467497"/>
+                  </a:lnTo>
+                  <a:lnTo>
+                    <a:pt x="4951541" y="2456666"/>
+                  </a:lnTo>
+                  <a:lnTo>
+                    <a:pt x="5028174" y="2445720"/>
+                  </a:lnTo>
+                  <a:lnTo>
+                    <a:pt x="5104806" y="2434658"/>
+                  </a:lnTo>
+                  <a:lnTo>
+                    <a:pt x="5181439" y="2423478"/>
+                  </a:lnTo>
+                  <a:lnTo>
+                    <a:pt x="5258071" y="2412178"/>
+                  </a:lnTo>
+                  <a:lnTo>
+                    <a:pt x="5334704" y="2400758"/>
+                  </a:lnTo>
+                  <a:lnTo>
+                    <a:pt x="5411336" y="2389217"/>
+                  </a:lnTo>
+                  <a:lnTo>
+                    <a:pt x="5487969" y="2377552"/>
+                  </a:lnTo>
+                  <a:lnTo>
+                    <a:pt x="5564602" y="2365763"/>
+                  </a:lnTo>
+                  <a:lnTo>
+                    <a:pt x="5641234" y="2353849"/>
+                  </a:lnTo>
+                  <a:lnTo>
+                    <a:pt x="5717867" y="2341807"/>
+                  </a:lnTo>
+                  <a:lnTo>
+                    <a:pt x="5794499" y="2329637"/>
+                  </a:lnTo>
+                  <a:lnTo>
+                    <a:pt x="5871132" y="2317338"/>
+                  </a:lnTo>
+                  <a:lnTo>
+                    <a:pt x="5947764" y="2304907"/>
+                  </a:lnTo>
+                  <a:lnTo>
+                    <a:pt x="6024397" y="2292344"/>
+                  </a:lnTo>
+                  <a:lnTo>
+                    <a:pt x="6101029" y="2279647"/>
+                  </a:lnTo>
+                  <a:lnTo>
+                    <a:pt x="6177662" y="2266815"/>
+                  </a:lnTo>
+                  <a:lnTo>
+                    <a:pt x="6254294" y="2253846"/>
+                  </a:lnTo>
+                  <a:lnTo>
+                    <a:pt x="6330927" y="2240738"/>
+                  </a:lnTo>
+                  <a:lnTo>
+                    <a:pt x="6407560" y="2227491"/>
+                  </a:lnTo>
+                  <a:lnTo>
+                    <a:pt x="6484192" y="2214103"/>
+                  </a:lnTo>
+                  <a:lnTo>
+                    <a:pt x="6560825" y="2200572"/>
+                  </a:lnTo>
+                  <a:lnTo>
+                    <a:pt x="6637457" y="2186897"/>
+                  </a:lnTo>
+                  <a:lnTo>
+                    <a:pt x="6714090" y="2173077"/>
+                  </a:lnTo>
+                  <a:lnTo>
+                    <a:pt x="6790722" y="2159109"/>
+                  </a:lnTo>
+                  <a:lnTo>
+                    <a:pt x="6867355" y="2144992"/>
+                  </a:lnTo>
+                  <a:lnTo>
+                    <a:pt x="6943987" y="2130724"/>
+                  </a:lnTo>
+                  <a:lnTo>
+                    <a:pt x="7020620" y="2116305"/>
+                  </a:lnTo>
+                  <a:lnTo>
+                    <a:pt x="7097253" y="2101732"/>
+                  </a:lnTo>
+                  <a:lnTo>
+                    <a:pt x="7173885" y="2087004"/>
+                  </a:lnTo>
+                  <a:lnTo>
+                    <a:pt x="7250518" y="2072118"/>
+                  </a:lnTo>
+                  <a:lnTo>
+                    <a:pt x="7327150" y="2057074"/>
+                  </a:lnTo>
+                  <a:lnTo>
+                    <a:pt x="7403783" y="2041870"/>
+                  </a:lnTo>
+                  <a:lnTo>
+                    <a:pt x="7403783" y="3467441"/>
+                  </a:lnTo>
+                  <a:lnTo>
+                    <a:pt x="7327150" y="3466166"/>
+                  </a:lnTo>
+                  <a:lnTo>
+                    <a:pt x="7250518" y="3464790"/>
+                  </a:lnTo>
+                  <a:lnTo>
+                    <a:pt x="7173885" y="3463307"/>
+                  </a:lnTo>
+                  <a:lnTo>
+                    <a:pt x="7097253" y="3461708"/>
+                  </a:lnTo>
+                  <a:lnTo>
+                    <a:pt x="7020620" y="3459983"/>
+                  </a:lnTo>
+                  <a:lnTo>
+                    <a:pt x="6943987" y="3458124"/>
+                  </a:lnTo>
+                  <a:lnTo>
+                    <a:pt x="6867355" y="3456119"/>
+                  </a:lnTo>
+                  <a:lnTo>
+                    <a:pt x="6790722" y="3453957"/>
+                  </a:lnTo>
+                  <a:lnTo>
+                    <a:pt x="6714090" y="3451626"/>
+                  </a:lnTo>
+                  <a:lnTo>
+                    <a:pt x="6637457" y="3449113"/>
+                  </a:lnTo>
+                  <a:lnTo>
+                    <a:pt x="6560825" y="3446403"/>
+                  </a:lnTo>
+                  <a:lnTo>
+                    <a:pt x="6484192" y="3443482"/>
+                  </a:lnTo>
+                  <a:lnTo>
+                    <a:pt x="6407560" y="3440331"/>
+                  </a:lnTo>
+                  <a:lnTo>
+                    <a:pt x="6330927" y="3436934"/>
+                  </a:lnTo>
+                  <a:lnTo>
+                    <a:pt x="6254294" y="3433271"/>
+                  </a:lnTo>
+                  <a:lnTo>
+                    <a:pt x="6177662" y="3429322"/>
+                  </a:lnTo>
+                  <a:lnTo>
+                    <a:pt x="6101029" y="3425063"/>
+                  </a:lnTo>
+                  <a:lnTo>
+                    <a:pt x="6024397" y="3420472"/>
+                  </a:lnTo>
+                  <a:lnTo>
+                    <a:pt x="5947764" y="3415521"/>
+                  </a:lnTo>
+                  <a:lnTo>
+                    <a:pt x="5871132" y="3410183"/>
+                  </a:lnTo>
+                  <a:lnTo>
+                    <a:pt x="5794499" y="3404427"/>
+                  </a:lnTo>
+                  <a:lnTo>
+                    <a:pt x="5717867" y="3398220"/>
+                  </a:lnTo>
+                  <a:lnTo>
+                    <a:pt x="5641234" y="3391529"/>
+                  </a:lnTo>
+                  <a:lnTo>
+                    <a:pt x="5564602" y="3384313"/>
+                  </a:lnTo>
+                  <a:lnTo>
+                    <a:pt x="5487969" y="3376533"/>
+                  </a:lnTo>
+                  <a:lnTo>
+                    <a:pt x="5411336" y="3368144"/>
+                  </a:lnTo>
+                  <a:lnTo>
+                    <a:pt x="5334704" y="3359099"/>
+                  </a:lnTo>
+                  <a:lnTo>
+                    <a:pt x="5258071" y="3349346"/>
+                  </a:lnTo>
+                  <a:lnTo>
+                    <a:pt x="5181439" y="3338830"/>
+                  </a:lnTo>
+                  <a:lnTo>
+                    <a:pt x="5104806" y="3327491"/>
+                  </a:lnTo>
+                  <a:lnTo>
+                    <a:pt x="5028174" y="3315265"/>
+                  </a:lnTo>
+                  <a:lnTo>
+                    <a:pt x="4951541" y="3302082"/>
+                  </a:lnTo>
+                  <a:lnTo>
+                    <a:pt x="4874909" y="3287868"/>
+                  </a:lnTo>
+                  <a:lnTo>
+                    <a:pt x="4798276" y="3272542"/>
+                  </a:lnTo>
+                  <a:lnTo>
+                    <a:pt x="4721644" y="3256016"/>
+                  </a:lnTo>
+                  <a:lnTo>
+                    <a:pt x="4645011" y="3238198"/>
+                  </a:lnTo>
+                  <a:lnTo>
+                    <a:pt x="4568378" y="3218985"/>
+                  </a:lnTo>
+                  <a:lnTo>
+                    <a:pt x="4491746" y="3198269"/>
+                  </a:lnTo>
+                  <a:lnTo>
+                    <a:pt x="4415113" y="3175932"/>
+                  </a:lnTo>
+                  <a:lnTo>
+                    <a:pt x="4338481" y="3151847"/>
+                  </a:lnTo>
+                  <a:lnTo>
+                    <a:pt x="4261848" y="3125878"/>
+                  </a:lnTo>
+                  <a:lnTo>
+                    <a:pt x="4185216" y="3097877"/>
+                  </a:lnTo>
+                  <a:lnTo>
+                    <a:pt x="4108583" y="3067685"/>
+                  </a:lnTo>
+                  <a:lnTo>
+                    <a:pt x="4031951" y="3035131"/>
+                  </a:lnTo>
+                  <a:lnTo>
+                    <a:pt x="3955318" y="3000029"/>
+                  </a:lnTo>
+                  <a:lnTo>
+                    <a:pt x="3878685" y="2962181"/>
+                  </a:lnTo>
+                  <a:lnTo>
+                    <a:pt x="3802053" y="2921372"/>
+                  </a:lnTo>
+                  <a:lnTo>
+                    <a:pt x="3725420" y="2877369"/>
+                  </a:lnTo>
+                  <a:lnTo>
+                    <a:pt x="3648788" y="2829924"/>
+                  </a:lnTo>
+                  <a:lnTo>
+                    <a:pt x="3572155" y="2778766"/>
+                  </a:lnTo>
+                  <a:lnTo>
+                    <a:pt x="3495523" y="2723605"/>
+                  </a:lnTo>
+                  <a:lnTo>
+                    <a:pt x="3418890" y="2664128"/>
+                  </a:lnTo>
+                  <a:lnTo>
+                    <a:pt x="3342258" y="2661649"/>
+                  </a:lnTo>
+                  <a:lnTo>
+                    <a:pt x="3265625" y="2670318"/>
+                  </a:lnTo>
+                  <a:lnTo>
+                    <a:pt x="3188993" y="2678895"/>
+                  </a:lnTo>
+                  <a:lnTo>
+                    <a:pt x="3112360" y="2687382"/>
+                  </a:lnTo>
+                  <a:lnTo>
+                    <a:pt x="3035727" y="2695780"/>
+                  </a:lnTo>
+                  <a:lnTo>
+                    <a:pt x="2959095" y="2704089"/>
+                  </a:lnTo>
+                  <a:lnTo>
+                    <a:pt x="2882462" y="2712310"/>
+                  </a:lnTo>
+                  <a:lnTo>
+                    <a:pt x="2805830" y="2720445"/>
+                  </a:lnTo>
+                  <a:lnTo>
+                    <a:pt x="2729197" y="2728494"/>
+                  </a:lnTo>
+                  <a:lnTo>
+                    <a:pt x="2652565" y="2736458"/>
+                  </a:lnTo>
+                  <a:lnTo>
+                    <a:pt x="2575932" y="2744338"/>
+                  </a:lnTo>
+                  <a:lnTo>
+                    <a:pt x="2499300" y="2752135"/>
+                  </a:lnTo>
+                  <a:lnTo>
+                    <a:pt x="2422667" y="2759849"/>
+                  </a:lnTo>
+                  <a:lnTo>
+                    <a:pt x="2346034" y="2767483"/>
+                  </a:lnTo>
+                  <a:lnTo>
+                    <a:pt x="2269402" y="2775036"/>
+                  </a:lnTo>
+                  <a:lnTo>
+                    <a:pt x="2192769" y="2782509"/>
+                  </a:lnTo>
+                  <a:lnTo>
+                    <a:pt x="2116137" y="2789903"/>
+                  </a:lnTo>
+                  <a:lnTo>
+                    <a:pt x="2039504" y="2797220"/>
+                  </a:lnTo>
+                  <a:lnTo>
+                    <a:pt x="1962872" y="2804459"/>
+                  </a:lnTo>
+                  <a:lnTo>
+                    <a:pt x="1886239" y="2811622"/>
+                  </a:lnTo>
+                  <a:lnTo>
+                    <a:pt x="1809607" y="2818709"/>
+                  </a:lnTo>
+                  <a:lnTo>
+                    <a:pt x="1732974" y="2825722"/>
+                  </a:lnTo>
+                  <a:lnTo>
+                    <a:pt x="1656342" y="2832661"/>
+                  </a:lnTo>
+                  <a:lnTo>
+                    <a:pt x="1579709" y="2839526"/>
+                  </a:lnTo>
+                  <a:lnTo>
+                    <a:pt x="1503076" y="2846319"/>
+                  </a:lnTo>
+                  <a:lnTo>
+                    <a:pt x="1426444" y="2853041"/>
+                  </a:lnTo>
+                  <a:lnTo>
+                    <a:pt x="1349811" y="2859692"/>
+                  </a:lnTo>
+                  <a:lnTo>
+                    <a:pt x="1273179" y="2866272"/>
+                  </a:lnTo>
+                  <a:lnTo>
+                    <a:pt x="1196546" y="2872783"/>
+                  </a:lnTo>
+                  <a:lnTo>
+                    <a:pt x="1119914" y="2879226"/>
+                  </a:lnTo>
+                  <a:lnTo>
+                    <a:pt x="1043281" y="2885600"/>
+                  </a:lnTo>
+                  <a:lnTo>
+                    <a:pt x="966649" y="2891908"/>
+                  </a:lnTo>
+                  <a:lnTo>
+                    <a:pt x="890016" y="2898149"/>
+                  </a:lnTo>
+                  <a:lnTo>
+                    <a:pt x="813384" y="2904324"/>
+                  </a:lnTo>
+                  <a:lnTo>
+                    <a:pt x="736751" y="2910433"/>
+                  </a:lnTo>
+                  <a:lnTo>
+                    <a:pt x="660118" y="2916479"/>
+                  </a:lnTo>
+                  <a:lnTo>
+                    <a:pt x="583486" y="2922461"/>
+                  </a:lnTo>
+                  <a:lnTo>
+                    <a:pt x="506853" y="2928379"/>
+                  </a:lnTo>
+                  <a:lnTo>
+                    <a:pt x="430221" y="2934236"/>
+                  </a:lnTo>
+                  <a:lnTo>
+                    <a:pt x="353588" y="2940030"/>
+                  </a:lnTo>
+                  <a:lnTo>
+                    <a:pt x="276956" y="2945763"/>
+                  </a:lnTo>
+                  <a:lnTo>
+                    <a:pt x="200323" y="2951436"/>
+                  </a:lnTo>
+                  <a:lnTo>
+                    <a:pt x="123691" y="2957049"/>
+                  </a:lnTo>
+                  <a:lnTo>
+                    <a:pt x="47058" y="2962603"/>
+                  </a:lnTo>
+                  <a:lnTo>
+                    <a:pt x="0" y="2965978"/>
                   </a:lnTo>
                   <a:close/>
                 </a:path>
@@ -3546,231 +3546,231 @@
           </p:nvSpPr>
           <p:spPr>
             <a:xfrm>
-              <a:off x="2764911" y="1896563"/>
-              <a:ext cx="5456389" cy="2781504"/>
+              <a:off x="2764911" y="2073503"/>
+              <a:ext cx="5456389" cy="2652888"/>
             </a:xfrm>
             <a:custGeom>
               <a:avLst/>
               <a:pathLst>
-                <a:path w="5456389" h="2781504">
+                <a:path w="5456389" h="2652888">
                   <a:moveTo>
                     <a:pt x="0" y="0"/>
                   </a:moveTo>
                   <a:lnTo>
-                    <a:pt x="15478" y="56827"/>
-                  </a:lnTo>
-                  <a:lnTo>
-                    <a:pt x="92110" y="317762"/>
-                  </a:lnTo>
-                  <a:lnTo>
-                    <a:pt x="168743" y="559762"/>
-                  </a:lnTo>
-                  <a:lnTo>
-                    <a:pt x="245375" y="784201"/>
-                  </a:lnTo>
-                  <a:lnTo>
-                    <a:pt x="322008" y="992353"/>
-                  </a:lnTo>
-                  <a:lnTo>
-                    <a:pt x="398641" y="1185401"/>
-                  </a:lnTo>
-                  <a:lnTo>
-                    <a:pt x="475273" y="1364439"/>
-                  </a:lnTo>
-                  <a:lnTo>
-                    <a:pt x="551906" y="1530486"/>
-                  </a:lnTo>
-                  <a:lnTo>
-                    <a:pt x="628538" y="1684483"/>
-                  </a:lnTo>
-                  <a:lnTo>
-                    <a:pt x="705171" y="1827305"/>
-                  </a:lnTo>
-                  <a:lnTo>
-                    <a:pt x="781803" y="1959763"/>
-                  </a:lnTo>
-                  <a:lnTo>
-                    <a:pt x="858436" y="2082609"/>
-                  </a:lnTo>
-                  <a:lnTo>
-                    <a:pt x="935068" y="2196541"/>
-                  </a:lnTo>
-                  <a:lnTo>
-                    <a:pt x="1011701" y="2302204"/>
-                  </a:lnTo>
-                  <a:lnTo>
-                    <a:pt x="1088333" y="2400201"/>
-                  </a:lnTo>
-                  <a:lnTo>
-                    <a:pt x="1164966" y="2491086"/>
-                  </a:lnTo>
-                  <a:lnTo>
-                    <a:pt x="1241599" y="2575376"/>
-                  </a:lnTo>
-                  <a:lnTo>
-                    <a:pt x="1318231" y="2653549"/>
-                  </a:lnTo>
-                  <a:lnTo>
-                    <a:pt x="1394864" y="2726050"/>
-                  </a:lnTo>
-                  <a:lnTo>
-                    <a:pt x="1471496" y="2781504"/>
-                  </a:lnTo>
-                  <a:lnTo>
-                    <a:pt x="1548129" y="2772220"/>
-                  </a:lnTo>
-                  <a:lnTo>
-                    <a:pt x="1624761" y="2762837"/>
-                  </a:lnTo>
-                  <a:lnTo>
-                    <a:pt x="1701394" y="2753354"/>
-                  </a:lnTo>
-                  <a:lnTo>
-                    <a:pt x="1778026" y="2743770"/>
-                  </a:lnTo>
-                  <a:lnTo>
-                    <a:pt x="1854659" y="2734084"/>
-                  </a:lnTo>
-                  <a:lnTo>
-                    <a:pt x="1931291" y="2724295"/>
-                  </a:lnTo>
-                  <a:lnTo>
-                    <a:pt x="2007924" y="2714401"/>
-                  </a:lnTo>
-                  <a:lnTo>
-                    <a:pt x="2084557" y="2704402"/>
-                  </a:lnTo>
-                  <a:lnTo>
-                    <a:pt x="2161189" y="2694297"/>
-                  </a:lnTo>
-                  <a:lnTo>
-                    <a:pt x="2237822" y="2684084"/>
-                  </a:lnTo>
-                  <a:lnTo>
-                    <a:pt x="2314454" y="2673761"/>
-                  </a:lnTo>
-                  <a:lnTo>
-                    <a:pt x="2391087" y="2663329"/>
-                  </a:lnTo>
-                  <a:lnTo>
-                    <a:pt x="2467719" y="2652786"/>
-                  </a:lnTo>
-                  <a:lnTo>
-                    <a:pt x="2544352" y="2642130"/>
-                  </a:lnTo>
-                  <a:lnTo>
-                    <a:pt x="2620984" y="2631361"/>
-                  </a:lnTo>
-                  <a:lnTo>
-                    <a:pt x="2697617" y="2620477"/>
-                  </a:lnTo>
-                  <a:lnTo>
-                    <a:pt x="2774250" y="2609477"/>
-                  </a:lnTo>
-                  <a:lnTo>
-                    <a:pt x="2850882" y="2598360"/>
-                  </a:lnTo>
-                  <a:lnTo>
-                    <a:pt x="2927515" y="2587124"/>
-                  </a:lnTo>
-                  <a:lnTo>
-                    <a:pt x="3004147" y="2575769"/>
-                  </a:lnTo>
-                  <a:lnTo>
-                    <a:pt x="3080780" y="2564292"/>
-                  </a:lnTo>
-                  <a:lnTo>
-                    <a:pt x="3157412" y="2552694"/>
-                  </a:lnTo>
-                  <a:lnTo>
-                    <a:pt x="3234045" y="2540971"/>
-                  </a:lnTo>
-                  <a:lnTo>
-                    <a:pt x="3310677" y="2529124"/>
-                  </a:lnTo>
-                  <a:lnTo>
-                    <a:pt x="3387310" y="2517150"/>
-                  </a:lnTo>
-                  <a:lnTo>
-                    <a:pt x="3463942" y="2505049"/>
-                  </a:lnTo>
-                  <a:lnTo>
-                    <a:pt x="3540575" y="2492819"/>
-                  </a:lnTo>
-                  <a:lnTo>
-                    <a:pt x="3617208" y="2480459"/>
-                  </a:lnTo>
-                  <a:lnTo>
-                    <a:pt x="3693840" y="2467967"/>
-                  </a:lnTo>
-                  <a:lnTo>
-                    <a:pt x="3770473" y="2455341"/>
-                  </a:lnTo>
-                  <a:lnTo>
-                    <a:pt x="3847105" y="2442581"/>
-                  </a:lnTo>
-                  <a:lnTo>
-                    <a:pt x="3923738" y="2429686"/>
-                  </a:lnTo>
-                  <a:lnTo>
-                    <a:pt x="4000370" y="2416652"/>
-                  </a:lnTo>
-                  <a:lnTo>
-                    <a:pt x="4077003" y="2403480"/>
-                  </a:lnTo>
-                  <a:lnTo>
-                    <a:pt x="4153635" y="2390167"/>
-                  </a:lnTo>
-                  <a:lnTo>
-                    <a:pt x="4230268" y="2376713"/>
-                  </a:lnTo>
-                  <a:lnTo>
-                    <a:pt x="4306901" y="2363115"/>
-                  </a:lnTo>
-                  <a:lnTo>
-                    <a:pt x="4383533" y="2349373"/>
-                  </a:lnTo>
-                  <a:lnTo>
-                    <a:pt x="4460166" y="2335483"/>
-                  </a:lnTo>
-                  <a:lnTo>
-                    <a:pt x="4536798" y="2321446"/>
-                  </a:lnTo>
-                  <a:lnTo>
-                    <a:pt x="4613431" y="2307259"/>
-                  </a:lnTo>
-                  <a:lnTo>
-                    <a:pt x="4690063" y="2292921"/>
-                  </a:lnTo>
-                  <a:lnTo>
-                    <a:pt x="4766696" y="2278431"/>
-                  </a:lnTo>
-                  <a:lnTo>
-                    <a:pt x="4843328" y="2263785"/>
-                  </a:lnTo>
-                  <a:lnTo>
-                    <a:pt x="4919961" y="2248984"/>
-                  </a:lnTo>
-                  <a:lnTo>
-                    <a:pt x="4996593" y="2234025"/>
-                  </a:lnTo>
-                  <a:lnTo>
-                    <a:pt x="5073226" y="2218906"/>
-                  </a:lnTo>
-                  <a:lnTo>
-                    <a:pt x="5149859" y="2203627"/>
-                  </a:lnTo>
-                  <a:lnTo>
-                    <a:pt x="5226491" y="2188184"/>
-                  </a:lnTo>
-                  <a:lnTo>
-                    <a:pt x="5303124" y="2172577"/>
-                  </a:lnTo>
-                  <a:lnTo>
-                    <a:pt x="5379756" y="2156804"/>
-                  </a:lnTo>
-                  <a:lnTo>
-                    <a:pt x="5456389" y="2140863"/>
+                    <a:pt x="15478" y="54199"/>
+                  </a:lnTo>
+                  <a:lnTo>
+                    <a:pt x="92110" y="303069"/>
+                  </a:lnTo>
+                  <a:lnTo>
+                    <a:pt x="168743" y="533879"/>
+                  </a:lnTo>
+                  <a:lnTo>
+                    <a:pt x="245375" y="747940"/>
+                  </a:lnTo>
+                  <a:lnTo>
+                    <a:pt x="322008" y="946467"/>
+                  </a:lnTo>
+                  <a:lnTo>
+                    <a:pt x="398641" y="1130588"/>
+                  </a:lnTo>
+                  <a:lnTo>
+                    <a:pt x="475273" y="1301348"/>
+                  </a:lnTo>
+                  <a:lnTo>
+                    <a:pt x="551906" y="1459717"/>
+                  </a:lnTo>
+                  <a:lnTo>
+                    <a:pt x="628538" y="1606593"/>
+                  </a:lnTo>
+                  <a:lnTo>
+                    <a:pt x="705171" y="1742811"/>
+                  </a:lnTo>
+                  <a:lnTo>
+                    <a:pt x="781803" y="1869144"/>
+                  </a:lnTo>
+                  <a:lnTo>
+                    <a:pt x="858436" y="1986310"/>
+                  </a:lnTo>
+                  <a:lnTo>
+                    <a:pt x="935068" y="2094973"/>
+                  </a:lnTo>
+                  <a:lnTo>
+                    <a:pt x="1011701" y="2195751"/>
+                  </a:lnTo>
+                  <a:lnTo>
+                    <a:pt x="1088333" y="2289216"/>
+                  </a:lnTo>
+                  <a:lnTo>
+                    <a:pt x="1164966" y="2375899"/>
+                  </a:lnTo>
+                  <a:lnTo>
+                    <a:pt x="1241599" y="2456291"/>
+                  </a:lnTo>
+                  <a:lnTo>
+                    <a:pt x="1318231" y="2530850"/>
+                  </a:lnTo>
+                  <a:lnTo>
+                    <a:pt x="1394864" y="2599998"/>
+                  </a:lnTo>
+                  <a:lnTo>
+                    <a:pt x="1471496" y="2652888"/>
+                  </a:lnTo>
+                  <a:lnTo>
+                    <a:pt x="1548129" y="2644033"/>
+                  </a:lnTo>
+                  <a:lnTo>
+                    <a:pt x="1624761" y="2635084"/>
+                  </a:lnTo>
+                  <a:lnTo>
+                    <a:pt x="1701394" y="2626040"/>
+                  </a:lnTo>
+                  <a:lnTo>
+                    <a:pt x="1778026" y="2616899"/>
+                  </a:lnTo>
+                  <a:lnTo>
+                    <a:pt x="1854659" y="2607661"/>
+                  </a:lnTo>
+                  <a:lnTo>
+                    <a:pt x="1931291" y="2598325"/>
+                  </a:lnTo>
+                  <a:lnTo>
+                    <a:pt x="2007924" y="2588888"/>
+                  </a:lnTo>
+                  <a:lnTo>
+                    <a:pt x="2084557" y="2579352"/>
+                  </a:lnTo>
+                  <a:lnTo>
+                    <a:pt x="2161189" y="2569713"/>
+                  </a:lnTo>
+                  <a:lnTo>
+                    <a:pt x="2237822" y="2559972"/>
+                  </a:lnTo>
+                  <a:lnTo>
+                    <a:pt x="2314454" y="2550128"/>
+                  </a:lnTo>
+                  <a:lnTo>
+                    <a:pt x="2391087" y="2540178"/>
+                  </a:lnTo>
+                  <a:lnTo>
+                    <a:pt x="2467719" y="2530122"/>
+                  </a:lnTo>
+                  <a:lnTo>
+                    <a:pt x="2544352" y="2519959"/>
+                  </a:lnTo>
+                  <a:lnTo>
+                    <a:pt x="2620984" y="2509688"/>
+                  </a:lnTo>
+                  <a:lnTo>
+                    <a:pt x="2697617" y="2499307"/>
+                  </a:lnTo>
+                  <a:lnTo>
+                    <a:pt x="2774250" y="2488816"/>
+                  </a:lnTo>
+                  <a:lnTo>
+                    <a:pt x="2850882" y="2478213"/>
+                  </a:lnTo>
+                  <a:lnTo>
+                    <a:pt x="2927515" y="2467497"/>
+                  </a:lnTo>
+                  <a:lnTo>
+                    <a:pt x="3004147" y="2456666"/>
+                  </a:lnTo>
+                  <a:lnTo>
+                    <a:pt x="3080780" y="2445720"/>
+                  </a:lnTo>
+                  <a:lnTo>
+                    <a:pt x="3157412" y="2434658"/>
+                  </a:lnTo>
+                  <a:lnTo>
+                    <a:pt x="3234045" y="2423478"/>
+                  </a:lnTo>
+                  <a:lnTo>
+                    <a:pt x="3310677" y="2412178"/>
+                  </a:lnTo>
+                  <a:lnTo>
+                    <a:pt x="3387310" y="2400758"/>
+                  </a:lnTo>
+                  <a:lnTo>
+                    <a:pt x="3463942" y="2389217"/>
+                  </a:lnTo>
+                  <a:lnTo>
+                    <a:pt x="3540575" y="2377552"/>
+                  </a:lnTo>
+                  <a:lnTo>
+                    <a:pt x="3617208" y="2365763"/>
+                  </a:lnTo>
+                  <a:lnTo>
+                    <a:pt x="3693840" y="2353849"/>
+                  </a:lnTo>
+                  <a:lnTo>
+                    <a:pt x="3770473" y="2341807"/>
+                  </a:lnTo>
+                  <a:lnTo>
+                    <a:pt x="3847105" y="2329637"/>
+                  </a:lnTo>
+                  <a:lnTo>
+                    <a:pt x="3923738" y="2317338"/>
+                  </a:lnTo>
+                  <a:lnTo>
+                    <a:pt x="4000370" y="2304907"/>
+                  </a:lnTo>
+                  <a:lnTo>
+                    <a:pt x="4077003" y="2292344"/>
+                  </a:lnTo>
+                  <a:lnTo>
+                    <a:pt x="4153635" y="2279647"/>
+                  </a:lnTo>
+                  <a:lnTo>
+                    <a:pt x="4230268" y="2266815"/>
+                  </a:lnTo>
+                  <a:lnTo>
+                    <a:pt x="4306901" y="2253846"/>
+                  </a:lnTo>
+                  <a:lnTo>
+                    <a:pt x="4383533" y="2240738"/>
+                  </a:lnTo>
+                  <a:lnTo>
+                    <a:pt x="4460166" y="2227491"/>
+                  </a:lnTo>
+                  <a:lnTo>
+                    <a:pt x="4536798" y="2214103"/>
+                  </a:lnTo>
+                  <a:lnTo>
+                    <a:pt x="4613431" y="2200572"/>
+                  </a:lnTo>
+                  <a:lnTo>
+                    <a:pt x="4690063" y="2186897"/>
+                  </a:lnTo>
+                  <a:lnTo>
+                    <a:pt x="4766696" y="2173077"/>
+                  </a:lnTo>
+                  <a:lnTo>
+                    <a:pt x="4843328" y="2159109"/>
+                  </a:lnTo>
+                  <a:lnTo>
+                    <a:pt x="4919961" y="2144992"/>
+                  </a:lnTo>
+                  <a:lnTo>
+                    <a:pt x="4996593" y="2130724"/>
+                  </a:lnTo>
+                  <a:lnTo>
+                    <a:pt x="5073226" y="2116305"/>
+                  </a:lnTo>
+                  <a:lnTo>
+                    <a:pt x="5149859" y="2101732"/>
+                  </a:lnTo>
+                  <a:lnTo>
+                    <a:pt x="5226491" y="2087004"/>
+                  </a:lnTo>
+                  <a:lnTo>
+                    <a:pt x="5303124" y="2072118"/>
+                  </a:lnTo>
+                  <a:lnTo>
+                    <a:pt x="5379756" y="2057074"/>
+                  </a:lnTo>
+                  <a:lnTo>
+                    <a:pt x="5456389" y="2041870"/>
                   </a:lnTo>
                 </a:path>
               </a:pathLst>
@@ -3790,306 +3790,306 @@
           </p:nvSpPr>
           <p:spPr>
             <a:xfrm>
-              <a:off x="817517" y="4687253"/>
-              <a:ext cx="7403783" cy="844858"/>
+              <a:off x="817517" y="4735152"/>
+              <a:ext cx="7403783" cy="805792"/>
             </a:xfrm>
             <a:custGeom>
               <a:avLst/>
               <a:pathLst>
-                <a:path w="7403783" h="844858">
+                <a:path w="7403783" h="805792">
                   <a:moveTo>
-                    <a:pt x="7403783" y="844858"/>
+                    <a:pt x="7403783" y="805792"/>
                   </a:moveTo>
                   <a:lnTo>
-                    <a:pt x="7327150" y="843520"/>
-                  </a:lnTo>
-                  <a:lnTo>
-                    <a:pt x="7250518" y="842078"/>
-                  </a:lnTo>
-                  <a:lnTo>
-                    <a:pt x="7173885" y="840523"/>
-                  </a:lnTo>
-                  <a:lnTo>
-                    <a:pt x="7097253" y="838846"/>
-                  </a:lnTo>
-                  <a:lnTo>
-                    <a:pt x="7020620" y="837038"/>
-                  </a:lnTo>
-                  <a:lnTo>
-                    <a:pt x="6943987" y="835088"/>
-                  </a:lnTo>
-                  <a:lnTo>
-                    <a:pt x="6867355" y="832986"/>
-                  </a:lnTo>
-                  <a:lnTo>
-                    <a:pt x="6790722" y="830720"/>
-                  </a:lnTo>
-                  <a:lnTo>
-                    <a:pt x="6714090" y="828276"/>
-                  </a:lnTo>
-                  <a:lnTo>
-                    <a:pt x="6637457" y="825641"/>
-                  </a:lnTo>
-                  <a:lnTo>
-                    <a:pt x="6560825" y="822800"/>
-                  </a:lnTo>
-                  <a:lnTo>
-                    <a:pt x="6484192" y="819736"/>
-                  </a:lnTo>
-                  <a:lnTo>
-                    <a:pt x="6407560" y="816433"/>
-                  </a:lnTo>
-                  <a:lnTo>
-                    <a:pt x="6330927" y="812871"/>
-                  </a:lnTo>
-                  <a:lnTo>
-                    <a:pt x="6254294" y="809031"/>
-                  </a:lnTo>
-                  <a:lnTo>
-                    <a:pt x="6177662" y="804890"/>
-                  </a:lnTo>
-                  <a:lnTo>
-                    <a:pt x="6101029" y="800425"/>
-                  </a:lnTo>
-                  <a:lnTo>
-                    <a:pt x="6024397" y="795611"/>
-                  </a:lnTo>
-                  <a:lnTo>
-                    <a:pt x="5947764" y="790420"/>
-                  </a:lnTo>
-                  <a:lnTo>
-                    <a:pt x="5871132" y="784823"/>
-                  </a:lnTo>
-                  <a:lnTo>
-                    <a:pt x="5794499" y="778788"/>
-                  </a:lnTo>
-                  <a:lnTo>
-                    <a:pt x="5717867" y="772281"/>
-                  </a:lnTo>
-                  <a:lnTo>
-                    <a:pt x="5641234" y="765264"/>
-                  </a:lnTo>
-                  <a:lnTo>
-                    <a:pt x="5564602" y="757699"/>
-                  </a:lnTo>
-                  <a:lnTo>
-                    <a:pt x="5487969" y="749542"/>
-                  </a:lnTo>
-                  <a:lnTo>
-                    <a:pt x="5411336" y="740746"/>
-                  </a:lnTo>
-                  <a:lnTo>
-                    <a:pt x="5334704" y="731263"/>
-                  </a:lnTo>
-                  <a:lnTo>
-                    <a:pt x="5258071" y="721037"/>
-                  </a:lnTo>
-                  <a:lnTo>
-                    <a:pt x="5181439" y="710011"/>
-                  </a:lnTo>
-                  <a:lnTo>
-                    <a:pt x="5104806" y="698122"/>
-                  </a:lnTo>
-                  <a:lnTo>
-                    <a:pt x="5028174" y="685304"/>
-                  </a:lnTo>
-                  <a:lnTo>
-                    <a:pt x="4951541" y="671482"/>
-                  </a:lnTo>
-                  <a:lnTo>
-                    <a:pt x="4874909" y="656578"/>
-                  </a:lnTo>
-                  <a:lnTo>
-                    <a:pt x="4798276" y="640509"/>
-                  </a:lnTo>
-                  <a:lnTo>
-                    <a:pt x="4721644" y="623182"/>
-                  </a:lnTo>
-                  <a:lnTo>
-                    <a:pt x="4645011" y="604500"/>
-                  </a:lnTo>
-                  <a:lnTo>
-                    <a:pt x="4568378" y="584356"/>
-                  </a:lnTo>
-                  <a:lnTo>
-                    <a:pt x="4491746" y="562635"/>
-                  </a:lnTo>
-                  <a:lnTo>
-                    <a:pt x="4415113" y="539216"/>
-                  </a:lnTo>
-                  <a:lnTo>
-                    <a:pt x="4338481" y="513963"/>
-                  </a:lnTo>
-                  <a:lnTo>
-                    <a:pt x="4261848" y="486735"/>
-                  </a:lnTo>
-                  <a:lnTo>
-                    <a:pt x="4185216" y="457376"/>
-                  </a:lnTo>
-                  <a:lnTo>
-                    <a:pt x="4108583" y="425721"/>
-                  </a:lnTo>
-                  <a:lnTo>
-                    <a:pt x="4031951" y="391588"/>
-                  </a:lnTo>
-                  <a:lnTo>
-                    <a:pt x="3955318" y="354785"/>
-                  </a:lnTo>
-                  <a:lnTo>
-                    <a:pt x="3878685" y="315102"/>
-                  </a:lnTo>
-                  <a:lnTo>
-                    <a:pt x="3802053" y="272314"/>
-                  </a:lnTo>
-                  <a:lnTo>
-                    <a:pt x="3725420" y="226178"/>
-                  </a:lnTo>
-                  <a:lnTo>
-                    <a:pt x="3648788" y="176432"/>
-                  </a:lnTo>
-                  <a:lnTo>
-                    <a:pt x="3572155" y="122794"/>
-                  </a:lnTo>
-                  <a:lnTo>
-                    <a:pt x="3495523" y="64959"/>
-                  </a:lnTo>
-                  <a:lnTo>
-                    <a:pt x="3418890" y="2599"/>
+                    <a:pt x="7327150" y="804516"/>
+                  </a:lnTo>
+                  <a:lnTo>
+                    <a:pt x="7250518" y="803140"/>
+                  </a:lnTo>
+                  <a:lnTo>
+                    <a:pt x="7173885" y="801657"/>
+                  </a:lnTo>
+                  <a:lnTo>
+                    <a:pt x="7097253" y="800058"/>
+                  </a:lnTo>
+                  <a:lnTo>
+                    <a:pt x="7020620" y="798333"/>
+                  </a:lnTo>
+                  <a:lnTo>
+                    <a:pt x="6943987" y="796474"/>
+                  </a:lnTo>
+                  <a:lnTo>
+                    <a:pt x="6867355" y="794469"/>
+                  </a:lnTo>
+                  <a:lnTo>
+                    <a:pt x="6790722" y="792308"/>
+                  </a:lnTo>
+                  <a:lnTo>
+                    <a:pt x="6714090" y="789977"/>
+                  </a:lnTo>
+                  <a:lnTo>
+                    <a:pt x="6637457" y="787464"/>
+                  </a:lnTo>
+                  <a:lnTo>
+                    <a:pt x="6560825" y="784754"/>
+                  </a:lnTo>
+                  <a:lnTo>
+                    <a:pt x="6484192" y="781832"/>
+                  </a:lnTo>
+                  <a:lnTo>
+                    <a:pt x="6407560" y="778681"/>
+                  </a:lnTo>
+                  <a:lnTo>
+                    <a:pt x="6330927" y="775284"/>
+                  </a:lnTo>
+                  <a:lnTo>
+                    <a:pt x="6254294" y="771622"/>
+                  </a:lnTo>
+                  <a:lnTo>
+                    <a:pt x="6177662" y="767672"/>
+                  </a:lnTo>
+                  <a:lnTo>
+                    <a:pt x="6101029" y="763414"/>
+                  </a:lnTo>
+                  <a:lnTo>
+                    <a:pt x="6024397" y="758822"/>
+                  </a:lnTo>
+                  <a:lnTo>
+                    <a:pt x="5947764" y="753871"/>
+                  </a:lnTo>
+                  <a:lnTo>
+                    <a:pt x="5871132" y="748533"/>
+                  </a:lnTo>
+                  <a:lnTo>
+                    <a:pt x="5794499" y="742777"/>
+                  </a:lnTo>
+                  <a:lnTo>
+                    <a:pt x="5717867" y="736571"/>
+                  </a:lnTo>
+                  <a:lnTo>
+                    <a:pt x="5641234" y="729879"/>
+                  </a:lnTo>
+                  <a:lnTo>
+                    <a:pt x="5564602" y="722663"/>
+                  </a:lnTo>
+                  <a:lnTo>
+                    <a:pt x="5487969" y="714883"/>
+                  </a:lnTo>
+                  <a:lnTo>
+                    <a:pt x="5411336" y="706494"/>
+                  </a:lnTo>
+                  <a:lnTo>
+                    <a:pt x="5334704" y="697449"/>
+                  </a:lnTo>
+                  <a:lnTo>
+                    <a:pt x="5258071" y="687696"/>
+                  </a:lnTo>
+                  <a:lnTo>
+                    <a:pt x="5181439" y="677180"/>
+                  </a:lnTo>
+                  <a:lnTo>
+                    <a:pt x="5104806" y="665841"/>
+                  </a:lnTo>
+                  <a:lnTo>
+                    <a:pt x="5028174" y="653615"/>
+                  </a:lnTo>
+                  <a:lnTo>
+                    <a:pt x="4951541" y="640433"/>
+                  </a:lnTo>
+                  <a:lnTo>
+                    <a:pt x="4874909" y="626219"/>
+                  </a:lnTo>
+                  <a:lnTo>
+                    <a:pt x="4798276" y="610892"/>
+                  </a:lnTo>
+                  <a:lnTo>
+                    <a:pt x="4721644" y="594367"/>
+                  </a:lnTo>
+                  <a:lnTo>
+                    <a:pt x="4645011" y="576548"/>
+                  </a:lnTo>
+                  <a:lnTo>
+                    <a:pt x="4568378" y="557335"/>
+                  </a:lnTo>
+                  <a:lnTo>
+                    <a:pt x="4491746" y="536619"/>
+                  </a:lnTo>
+                  <a:lnTo>
+                    <a:pt x="4415113" y="514282"/>
+                  </a:lnTo>
+                  <a:lnTo>
+                    <a:pt x="4338481" y="490198"/>
+                  </a:lnTo>
+                  <a:lnTo>
+                    <a:pt x="4261848" y="464229"/>
+                  </a:lnTo>
+                  <a:lnTo>
+                    <a:pt x="4185216" y="436227"/>
+                  </a:lnTo>
+                  <a:lnTo>
+                    <a:pt x="4108583" y="406035"/>
+                  </a:lnTo>
+                  <a:lnTo>
+                    <a:pt x="4031951" y="373481"/>
+                  </a:lnTo>
+                  <a:lnTo>
+                    <a:pt x="3955318" y="338379"/>
+                  </a:lnTo>
+                  <a:lnTo>
+                    <a:pt x="3878685" y="300531"/>
+                  </a:lnTo>
+                  <a:lnTo>
+                    <a:pt x="3802053" y="259722"/>
+                  </a:lnTo>
+                  <a:lnTo>
+                    <a:pt x="3725420" y="215719"/>
+                  </a:lnTo>
+                  <a:lnTo>
+                    <a:pt x="3648788" y="168274"/>
+                  </a:lnTo>
+                  <a:lnTo>
+                    <a:pt x="3572155" y="117116"/>
+                  </a:lnTo>
+                  <a:lnTo>
+                    <a:pt x="3495523" y="61955"/>
+                  </a:lnTo>
+                  <a:lnTo>
+                    <a:pt x="3418890" y="2479"/>
                   </a:lnTo>
                   <a:lnTo>
                     <a:pt x="3342258" y="0"/>
                   </a:lnTo>
                   <a:lnTo>
-                    <a:pt x="3265625" y="9089"/>
-                  </a:lnTo>
-                  <a:lnTo>
-                    <a:pt x="3188993" y="18082"/>
-                  </a:lnTo>
-                  <a:lnTo>
-                    <a:pt x="3112360" y="26980"/>
-                  </a:lnTo>
-                  <a:lnTo>
-                    <a:pt x="3035727" y="35785"/>
-                  </a:lnTo>
-                  <a:lnTo>
-                    <a:pt x="2959095" y="44497"/>
-                  </a:lnTo>
-                  <a:lnTo>
-                    <a:pt x="2882462" y="53117"/>
-                  </a:lnTo>
-                  <a:lnTo>
-                    <a:pt x="2805830" y="61646"/>
-                  </a:lnTo>
-                  <a:lnTo>
-                    <a:pt x="2729197" y="70085"/>
-                  </a:lnTo>
-                  <a:lnTo>
-                    <a:pt x="2652565" y="78435"/>
-                  </a:lnTo>
-                  <a:lnTo>
-                    <a:pt x="2575932" y="86697"/>
-                  </a:lnTo>
-                  <a:lnTo>
-                    <a:pt x="2499300" y="94872"/>
-                  </a:lnTo>
-                  <a:lnTo>
-                    <a:pt x="2422667" y="102961"/>
-                  </a:lnTo>
-                  <a:lnTo>
-                    <a:pt x="2346034" y="110964"/>
-                  </a:lnTo>
-                  <a:lnTo>
-                    <a:pt x="2269402" y="118883"/>
-                  </a:lnTo>
-                  <a:lnTo>
-                    <a:pt x="2192769" y="126719"/>
-                  </a:lnTo>
-                  <a:lnTo>
-                    <a:pt x="2116137" y="134471"/>
-                  </a:lnTo>
-                  <a:lnTo>
-                    <a:pt x="2039504" y="142143"/>
-                  </a:lnTo>
-                  <a:lnTo>
-                    <a:pt x="1962872" y="149733"/>
-                  </a:lnTo>
-                  <a:lnTo>
-                    <a:pt x="1886239" y="157243"/>
-                  </a:lnTo>
-                  <a:lnTo>
-                    <a:pt x="1809607" y="164674"/>
-                  </a:lnTo>
-                  <a:lnTo>
-                    <a:pt x="1732974" y="172027"/>
-                  </a:lnTo>
-                  <a:lnTo>
-                    <a:pt x="1656342" y="179302"/>
-                  </a:lnTo>
-                  <a:lnTo>
-                    <a:pt x="1579709" y="186500"/>
-                  </a:lnTo>
-                  <a:lnTo>
-                    <a:pt x="1503076" y="193623"/>
-                  </a:lnTo>
-                  <a:lnTo>
-                    <a:pt x="1426444" y="200670"/>
-                  </a:lnTo>
-                  <a:lnTo>
-                    <a:pt x="1349811" y="207643"/>
-                  </a:lnTo>
-                  <a:lnTo>
-                    <a:pt x="1273179" y="214543"/>
-                  </a:lnTo>
-                  <a:lnTo>
-                    <a:pt x="1196546" y="221370"/>
-                  </a:lnTo>
-                  <a:lnTo>
-                    <a:pt x="1119914" y="228125"/>
-                  </a:lnTo>
-                  <a:lnTo>
-                    <a:pt x="1043281" y="234808"/>
-                  </a:lnTo>
-                  <a:lnTo>
-                    <a:pt x="966649" y="241421"/>
-                  </a:lnTo>
-                  <a:lnTo>
-                    <a:pt x="890016" y="247965"/>
-                  </a:lnTo>
-                  <a:lnTo>
-                    <a:pt x="813384" y="254439"/>
-                  </a:lnTo>
-                  <a:lnTo>
-                    <a:pt x="736751" y="260845"/>
-                  </a:lnTo>
-                  <a:lnTo>
-                    <a:pt x="660118" y="267184"/>
-                  </a:lnTo>
-                  <a:lnTo>
-                    <a:pt x="583486" y="273455"/>
-                  </a:lnTo>
-                  <a:lnTo>
-                    <a:pt x="506853" y="279661"/>
-                  </a:lnTo>
-                  <a:lnTo>
-                    <a:pt x="430221" y="285801"/>
-                  </a:lnTo>
-                  <a:lnTo>
-                    <a:pt x="353588" y="291877"/>
-                  </a:lnTo>
-                  <a:lnTo>
-                    <a:pt x="276956" y="297888"/>
-                  </a:lnTo>
-                  <a:lnTo>
-                    <a:pt x="200323" y="303836"/>
-                  </a:lnTo>
-                  <a:lnTo>
-                    <a:pt x="123691" y="309721"/>
-                  </a:lnTo>
-                  <a:lnTo>
-                    <a:pt x="47058" y="315544"/>
-                  </a:lnTo>
-                  <a:lnTo>
-                    <a:pt x="0" y="319083"/>
+                    <a:pt x="3265625" y="8668"/>
+                  </a:lnTo>
+                  <a:lnTo>
+                    <a:pt x="3188993" y="17246"/>
+                  </a:lnTo>
+                  <a:lnTo>
+                    <a:pt x="3112360" y="25733"/>
+                  </a:lnTo>
+                  <a:lnTo>
+                    <a:pt x="3035727" y="34130"/>
+                  </a:lnTo>
+                  <a:lnTo>
+                    <a:pt x="2959095" y="42439"/>
+                  </a:lnTo>
+                  <a:lnTo>
+                    <a:pt x="2882462" y="50661"/>
+                  </a:lnTo>
+                  <a:lnTo>
+                    <a:pt x="2805830" y="58795"/>
+                  </a:lnTo>
+                  <a:lnTo>
+                    <a:pt x="2729197" y="66844"/>
+                  </a:lnTo>
+                  <a:lnTo>
+                    <a:pt x="2652565" y="74808"/>
+                  </a:lnTo>
+                  <a:lnTo>
+                    <a:pt x="2575932" y="82688"/>
+                  </a:lnTo>
+                  <a:lnTo>
+                    <a:pt x="2499300" y="90485"/>
+                  </a:lnTo>
+                  <a:lnTo>
+                    <a:pt x="2422667" y="98200"/>
+                  </a:lnTo>
+                  <a:lnTo>
+                    <a:pt x="2346034" y="105833"/>
+                  </a:lnTo>
+                  <a:lnTo>
+                    <a:pt x="2269402" y="113386"/>
+                  </a:lnTo>
+                  <a:lnTo>
+                    <a:pt x="2192769" y="120859"/>
+                  </a:lnTo>
+                  <a:lnTo>
+                    <a:pt x="2116137" y="128254"/>
+                  </a:lnTo>
+                  <a:lnTo>
+                    <a:pt x="2039504" y="135570"/>
+                  </a:lnTo>
+                  <a:lnTo>
+                    <a:pt x="1962872" y="142809"/>
+                  </a:lnTo>
+                  <a:lnTo>
+                    <a:pt x="1886239" y="149972"/>
+                  </a:lnTo>
+                  <a:lnTo>
+                    <a:pt x="1809607" y="157060"/>
+                  </a:lnTo>
+                  <a:lnTo>
+                    <a:pt x="1732974" y="164072"/>
+                  </a:lnTo>
+                  <a:lnTo>
+                    <a:pt x="1656342" y="171011"/>
+                  </a:lnTo>
+                  <a:lnTo>
+                    <a:pt x="1579709" y="177877"/>
+                  </a:lnTo>
+                  <a:lnTo>
+                    <a:pt x="1503076" y="184670"/>
+                  </a:lnTo>
+                  <a:lnTo>
+                    <a:pt x="1426444" y="191391"/>
+                  </a:lnTo>
+                  <a:lnTo>
+                    <a:pt x="1349811" y="198042"/>
+                  </a:lnTo>
+                  <a:lnTo>
+                    <a:pt x="1273179" y="204623"/>
+                  </a:lnTo>
+                  <a:lnTo>
+                    <a:pt x="1196546" y="211134"/>
+                  </a:lnTo>
+                  <a:lnTo>
+                    <a:pt x="1119914" y="217576"/>
+                  </a:lnTo>
+                  <a:lnTo>
+                    <a:pt x="1043281" y="223951"/>
+                  </a:lnTo>
+                  <a:lnTo>
+                    <a:pt x="966649" y="230258"/>
+                  </a:lnTo>
+                  <a:lnTo>
+                    <a:pt x="890016" y="236499"/>
+                  </a:lnTo>
+                  <a:lnTo>
+                    <a:pt x="813384" y="242674"/>
+                  </a:lnTo>
+                  <a:lnTo>
+                    <a:pt x="736751" y="248784"/>
+                  </a:lnTo>
+                  <a:lnTo>
+                    <a:pt x="660118" y="254829"/>
+                  </a:lnTo>
+                  <a:lnTo>
+                    <a:pt x="583486" y="260811"/>
+                  </a:lnTo>
+                  <a:lnTo>
+                    <a:pt x="506853" y="266730"/>
+                  </a:lnTo>
+                  <a:lnTo>
+                    <a:pt x="430221" y="272586"/>
+                  </a:lnTo>
+                  <a:lnTo>
+                    <a:pt x="353588" y="278380"/>
+                  </a:lnTo>
+                  <a:lnTo>
+                    <a:pt x="276956" y="284114"/>
+                  </a:lnTo>
+                  <a:lnTo>
+                    <a:pt x="200323" y="289787"/>
+                  </a:lnTo>
+                  <a:lnTo>
+                    <a:pt x="123691" y="295400"/>
+                  </a:lnTo>
+                  <a:lnTo>
+                    <a:pt x="47058" y="300954"/>
+                  </a:lnTo>
+                  <a:lnTo>
+                    <a:pt x="0" y="304328"/>
                   </a:lnTo>
                 </a:path>
               </a:pathLst>
@@ -4109,306 +4109,306 @@
           </p:nvSpPr>
           <p:spPr>
             <a:xfrm>
-              <a:off x="826802" y="1896563"/>
-              <a:ext cx="7394498" cy="3491881"/>
+              <a:off x="826802" y="2073503"/>
+              <a:ext cx="7394498" cy="3330417"/>
             </a:xfrm>
             <a:custGeom>
               <a:avLst/>
               <a:pathLst>
-                <a:path w="7394498" h="3491881">
+                <a:path w="7394498" h="3330417">
                   <a:moveTo>
                     <a:pt x="0" y="0"/>
                   </a:moveTo>
                   <a:lnTo>
-                    <a:pt x="37773" y="58283"/>
-                  </a:lnTo>
-                  <a:lnTo>
-                    <a:pt x="114406" y="172758"/>
-                  </a:lnTo>
-                  <a:lnTo>
-                    <a:pt x="191039" y="283586"/>
-                  </a:lnTo>
-                  <a:lnTo>
-                    <a:pt x="267671" y="390885"/>
-                  </a:lnTo>
-                  <a:lnTo>
-                    <a:pt x="344304" y="494767"/>
-                  </a:lnTo>
-                  <a:lnTo>
-                    <a:pt x="420936" y="595340"/>
-                  </a:lnTo>
-                  <a:lnTo>
-                    <a:pt x="497569" y="692711"/>
-                  </a:lnTo>
-                  <a:lnTo>
-                    <a:pt x="574201" y="786980"/>
-                  </a:lnTo>
-                  <a:lnTo>
-                    <a:pt x="650834" y="878246"/>
-                  </a:lnTo>
-                  <a:lnTo>
-                    <a:pt x="727466" y="966606"/>
-                  </a:lnTo>
-                  <a:lnTo>
-                    <a:pt x="804099" y="1052152"/>
-                  </a:lnTo>
-                  <a:lnTo>
-                    <a:pt x="880732" y="1134974"/>
-                  </a:lnTo>
-                  <a:lnTo>
-                    <a:pt x="957364" y="1215158"/>
-                  </a:lnTo>
-                  <a:lnTo>
-                    <a:pt x="1033997" y="1292788"/>
-                  </a:lnTo>
-                  <a:lnTo>
-                    <a:pt x="1110629" y="1367945"/>
-                  </a:lnTo>
-                  <a:lnTo>
-                    <a:pt x="1187262" y="1440709"/>
-                  </a:lnTo>
-                  <a:lnTo>
-                    <a:pt x="1263894" y="1511156"/>
-                  </a:lnTo>
-                  <a:lnTo>
-                    <a:pt x="1340527" y="1579359"/>
-                  </a:lnTo>
-                  <a:lnTo>
-                    <a:pt x="1417159" y="1645389"/>
-                  </a:lnTo>
-                  <a:lnTo>
-                    <a:pt x="1493792" y="1709317"/>
-                  </a:lnTo>
-                  <a:lnTo>
-                    <a:pt x="1570424" y="1771209"/>
-                  </a:lnTo>
-                  <a:lnTo>
-                    <a:pt x="1647057" y="1831130"/>
-                  </a:lnTo>
-                  <a:lnTo>
-                    <a:pt x="1723690" y="1889142"/>
-                  </a:lnTo>
-                  <a:lnTo>
-                    <a:pt x="1800322" y="1945307"/>
-                  </a:lnTo>
-                  <a:lnTo>
-                    <a:pt x="1876955" y="1999683"/>
-                  </a:lnTo>
-                  <a:lnTo>
-                    <a:pt x="1953587" y="2052327"/>
-                  </a:lnTo>
-                  <a:lnTo>
-                    <a:pt x="2030220" y="2103294"/>
-                  </a:lnTo>
-                  <a:lnTo>
-                    <a:pt x="2106852" y="2152638"/>
-                  </a:lnTo>
-                  <a:lnTo>
-                    <a:pt x="2183485" y="2200411"/>
-                  </a:lnTo>
-                  <a:lnTo>
-                    <a:pt x="2260117" y="2246662"/>
-                  </a:lnTo>
-                  <a:lnTo>
-                    <a:pt x="2336750" y="2291441"/>
-                  </a:lnTo>
-                  <a:lnTo>
-                    <a:pt x="2413382" y="2334793"/>
-                  </a:lnTo>
-                  <a:lnTo>
-                    <a:pt x="2490015" y="2376764"/>
-                  </a:lnTo>
-                  <a:lnTo>
-                    <a:pt x="2566648" y="2417399"/>
-                  </a:lnTo>
-                  <a:lnTo>
-                    <a:pt x="2643280" y="2456739"/>
-                  </a:lnTo>
-                  <a:lnTo>
-                    <a:pt x="2719913" y="2494827"/>
-                  </a:lnTo>
-                  <a:lnTo>
-                    <a:pt x="2796545" y="2531702"/>
-                  </a:lnTo>
-                  <a:lnTo>
-                    <a:pt x="2873178" y="2567402"/>
-                  </a:lnTo>
-                  <a:lnTo>
-                    <a:pt x="2949810" y="2601965"/>
-                  </a:lnTo>
-                  <a:lnTo>
-                    <a:pt x="3026443" y="2635427"/>
-                  </a:lnTo>
-                  <a:lnTo>
-                    <a:pt x="3103075" y="2667824"/>
-                  </a:lnTo>
-                  <a:lnTo>
-                    <a:pt x="3179708" y="2699189"/>
-                  </a:lnTo>
-                  <a:lnTo>
-                    <a:pt x="3256341" y="2729555"/>
-                  </a:lnTo>
-                  <a:lnTo>
-                    <a:pt x="3332973" y="2758954"/>
-                  </a:lnTo>
-                  <a:lnTo>
-                    <a:pt x="3409606" y="2787416"/>
-                  </a:lnTo>
-                  <a:lnTo>
-                    <a:pt x="3486238" y="2814973"/>
-                  </a:lnTo>
-                  <a:lnTo>
-                    <a:pt x="3562871" y="2841651"/>
-                  </a:lnTo>
-                  <a:lnTo>
-                    <a:pt x="3639503" y="2867480"/>
-                  </a:lnTo>
-                  <a:lnTo>
-                    <a:pt x="3716136" y="2892486"/>
-                  </a:lnTo>
-                  <a:lnTo>
-                    <a:pt x="3792768" y="2916696"/>
-                  </a:lnTo>
-                  <a:lnTo>
-                    <a:pt x="3869401" y="2940135"/>
-                  </a:lnTo>
-                  <a:lnTo>
-                    <a:pt x="3946033" y="2962827"/>
-                  </a:lnTo>
-                  <a:lnTo>
-                    <a:pt x="4022666" y="2984796"/>
-                  </a:lnTo>
-                  <a:lnTo>
-                    <a:pt x="4099299" y="3006066"/>
-                  </a:lnTo>
-                  <a:lnTo>
-                    <a:pt x="4175931" y="3026659"/>
-                  </a:lnTo>
-                  <a:lnTo>
-                    <a:pt x="4252564" y="3046595"/>
-                  </a:lnTo>
-                  <a:lnTo>
-                    <a:pt x="4329196" y="3065897"/>
-                  </a:lnTo>
-                  <a:lnTo>
-                    <a:pt x="4405829" y="3084584"/>
-                  </a:lnTo>
-                  <a:lnTo>
-                    <a:pt x="4482461" y="3102676"/>
-                  </a:lnTo>
-                  <a:lnTo>
-                    <a:pt x="4559094" y="3120191"/>
-                  </a:lnTo>
-                  <a:lnTo>
-                    <a:pt x="4635726" y="3137149"/>
-                  </a:lnTo>
-                  <a:lnTo>
-                    <a:pt x="4712359" y="3153567"/>
-                  </a:lnTo>
-                  <a:lnTo>
-                    <a:pt x="4788991" y="3169461"/>
-                  </a:lnTo>
-                  <a:lnTo>
-                    <a:pt x="4865624" y="3184850"/>
-                  </a:lnTo>
-                  <a:lnTo>
-                    <a:pt x="4942257" y="3199748"/>
-                  </a:lnTo>
-                  <a:lnTo>
-                    <a:pt x="5018889" y="3214172"/>
-                  </a:lnTo>
-                  <a:lnTo>
-                    <a:pt x="5095522" y="3228137"/>
-                  </a:lnTo>
-                  <a:lnTo>
-                    <a:pt x="5172154" y="3241657"/>
-                  </a:lnTo>
-                  <a:lnTo>
-                    <a:pt x="5248787" y="3254746"/>
-                  </a:lnTo>
-                  <a:lnTo>
-                    <a:pt x="5325419" y="3267418"/>
-                  </a:lnTo>
-                  <a:lnTo>
-                    <a:pt x="5402052" y="3279687"/>
-                  </a:lnTo>
-                  <a:lnTo>
-                    <a:pt x="5478684" y="3291565"/>
-                  </a:lnTo>
-                  <a:lnTo>
-                    <a:pt x="5555317" y="3303065"/>
-                  </a:lnTo>
-                  <a:lnTo>
-                    <a:pt x="5631950" y="3314199"/>
-                  </a:lnTo>
-                  <a:lnTo>
-                    <a:pt x="5708582" y="3324977"/>
-                  </a:lnTo>
-                  <a:lnTo>
-                    <a:pt x="5785215" y="3335413"/>
-                  </a:lnTo>
-                  <a:lnTo>
-                    <a:pt x="5861847" y="3345516"/>
-                  </a:lnTo>
-                  <a:lnTo>
-                    <a:pt x="5938480" y="3355298"/>
-                  </a:lnTo>
-                  <a:lnTo>
-                    <a:pt x="6015112" y="3364768"/>
-                  </a:lnTo>
-                  <a:lnTo>
-                    <a:pt x="6091745" y="3373936"/>
-                  </a:lnTo>
-                  <a:lnTo>
-                    <a:pt x="6168377" y="3382813"/>
-                  </a:lnTo>
-                  <a:lnTo>
-                    <a:pt x="6245010" y="3391406"/>
-                  </a:lnTo>
-                  <a:lnTo>
-                    <a:pt x="6321642" y="3399726"/>
-                  </a:lnTo>
-                  <a:lnTo>
-                    <a:pt x="6398275" y="3407781"/>
-                  </a:lnTo>
-                  <a:lnTo>
-                    <a:pt x="6474908" y="3415580"/>
-                  </a:lnTo>
-                  <a:lnTo>
-                    <a:pt x="6551540" y="3423130"/>
-                  </a:lnTo>
-                  <a:lnTo>
-                    <a:pt x="6628173" y="3430439"/>
-                  </a:lnTo>
-                  <a:lnTo>
-                    <a:pt x="6704805" y="3437516"/>
-                  </a:lnTo>
-                  <a:lnTo>
-                    <a:pt x="6781438" y="3444368"/>
-                  </a:lnTo>
-                  <a:lnTo>
-                    <a:pt x="6858070" y="3451001"/>
-                  </a:lnTo>
-                  <a:lnTo>
-                    <a:pt x="6934703" y="3457423"/>
-                  </a:lnTo>
-                  <a:lnTo>
-                    <a:pt x="7011335" y="3463640"/>
-                  </a:lnTo>
-                  <a:lnTo>
-                    <a:pt x="7087968" y="3469660"/>
-                  </a:lnTo>
-                  <a:lnTo>
-                    <a:pt x="7164601" y="3475488"/>
-                  </a:lnTo>
-                  <a:lnTo>
-                    <a:pt x="7241233" y="3481130"/>
-                  </a:lnTo>
-                  <a:lnTo>
-                    <a:pt x="7317866" y="3486592"/>
-                  </a:lnTo>
-                  <a:lnTo>
-                    <a:pt x="7394498" y="3491881"/>
+                    <a:pt x="37773" y="55588"/>
+                  </a:lnTo>
+                  <a:lnTo>
+                    <a:pt x="114406" y="164769"/>
+                  </a:lnTo>
+                  <a:lnTo>
+                    <a:pt x="191039" y="270473"/>
+                  </a:lnTo>
+                  <a:lnTo>
+                    <a:pt x="267671" y="372811"/>
+                  </a:lnTo>
+                  <a:lnTo>
+                    <a:pt x="344304" y="471889"/>
+                  </a:lnTo>
+                  <a:lnTo>
+                    <a:pt x="420936" y="567812"/>
+                  </a:lnTo>
+                  <a:lnTo>
+                    <a:pt x="497569" y="660680"/>
+                  </a:lnTo>
+                  <a:lnTo>
+                    <a:pt x="574201" y="750590"/>
+                  </a:lnTo>
+                  <a:lnTo>
+                    <a:pt x="650834" y="837637"/>
+                  </a:lnTo>
+                  <a:lnTo>
+                    <a:pt x="727466" y="921911"/>
+                  </a:lnTo>
+                  <a:lnTo>
+                    <a:pt x="804099" y="1003501"/>
+                  </a:lnTo>
+                  <a:lnTo>
+                    <a:pt x="880732" y="1082493"/>
+                  </a:lnTo>
+                  <a:lnTo>
+                    <a:pt x="957364" y="1158969"/>
+                  </a:lnTo>
+                  <a:lnTo>
+                    <a:pt x="1033997" y="1233010"/>
+                  </a:lnTo>
+                  <a:lnTo>
+                    <a:pt x="1110629" y="1304692"/>
+                  </a:lnTo>
+                  <a:lnTo>
+                    <a:pt x="1187262" y="1374091"/>
+                  </a:lnTo>
+                  <a:lnTo>
+                    <a:pt x="1263894" y="1441280"/>
+                  </a:lnTo>
+                  <a:lnTo>
+                    <a:pt x="1340527" y="1506330"/>
+                  </a:lnTo>
+                  <a:lnTo>
+                    <a:pt x="1417159" y="1569307"/>
+                  </a:lnTo>
+                  <a:lnTo>
+                    <a:pt x="1493792" y="1630279"/>
+                  </a:lnTo>
+                  <a:lnTo>
+                    <a:pt x="1570424" y="1689309"/>
+                  </a:lnTo>
+                  <a:lnTo>
+                    <a:pt x="1647057" y="1746459"/>
+                  </a:lnTo>
+                  <a:lnTo>
+                    <a:pt x="1723690" y="1801789"/>
+                  </a:lnTo>
+                  <a:lnTo>
+                    <a:pt x="1800322" y="1855356"/>
+                  </a:lnTo>
+                  <a:lnTo>
+                    <a:pt x="1876955" y="1907218"/>
+                  </a:lnTo>
+                  <a:lnTo>
+                    <a:pt x="1953587" y="1957428"/>
+                  </a:lnTo>
+                  <a:lnTo>
+                    <a:pt x="2030220" y="2006039"/>
+                  </a:lnTo>
+                  <a:lnTo>
+                    <a:pt x="2106852" y="2053101"/>
+                  </a:lnTo>
+                  <a:lnTo>
+                    <a:pt x="2183485" y="2098665"/>
+                  </a:lnTo>
+                  <a:lnTo>
+                    <a:pt x="2260117" y="2142778"/>
+                  </a:lnTo>
+                  <a:lnTo>
+                    <a:pt x="2336750" y="2185485"/>
+                  </a:lnTo>
+                  <a:lnTo>
+                    <a:pt x="2413382" y="2226833"/>
+                  </a:lnTo>
+                  <a:lnTo>
+                    <a:pt x="2490015" y="2266864"/>
+                  </a:lnTo>
+                  <a:lnTo>
+                    <a:pt x="2566648" y="2305619"/>
+                  </a:lnTo>
+                  <a:lnTo>
+                    <a:pt x="2643280" y="2343141"/>
+                  </a:lnTo>
+                  <a:lnTo>
+                    <a:pt x="2719913" y="2379467"/>
+                  </a:lnTo>
+                  <a:lnTo>
+                    <a:pt x="2796545" y="2414637"/>
+                  </a:lnTo>
+                  <a:lnTo>
+                    <a:pt x="2873178" y="2448686"/>
+                  </a:lnTo>
+                  <a:lnTo>
+                    <a:pt x="2949810" y="2481651"/>
+                  </a:lnTo>
+                  <a:lnTo>
+                    <a:pt x="3026443" y="2513566"/>
+                  </a:lnTo>
+                  <a:lnTo>
+                    <a:pt x="3103075" y="2544465"/>
+                  </a:lnTo>
+                  <a:lnTo>
+                    <a:pt x="3179708" y="2574380"/>
+                  </a:lnTo>
+                  <a:lnTo>
+                    <a:pt x="3256341" y="2603341"/>
+                  </a:lnTo>
+                  <a:lnTo>
+                    <a:pt x="3332973" y="2631381"/>
+                  </a:lnTo>
+                  <a:lnTo>
+                    <a:pt x="3409606" y="2658527"/>
+                  </a:lnTo>
+                  <a:lnTo>
+                    <a:pt x="3486238" y="2684809"/>
+                  </a:lnTo>
+                  <a:lnTo>
+                    <a:pt x="3562871" y="2710254"/>
+                  </a:lnTo>
+                  <a:lnTo>
+                    <a:pt x="3639503" y="2734889"/>
+                  </a:lnTo>
+                  <a:lnTo>
+                    <a:pt x="3716136" y="2758739"/>
+                  </a:lnTo>
+                  <a:lnTo>
+                    <a:pt x="3792768" y="2781829"/>
+                  </a:lnTo>
+                  <a:lnTo>
+                    <a:pt x="3869401" y="2804184"/>
+                  </a:lnTo>
+                  <a:lnTo>
+                    <a:pt x="3946033" y="2825827"/>
+                  </a:lnTo>
+                  <a:lnTo>
+                    <a:pt x="4022666" y="2846780"/>
+                  </a:lnTo>
+                  <a:lnTo>
+                    <a:pt x="4099299" y="2867067"/>
+                  </a:lnTo>
+                  <a:lnTo>
+                    <a:pt x="4175931" y="2886707"/>
+                  </a:lnTo>
+                  <a:lnTo>
+                    <a:pt x="4252564" y="2905722"/>
+                  </a:lnTo>
+                  <a:lnTo>
+                    <a:pt x="4329196" y="2924131"/>
+                  </a:lnTo>
+                  <a:lnTo>
+                    <a:pt x="4405829" y="2941954"/>
+                  </a:lnTo>
+                  <a:lnTo>
+                    <a:pt x="4482461" y="2959209"/>
+                  </a:lnTo>
+                  <a:lnTo>
+                    <a:pt x="4559094" y="2975915"/>
+                  </a:lnTo>
+                  <a:lnTo>
+                    <a:pt x="4635726" y="2992088"/>
+                  </a:lnTo>
+                  <a:lnTo>
+                    <a:pt x="4712359" y="3007747"/>
+                  </a:lnTo>
+                  <a:lnTo>
+                    <a:pt x="4788991" y="3022907"/>
+                  </a:lnTo>
+                  <a:lnTo>
+                    <a:pt x="4865624" y="3037584"/>
+                  </a:lnTo>
+                  <a:lnTo>
+                    <a:pt x="4942257" y="3051793"/>
+                  </a:lnTo>
+                  <a:lnTo>
+                    <a:pt x="5018889" y="3065550"/>
+                  </a:lnTo>
+                  <a:lnTo>
+                    <a:pt x="5095522" y="3078869"/>
+                  </a:lnTo>
+                  <a:lnTo>
+                    <a:pt x="5172154" y="3091764"/>
+                  </a:lnTo>
+                  <a:lnTo>
+                    <a:pt x="5248787" y="3104248"/>
+                  </a:lnTo>
+                  <a:lnTo>
+                    <a:pt x="5325419" y="3116334"/>
+                  </a:lnTo>
+                  <a:lnTo>
+                    <a:pt x="5402052" y="3128036"/>
+                  </a:lnTo>
+                  <a:lnTo>
+                    <a:pt x="5478684" y="3139365"/>
+                  </a:lnTo>
+                  <a:lnTo>
+                    <a:pt x="5555317" y="3150333"/>
+                  </a:lnTo>
+                  <a:lnTo>
+                    <a:pt x="5631950" y="3160951"/>
+                  </a:lnTo>
+                  <a:lnTo>
+                    <a:pt x="5708582" y="3171232"/>
+                  </a:lnTo>
+                  <a:lnTo>
+                    <a:pt x="5785215" y="3181185"/>
+                  </a:lnTo>
+                  <a:lnTo>
+                    <a:pt x="5861847" y="3190821"/>
+                  </a:lnTo>
+                  <a:lnTo>
+                    <a:pt x="5938480" y="3200150"/>
+                  </a:lnTo>
+                  <a:lnTo>
+                    <a:pt x="6015112" y="3209182"/>
+                  </a:lnTo>
+                  <a:lnTo>
+                    <a:pt x="6091745" y="3217927"/>
+                  </a:lnTo>
+                  <a:lnTo>
+                    <a:pt x="6168377" y="3226393"/>
+                  </a:lnTo>
+                  <a:lnTo>
+                    <a:pt x="6245010" y="3234589"/>
+                  </a:lnTo>
+                  <a:lnTo>
+                    <a:pt x="6321642" y="3242524"/>
+                  </a:lnTo>
+                  <a:lnTo>
+                    <a:pt x="6398275" y="3250207"/>
+                  </a:lnTo>
+                  <a:lnTo>
+                    <a:pt x="6474908" y="3257645"/>
+                  </a:lnTo>
+                  <a:lnTo>
+                    <a:pt x="6551540" y="3264846"/>
+                  </a:lnTo>
+                  <a:lnTo>
+                    <a:pt x="6628173" y="3271817"/>
+                  </a:lnTo>
+                  <a:lnTo>
+                    <a:pt x="6704805" y="3278567"/>
+                  </a:lnTo>
+                  <a:lnTo>
+                    <a:pt x="6781438" y="3285101"/>
+                  </a:lnTo>
+                  <a:lnTo>
+                    <a:pt x="6858070" y="3291428"/>
+                  </a:lnTo>
+                  <a:lnTo>
+                    <a:pt x="6934703" y="3297553"/>
+                  </a:lnTo>
+                  <a:lnTo>
+                    <a:pt x="7011335" y="3303483"/>
+                  </a:lnTo>
+                  <a:lnTo>
+                    <a:pt x="7087968" y="3309224"/>
+                  </a:lnTo>
+                  <a:lnTo>
+                    <a:pt x="7164601" y="3314782"/>
+                  </a:lnTo>
+                  <a:lnTo>
+                    <a:pt x="7241233" y="3320164"/>
+                  </a:lnTo>
+                  <a:lnTo>
+                    <a:pt x="7317866" y="3325373"/>
+                  </a:lnTo>
+                  <a:lnTo>
+                    <a:pt x="7394498" y="3330417"/>
                   </a:lnTo>
                 </a:path>
               </a:pathLst>
@@ -4437,7 +4437,7 @@
           </p:nvSpPr>
           <p:spPr>
             <a:xfrm>
-              <a:off x="817517" y="4679530"/>
+              <a:off x="817517" y="4727786"/>
               <a:ext cx="7799693" cy="0"/>
             </a:xfrm>
             <a:custGeom>
@@ -4480,15 +4480,15 @@
           </p:nvSpPr>
           <p:spPr>
             <a:xfrm>
-              <a:off x="4224261" y="1896563"/>
-              <a:ext cx="0" cy="3826579"/>
+              <a:off x="4224261" y="2073503"/>
+              <a:ext cx="0" cy="3649639"/>
             </a:xfrm>
             <a:custGeom>
               <a:avLst/>
               <a:pathLst>
-                <a:path w="0" h="3826579">
+                <a:path w="0" h="3649639">
                   <a:moveTo>
-                    <a:pt x="0" y="3826579"/>
+                    <a:pt x="0" y="3649639"/>
                   </a:moveTo>
                   <a:lnTo>
                     <a:pt x="0" y="0"/>
@@ -4523,7 +4523,7 @@
           </p:nvSpPr>
           <p:spPr>
             <a:xfrm>
-              <a:off x="692708" y="5509156"/>
+              <a:off x="692708" y="5517199"/>
               <a:ext cx="62179" cy="80101"/>
             </a:xfrm>
             <a:prstGeom prst="rect">
@@ -4569,7 +4569,7 @@
           </p:nvSpPr>
           <p:spPr>
             <a:xfrm>
-              <a:off x="692708" y="4639479"/>
+              <a:off x="692708" y="4687735"/>
               <a:ext cx="62179" cy="80101"/>
             </a:xfrm>
             <a:prstGeom prst="rect">
@@ -4615,7 +4615,7 @@
           </p:nvSpPr>
           <p:spPr>
             <a:xfrm>
-              <a:off x="692708" y="3769802"/>
+              <a:off x="692708" y="3858272"/>
               <a:ext cx="62179" cy="80101"/>
             </a:xfrm>
             <a:prstGeom prst="rect">
@@ -4661,7 +4661,7 @@
           </p:nvSpPr>
           <p:spPr>
             <a:xfrm>
-              <a:off x="692708" y="2900125"/>
+              <a:off x="692708" y="3028808"/>
               <a:ext cx="62179" cy="80101"/>
             </a:xfrm>
             <a:prstGeom prst="rect">
@@ -4707,7 +4707,7 @@
           </p:nvSpPr>
           <p:spPr>
             <a:xfrm>
-              <a:off x="692708" y="2030448"/>
+              <a:off x="692708" y="2199345"/>
               <a:ext cx="62179" cy="80101"/>
             </a:xfrm>
             <a:prstGeom prst="rect">
@@ -4983,7 +4983,7 @@
           </p:nvSpPr>
           <p:spPr>
             <a:xfrm rot="-5400000">
-              <a:off x="68446" y="3759743"/>
+              <a:off x="68446" y="3848213"/>
               <a:ext cx="1016904" cy="100218"/>
             </a:xfrm>
             <a:prstGeom prst="rect">
@@ -5024,6 +5024,52 @@
         <p:sp>
           <p:nvSpPr>
             <p:cNvPr id="38" name="tx38"/>
+            <p:cNvSpPr/>
+            <p:nvPr/>
+          </p:nvSpPr>
+          <p:spPr>
+            <a:xfrm>
+              <a:off x="817517" y="1896563"/>
+              <a:ext cx="5689762" cy="82021"/>
+            </a:xfrm>
+            <a:prstGeom prst="rect">
+              <a:avLst/>
+            </a:prstGeom>
+            <a:noFill/>
+          </p:spPr>
+          <p:txBody>
+            <a:bodyPr lIns="0" rIns="0" tIns="0" bIns="0" anchorCtr="1" anchor="ctr" wrap="none"/>
+            <a:lstStyle/>
+            <a:p>
+              <a:pPr algn="l" marL="0" marR="0" indent="0">
+                <a:lnSpc>
+                  <a:spcPts val="900"/>
+                </a:lnSpc>
+                <a:spcBef>
+                  <a:spcPts val="0"/>
+                </a:spcBef>
+                <a:spcAft>
+                  <a:spcPts val="0"/>
+                </a:spcAft>
+              </a:pPr>
+              <a:r>
+                <a:rPr sz="900">
+                  <a:solidFill>
+                    <a:srgbClr val="404040">
+                      <a:alpha val="100000"/>
+                    </a:srgbClr>
+                  </a:solidFill>
+                  <a:latin typeface="Helvetica"/>
+                  <a:cs typeface="Helvetica"/>
+                </a:rPr>
+                <a:t>subHR per 0.1 ratio decline: 1.45 (0.88-2.39)  |  per IQR decline (Δ = 0.30): 3.06 (0.69-13.55)  |  IQR: [0.85, 1.15]</a:t>
+              </a:r>
+            </a:p>
+          </p:txBody>
+        </p:sp>
+        <p:sp>
+          <p:nvSpPr>
+            <p:cNvPr id="39" name="tx39"/>
             <p:cNvSpPr/>
             <p:nvPr/>
           </p:nvSpPr>

--- a/docs/pptx/carbo/jx-carbo-linsubhr-ratio-hosp4.pptx
+++ b/docs/pptx/carbo/jx-carbo-linsubhr-ratio-hosp4.pptx
@@ -5030,7 +5030,7 @@
           <p:spPr>
             <a:xfrm>
               <a:off x="817517" y="1896563"/>
-              <a:ext cx="5689762" cy="82021"/>
+              <a:ext cx="6232916" cy="82021"/>
             </a:xfrm>
             <a:prstGeom prst="rect">
               <a:avLst/>
@@ -5062,7 +5062,7 @@
                   <a:latin typeface="Helvetica"/>
                   <a:cs typeface="Helvetica"/>
                 </a:rPr>
-                <a:t>subHR per 0.1 ratio decline: 1.45 (0.88-2.39)  |  per IQR decline (Δ = 0.30): 3.06 (0.69-13.55)  |  IQR: [0.85, 1.15]</a:t>
+                <a:t>subHR per 0.1 ratio decline: 1.45 (0.88-2.39), p = 0.140  |  per IQR decline (Δ = 0.30): 3.06 (0.69-13.55)  |  IQR: [0.85, 1.15]</a:t>
               </a:r>
             </a:p>
           </p:txBody>

--- a/docs/pptx/carbo/jx-carbo-linsubhr-ratio-hosp4.pptx
+++ b/docs/pptx/carbo/jx-carbo-linsubhr-ratio-hosp4.pptx
@@ -2443,7 +2443,7 @@
           </p:nvSpPr>
           <p:spPr>
             <a:xfrm>
-              <a:off x="1615213" y="2073503"/>
+              <a:off x="1467192" y="2073503"/>
               <a:ext cx="0" cy="3649639"/>
             </a:xfrm>
             <a:custGeom>
@@ -2486,7 +2486,7 @@
           </p:nvSpPr>
           <p:spPr>
             <a:xfrm>
-              <a:off x="3387871" y="2073503"/>
+              <a:off x="3538150" y="2073503"/>
               <a:ext cx="0" cy="3649639"/>
             </a:xfrm>
             <a:custGeom>
@@ -2529,7 +2529,7 @@
           </p:nvSpPr>
           <p:spPr>
             <a:xfrm>
-              <a:off x="5160528" y="2073503"/>
+              <a:off x="5609107" y="2073503"/>
               <a:ext cx="0" cy="3649639"/>
             </a:xfrm>
             <a:custGeom>
@@ -2572,7 +2572,7 @@
           </p:nvSpPr>
           <p:spPr>
             <a:xfrm>
-              <a:off x="6933186" y="2073503"/>
+              <a:off x="7680065" y="2073503"/>
               <a:ext cx="0" cy="3649639"/>
             </a:xfrm>
             <a:custGeom>
@@ -2830,7 +2830,7 @@
           </p:nvSpPr>
           <p:spPr>
             <a:xfrm>
-              <a:off x="2501542" y="2073503"/>
+              <a:off x="2502671" y="2073503"/>
               <a:ext cx="0" cy="3649639"/>
             </a:xfrm>
             <a:custGeom>
@@ -2873,7 +2873,7 @@
           </p:nvSpPr>
           <p:spPr>
             <a:xfrm>
-              <a:off x="4274200" y="2073503"/>
+              <a:off x="4573628" y="2073503"/>
               <a:ext cx="0" cy="3649639"/>
             </a:xfrm>
             <a:custGeom>
@@ -2916,7 +2916,7 @@
           </p:nvSpPr>
           <p:spPr>
             <a:xfrm>
-              <a:off x="6046857" y="2073503"/>
+              <a:off x="6644586" y="2073503"/>
               <a:ext cx="0" cy="3649639"/>
             </a:xfrm>
             <a:custGeom>
@@ -2953,574 +2953,537 @@
         </p:sp>
         <p:sp>
           <p:nvSpPr>
-            <p:cNvPr id="20" name="pl20"/>
+            <p:cNvPr id="20" name="pg20"/>
             <p:cNvSpPr/>
             <p:nvPr/>
           </p:nvSpPr>
           <p:spPr>
             <a:xfrm>
-              <a:off x="7819515" y="2073503"/>
-              <a:ext cx="0" cy="3649639"/>
+              <a:off x="1172049" y="2073503"/>
+              <a:ext cx="7090630" cy="3467441"/>
             </a:xfrm>
             <a:custGeom>
               <a:avLst/>
               <a:pathLst>
-                <a:path w="0" h="3649639">
+                <a:path w="7090630" h="3467441">
                   <a:moveTo>
-                    <a:pt x="0" y="3649639"/>
+                    <a:pt x="1990964" y="0"/>
                   </a:moveTo>
                   <a:lnTo>
-                    <a:pt x="0" y="0"/>
-                  </a:lnTo>
-                  <a:lnTo>
-                    <a:pt x="0" y="0"/>
-                  </a:lnTo>
-                </a:path>
-              </a:pathLst>
-            </a:custGeom>
-            <a:ln w="13550" cap="flat">
-              <a:solidFill>
-                <a:srgbClr val="EBEBEB">
-                  <a:alpha val="100000"/>
-                </a:srgbClr>
-              </a:solidFill>
-              <a:prstDash val="solid"/>
-              <a:round/>
-            </a:ln>
-          </p:spPr>
-          <p:txBody>
-            <a:bodyPr/>
-            <a:lstStyle/>
-            <a:p/>
-          </p:txBody>
-        </p:sp>
-        <p:sp>
-          <p:nvSpPr>
-            <p:cNvPr id="21" name="pg21"/>
-            <p:cNvSpPr/>
-            <p:nvPr/>
-          </p:nvSpPr>
-          <p:spPr>
-            <a:xfrm>
-              <a:off x="817517" y="2073503"/>
-              <a:ext cx="7403783" cy="3467441"/>
-            </a:xfrm>
-            <a:custGeom>
-              <a:avLst/>
-              <a:pathLst>
-                <a:path w="7403783" h="3467441">
-                  <a:moveTo>
-                    <a:pt x="1947393" y="0"/>
-                  </a:moveTo>
-                  <a:lnTo>
-                    <a:pt x="1962872" y="54199"/>
-                  </a:lnTo>
-                  <a:lnTo>
-                    <a:pt x="2039504" y="303069"/>
-                  </a:lnTo>
-                  <a:lnTo>
-                    <a:pt x="2116137" y="533879"/>
-                  </a:lnTo>
-                  <a:lnTo>
-                    <a:pt x="2192769" y="747940"/>
-                  </a:lnTo>
-                  <a:lnTo>
-                    <a:pt x="2269402" y="946467"/>
-                  </a:lnTo>
-                  <a:lnTo>
-                    <a:pt x="2346034" y="1130588"/>
-                  </a:lnTo>
-                  <a:lnTo>
-                    <a:pt x="2422667" y="1301348"/>
-                  </a:lnTo>
-                  <a:lnTo>
-                    <a:pt x="2499300" y="1459717"/>
-                  </a:lnTo>
-                  <a:lnTo>
-                    <a:pt x="2575932" y="1606593"/>
-                  </a:lnTo>
-                  <a:lnTo>
-                    <a:pt x="2652565" y="1742811"/>
-                  </a:lnTo>
-                  <a:lnTo>
-                    <a:pt x="2729197" y="1869144"/>
-                  </a:lnTo>
-                  <a:lnTo>
-                    <a:pt x="2805830" y="1986310"/>
-                  </a:lnTo>
-                  <a:lnTo>
-                    <a:pt x="2882462" y="2094973"/>
-                  </a:lnTo>
-                  <a:lnTo>
-                    <a:pt x="2959095" y="2195751"/>
-                  </a:lnTo>
-                  <a:lnTo>
-                    <a:pt x="3035727" y="2289216"/>
-                  </a:lnTo>
-                  <a:lnTo>
-                    <a:pt x="3112360" y="2375899"/>
-                  </a:lnTo>
-                  <a:lnTo>
-                    <a:pt x="3188993" y="2456291"/>
-                  </a:lnTo>
-                  <a:lnTo>
-                    <a:pt x="3265625" y="2530850"/>
-                  </a:lnTo>
-                  <a:lnTo>
-                    <a:pt x="3342258" y="2599998"/>
-                  </a:lnTo>
-                  <a:lnTo>
-                    <a:pt x="3418890" y="2652888"/>
-                  </a:lnTo>
-                  <a:lnTo>
-                    <a:pt x="3495523" y="2644033"/>
-                  </a:lnTo>
-                  <a:lnTo>
-                    <a:pt x="3572155" y="2635084"/>
-                  </a:lnTo>
-                  <a:lnTo>
-                    <a:pt x="3648788" y="2626040"/>
-                  </a:lnTo>
-                  <a:lnTo>
-                    <a:pt x="3725420" y="2616899"/>
-                  </a:lnTo>
-                  <a:lnTo>
-                    <a:pt x="3802053" y="2607661"/>
-                  </a:lnTo>
-                  <a:lnTo>
-                    <a:pt x="3878685" y="2598325"/>
-                  </a:lnTo>
-                  <a:lnTo>
-                    <a:pt x="3955318" y="2588888"/>
-                  </a:lnTo>
-                  <a:lnTo>
-                    <a:pt x="4031951" y="2579352"/>
-                  </a:lnTo>
-                  <a:lnTo>
-                    <a:pt x="4108583" y="2569713"/>
-                  </a:lnTo>
-                  <a:lnTo>
-                    <a:pt x="4185216" y="2559972"/>
-                  </a:lnTo>
-                  <a:lnTo>
-                    <a:pt x="4261848" y="2550128"/>
-                  </a:lnTo>
-                  <a:lnTo>
-                    <a:pt x="4338481" y="2540178"/>
-                  </a:lnTo>
-                  <a:lnTo>
-                    <a:pt x="4415113" y="2530122"/>
-                  </a:lnTo>
-                  <a:lnTo>
-                    <a:pt x="4491746" y="2519959"/>
-                  </a:lnTo>
-                  <a:lnTo>
-                    <a:pt x="4568378" y="2509688"/>
-                  </a:lnTo>
-                  <a:lnTo>
-                    <a:pt x="4645011" y="2499307"/>
-                  </a:lnTo>
-                  <a:lnTo>
-                    <a:pt x="4721644" y="2488816"/>
-                  </a:lnTo>
-                  <a:lnTo>
-                    <a:pt x="4798276" y="2478213"/>
-                  </a:lnTo>
-                  <a:lnTo>
-                    <a:pt x="4874909" y="2467497"/>
-                  </a:lnTo>
-                  <a:lnTo>
-                    <a:pt x="4951541" y="2456666"/>
-                  </a:lnTo>
-                  <a:lnTo>
-                    <a:pt x="5028174" y="2445720"/>
-                  </a:lnTo>
-                  <a:lnTo>
-                    <a:pt x="5104806" y="2434658"/>
-                  </a:lnTo>
-                  <a:lnTo>
-                    <a:pt x="5181439" y="2423478"/>
-                  </a:lnTo>
-                  <a:lnTo>
-                    <a:pt x="5258071" y="2412178"/>
-                  </a:lnTo>
-                  <a:lnTo>
-                    <a:pt x="5334704" y="2400758"/>
-                  </a:lnTo>
-                  <a:lnTo>
-                    <a:pt x="5411336" y="2389217"/>
-                  </a:lnTo>
-                  <a:lnTo>
-                    <a:pt x="5487969" y="2377552"/>
-                  </a:lnTo>
-                  <a:lnTo>
-                    <a:pt x="5564602" y="2365763"/>
-                  </a:lnTo>
-                  <a:lnTo>
-                    <a:pt x="5641234" y="2353849"/>
-                  </a:lnTo>
-                  <a:lnTo>
-                    <a:pt x="5717867" y="2341807"/>
-                  </a:lnTo>
-                  <a:lnTo>
-                    <a:pt x="5794499" y="2329637"/>
-                  </a:lnTo>
-                  <a:lnTo>
-                    <a:pt x="5871132" y="2317338"/>
-                  </a:lnTo>
-                  <a:lnTo>
-                    <a:pt x="5947764" y="2304907"/>
-                  </a:lnTo>
-                  <a:lnTo>
-                    <a:pt x="6024397" y="2292344"/>
-                  </a:lnTo>
-                  <a:lnTo>
-                    <a:pt x="6101029" y="2279647"/>
-                  </a:lnTo>
-                  <a:lnTo>
-                    <a:pt x="6177662" y="2266815"/>
-                  </a:lnTo>
-                  <a:lnTo>
-                    <a:pt x="6254294" y="2253846"/>
-                  </a:lnTo>
-                  <a:lnTo>
-                    <a:pt x="6330927" y="2240738"/>
-                  </a:lnTo>
-                  <a:lnTo>
-                    <a:pt x="6407560" y="2227491"/>
-                  </a:lnTo>
-                  <a:lnTo>
-                    <a:pt x="6484192" y="2214103"/>
-                  </a:lnTo>
-                  <a:lnTo>
-                    <a:pt x="6560825" y="2200572"/>
-                  </a:lnTo>
-                  <a:lnTo>
-                    <a:pt x="6637457" y="2186897"/>
-                  </a:lnTo>
-                  <a:lnTo>
-                    <a:pt x="6714090" y="2173077"/>
-                  </a:lnTo>
-                  <a:lnTo>
-                    <a:pt x="6790722" y="2159109"/>
-                  </a:lnTo>
-                  <a:lnTo>
-                    <a:pt x="6867355" y="2144992"/>
-                  </a:lnTo>
-                  <a:lnTo>
-                    <a:pt x="6943987" y="2130724"/>
-                  </a:lnTo>
-                  <a:lnTo>
-                    <a:pt x="7020620" y="2116305"/>
-                  </a:lnTo>
-                  <a:lnTo>
-                    <a:pt x="7097253" y="2101732"/>
-                  </a:lnTo>
-                  <a:lnTo>
-                    <a:pt x="7173885" y="2087004"/>
-                  </a:lnTo>
-                  <a:lnTo>
-                    <a:pt x="7250518" y="2072118"/>
-                  </a:lnTo>
-                  <a:lnTo>
-                    <a:pt x="7327150" y="2057074"/>
-                  </a:lnTo>
-                  <a:lnTo>
-                    <a:pt x="7403783" y="2041870"/>
-                  </a:lnTo>
-                  <a:lnTo>
-                    <a:pt x="7403783" y="3467441"/>
-                  </a:lnTo>
-                  <a:lnTo>
-                    <a:pt x="7327150" y="3466166"/>
-                  </a:lnTo>
-                  <a:lnTo>
-                    <a:pt x="7250518" y="3464790"/>
-                  </a:lnTo>
-                  <a:lnTo>
-                    <a:pt x="7173885" y="3463307"/>
-                  </a:lnTo>
-                  <a:lnTo>
-                    <a:pt x="7097253" y="3461708"/>
-                  </a:lnTo>
-                  <a:lnTo>
-                    <a:pt x="7020620" y="3459983"/>
-                  </a:lnTo>
-                  <a:lnTo>
-                    <a:pt x="6943987" y="3458124"/>
-                  </a:lnTo>
-                  <a:lnTo>
-                    <a:pt x="6867355" y="3456119"/>
-                  </a:lnTo>
-                  <a:lnTo>
-                    <a:pt x="6790722" y="3453957"/>
-                  </a:lnTo>
-                  <a:lnTo>
-                    <a:pt x="6714090" y="3451626"/>
-                  </a:lnTo>
-                  <a:lnTo>
-                    <a:pt x="6637457" y="3449113"/>
-                  </a:lnTo>
-                  <a:lnTo>
-                    <a:pt x="6560825" y="3446403"/>
-                  </a:lnTo>
-                  <a:lnTo>
-                    <a:pt x="6484192" y="3443482"/>
-                  </a:lnTo>
-                  <a:lnTo>
-                    <a:pt x="6407560" y="3440331"/>
-                  </a:lnTo>
-                  <a:lnTo>
-                    <a:pt x="6330927" y="3436934"/>
-                  </a:lnTo>
-                  <a:lnTo>
-                    <a:pt x="6254294" y="3433271"/>
-                  </a:lnTo>
-                  <a:lnTo>
-                    <a:pt x="6177662" y="3429322"/>
-                  </a:lnTo>
-                  <a:lnTo>
-                    <a:pt x="6101029" y="3425063"/>
-                  </a:lnTo>
-                  <a:lnTo>
-                    <a:pt x="6024397" y="3420472"/>
-                  </a:lnTo>
-                  <a:lnTo>
-                    <a:pt x="5947764" y="3415521"/>
-                  </a:lnTo>
-                  <a:lnTo>
-                    <a:pt x="5871132" y="3410183"/>
-                  </a:lnTo>
-                  <a:lnTo>
-                    <a:pt x="5794499" y="3404427"/>
-                  </a:lnTo>
-                  <a:lnTo>
-                    <a:pt x="5717867" y="3398220"/>
-                  </a:lnTo>
-                  <a:lnTo>
-                    <a:pt x="5641234" y="3391529"/>
-                  </a:lnTo>
-                  <a:lnTo>
-                    <a:pt x="5564602" y="3384313"/>
-                  </a:lnTo>
-                  <a:lnTo>
-                    <a:pt x="5487969" y="3376533"/>
-                  </a:lnTo>
-                  <a:lnTo>
-                    <a:pt x="5411336" y="3368144"/>
-                  </a:lnTo>
-                  <a:lnTo>
-                    <a:pt x="5334704" y="3359099"/>
-                  </a:lnTo>
-                  <a:lnTo>
-                    <a:pt x="5258071" y="3349346"/>
-                  </a:lnTo>
-                  <a:lnTo>
-                    <a:pt x="5181439" y="3338830"/>
-                  </a:lnTo>
-                  <a:lnTo>
-                    <a:pt x="5104806" y="3327491"/>
-                  </a:lnTo>
-                  <a:lnTo>
-                    <a:pt x="5028174" y="3315265"/>
-                  </a:lnTo>
-                  <a:lnTo>
-                    <a:pt x="4951541" y="3302082"/>
-                  </a:lnTo>
-                  <a:lnTo>
-                    <a:pt x="4874909" y="3287868"/>
-                  </a:lnTo>
-                  <a:lnTo>
-                    <a:pt x="4798276" y="3272542"/>
-                  </a:lnTo>
-                  <a:lnTo>
-                    <a:pt x="4721644" y="3256016"/>
-                  </a:lnTo>
-                  <a:lnTo>
-                    <a:pt x="4645011" y="3238198"/>
-                  </a:lnTo>
-                  <a:lnTo>
-                    <a:pt x="4568378" y="3218985"/>
-                  </a:lnTo>
-                  <a:lnTo>
-                    <a:pt x="4491746" y="3198269"/>
-                  </a:lnTo>
-                  <a:lnTo>
-                    <a:pt x="4415113" y="3175932"/>
-                  </a:lnTo>
-                  <a:lnTo>
-                    <a:pt x="4338481" y="3151847"/>
-                  </a:lnTo>
-                  <a:lnTo>
-                    <a:pt x="4261848" y="3125878"/>
-                  </a:lnTo>
-                  <a:lnTo>
-                    <a:pt x="4185216" y="3097877"/>
-                  </a:lnTo>
-                  <a:lnTo>
-                    <a:pt x="4108583" y="3067685"/>
-                  </a:lnTo>
-                  <a:lnTo>
-                    <a:pt x="4031951" y="3035131"/>
-                  </a:lnTo>
-                  <a:lnTo>
-                    <a:pt x="3955318" y="3000029"/>
-                  </a:lnTo>
-                  <a:lnTo>
-                    <a:pt x="3878685" y="2962181"/>
-                  </a:lnTo>
-                  <a:lnTo>
-                    <a:pt x="3802053" y="2921372"/>
-                  </a:lnTo>
-                  <a:lnTo>
-                    <a:pt x="3725420" y="2877369"/>
-                  </a:lnTo>
-                  <a:lnTo>
-                    <a:pt x="3648788" y="2829924"/>
-                  </a:lnTo>
-                  <a:lnTo>
-                    <a:pt x="3572155" y="2778766"/>
-                  </a:lnTo>
-                  <a:lnTo>
-                    <a:pt x="3495523" y="2723605"/>
-                  </a:lnTo>
-                  <a:lnTo>
-                    <a:pt x="3418890" y="2664128"/>
-                  </a:lnTo>
-                  <a:lnTo>
-                    <a:pt x="3342258" y="2661649"/>
-                  </a:lnTo>
-                  <a:lnTo>
-                    <a:pt x="3265625" y="2670318"/>
-                  </a:lnTo>
-                  <a:lnTo>
-                    <a:pt x="3188993" y="2678895"/>
-                  </a:lnTo>
-                  <a:lnTo>
-                    <a:pt x="3112360" y="2687382"/>
-                  </a:lnTo>
-                  <a:lnTo>
-                    <a:pt x="3035727" y="2695780"/>
-                  </a:lnTo>
-                  <a:lnTo>
-                    <a:pt x="2959095" y="2704089"/>
-                  </a:lnTo>
-                  <a:lnTo>
-                    <a:pt x="2882462" y="2712310"/>
-                  </a:lnTo>
-                  <a:lnTo>
-                    <a:pt x="2805830" y="2720445"/>
-                  </a:lnTo>
-                  <a:lnTo>
-                    <a:pt x="2729197" y="2728494"/>
-                  </a:lnTo>
-                  <a:lnTo>
-                    <a:pt x="2652565" y="2736458"/>
-                  </a:lnTo>
-                  <a:lnTo>
-                    <a:pt x="2575932" y="2744338"/>
-                  </a:lnTo>
-                  <a:lnTo>
-                    <a:pt x="2499300" y="2752135"/>
-                  </a:lnTo>
-                  <a:lnTo>
-                    <a:pt x="2422667" y="2759849"/>
-                  </a:lnTo>
-                  <a:lnTo>
-                    <a:pt x="2346034" y="2767483"/>
-                  </a:lnTo>
-                  <a:lnTo>
-                    <a:pt x="2269402" y="2775036"/>
-                  </a:lnTo>
-                  <a:lnTo>
-                    <a:pt x="2192769" y="2782509"/>
-                  </a:lnTo>
-                  <a:lnTo>
-                    <a:pt x="2116137" y="2789903"/>
-                  </a:lnTo>
-                  <a:lnTo>
-                    <a:pt x="2039504" y="2797220"/>
-                  </a:lnTo>
-                  <a:lnTo>
-                    <a:pt x="1962872" y="2804459"/>
-                  </a:lnTo>
-                  <a:lnTo>
-                    <a:pt x="1886239" y="2811622"/>
-                  </a:lnTo>
-                  <a:lnTo>
-                    <a:pt x="1809607" y="2818709"/>
-                  </a:lnTo>
-                  <a:lnTo>
-                    <a:pt x="1732974" y="2825722"/>
-                  </a:lnTo>
-                  <a:lnTo>
-                    <a:pt x="1656342" y="2832661"/>
-                  </a:lnTo>
-                  <a:lnTo>
-                    <a:pt x="1579709" y="2839526"/>
-                  </a:lnTo>
-                  <a:lnTo>
-                    <a:pt x="1503076" y="2846319"/>
-                  </a:lnTo>
-                  <a:lnTo>
-                    <a:pt x="1426444" y="2853041"/>
-                  </a:lnTo>
-                  <a:lnTo>
-                    <a:pt x="1349811" y="2859692"/>
-                  </a:lnTo>
-                  <a:lnTo>
-                    <a:pt x="1273179" y="2866272"/>
-                  </a:lnTo>
-                  <a:lnTo>
-                    <a:pt x="1196546" y="2872783"/>
-                  </a:lnTo>
-                  <a:lnTo>
-                    <a:pt x="1119914" y="2879226"/>
-                  </a:lnTo>
-                  <a:lnTo>
-                    <a:pt x="1043281" y="2885600"/>
-                  </a:lnTo>
-                  <a:lnTo>
-                    <a:pt x="966649" y="2891908"/>
-                  </a:lnTo>
-                  <a:lnTo>
-                    <a:pt x="890016" y="2898149"/>
-                  </a:lnTo>
-                  <a:lnTo>
-                    <a:pt x="813384" y="2904324"/>
-                  </a:lnTo>
-                  <a:lnTo>
-                    <a:pt x="736751" y="2910433"/>
-                  </a:lnTo>
-                  <a:lnTo>
-                    <a:pt x="660118" y="2916479"/>
-                  </a:lnTo>
-                  <a:lnTo>
-                    <a:pt x="583486" y="2922461"/>
-                  </a:lnTo>
-                  <a:lnTo>
-                    <a:pt x="506853" y="2928379"/>
-                  </a:lnTo>
-                  <a:lnTo>
-                    <a:pt x="430221" y="2934236"/>
-                  </a:lnTo>
-                  <a:lnTo>
-                    <a:pt x="353588" y="2940030"/>
-                  </a:lnTo>
-                  <a:lnTo>
-                    <a:pt x="276956" y="2945763"/>
-                  </a:lnTo>
-                  <a:lnTo>
-                    <a:pt x="200323" y="2951436"/>
-                  </a:lnTo>
-                  <a:lnTo>
-                    <a:pt x="123691" y="2957049"/>
-                  </a:lnTo>
-                  <a:lnTo>
-                    <a:pt x="47058" y="2962603"/>
-                  </a:lnTo>
-                  <a:lnTo>
-                    <a:pt x="0" y="2965978"/>
+                    <a:pt x="2005430" y="54199"/>
+                  </a:lnTo>
+                  <a:lnTo>
+                    <a:pt x="2077053" y="303069"/>
+                  </a:lnTo>
+                  <a:lnTo>
+                    <a:pt x="2148675" y="533879"/>
+                  </a:lnTo>
+                  <a:lnTo>
+                    <a:pt x="2220298" y="747940"/>
+                  </a:lnTo>
+                  <a:lnTo>
+                    <a:pt x="2291920" y="946467"/>
+                  </a:lnTo>
+                  <a:lnTo>
+                    <a:pt x="2363543" y="1130588"/>
+                  </a:lnTo>
+                  <a:lnTo>
+                    <a:pt x="2435165" y="1301348"/>
+                  </a:lnTo>
+                  <a:lnTo>
+                    <a:pt x="2506788" y="1459717"/>
+                  </a:lnTo>
+                  <a:lnTo>
+                    <a:pt x="2578410" y="1606593"/>
+                  </a:lnTo>
+                  <a:lnTo>
+                    <a:pt x="2650033" y="1742811"/>
+                  </a:lnTo>
+                  <a:lnTo>
+                    <a:pt x="2721655" y="1869144"/>
+                  </a:lnTo>
+                  <a:lnTo>
+                    <a:pt x="2793278" y="1986310"/>
+                  </a:lnTo>
+                  <a:lnTo>
+                    <a:pt x="2864901" y="2094973"/>
+                  </a:lnTo>
+                  <a:lnTo>
+                    <a:pt x="2936523" y="2195751"/>
+                  </a:lnTo>
+                  <a:lnTo>
+                    <a:pt x="3008146" y="2289216"/>
+                  </a:lnTo>
+                  <a:lnTo>
+                    <a:pt x="3079768" y="2375899"/>
+                  </a:lnTo>
+                  <a:lnTo>
+                    <a:pt x="3151391" y="2456291"/>
+                  </a:lnTo>
+                  <a:lnTo>
+                    <a:pt x="3223013" y="2530850"/>
+                  </a:lnTo>
+                  <a:lnTo>
+                    <a:pt x="3294636" y="2599998"/>
+                  </a:lnTo>
+                  <a:lnTo>
+                    <a:pt x="3366258" y="2652888"/>
+                  </a:lnTo>
+                  <a:lnTo>
+                    <a:pt x="3437881" y="2644033"/>
+                  </a:lnTo>
+                  <a:lnTo>
+                    <a:pt x="3509503" y="2635084"/>
+                  </a:lnTo>
+                  <a:lnTo>
+                    <a:pt x="3581126" y="2626040"/>
+                  </a:lnTo>
+                  <a:lnTo>
+                    <a:pt x="3652748" y="2616899"/>
+                  </a:lnTo>
+                  <a:lnTo>
+                    <a:pt x="3724371" y="2607661"/>
+                  </a:lnTo>
+                  <a:lnTo>
+                    <a:pt x="3795993" y="2598325"/>
+                  </a:lnTo>
+                  <a:lnTo>
+                    <a:pt x="3867616" y="2588888"/>
+                  </a:lnTo>
+                  <a:lnTo>
+                    <a:pt x="3939238" y="2579352"/>
+                  </a:lnTo>
+                  <a:lnTo>
+                    <a:pt x="4010861" y="2569713"/>
+                  </a:lnTo>
+                  <a:lnTo>
+                    <a:pt x="4082483" y="2559972"/>
+                  </a:lnTo>
+                  <a:lnTo>
+                    <a:pt x="4154106" y="2550128"/>
+                  </a:lnTo>
+                  <a:lnTo>
+                    <a:pt x="4225729" y="2540178"/>
+                  </a:lnTo>
+                  <a:lnTo>
+                    <a:pt x="4297351" y="2530122"/>
+                  </a:lnTo>
+                  <a:lnTo>
+                    <a:pt x="4368974" y="2519959"/>
+                  </a:lnTo>
+                  <a:lnTo>
+                    <a:pt x="4440596" y="2509688"/>
+                  </a:lnTo>
+                  <a:lnTo>
+                    <a:pt x="4512219" y="2499307"/>
+                  </a:lnTo>
+                  <a:lnTo>
+                    <a:pt x="4583841" y="2488816"/>
+                  </a:lnTo>
+                  <a:lnTo>
+                    <a:pt x="4655464" y="2478213"/>
+                  </a:lnTo>
+                  <a:lnTo>
+                    <a:pt x="4727086" y="2467497"/>
+                  </a:lnTo>
+                  <a:lnTo>
+                    <a:pt x="4798709" y="2456666"/>
+                  </a:lnTo>
+                  <a:lnTo>
+                    <a:pt x="4870331" y="2445720"/>
+                  </a:lnTo>
+                  <a:lnTo>
+                    <a:pt x="4941954" y="2434658"/>
+                  </a:lnTo>
+                  <a:lnTo>
+                    <a:pt x="5013576" y="2423478"/>
+                  </a:lnTo>
+                  <a:lnTo>
+                    <a:pt x="5085199" y="2412178"/>
+                  </a:lnTo>
+                  <a:lnTo>
+                    <a:pt x="5156821" y="2400758"/>
+                  </a:lnTo>
+                  <a:lnTo>
+                    <a:pt x="5228444" y="2389217"/>
+                  </a:lnTo>
+                  <a:lnTo>
+                    <a:pt x="5300066" y="2377552"/>
+                  </a:lnTo>
+                  <a:lnTo>
+                    <a:pt x="5371689" y="2365763"/>
+                  </a:lnTo>
+                  <a:lnTo>
+                    <a:pt x="5443311" y="2353849"/>
+                  </a:lnTo>
+                  <a:lnTo>
+                    <a:pt x="5514934" y="2341807"/>
+                  </a:lnTo>
+                  <a:lnTo>
+                    <a:pt x="5586557" y="2329637"/>
+                  </a:lnTo>
+                  <a:lnTo>
+                    <a:pt x="5658179" y="2317338"/>
+                  </a:lnTo>
+                  <a:lnTo>
+                    <a:pt x="5729802" y="2304907"/>
+                  </a:lnTo>
+                  <a:lnTo>
+                    <a:pt x="5801424" y="2292344"/>
+                  </a:lnTo>
+                  <a:lnTo>
+                    <a:pt x="5873047" y="2279647"/>
+                  </a:lnTo>
+                  <a:lnTo>
+                    <a:pt x="5944669" y="2266815"/>
+                  </a:lnTo>
+                  <a:lnTo>
+                    <a:pt x="6016292" y="2253846"/>
+                  </a:lnTo>
+                  <a:lnTo>
+                    <a:pt x="6087914" y="2240738"/>
+                  </a:lnTo>
+                  <a:lnTo>
+                    <a:pt x="6159537" y="2227491"/>
+                  </a:lnTo>
+                  <a:lnTo>
+                    <a:pt x="6231159" y="2214103"/>
+                  </a:lnTo>
+                  <a:lnTo>
+                    <a:pt x="6302782" y="2200572"/>
+                  </a:lnTo>
+                  <a:lnTo>
+                    <a:pt x="6374404" y="2186897"/>
+                  </a:lnTo>
+                  <a:lnTo>
+                    <a:pt x="6446027" y="2173077"/>
+                  </a:lnTo>
+                  <a:lnTo>
+                    <a:pt x="6517649" y="2159109"/>
+                  </a:lnTo>
+                  <a:lnTo>
+                    <a:pt x="6589272" y="2144992"/>
+                  </a:lnTo>
+                  <a:lnTo>
+                    <a:pt x="6660894" y="2130724"/>
+                  </a:lnTo>
+                  <a:lnTo>
+                    <a:pt x="6732517" y="2116305"/>
+                  </a:lnTo>
+                  <a:lnTo>
+                    <a:pt x="6804139" y="2101732"/>
+                  </a:lnTo>
+                  <a:lnTo>
+                    <a:pt x="6875762" y="2087004"/>
+                  </a:lnTo>
+                  <a:lnTo>
+                    <a:pt x="6947385" y="2072118"/>
+                  </a:lnTo>
+                  <a:lnTo>
+                    <a:pt x="7019007" y="2057074"/>
+                  </a:lnTo>
+                  <a:lnTo>
+                    <a:pt x="7090630" y="2041870"/>
+                  </a:lnTo>
+                  <a:lnTo>
+                    <a:pt x="7090630" y="3467441"/>
+                  </a:lnTo>
+                  <a:lnTo>
+                    <a:pt x="7019007" y="3466166"/>
+                  </a:lnTo>
+                  <a:lnTo>
+                    <a:pt x="6947385" y="3464790"/>
+                  </a:lnTo>
+                  <a:lnTo>
+                    <a:pt x="6875762" y="3463307"/>
+                  </a:lnTo>
+                  <a:lnTo>
+                    <a:pt x="6804139" y="3461708"/>
+                  </a:lnTo>
+                  <a:lnTo>
+                    <a:pt x="6732517" y="3459983"/>
+                  </a:lnTo>
+                  <a:lnTo>
+                    <a:pt x="6660894" y="3458124"/>
+                  </a:lnTo>
+                  <a:lnTo>
+                    <a:pt x="6589272" y="3456119"/>
+                  </a:lnTo>
+                  <a:lnTo>
+                    <a:pt x="6517649" y="3453957"/>
+                  </a:lnTo>
+                  <a:lnTo>
+                    <a:pt x="6446027" y="3451626"/>
+                  </a:lnTo>
+                  <a:lnTo>
+                    <a:pt x="6374404" y="3449113"/>
+                  </a:lnTo>
+                  <a:lnTo>
+                    <a:pt x="6302782" y="3446403"/>
+                  </a:lnTo>
+                  <a:lnTo>
+                    <a:pt x="6231159" y="3443482"/>
+                  </a:lnTo>
+                  <a:lnTo>
+                    <a:pt x="6159537" y="3440331"/>
+                  </a:lnTo>
+                  <a:lnTo>
+                    <a:pt x="6087914" y="3436934"/>
+                  </a:lnTo>
+                  <a:lnTo>
+                    <a:pt x="6016292" y="3433271"/>
+                  </a:lnTo>
+                  <a:lnTo>
+                    <a:pt x="5944669" y="3429322"/>
+                  </a:lnTo>
+                  <a:lnTo>
+                    <a:pt x="5873047" y="3425063"/>
+                  </a:lnTo>
+                  <a:lnTo>
+                    <a:pt x="5801424" y="3420472"/>
+                  </a:lnTo>
+                  <a:lnTo>
+                    <a:pt x="5729802" y="3415521"/>
+                  </a:lnTo>
+                  <a:lnTo>
+                    <a:pt x="5658179" y="3410183"/>
+                  </a:lnTo>
+                  <a:lnTo>
+                    <a:pt x="5586557" y="3404427"/>
+                  </a:lnTo>
+                  <a:lnTo>
+                    <a:pt x="5514934" y="3398220"/>
+                  </a:lnTo>
+                  <a:lnTo>
+                    <a:pt x="5443311" y="3391529"/>
+                  </a:lnTo>
+                  <a:lnTo>
+                    <a:pt x="5371689" y="3384313"/>
+                  </a:lnTo>
+                  <a:lnTo>
+                    <a:pt x="5300066" y="3376533"/>
+                  </a:lnTo>
+                  <a:lnTo>
+                    <a:pt x="5228444" y="3368144"/>
+                  </a:lnTo>
+                  <a:lnTo>
+                    <a:pt x="5156821" y="3359099"/>
+                  </a:lnTo>
+                  <a:lnTo>
+                    <a:pt x="5085199" y="3349346"/>
+                  </a:lnTo>
+                  <a:lnTo>
+                    <a:pt x="5013576" y="3338830"/>
+                  </a:lnTo>
+                  <a:lnTo>
+                    <a:pt x="4941954" y="3327491"/>
+                  </a:lnTo>
+                  <a:lnTo>
+                    <a:pt x="4870331" y="3315265"/>
+                  </a:lnTo>
+                  <a:lnTo>
+                    <a:pt x="4798709" y="3302082"/>
+                  </a:lnTo>
+                  <a:lnTo>
+                    <a:pt x="4727086" y="3287868"/>
+                  </a:lnTo>
+                  <a:lnTo>
+                    <a:pt x="4655464" y="3272542"/>
+                  </a:lnTo>
+                  <a:lnTo>
+                    <a:pt x="4583841" y="3256016"/>
+                  </a:lnTo>
+                  <a:lnTo>
+                    <a:pt x="4512219" y="3238198"/>
+                  </a:lnTo>
+                  <a:lnTo>
+                    <a:pt x="4440596" y="3218985"/>
+                  </a:lnTo>
+                  <a:lnTo>
+                    <a:pt x="4368974" y="3198269"/>
+                  </a:lnTo>
+                  <a:lnTo>
+                    <a:pt x="4297351" y="3175932"/>
+                  </a:lnTo>
+                  <a:lnTo>
+                    <a:pt x="4225729" y="3151847"/>
+                  </a:lnTo>
+                  <a:lnTo>
+                    <a:pt x="4154106" y="3125878"/>
+                  </a:lnTo>
+                  <a:lnTo>
+                    <a:pt x="4082483" y="3097877"/>
+                  </a:lnTo>
+                  <a:lnTo>
+                    <a:pt x="4010861" y="3067685"/>
+                  </a:lnTo>
+                  <a:lnTo>
+                    <a:pt x="3939238" y="3035131"/>
+                  </a:lnTo>
+                  <a:lnTo>
+                    <a:pt x="3867616" y="3000029"/>
+                  </a:lnTo>
+                  <a:lnTo>
+                    <a:pt x="3795993" y="2962181"/>
+                  </a:lnTo>
+                  <a:lnTo>
+                    <a:pt x="3724371" y="2921372"/>
+                  </a:lnTo>
+                  <a:lnTo>
+                    <a:pt x="3652748" y="2877369"/>
+                  </a:lnTo>
+                  <a:lnTo>
+                    <a:pt x="3581126" y="2829924"/>
+                  </a:lnTo>
+                  <a:lnTo>
+                    <a:pt x="3509503" y="2778766"/>
+                  </a:lnTo>
+                  <a:lnTo>
+                    <a:pt x="3437881" y="2723605"/>
+                  </a:lnTo>
+                  <a:lnTo>
+                    <a:pt x="3366258" y="2664128"/>
+                  </a:lnTo>
+                  <a:lnTo>
+                    <a:pt x="3294636" y="2661649"/>
+                  </a:lnTo>
+                  <a:lnTo>
+                    <a:pt x="3223013" y="2670318"/>
+                  </a:lnTo>
+                  <a:lnTo>
+                    <a:pt x="3151391" y="2678895"/>
+                  </a:lnTo>
+                  <a:lnTo>
+                    <a:pt x="3079768" y="2687382"/>
+                  </a:lnTo>
+                  <a:lnTo>
+                    <a:pt x="3008146" y="2695780"/>
+                  </a:lnTo>
+                  <a:lnTo>
+                    <a:pt x="2936523" y="2704089"/>
+                  </a:lnTo>
+                  <a:lnTo>
+                    <a:pt x="2864901" y="2712310"/>
+                  </a:lnTo>
+                  <a:lnTo>
+                    <a:pt x="2793278" y="2720445"/>
+                  </a:lnTo>
+                  <a:lnTo>
+                    <a:pt x="2721655" y="2728494"/>
+                  </a:lnTo>
+                  <a:lnTo>
+                    <a:pt x="2650033" y="2736458"/>
+                  </a:lnTo>
+                  <a:lnTo>
+                    <a:pt x="2578410" y="2744338"/>
+                  </a:lnTo>
+                  <a:lnTo>
+                    <a:pt x="2506788" y="2752135"/>
+                  </a:lnTo>
+                  <a:lnTo>
+                    <a:pt x="2435165" y="2759849"/>
+                  </a:lnTo>
+                  <a:lnTo>
+                    <a:pt x="2363543" y="2767483"/>
+                  </a:lnTo>
+                  <a:lnTo>
+                    <a:pt x="2291920" y="2775036"/>
+                  </a:lnTo>
+                  <a:lnTo>
+                    <a:pt x="2220298" y="2782509"/>
+                  </a:lnTo>
+                  <a:lnTo>
+                    <a:pt x="2148675" y="2789903"/>
+                  </a:lnTo>
+                  <a:lnTo>
+                    <a:pt x="2077053" y="2797220"/>
+                  </a:lnTo>
+                  <a:lnTo>
+                    <a:pt x="2005430" y="2804459"/>
+                  </a:lnTo>
+                  <a:lnTo>
+                    <a:pt x="1933808" y="2811622"/>
+                  </a:lnTo>
+                  <a:lnTo>
+                    <a:pt x="1862185" y="2818709"/>
+                  </a:lnTo>
+                  <a:lnTo>
+                    <a:pt x="1790563" y="2825722"/>
+                  </a:lnTo>
+                  <a:lnTo>
+                    <a:pt x="1718940" y="2832661"/>
+                  </a:lnTo>
+                  <a:lnTo>
+                    <a:pt x="1647318" y="2839526"/>
+                  </a:lnTo>
+                  <a:lnTo>
+                    <a:pt x="1575695" y="2846319"/>
+                  </a:lnTo>
+                  <a:lnTo>
+                    <a:pt x="1504073" y="2853041"/>
+                  </a:lnTo>
+                  <a:lnTo>
+                    <a:pt x="1432450" y="2859692"/>
+                  </a:lnTo>
+                  <a:lnTo>
+                    <a:pt x="1360827" y="2866272"/>
+                  </a:lnTo>
+                  <a:lnTo>
+                    <a:pt x="1289205" y="2872783"/>
+                  </a:lnTo>
+                  <a:lnTo>
+                    <a:pt x="1217582" y="2879226"/>
+                  </a:lnTo>
+                  <a:lnTo>
+                    <a:pt x="1145960" y="2885600"/>
+                  </a:lnTo>
+                  <a:lnTo>
+                    <a:pt x="1074337" y="2891908"/>
+                  </a:lnTo>
+                  <a:lnTo>
+                    <a:pt x="1002715" y="2898149"/>
+                  </a:lnTo>
+                  <a:lnTo>
+                    <a:pt x="931092" y="2904324"/>
+                  </a:lnTo>
+                  <a:lnTo>
+                    <a:pt x="859470" y="2910433"/>
+                  </a:lnTo>
+                  <a:lnTo>
+                    <a:pt x="787847" y="2916479"/>
+                  </a:lnTo>
+                  <a:lnTo>
+                    <a:pt x="716225" y="2922461"/>
+                  </a:lnTo>
+                  <a:lnTo>
+                    <a:pt x="644602" y="2928379"/>
+                  </a:lnTo>
+                  <a:lnTo>
+                    <a:pt x="572980" y="2934236"/>
+                  </a:lnTo>
+                  <a:lnTo>
+                    <a:pt x="501357" y="2940030"/>
+                  </a:lnTo>
+                  <a:lnTo>
+                    <a:pt x="429735" y="2945763"/>
+                  </a:lnTo>
+                  <a:lnTo>
+                    <a:pt x="358112" y="2951436"/>
+                  </a:lnTo>
+                  <a:lnTo>
+                    <a:pt x="286490" y="2957049"/>
+                  </a:lnTo>
+                  <a:lnTo>
+                    <a:pt x="214867" y="2962603"/>
+                  </a:lnTo>
+                  <a:lnTo>
+                    <a:pt x="143245" y="2968099"/>
+                  </a:lnTo>
+                  <a:lnTo>
+                    <a:pt x="71622" y="2973536"/>
+                  </a:lnTo>
+                  <a:lnTo>
+                    <a:pt x="0" y="2978916"/>
                   </a:lnTo>
                   <a:close/>
                 </a:path>
@@ -3540,237 +3503,562 @@
         </p:sp>
         <p:sp>
           <p:nvSpPr>
+            <p:cNvPr id="21" name="pl21"/>
+            <p:cNvSpPr/>
+            <p:nvPr/>
+          </p:nvSpPr>
+          <p:spPr>
+            <a:xfrm>
+              <a:off x="3163013" y="2073503"/>
+              <a:ext cx="5099665" cy="2652888"/>
+            </a:xfrm>
+            <a:custGeom>
+              <a:avLst/>
+              <a:pathLst>
+                <a:path w="5099665" h="2652888">
+                  <a:moveTo>
+                    <a:pt x="0" y="0"/>
+                  </a:moveTo>
+                  <a:lnTo>
+                    <a:pt x="14466" y="54199"/>
+                  </a:lnTo>
+                  <a:lnTo>
+                    <a:pt x="86088" y="303069"/>
+                  </a:lnTo>
+                  <a:lnTo>
+                    <a:pt x="157711" y="533879"/>
+                  </a:lnTo>
+                  <a:lnTo>
+                    <a:pt x="229333" y="747940"/>
+                  </a:lnTo>
+                  <a:lnTo>
+                    <a:pt x="300956" y="946467"/>
+                  </a:lnTo>
+                  <a:lnTo>
+                    <a:pt x="372578" y="1130588"/>
+                  </a:lnTo>
+                  <a:lnTo>
+                    <a:pt x="444201" y="1301348"/>
+                  </a:lnTo>
+                  <a:lnTo>
+                    <a:pt x="515824" y="1459717"/>
+                  </a:lnTo>
+                  <a:lnTo>
+                    <a:pt x="587446" y="1606593"/>
+                  </a:lnTo>
+                  <a:lnTo>
+                    <a:pt x="659069" y="1742811"/>
+                  </a:lnTo>
+                  <a:lnTo>
+                    <a:pt x="730691" y="1869144"/>
+                  </a:lnTo>
+                  <a:lnTo>
+                    <a:pt x="802314" y="1986310"/>
+                  </a:lnTo>
+                  <a:lnTo>
+                    <a:pt x="873936" y="2094973"/>
+                  </a:lnTo>
+                  <a:lnTo>
+                    <a:pt x="945559" y="2195751"/>
+                  </a:lnTo>
+                  <a:lnTo>
+                    <a:pt x="1017181" y="2289216"/>
+                  </a:lnTo>
+                  <a:lnTo>
+                    <a:pt x="1088804" y="2375899"/>
+                  </a:lnTo>
+                  <a:lnTo>
+                    <a:pt x="1160426" y="2456291"/>
+                  </a:lnTo>
+                  <a:lnTo>
+                    <a:pt x="1232049" y="2530850"/>
+                  </a:lnTo>
+                  <a:lnTo>
+                    <a:pt x="1303671" y="2599998"/>
+                  </a:lnTo>
+                  <a:lnTo>
+                    <a:pt x="1375294" y="2652888"/>
+                  </a:lnTo>
+                  <a:lnTo>
+                    <a:pt x="1446916" y="2644033"/>
+                  </a:lnTo>
+                  <a:lnTo>
+                    <a:pt x="1518539" y="2635084"/>
+                  </a:lnTo>
+                  <a:lnTo>
+                    <a:pt x="1590161" y="2626040"/>
+                  </a:lnTo>
+                  <a:lnTo>
+                    <a:pt x="1661784" y="2616899"/>
+                  </a:lnTo>
+                  <a:lnTo>
+                    <a:pt x="1733406" y="2607661"/>
+                  </a:lnTo>
+                  <a:lnTo>
+                    <a:pt x="1805029" y="2598325"/>
+                  </a:lnTo>
+                  <a:lnTo>
+                    <a:pt x="1876652" y="2588888"/>
+                  </a:lnTo>
+                  <a:lnTo>
+                    <a:pt x="1948274" y="2579352"/>
+                  </a:lnTo>
+                  <a:lnTo>
+                    <a:pt x="2019897" y="2569713"/>
+                  </a:lnTo>
+                  <a:lnTo>
+                    <a:pt x="2091519" y="2559972"/>
+                  </a:lnTo>
+                  <a:lnTo>
+                    <a:pt x="2163142" y="2550128"/>
+                  </a:lnTo>
+                  <a:lnTo>
+                    <a:pt x="2234764" y="2540178"/>
+                  </a:lnTo>
+                  <a:lnTo>
+                    <a:pt x="2306387" y="2530122"/>
+                  </a:lnTo>
+                  <a:lnTo>
+                    <a:pt x="2378009" y="2519959"/>
+                  </a:lnTo>
+                  <a:lnTo>
+                    <a:pt x="2449632" y="2509688"/>
+                  </a:lnTo>
+                  <a:lnTo>
+                    <a:pt x="2521254" y="2499307"/>
+                  </a:lnTo>
+                  <a:lnTo>
+                    <a:pt x="2592877" y="2488816"/>
+                  </a:lnTo>
+                  <a:lnTo>
+                    <a:pt x="2664499" y="2478213"/>
+                  </a:lnTo>
+                  <a:lnTo>
+                    <a:pt x="2736122" y="2467497"/>
+                  </a:lnTo>
+                  <a:lnTo>
+                    <a:pt x="2807744" y="2456666"/>
+                  </a:lnTo>
+                  <a:lnTo>
+                    <a:pt x="2879367" y="2445720"/>
+                  </a:lnTo>
+                  <a:lnTo>
+                    <a:pt x="2950989" y="2434658"/>
+                  </a:lnTo>
+                  <a:lnTo>
+                    <a:pt x="3022612" y="2423478"/>
+                  </a:lnTo>
+                  <a:lnTo>
+                    <a:pt x="3094234" y="2412178"/>
+                  </a:lnTo>
+                  <a:lnTo>
+                    <a:pt x="3165857" y="2400758"/>
+                  </a:lnTo>
+                  <a:lnTo>
+                    <a:pt x="3237480" y="2389217"/>
+                  </a:lnTo>
+                  <a:lnTo>
+                    <a:pt x="3309102" y="2377552"/>
+                  </a:lnTo>
+                  <a:lnTo>
+                    <a:pt x="3380725" y="2365763"/>
+                  </a:lnTo>
+                  <a:lnTo>
+                    <a:pt x="3452347" y="2353849"/>
+                  </a:lnTo>
+                  <a:lnTo>
+                    <a:pt x="3523970" y="2341807"/>
+                  </a:lnTo>
+                  <a:lnTo>
+                    <a:pt x="3595592" y="2329637"/>
+                  </a:lnTo>
+                  <a:lnTo>
+                    <a:pt x="3667215" y="2317338"/>
+                  </a:lnTo>
+                  <a:lnTo>
+                    <a:pt x="3738837" y="2304907"/>
+                  </a:lnTo>
+                  <a:lnTo>
+                    <a:pt x="3810460" y="2292344"/>
+                  </a:lnTo>
+                  <a:lnTo>
+                    <a:pt x="3882082" y="2279647"/>
+                  </a:lnTo>
+                  <a:lnTo>
+                    <a:pt x="3953705" y="2266815"/>
+                  </a:lnTo>
+                  <a:lnTo>
+                    <a:pt x="4025327" y="2253846"/>
+                  </a:lnTo>
+                  <a:lnTo>
+                    <a:pt x="4096950" y="2240738"/>
+                  </a:lnTo>
+                  <a:lnTo>
+                    <a:pt x="4168572" y="2227491"/>
+                  </a:lnTo>
+                  <a:lnTo>
+                    <a:pt x="4240195" y="2214103"/>
+                  </a:lnTo>
+                  <a:lnTo>
+                    <a:pt x="4311817" y="2200572"/>
+                  </a:lnTo>
+                  <a:lnTo>
+                    <a:pt x="4383440" y="2186897"/>
+                  </a:lnTo>
+                  <a:lnTo>
+                    <a:pt x="4455062" y="2173077"/>
+                  </a:lnTo>
+                  <a:lnTo>
+                    <a:pt x="4526685" y="2159109"/>
+                  </a:lnTo>
+                  <a:lnTo>
+                    <a:pt x="4598308" y="2144992"/>
+                  </a:lnTo>
+                  <a:lnTo>
+                    <a:pt x="4669930" y="2130724"/>
+                  </a:lnTo>
+                  <a:lnTo>
+                    <a:pt x="4741553" y="2116305"/>
+                  </a:lnTo>
+                  <a:lnTo>
+                    <a:pt x="4813175" y="2101732"/>
+                  </a:lnTo>
+                  <a:lnTo>
+                    <a:pt x="4884798" y="2087004"/>
+                  </a:lnTo>
+                  <a:lnTo>
+                    <a:pt x="4956420" y="2072118"/>
+                  </a:lnTo>
+                  <a:lnTo>
+                    <a:pt x="5028043" y="2057074"/>
+                  </a:lnTo>
+                  <a:lnTo>
+                    <a:pt x="5099665" y="2041870"/>
+                  </a:lnTo>
+                </a:path>
+              </a:pathLst>
+            </a:custGeom>
+          </p:spPr>
+          <p:txBody>
+            <a:bodyPr/>
+            <a:lstStyle/>
+            <a:p/>
+          </p:txBody>
+        </p:sp>
+        <p:sp>
+          <p:nvSpPr>
             <p:cNvPr id="22" name="pl22"/>
             <p:cNvSpPr/>
             <p:nvPr/>
           </p:nvSpPr>
           <p:spPr>
             <a:xfrm>
-              <a:off x="2764911" y="2073503"/>
-              <a:ext cx="5456389" cy="2652888"/>
+              <a:off x="1172049" y="4735152"/>
+              <a:ext cx="7090630" cy="805792"/>
             </a:xfrm>
             <a:custGeom>
               <a:avLst/>
               <a:pathLst>
-                <a:path w="5456389" h="2652888">
+                <a:path w="7090630" h="805792">
                   <a:moveTo>
-                    <a:pt x="0" y="0"/>
+                    <a:pt x="7090630" y="805792"/>
                   </a:moveTo>
                   <a:lnTo>
-                    <a:pt x="15478" y="54199"/>
-                  </a:lnTo>
-                  <a:lnTo>
-                    <a:pt x="92110" y="303069"/>
-                  </a:lnTo>
-                  <a:lnTo>
-                    <a:pt x="168743" y="533879"/>
-                  </a:lnTo>
-                  <a:lnTo>
-                    <a:pt x="245375" y="747940"/>
-                  </a:lnTo>
-                  <a:lnTo>
-                    <a:pt x="322008" y="946467"/>
-                  </a:lnTo>
-                  <a:lnTo>
-                    <a:pt x="398641" y="1130588"/>
-                  </a:lnTo>
-                  <a:lnTo>
-                    <a:pt x="475273" y="1301348"/>
-                  </a:lnTo>
-                  <a:lnTo>
-                    <a:pt x="551906" y="1459717"/>
-                  </a:lnTo>
-                  <a:lnTo>
-                    <a:pt x="628538" y="1606593"/>
-                  </a:lnTo>
-                  <a:lnTo>
-                    <a:pt x="705171" y="1742811"/>
-                  </a:lnTo>
-                  <a:lnTo>
-                    <a:pt x="781803" y="1869144"/>
-                  </a:lnTo>
-                  <a:lnTo>
-                    <a:pt x="858436" y="1986310"/>
-                  </a:lnTo>
-                  <a:lnTo>
-                    <a:pt x="935068" y="2094973"/>
-                  </a:lnTo>
-                  <a:lnTo>
-                    <a:pt x="1011701" y="2195751"/>
-                  </a:lnTo>
-                  <a:lnTo>
-                    <a:pt x="1088333" y="2289216"/>
-                  </a:lnTo>
-                  <a:lnTo>
-                    <a:pt x="1164966" y="2375899"/>
-                  </a:lnTo>
-                  <a:lnTo>
-                    <a:pt x="1241599" y="2456291"/>
-                  </a:lnTo>
-                  <a:lnTo>
-                    <a:pt x="1318231" y="2530850"/>
-                  </a:lnTo>
-                  <a:lnTo>
-                    <a:pt x="1394864" y="2599998"/>
-                  </a:lnTo>
-                  <a:lnTo>
-                    <a:pt x="1471496" y="2652888"/>
-                  </a:lnTo>
-                  <a:lnTo>
-                    <a:pt x="1548129" y="2644033"/>
-                  </a:lnTo>
-                  <a:lnTo>
-                    <a:pt x="1624761" y="2635084"/>
-                  </a:lnTo>
-                  <a:lnTo>
-                    <a:pt x="1701394" y="2626040"/>
-                  </a:lnTo>
-                  <a:lnTo>
-                    <a:pt x="1778026" y="2616899"/>
-                  </a:lnTo>
-                  <a:lnTo>
-                    <a:pt x="1854659" y="2607661"/>
-                  </a:lnTo>
-                  <a:lnTo>
-                    <a:pt x="1931291" y="2598325"/>
-                  </a:lnTo>
-                  <a:lnTo>
-                    <a:pt x="2007924" y="2588888"/>
-                  </a:lnTo>
-                  <a:lnTo>
-                    <a:pt x="2084557" y="2579352"/>
-                  </a:lnTo>
-                  <a:lnTo>
-                    <a:pt x="2161189" y="2569713"/>
-                  </a:lnTo>
-                  <a:lnTo>
-                    <a:pt x="2237822" y="2559972"/>
-                  </a:lnTo>
-                  <a:lnTo>
-                    <a:pt x="2314454" y="2550128"/>
-                  </a:lnTo>
-                  <a:lnTo>
-                    <a:pt x="2391087" y="2540178"/>
-                  </a:lnTo>
-                  <a:lnTo>
-                    <a:pt x="2467719" y="2530122"/>
-                  </a:lnTo>
-                  <a:lnTo>
-                    <a:pt x="2544352" y="2519959"/>
-                  </a:lnTo>
-                  <a:lnTo>
-                    <a:pt x="2620984" y="2509688"/>
-                  </a:lnTo>
-                  <a:lnTo>
-                    <a:pt x="2697617" y="2499307"/>
-                  </a:lnTo>
-                  <a:lnTo>
-                    <a:pt x="2774250" y="2488816"/>
-                  </a:lnTo>
-                  <a:lnTo>
-                    <a:pt x="2850882" y="2478213"/>
-                  </a:lnTo>
-                  <a:lnTo>
-                    <a:pt x="2927515" y="2467497"/>
-                  </a:lnTo>
-                  <a:lnTo>
-                    <a:pt x="3004147" y="2456666"/>
-                  </a:lnTo>
-                  <a:lnTo>
-                    <a:pt x="3080780" y="2445720"/>
-                  </a:lnTo>
-                  <a:lnTo>
-                    <a:pt x="3157412" y="2434658"/>
-                  </a:lnTo>
-                  <a:lnTo>
-                    <a:pt x="3234045" y="2423478"/>
-                  </a:lnTo>
-                  <a:lnTo>
-                    <a:pt x="3310677" y="2412178"/>
-                  </a:lnTo>
-                  <a:lnTo>
-                    <a:pt x="3387310" y="2400758"/>
-                  </a:lnTo>
-                  <a:lnTo>
-                    <a:pt x="3463942" y="2389217"/>
-                  </a:lnTo>
-                  <a:lnTo>
-                    <a:pt x="3540575" y="2377552"/>
-                  </a:lnTo>
-                  <a:lnTo>
-                    <a:pt x="3617208" y="2365763"/>
-                  </a:lnTo>
-                  <a:lnTo>
-                    <a:pt x="3693840" y="2353849"/>
-                  </a:lnTo>
-                  <a:lnTo>
-                    <a:pt x="3770473" y="2341807"/>
-                  </a:lnTo>
-                  <a:lnTo>
-                    <a:pt x="3847105" y="2329637"/>
-                  </a:lnTo>
-                  <a:lnTo>
-                    <a:pt x="3923738" y="2317338"/>
-                  </a:lnTo>
-                  <a:lnTo>
-                    <a:pt x="4000370" y="2304907"/>
-                  </a:lnTo>
-                  <a:lnTo>
-                    <a:pt x="4077003" y="2292344"/>
-                  </a:lnTo>
-                  <a:lnTo>
-                    <a:pt x="4153635" y="2279647"/>
-                  </a:lnTo>
-                  <a:lnTo>
-                    <a:pt x="4230268" y="2266815"/>
-                  </a:lnTo>
-                  <a:lnTo>
-                    <a:pt x="4306901" y="2253846"/>
-                  </a:lnTo>
-                  <a:lnTo>
-                    <a:pt x="4383533" y="2240738"/>
-                  </a:lnTo>
-                  <a:lnTo>
-                    <a:pt x="4460166" y="2227491"/>
-                  </a:lnTo>
-                  <a:lnTo>
-                    <a:pt x="4536798" y="2214103"/>
-                  </a:lnTo>
-                  <a:lnTo>
-                    <a:pt x="4613431" y="2200572"/>
-                  </a:lnTo>
-                  <a:lnTo>
-                    <a:pt x="4690063" y="2186897"/>
-                  </a:lnTo>
-                  <a:lnTo>
-                    <a:pt x="4766696" y="2173077"/>
-                  </a:lnTo>
-                  <a:lnTo>
-                    <a:pt x="4843328" y="2159109"/>
-                  </a:lnTo>
-                  <a:lnTo>
-                    <a:pt x="4919961" y="2144992"/>
-                  </a:lnTo>
-                  <a:lnTo>
-                    <a:pt x="4996593" y="2130724"/>
-                  </a:lnTo>
-                  <a:lnTo>
-                    <a:pt x="5073226" y="2116305"/>
-                  </a:lnTo>
-                  <a:lnTo>
-                    <a:pt x="5149859" y="2101732"/>
-                  </a:lnTo>
-                  <a:lnTo>
-                    <a:pt x="5226491" y="2087004"/>
-                  </a:lnTo>
-                  <a:lnTo>
-                    <a:pt x="5303124" y="2072118"/>
-                  </a:lnTo>
-                  <a:lnTo>
-                    <a:pt x="5379756" y="2057074"/>
-                  </a:lnTo>
-                  <a:lnTo>
-                    <a:pt x="5456389" y="2041870"/>
+                    <a:pt x="7019007" y="804516"/>
+                  </a:lnTo>
+                  <a:lnTo>
+                    <a:pt x="6947385" y="803140"/>
+                  </a:lnTo>
+                  <a:lnTo>
+                    <a:pt x="6875762" y="801657"/>
+                  </a:lnTo>
+                  <a:lnTo>
+                    <a:pt x="6804139" y="800058"/>
+                  </a:lnTo>
+                  <a:lnTo>
+                    <a:pt x="6732517" y="798333"/>
+                  </a:lnTo>
+                  <a:lnTo>
+                    <a:pt x="6660894" y="796474"/>
+                  </a:lnTo>
+                  <a:lnTo>
+                    <a:pt x="6589272" y="794469"/>
+                  </a:lnTo>
+                  <a:lnTo>
+                    <a:pt x="6517649" y="792308"/>
+                  </a:lnTo>
+                  <a:lnTo>
+                    <a:pt x="6446027" y="789977"/>
+                  </a:lnTo>
+                  <a:lnTo>
+                    <a:pt x="6374404" y="787464"/>
+                  </a:lnTo>
+                  <a:lnTo>
+                    <a:pt x="6302782" y="784754"/>
+                  </a:lnTo>
+                  <a:lnTo>
+                    <a:pt x="6231159" y="781832"/>
+                  </a:lnTo>
+                  <a:lnTo>
+                    <a:pt x="6159537" y="778681"/>
+                  </a:lnTo>
+                  <a:lnTo>
+                    <a:pt x="6087914" y="775284"/>
+                  </a:lnTo>
+                  <a:lnTo>
+                    <a:pt x="6016292" y="771622"/>
+                  </a:lnTo>
+                  <a:lnTo>
+                    <a:pt x="5944669" y="767672"/>
+                  </a:lnTo>
+                  <a:lnTo>
+                    <a:pt x="5873047" y="763414"/>
+                  </a:lnTo>
+                  <a:lnTo>
+                    <a:pt x="5801424" y="758822"/>
+                  </a:lnTo>
+                  <a:lnTo>
+                    <a:pt x="5729802" y="753871"/>
+                  </a:lnTo>
+                  <a:lnTo>
+                    <a:pt x="5658179" y="748533"/>
+                  </a:lnTo>
+                  <a:lnTo>
+                    <a:pt x="5586557" y="742777"/>
+                  </a:lnTo>
+                  <a:lnTo>
+                    <a:pt x="5514934" y="736571"/>
+                  </a:lnTo>
+                  <a:lnTo>
+                    <a:pt x="5443311" y="729879"/>
+                  </a:lnTo>
+                  <a:lnTo>
+                    <a:pt x="5371689" y="722663"/>
+                  </a:lnTo>
+                  <a:lnTo>
+                    <a:pt x="5300066" y="714883"/>
+                  </a:lnTo>
+                  <a:lnTo>
+                    <a:pt x="5228444" y="706494"/>
+                  </a:lnTo>
+                  <a:lnTo>
+                    <a:pt x="5156821" y="697449"/>
+                  </a:lnTo>
+                  <a:lnTo>
+                    <a:pt x="5085199" y="687696"/>
+                  </a:lnTo>
+                  <a:lnTo>
+                    <a:pt x="5013576" y="677180"/>
+                  </a:lnTo>
+                  <a:lnTo>
+                    <a:pt x="4941954" y="665841"/>
+                  </a:lnTo>
+                  <a:lnTo>
+                    <a:pt x="4870331" y="653615"/>
+                  </a:lnTo>
+                  <a:lnTo>
+                    <a:pt x="4798709" y="640433"/>
+                  </a:lnTo>
+                  <a:lnTo>
+                    <a:pt x="4727086" y="626219"/>
+                  </a:lnTo>
+                  <a:lnTo>
+                    <a:pt x="4655464" y="610892"/>
+                  </a:lnTo>
+                  <a:lnTo>
+                    <a:pt x="4583841" y="594367"/>
+                  </a:lnTo>
+                  <a:lnTo>
+                    <a:pt x="4512219" y="576548"/>
+                  </a:lnTo>
+                  <a:lnTo>
+                    <a:pt x="4440596" y="557335"/>
+                  </a:lnTo>
+                  <a:lnTo>
+                    <a:pt x="4368974" y="536619"/>
+                  </a:lnTo>
+                  <a:lnTo>
+                    <a:pt x="4297351" y="514282"/>
+                  </a:lnTo>
+                  <a:lnTo>
+                    <a:pt x="4225729" y="490198"/>
+                  </a:lnTo>
+                  <a:lnTo>
+                    <a:pt x="4154106" y="464229"/>
+                  </a:lnTo>
+                  <a:lnTo>
+                    <a:pt x="4082483" y="436227"/>
+                  </a:lnTo>
+                  <a:lnTo>
+                    <a:pt x="4010861" y="406035"/>
+                  </a:lnTo>
+                  <a:lnTo>
+                    <a:pt x="3939238" y="373481"/>
+                  </a:lnTo>
+                  <a:lnTo>
+                    <a:pt x="3867616" y="338379"/>
+                  </a:lnTo>
+                  <a:lnTo>
+                    <a:pt x="3795993" y="300531"/>
+                  </a:lnTo>
+                  <a:lnTo>
+                    <a:pt x="3724371" y="259722"/>
+                  </a:lnTo>
+                  <a:lnTo>
+                    <a:pt x="3652748" y="215719"/>
+                  </a:lnTo>
+                  <a:lnTo>
+                    <a:pt x="3581126" y="168274"/>
+                  </a:lnTo>
+                  <a:lnTo>
+                    <a:pt x="3509503" y="117116"/>
+                  </a:lnTo>
+                  <a:lnTo>
+                    <a:pt x="3437881" y="61955"/>
+                  </a:lnTo>
+                  <a:lnTo>
+                    <a:pt x="3366258" y="2479"/>
+                  </a:lnTo>
+                  <a:lnTo>
+                    <a:pt x="3294636" y="0"/>
+                  </a:lnTo>
+                  <a:lnTo>
+                    <a:pt x="3223013" y="8668"/>
+                  </a:lnTo>
+                  <a:lnTo>
+                    <a:pt x="3151391" y="17246"/>
+                  </a:lnTo>
+                  <a:lnTo>
+                    <a:pt x="3079768" y="25733"/>
+                  </a:lnTo>
+                  <a:lnTo>
+                    <a:pt x="3008146" y="34130"/>
+                  </a:lnTo>
+                  <a:lnTo>
+                    <a:pt x="2936523" y="42439"/>
+                  </a:lnTo>
+                  <a:lnTo>
+                    <a:pt x="2864901" y="50661"/>
+                  </a:lnTo>
+                  <a:lnTo>
+                    <a:pt x="2793278" y="58795"/>
+                  </a:lnTo>
+                  <a:lnTo>
+                    <a:pt x="2721655" y="66844"/>
+                  </a:lnTo>
+                  <a:lnTo>
+                    <a:pt x="2650033" y="74808"/>
+                  </a:lnTo>
+                  <a:lnTo>
+                    <a:pt x="2578410" y="82688"/>
+                  </a:lnTo>
+                  <a:lnTo>
+                    <a:pt x="2506788" y="90485"/>
+                  </a:lnTo>
+                  <a:lnTo>
+                    <a:pt x="2435165" y="98200"/>
+                  </a:lnTo>
+                  <a:lnTo>
+                    <a:pt x="2363543" y="105833"/>
+                  </a:lnTo>
+                  <a:lnTo>
+                    <a:pt x="2291920" y="113386"/>
+                  </a:lnTo>
+                  <a:lnTo>
+                    <a:pt x="2220298" y="120859"/>
+                  </a:lnTo>
+                  <a:lnTo>
+                    <a:pt x="2148675" y="128254"/>
+                  </a:lnTo>
+                  <a:lnTo>
+                    <a:pt x="2077053" y="135570"/>
+                  </a:lnTo>
+                  <a:lnTo>
+                    <a:pt x="2005430" y="142809"/>
+                  </a:lnTo>
+                  <a:lnTo>
+                    <a:pt x="1933808" y="149972"/>
+                  </a:lnTo>
+                  <a:lnTo>
+                    <a:pt x="1862185" y="157060"/>
+                  </a:lnTo>
+                  <a:lnTo>
+                    <a:pt x="1790563" y="164072"/>
+                  </a:lnTo>
+                  <a:lnTo>
+                    <a:pt x="1718940" y="171011"/>
+                  </a:lnTo>
+                  <a:lnTo>
+                    <a:pt x="1647318" y="177877"/>
+                  </a:lnTo>
+                  <a:lnTo>
+                    <a:pt x="1575695" y="184670"/>
+                  </a:lnTo>
+                  <a:lnTo>
+                    <a:pt x="1504073" y="191391"/>
+                  </a:lnTo>
+                  <a:lnTo>
+                    <a:pt x="1432450" y="198042"/>
+                  </a:lnTo>
+                  <a:lnTo>
+                    <a:pt x="1360827" y="204623"/>
+                  </a:lnTo>
+                  <a:lnTo>
+                    <a:pt x="1289205" y="211134"/>
+                  </a:lnTo>
+                  <a:lnTo>
+                    <a:pt x="1217582" y="217576"/>
+                  </a:lnTo>
+                  <a:lnTo>
+                    <a:pt x="1145960" y="223951"/>
+                  </a:lnTo>
+                  <a:lnTo>
+                    <a:pt x="1074337" y="230258"/>
+                  </a:lnTo>
+                  <a:lnTo>
+                    <a:pt x="1002715" y="236499"/>
+                  </a:lnTo>
+                  <a:lnTo>
+                    <a:pt x="931092" y="242674"/>
+                  </a:lnTo>
+                  <a:lnTo>
+                    <a:pt x="859470" y="248784"/>
+                  </a:lnTo>
+                  <a:lnTo>
+                    <a:pt x="787847" y="254829"/>
+                  </a:lnTo>
+                  <a:lnTo>
+                    <a:pt x="716225" y="260811"/>
+                  </a:lnTo>
+                  <a:lnTo>
+                    <a:pt x="644602" y="266730"/>
+                  </a:lnTo>
+                  <a:lnTo>
+                    <a:pt x="572980" y="272586"/>
+                  </a:lnTo>
+                  <a:lnTo>
+                    <a:pt x="501357" y="278380"/>
+                  </a:lnTo>
+                  <a:lnTo>
+                    <a:pt x="429735" y="284114"/>
+                  </a:lnTo>
+                  <a:lnTo>
+                    <a:pt x="358112" y="289787"/>
+                  </a:lnTo>
+                  <a:lnTo>
+                    <a:pt x="286490" y="295400"/>
+                  </a:lnTo>
+                  <a:lnTo>
+                    <a:pt x="214867" y="300954"/>
+                  </a:lnTo>
+                  <a:lnTo>
+                    <a:pt x="143245" y="306449"/>
+                  </a:lnTo>
+                  <a:lnTo>
+                    <a:pt x="71622" y="311886"/>
+                  </a:lnTo>
+                  <a:lnTo>
+                    <a:pt x="0" y="317266"/>
                   </a:lnTo>
                 </a:path>
               </a:pathLst>
@@ -3790,625 +4078,306 @@
           </p:nvSpPr>
           <p:spPr>
             <a:xfrm>
-              <a:off x="817517" y="4735152"/>
-              <a:ext cx="7403783" cy="805792"/>
+              <a:off x="1351612" y="2073503"/>
+              <a:ext cx="6911066" cy="3330417"/>
             </a:xfrm>
             <a:custGeom>
               <a:avLst/>
               <a:pathLst>
-                <a:path w="7403783" h="805792">
-                  <a:moveTo>
-                    <a:pt x="7403783" y="805792"/>
-                  </a:moveTo>
-                  <a:lnTo>
-                    <a:pt x="7327150" y="804516"/>
-                  </a:lnTo>
-                  <a:lnTo>
-                    <a:pt x="7250518" y="803140"/>
-                  </a:lnTo>
-                  <a:lnTo>
-                    <a:pt x="7173885" y="801657"/>
-                  </a:lnTo>
-                  <a:lnTo>
-                    <a:pt x="7097253" y="800058"/>
-                  </a:lnTo>
-                  <a:lnTo>
-                    <a:pt x="7020620" y="798333"/>
-                  </a:lnTo>
-                  <a:lnTo>
-                    <a:pt x="6943987" y="796474"/>
-                  </a:lnTo>
-                  <a:lnTo>
-                    <a:pt x="6867355" y="794469"/>
-                  </a:lnTo>
-                  <a:lnTo>
-                    <a:pt x="6790722" y="792308"/>
-                  </a:lnTo>
-                  <a:lnTo>
-                    <a:pt x="6714090" y="789977"/>
-                  </a:lnTo>
-                  <a:lnTo>
-                    <a:pt x="6637457" y="787464"/>
-                  </a:lnTo>
-                  <a:lnTo>
-                    <a:pt x="6560825" y="784754"/>
-                  </a:lnTo>
-                  <a:lnTo>
-                    <a:pt x="6484192" y="781832"/>
-                  </a:lnTo>
-                  <a:lnTo>
-                    <a:pt x="6407560" y="778681"/>
-                  </a:lnTo>
-                  <a:lnTo>
-                    <a:pt x="6330927" y="775284"/>
-                  </a:lnTo>
-                  <a:lnTo>
-                    <a:pt x="6254294" y="771622"/>
-                  </a:lnTo>
-                  <a:lnTo>
-                    <a:pt x="6177662" y="767672"/>
-                  </a:lnTo>
-                  <a:lnTo>
-                    <a:pt x="6101029" y="763414"/>
-                  </a:lnTo>
-                  <a:lnTo>
-                    <a:pt x="6024397" y="758822"/>
-                  </a:lnTo>
-                  <a:lnTo>
-                    <a:pt x="5947764" y="753871"/>
-                  </a:lnTo>
-                  <a:lnTo>
-                    <a:pt x="5871132" y="748533"/>
-                  </a:lnTo>
-                  <a:lnTo>
-                    <a:pt x="5794499" y="742777"/>
-                  </a:lnTo>
-                  <a:lnTo>
-                    <a:pt x="5717867" y="736571"/>
-                  </a:lnTo>
-                  <a:lnTo>
-                    <a:pt x="5641234" y="729879"/>
-                  </a:lnTo>
-                  <a:lnTo>
-                    <a:pt x="5564602" y="722663"/>
-                  </a:lnTo>
-                  <a:lnTo>
-                    <a:pt x="5487969" y="714883"/>
-                  </a:lnTo>
-                  <a:lnTo>
-                    <a:pt x="5411336" y="706494"/>
-                  </a:lnTo>
-                  <a:lnTo>
-                    <a:pt x="5334704" y="697449"/>
-                  </a:lnTo>
-                  <a:lnTo>
-                    <a:pt x="5258071" y="687696"/>
-                  </a:lnTo>
-                  <a:lnTo>
-                    <a:pt x="5181439" y="677180"/>
-                  </a:lnTo>
-                  <a:lnTo>
-                    <a:pt x="5104806" y="665841"/>
-                  </a:lnTo>
-                  <a:lnTo>
-                    <a:pt x="5028174" y="653615"/>
-                  </a:lnTo>
-                  <a:lnTo>
-                    <a:pt x="4951541" y="640433"/>
-                  </a:lnTo>
-                  <a:lnTo>
-                    <a:pt x="4874909" y="626219"/>
-                  </a:lnTo>
-                  <a:lnTo>
-                    <a:pt x="4798276" y="610892"/>
-                  </a:lnTo>
-                  <a:lnTo>
-                    <a:pt x="4721644" y="594367"/>
-                  </a:lnTo>
-                  <a:lnTo>
-                    <a:pt x="4645011" y="576548"/>
-                  </a:lnTo>
-                  <a:lnTo>
-                    <a:pt x="4568378" y="557335"/>
-                  </a:lnTo>
-                  <a:lnTo>
-                    <a:pt x="4491746" y="536619"/>
-                  </a:lnTo>
-                  <a:lnTo>
-                    <a:pt x="4415113" y="514282"/>
-                  </a:lnTo>
-                  <a:lnTo>
-                    <a:pt x="4338481" y="490198"/>
-                  </a:lnTo>
-                  <a:lnTo>
-                    <a:pt x="4261848" y="464229"/>
-                  </a:lnTo>
-                  <a:lnTo>
-                    <a:pt x="4185216" y="436227"/>
-                  </a:lnTo>
-                  <a:lnTo>
-                    <a:pt x="4108583" y="406035"/>
-                  </a:lnTo>
-                  <a:lnTo>
-                    <a:pt x="4031951" y="373481"/>
-                  </a:lnTo>
-                  <a:lnTo>
-                    <a:pt x="3955318" y="338379"/>
-                  </a:lnTo>
-                  <a:lnTo>
-                    <a:pt x="3878685" y="300531"/>
-                  </a:lnTo>
-                  <a:lnTo>
-                    <a:pt x="3802053" y="259722"/>
-                  </a:lnTo>
-                  <a:lnTo>
-                    <a:pt x="3725420" y="215719"/>
-                  </a:lnTo>
-                  <a:lnTo>
-                    <a:pt x="3648788" y="168274"/>
-                  </a:lnTo>
-                  <a:lnTo>
-                    <a:pt x="3572155" y="117116"/>
-                  </a:lnTo>
-                  <a:lnTo>
-                    <a:pt x="3495523" y="61955"/>
-                  </a:lnTo>
-                  <a:lnTo>
-                    <a:pt x="3418890" y="2479"/>
-                  </a:lnTo>
-                  <a:lnTo>
-                    <a:pt x="3342258" y="0"/>
-                  </a:lnTo>
-                  <a:lnTo>
-                    <a:pt x="3265625" y="8668"/>
-                  </a:lnTo>
-                  <a:lnTo>
-                    <a:pt x="3188993" y="17246"/>
-                  </a:lnTo>
-                  <a:lnTo>
-                    <a:pt x="3112360" y="25733"/>
-                  </a:lnTo>
-                  <a:lnTo>
-                    <a:pt x="3035727" y="34130"/>
-                  </a:lnTo>
-                  <a:lnTo>
-                    <a:pt x="2959095" y="42439"/>
-                  </a:lnTo>
-                  <a:lnTo>
-                    <a:pt x="2882462" y="50661"/>
-                  </a:lnTo>
-                  <a:lnTo>
-                    <a:pt x="2805830" y="58795"/>
-                  </a:lnTo>
-                  <a:lnTo>
-                    <a:pt x="2729197" y="66844"/>
-                  </a:lnTo>
-                  <a:lnTo>
-                    <a:pt x="2652565" y="74808"/>
-                  </a:lnTo>
-                  <a:lnTo>
-                    <a:pt x="2575932" y="82688"/>
-                  </a:lnTo>
-                  <a:lnTo>
-                    <a:pt x="2499300" y="90485"/>
-                  </a:lnTo>
-                  <a:lnTo>
-                    <a:pt x="2422667" y="98200"/>
-                  </a:lnTo>
-                  <a:lnTo>
-                    <a:pt x="2346034" y="105833"/>
-                  </a:lnTo>
-                  <a:lnTo>
-                    <a:pt x="2269402" y="113386"/>
-                  </a:lnTo>
-                  <a:lnTo>
-                    <a:pt x="2192769" y="120859"/>
-                  </a:lnTo>
-                  <a:lnTo>
-                    <a:pt x="2116137" y="128254"/>
-                  </a:lnTo>
-                  <a:lnTo>
-                    <a:pt x="2039504" y="135570"/>
-                  </a:lnTo>
-                  <a:lnTo>
-                    <a:pt x="1962872" y="142809"/>
-                  </a:lnTo>
-                  <a:lnTo>
-                    <a:pt x="1886239" y="149972"/>
-                  </a:lnTo>
-                  <a:lnTo>
-                    <a:pt x="1809607" y="157060"/>
-                  </a:lnTo>
-                  <a:lnTo>
-                    <a:pt x="1732974" y="164072"/>
-                  </a:lnTo>
-                  <a:lnTo>
-                    <a:pt x="1656342" y="171011"/>
-                  </a:lnTo>
-                  <a:lnTo>
-                    <a:pt x="1579709" y="177877"/>
-                  </a:lnTo>
-                  <a:lnTo>
-                    <a:pt x="1503076" y="184670"/>
-                  </a:lnTo>
-                  <a:lnTo>
-                    <a:pt x="1426444" y="191391"/>
-                  </a:lnTo>
-                  <a:lnTo>
-                    <a:pt x="1349811" y="198042"/>
-                  </a:lnTo>
-                  <a:lnTo>
-                    <a:pt x="1273179" y="204623"/>
-                  </a:lnTo>
-                  <a:lnTo>
-                    <a:pt x="1196546" y="211134"/>
-                  </a:lnTo>
-                  <a:lnTo>
-                    <a:pt x="1119914" y="217576"/>
-                  </a:lnTo>
-                  <a:lnTo>
-                    <a:pt x="1043281" y="223951"/>
-                  </a:lnTo>
-                  <a:lnTo>
-                    <a:pt x="966649" y="230258"/>
-                  </a:lnTo>
-                  <a:lnTo>
-                    <a:pt x="890016" y="236499"/>
-                  </a:lnTo>
-                  <a:lnTo>
-                    <a:pt x="813384" y="242674"/>
-                  </a:lnTo>
-                  <a:lnTo>
-                    <a:pt x="736751" y="248784"/>
-                  </a:lnTo>
-                  <a:lnTo>
-                    <a:pt x="660118" y="254829"/>
-                  </a:lnTo>
-                  <a:lnTo>
-                    <a:pt x="583486" y="260811"/>
-                  </a:lnTo>
-                  <a:lnTo>
-                    <a:pt x="506853" y="266730"/>
-                  </a:lnTo>
-                  <a:lnTo>
-                    <a:pt x="430221" y="272586"/>
-                  </a:lnTo>
-                  <a:lnTo>
-                    <a:pt x="353588" y="278380"/>
-                  </a:lnTo>
-                  <a:lnTo>
-                    <a:pt x="276956" y="284114"/>
-                  </a:lnTo>
-                  <a:lnTo>
-                    <a:pt x="200323" y="289787"/>
-                  </a:lnTo>
-                  <a:lnTo>
-                    <a:pt x="123691" y="295400"/>
-                  </a:lnTo>
-                  <a:lnTo>
-                    <a:pt x="47058" y="300954"/>
-                  </a:lnTo>
-                  <a:lnTo>
-                    <a:pt x="0" y="304328"/>
-                  </a:lnTo>
-                </a:path>
-              </a:pathLst>
-            </a:custGeom>
-          </p:spPr>
-          <p:txBody>
-            <a:bodyPr/>
-            <a:lstStyle/>
-            <a:p/>
-          </p:txBody>
-        </p:sp>
-        <p:sp>
-          <p:nvSpPr>
-            <p:cNvPr id="24" name="pl24"/>
-            <p:cNvSpPr/>
-            <p:nvPr/>
-          </p:nvSpPr>
-          <p:spPr>
-            <a:xfrm>
-              <a:off x="826802" y="2073503"/>
-              <a:ext cx="7394498" cy="3330417"/>
-            </a:xfrm>
-            <a:custGeom>
-              <a:avLst/>
-              <a:pathLst>
-                <a:path w="7394498" h="3330417">
+                <a:path w="6911066" h="3330417">
                   <a:moveTo>
                     <a:pt x="0" y="0"/>
                   </a:moveTo>
                   <a:lnTo>
-                    <a:pt x="37773" y="55588"/>
-                  </a:lnTo>
-                  <a:lnTo>
-                    <a:pt x="114406" y="164769"/>
-                  </a:lnTo>
-                  <a:lnTo>
-                    <a:pt x="191039" y="270473"/>
-                  </a:lnTo>
-                  <a:lnTo>
-                    <a:pt x="267671" y="372811"/>
-                  </a:lnTo>
-                  <a:lnTo>
-                    <a:pt x="344304" y="471889"/>
-                  </a:lnTo>
-                  <a:lnTo>
-                    <a:pt x="420936" y="567812"/>
-                  </a:lnTo>
-                  <a:lnTo>
-                    <a:pt x="497569" y="660680"/>
-                  </a:lnTo>
-                  <a:lnTo>
-                    <a:pt x="574201" y="750590"/>
-                  </a:lnTo>
-                  <a:lnTo>
-                    <a:pt x="650834" y="837637"/>
-                  </a:lnTo>
-                  <a:lnTo>
-                    <a:pt x="727466" y="921911"/>
-                  </a:lnTo>
-                  <a:lnTo>
-                    <a:pt x="804099" y="1003501"/>
-                  </a:lnTo>
-                  <a:lnTo>
-                    <a:pt x="880732" y="1082493"/>
-                  </a:lnTo>
-                  <a:lnTo>
-                    <a:pt x="957364" y="1158969"/>
-                  </a:lnTo>
-                  <a:lnTo>
-                    <a:pt x="1033997" y="1233010"/>
-                  </a:lnTo>
-                  <a:lnTo>
-                    <a:pt x="1110629" y="1304692"/>
-                  </a:lnTo>
-                  <a:lnTo>
-                    <a:pt x="1187262" y="1374091"/>
-                  </a:lnTo>
-                  <a:lnTo>
-                    <a:pt x="1263894" y="1441280"/>
-                  </a:lnTo>
-                  <a:lnTo>
-                    <a:pt x="1340527" y="1506330"/>
-                  </a:lnTo>
-                  <a:lnTo>
-                    <a:pt x="1417159" y="1569307"/>
-                  </a:lnTo>
-                  <a:lnTo>
-                    <a:pt x="1493792" y="1630279"/>
-                  </a:lnTo>
-                  <a:lnTo>
-                    <a:pt x="1570424" y="1689309"/>
-                  </a:lnTo>
-                  <a:lnTo>
-                    <a:pt x="1647057" y="1746459"/>
-                  </a:lnTo>
-                  <a:lnTo>
-                    <a:pt x="1723690" y="1801789"/>
-                  </a:lnTo>
-                  <a:lnTo>
-                    <a:pt x="1800322" y="1855356"/>
-                  </a:lnTo>
-                  <a:lnTo>
-                    <a:pt x="1876955" y="1907218"/>
-                  </a:lnTo>
-                  <a:lnTo>
-                    <a:pt x="1953587" y="1957428"/>
-                  </a:lnTo>
-                  <a:lnTo>
-                    <a:pt x="2030220" y="2006039"/>
-                  </a:lnTo>
-                  <a:lnTo>
-                    <a:pt x="2106852" y="2053101"/>
-                  </a:lnTo>
-                  <a:lnTo>
-                    <a:pt x="2183485" y="2098665"/>
-                  </a:lnTo>
-                  <a:lnTo>
-                    <a:pt x="2260117" y="2142778"/>
-                  </a:lnTo>
-                  <a:lnTo>
-                    <a:pt x="2336750" y="2185485"/>
-                  </a:lnTo>
-                  <a:lnTo>
-                    <a:pt x="2413382" y="2226833"/>
-                  </a:lnTo>
-                  <a:lnTo>
-                    <a:pt x="2490015" y="2266864"/>
-                  </a:lnTo>
-                  <a:lnTo>
-                    <a:pt x="2566648" y="2305619"/>
-                  </a:lnTo>
-                  <a:lnTo>
-                    <a:pt x="2643280" y="2343141"/>
-                  </a:lnTo>
-                  <a:lnTo>
-                    <a:pt x="2719913" y="2379467"/>
-                  </a:lnTo>
-                  <a:lnTo>
-                    <a:pt x="2796545" y="2414637"/>
-                  </a:lnTo>
-                  <a:lnTo>
-                    <a:pt x="2873178" y="2448686"/>
-                  </a:lnTo>
-                  <a:lnTo>
-                    <a:pt x="2949810" y="2481651"/>
-                  </a:lnTo>
-                  <a:lnTo>
-                    <a:pt x="3026443" y="2513566"/>
-                  </a:lnTo>
-                  <a:lnTo>
-                    <a:pt x="3103075" y="2544465"/>
-                  </a:lnTo>
-                  <a:lnTo>
-                    <a:pt x="3179708" y="2574380"/>
-                  </a:lnTo>
-                  <a:lnTo>
-                    <a:pt x="3256341" y="2603341"/>
-                  </a:lnTo>
-                  <a:lnTo>
-                    <a:pt x="3332973" y="2631381"/>
-                  </a:lnTo>
-                  <a:lnTo>
-                    <a:pt x="3409606" y="2658527"/>
-                  </a:lnTo>
-                  <a:lnTo>
-                    <a:pt x="3486238" y="2684809"/>
-                  </a:lnTo>
-                  <a:lnTo>
-                    <a:pt x="3562871" y="2710254"/>
-                  </a:lnTo>
-                  <a:lnTo>
-                    <a:pt x="3639503" y="2734889"/>
-                  </a:lnTo>
-                  <a:lnTo>
-                    <a:pt x="3716136" y="2758739"/>
-                  </a:lnTo>
-                  <a:lnTo>
-                    <a:pt x="3792768" y="2781829"/>
-                  </a:lnTo>
-                  <a:lnTo>
-                    <a:pt x="3869401" y="2804184"/>
-                  </a:lnTo>
-                  <a:lnTo>
-                    <a:pt x="3946033" y="2825827"/>
-                  </a:lnTo>
-                  <a:lnTo>
-                    <a:pt x="4022666" y="2846780"/>
-                  </a:lnTo>
-                  <a:lnTo>
-                    <a:pt x="4099299" y="2867067"/>
-                  </a:lnTo>
-                  <a:lnTo>
-                    <a:pt x="4175931" y="2886707"/>
-                  </a:lnTo>
-                  <a:lnTo>
-                    <a:pt x="4252564" y="2905722"/>
-                  </a:lnTo>
-                  <a:lnTo>
-                    <a:pt x="4329196" y="2924131"/>
-                  </a:lnTo>
-                  <a:lnTo>
-                    <a:pt x="4405829" y="2941954"/>
-                  </a:lnTo>
-                  <a:lnTo>
-                    <a:pt x="4482461" y="2959209"/>
-                  </a:lnTo>
-                  <a:lnTo>
-                    <a:pt x="4559094" y="2975915"/>
-                  </a:lnTo>
-                  <a:lnTo>
-                    <a:pt x="4635726" y="2992088"/>
-                  </a:lnTo>
-                  <a:lnTo>
-                    <a:pt x="4712359" y="3007747"/>
-                  </a:lnTo>
-                  <a:lnTo>
-                    <a:pt x="4788991" y="3022907"/>
-                  </a:lnTo>
-                  <a:lnTo>
-                    <a:pt x="4865624" y="3037584"/>
-                  </a:lnTo>
-                  <a:lnTo>
-                    <a:pt x="4942257" y="3051793"/>
-                  </a:lnTo>
-                  <a:lnTo>
-                    <a:pt x="5018889" y="3065550"/>
-                  </a:lnTo>
-                  <a:lnTo>
-                    <a:pt x="5095522" y="3078869"/>
-                  </a:lnTo>
-                  <a:lnTo>
-                    <a:pt x="5172154" y="3091764"/>
-                  </a:lnTo>
-                  <a:lnTo>
-                    <a:pt x="5248787" y="3104248"/>
-                  </a:lnTo>
-                  <a:lnTo>
-                    <a:pt x="5325419" y="3116334"/>
-                  </a:lnTo>
-                  <a:lnTo>
-                    <a:pt x="5402052" y="3128036"/>
-                  </a:lnTo>
-                  <a:lnTo>
-                    <a:pt x="5478684" y="3139365"/>
-                  </a:lnTo>
-                  <a:lnTo>
-                    <a:pt x="5555317" y="3150333"/>
-                  </a:lnTo>
-                  <a:lnTo>
-                    <a:pt x="5631950" y="3160951"/>
-                  </a:lnTo>
-                  <a:lnTo>
-                    <a:pt x="5708582" y="3171232"/>
-                  </a:lnTo>
-                  <a:lnTo>
-                    <a:pt x="5785215" y="3181185"/>
-                  </a:lnTo>
-                  <a:lnTo>
-                    <a:pt x="5861847" y="3190821"/>
-                  </a:lnTo>
-                  <a:lnTo>
-                    <a:pt x="5938480" y="3200150"/>
-                  </a:lnTo>
-                  <a:lnTo>
-                    <a:pt x="6015112" y="3209182"/>
-                  </a:lnTo>
-                  <a:lnTo>
-                    <a:pt x="6091745" y="3217927"/>
-                  </a:lnTo>
-                  <a:lnTo>
-                    <a:pt x="6168377" y="3226393"/>
-                  </a:lnTo>
-                  <a:lnTo>
-                    <a:pt x="6245010" y="3234589"/>
-                  </a:lnTo>
-                  <a:lnTo>
-                    <a:pt x="6321642" y="3242524"/>
-                  </a:lnTo>
-                  <a:lnTo>
-                    <a:pt x="6398275" y="3250207"/>
-                  </a:lnTo>
-                  <a:lnTo>
-                    <a:pt x="6474908" y="3257645"/>
-                  </a:lnTo>
-                  <a:lnTo>
-                    <a:pt x="6551540" y="3264846"/>
-                  </a:lnTo>
-                  <a:lnTo>
-                    <a:pt x="6628173" y="3271817"/>
-                  </a:lnTo>
-                  <a:lnTo>
-                    <a:pt x="6704805" y="3278567"/>
-                  </a:lnTo>
-                  <a:lnTo>
-                    <a:pt x="6781438" y="3285101"/>
-                  </a:lnTo>
-                  <a:lnTo>
-                    <a:pt x="6858070" y="3291428"/>
-                  </a:lnTo>
-                  <a:lnTo>
-                    <a:pt x="6934703" y="3297553"/>
-                  </a:lnTo>
-                  <a:lnTo>
-                    <a:pt x="7011335" y="3303483"/>
-                  </a:lnTo>
-                  <a:lnTo>
-                    <a:pt x="7087968" y="3309224"/>
-                  </a:lnTo>
-                  <a:lnTo>
-                    <a:pt x="7164601" y="3314782"/>
-                  </a:lnTo>
-                  <a:lnTo>
-                    <a:pt x="7241233" y="3320164"/>
-                  </a:lnTo>
-                  <a:lnTo>
-                    <a:pt x="7317866" y="3325373"/>
-                  </a:lnTo>
-                  <a:lnTo>
-                    <a:pt x="7394498" y="3330417"/>
+                    <a:pt x="35304" y="55588"/>
+                  </a:lnTo>
+                  <a:lnTo>
+                    <a:pt x="106926" y="164769"/>
+                  </a:lnTo>
+                  <a:lnTo>
+                    <a:pt x="178549" y="270473"/>
+                  </a:lnTo>
+                  <a:lnTo>
+                    <a:pt x="250171" y="372811"/>
+                  </a:lnTo>
+                  <a:lnTo>
+                    <a:pt x="321794" y="471889"/>
+                  </a:lnTo>
+                  <a:lnTo>
+                    <a:pt x="393417" y="567812"/>
+                  </a:lnTo>
+                  <a:lnTo>
+                    <a:pt x="465039" y="660680"/>
+                  </a:lnTo>
+                  <a:lnTo>
+                    <a:pt x="536662" y="750590"/>
+                  </a:lnTo>
+                  <a:lnTo>
+                    <a:pt x="608284" y="837637"/>
+                  </a:lnTo>
+                  <a:lnTo>
+                    <a:pt x="679907" y="921911"/>
+                  </a:lnTo>
+                  <a:lnTo>
+                    <a:pt x="751529" y="1003501"/>
+                  </a:lnTo>
+                  <a:lnTo>
+                    <a:pt x="823152" y="1082493"/>
+                  </a:lnTo>
+                  <a:lnTo>
+                    <a:pt x="894774" y="1158969"/>
+                  </a:lnTo>
+                  <a:lnTo>
+                    <a:pt x="966397" y="1233010"/>
+                  </a:lnTo>
+                  <a:lnTo>
+                    <a:pt x="1038019" y="1304692"/>
+                  </a:lnTo>
+                  <a:lnTo>
+                    <a:pt x="1109642" y="1374091"/>
+                  </a:lnTo>
+                  <a:lnTo>
+                    <a:pt x="1181264" y="1441280"/>
+                  </a:lnTo>
+                  <a:lnTo>
+                    <a:pt x="1252887" y="1506330"/>
+                  </a:lnTo>
+                  <a:lnTo>
+                    <a:pt x="1324509" y="1569307"/>
+                  </a:lnTo>
+                  <a:lnTo>
+                    <a:pt x="1396132" y="1630279"/>
+                  </a:lnTo>
+                  <a:lnTo>
+                    <a:pt x="1467754" y="1689309"/>
+                  </a:lnTo>
+                  <a:lnTo>
+                    <a:pt x="1539377" y="1746459"/>
+                  </a:lnTo>
+                  <a:lnTo>
+                    <a:pt x="1610999" y="1801789"/>
+                  </a:lnTo>
+                  <a:lnTo>
+                    <a:pt x="1682622" y="1855356"/>
+                  </a:lnTo>
+                  <a:lnTo>
+                    <a:pt x="1754245" y="1907218"/>
+                  </a:lnTo>
+                  <a:lnTo>
+                    <a:pt x="1825867" y="1957428"/>
+                  </a:lnTo>
+                  <a:lnTo>
+                    <a:pt x="1897490" y="2006039"/>
+                  </a:lnTo>
+                  <a:lnTo>
+                    <a:pt x="1969112" y="2053101"/>
+                  </a:lnTo>
+                  <a:lnTo>
+                    <a:pt x="2040735" y="2098665"/>
+                  </a:lnTo>
+                  <a:lnTo>
+                    <a:pt x="2112357" y="2142778"/>
+                  </a:lnTo>
+                  <a:lnTo>
+                    <a:pt x="2183980" y="2185485"/>
+                  </a:lnTo>
+                  <a:lnTo>
+                    <a:pt x="2255602" y="2226833"/>
+                  </a:lnTo>
+                  <a:lnTo>
+                    <a:pt x="2327225" y="2266864"/>
+                  </a:lnTo>
+                  <a:lnTo>
+                    <a:pt x="2398847" y="2305619"/>
+                  </a:lnTo>
+                  <a:lnTo>
+                    <a:pt x="2470470" y="2343141"/>
+                  </a:lnTo>
+                  <a:lnTo>
+                    <a:pt x="2542092" y="2379467"/>
+                  </a:lnTo>
+                  <a:lnTo>
+                    <a:pt x="2613715" y="2414637"/>
+                  </a:lnTo>
+                  <a:lnTo>
+                    <a:pt x="2685337" y="2448686"/>
+                  </a:lnTo>
+                  <a:lnTo>
+                    <a:pt x="2756960" y="2481651"/>
+                  </a:lnTo>
+                  <a:lnTo>
+                    <a:pt x="2828582" y="2513566"/>
+                  </a:lnTo>
+                  <a:lnTo>
+                    <a:pt x="2900205" y="2544465"/>
+                  </a:lnTo>
+                  <a:lnTo>
+                    <a:pt x="2971827" y="2574380"/>
+                  </a:lnTo>
+                  <a:lnTo>
+                    <a:pt x="3043450" y="2603341"/>
+                  </a:lnTo>
+                  <a:lnTo>
+                    <a:pt x="3115073" y="2631381"/>
+                  </a:lnTo>
+                  <a:lnTo>
+                    <a:pt x="3186695" y="2658527"/>
+                  </a:lnTo>
+                  <a:lnTo>
+                    <a:pt x="3258318" y="2684809"/>
+                  </a:lnTo>
+                  <a:lnTo>
+                    <a:pt x="3329940" y="2710254"/>
+                  </a:lnTo>
+                  <a:lnTo>
+                    <a:pt x="3401563" y="2734889"/>
+                  </a:lnTo>
+                  <a:lnTo>
+                    <a:pt x="3473185" y="2758739"/>
+                  </a:lnTo>
+                  <a:lnTo>
+                    <a:pt x="3544808" y="2781829"/>
+                  </a:lnTo>
+                  <a:lnTo>
+                    <a:pt x="3616430" y="2804184"/>
+                  </a:lnTo>
+                  <a:lnTo>
+                    <a:pt x="3688053" y="2825827"/>
+                  </a:lnTo>
+                  <a:lnTo>
+                    <a:pt x="3759675" y="2846780"/>
+                  </a:lnTo>
+                  <a:lnTo>
+                    <a:pt x="3831298" y="2867067"/>
+                  </a:lnTo>
+                  <a:lnTo>
+                    <a:pt x="3902920" y="2886707"/>
+                  </a:lnTo>
+                  <a:lnTo>
+                    <a:pt x="3974543" y="2905722"/>
+                  </a:lnTo>
+                  <a:lnTo>
+                    <a:pt x="4046165" y="2924131"/>
+                  </a:lnTo>
+                  <a:lnTo>
+                    <a:pt x="4117788" y="2941954"/>
+                  </a:lnTo>
+                  <a:lnTo>
+                    <a:pt x="4189410" y="2959209"/>
+                  </a:lnTo>
+                  <a:lnTo>
+                    <a:pt x="4261033" y="2975915"/>
+                  </a:lnTo>
+                  <a:lnTo>
+                    <a:pt x="4332655" y="2992088"/>
+                  </a:lnTo>
+                  <a:lnTo>
+                    <a:pt x="4404278" y="3007747"/>
+                  </a:lnTo>
+                  <a:lnTo>
+                    <a:pt x="4475901" y="3022907"/>
+                  </a:lnTo>
+                  <a:lnTo>
+                    <a:pt x="4547523" y="3037584"/>
+                  </a:lnTo>
+                  <a:lnTo>
+                    <a:pt x="4619146" y="3051793"/>
+                  </a:lnTo>
+                  <a:lnTo>
+                    <a:pt x="4690768" y="3065550"/>
+                  </a:lnTo>
+                  <a:lnTo>
+                    <a:pt x="4762391" y="3078869"/>
+                  </a:lnTo>
+                  <a:lnTo>
+                    <a:pt x="4834013" y="3091764"/>
+                  </a:lnTo>
+                  <a:lnTo>
+                    <a:pt x="4905636" y="3104248"/>
+                  </a:lnTo>
+                  <a:lnTo>
+                    <a:pt x="4977258" y="3116334"/>
+                  </a:lnTo>
+                  <a:lnTo>
+                    <a:pt x="5048881" y="3128036"/>
+                  </a:lnTo>
+                  <a:lnTo>
+                    <a:pt x="5120503" y="3139365"/>
+                  </a:lnTo>
+                  <a:lnTo>
+                    <a:pt x="5192126" y="3150333"/>
+                  </a:lnTo>
+                  <a:lnTo>
+                    <a:pt x="5263748" y="3160951"/>
+                  </a:lnTo>
+                  <a:lnTo>
+                    <a:pt x="5335371" y="3171232"/>
+                  </a:lnTo>
+                  <a:lnTo>
+                    <a:pt x="5406993" y="3181185"/>
+                  </a:lnTo>
+                  <a:lnTo>
+                    <a:pt x="5478616" y="3190821"/>
+                  </a:lnTo>
+                  <a:lnTo>
+                    <a:pt x="5550238" y="3200150"/>
+                  </a:lnTo>
+                  <a:lnTo>
+                    <a:pt x="5621861" y="3209182"/>
+                  </a:lnTo>
+                  <a:lnTo>
+                    <a:pt x="5693483" y="3217927"/>
+                  </a:lnTo>
+                  <a:lnTo>
+                    <a:pt x="5765106" y="3226393"/>
+                  </a:lnTo>
+                  <a:lnTo>
+                    <a:pt x="5836729" y="3234589"/>
+                  </a:lnTo>
+                  <a:lnTo>
+                    <a:pt x="5908351" y="3242524"/>
+                  </a:lnTo>
+                  <a:lnTo>
+                    <a:pt x="5979974" y="3250207"/>
+                  </a:lnTo>
+                  <a:lnTo>
+                    <a:pt x="6051596" y="3257645"/>
+                  </a:lnTo>
+                  <a:lnTo>
+                    <a:pt x="6123219" y="3264846"/>
+                  </a:lnTo>
+                  <a:lnTo>
+                    <a:pt x="6194841" y="3271817"/>
+                  </a:lnTo>
+                  <a:lnTo>
+                    <a:pt x="6266464" y="3278567"/>
+                  </a:lnTo>
+                  <a:lnTo>
+                    <a:pt x="6338086" y="3285101"/>
+                  </a:lnTo>
+                  <a:lnTo>
+                    <a:pt x="6409709" y="3291428"/>
+                  </a:lnTo>
+                  <a:lnTo>
+                    <a:pt x="6481331" y="3297553"/>
+                  </a:lnTo>
+                  <a:lnTo>
+                    <a:pt x="6552954" y="3303483"/>
+                  </a:lnTo>
+                  <a:lnTo>
+                    <a:pt x="6624576" y="3309224"/>
+                  </a:lnTo>
+                  <a:lnTo>
+                    <a:pt x="6696199" y="3314782"/>
+                  </a:lnTo>
+                  <a:lnTo>
+                    <a:pt x="6767821" y="3320164"/>
+                  </a:lnTo>
+                  <a:lnTo>
+                    <a:pt x="6839444" y="3325373"/>
+                  </a:lnTo>
+                  <a:lnTo>
+                    <a:pt x="6911066" y="3330417"/>
                   </a:lnTo>
                 </a:path>
               </a:pathLst>
@@ -4431,7 +4400,7 @@
         </p:sp>
         <p:sp>
           <p:nvSpPr>
-            <p:cNvPr id="25" name="pl25"/>
+            <p:cNvPr id="24" name="pl24"/>
             <p:cNvSpPr/>
             <p:nvPr/>
           </p:nvSpPr>
@@ -4474,13 +4443,13 @@
         </p:sp>
         <p:sp>
           <p:nvSpPr>
-            <p:cNvPr id="26" name="pl26"/>
+            <p:cNvPr id="25" name="pl25"/>
             <p:cNvSpPr/>
             <p:nvPr/>
           </p:nvSpPr>
           <p:spPr>
             <a:xfrm>
-              <a:off x="4224261" y="2073503"/>
+              <a:off x="4526955" y="2073503"/>
               <a:ext cx="0" cy="3649639"/>
             </a:xfrm>
             <a:custGeom>
@@ -4517,7 +4486,7 @@
         </p:sp>
         <p:sp>
           <p:nvSpPr>
-            <p:cNvPr id="27" name="tx27"/>
+            <p:cNvPr id="26" name="tx26"/>
             <p:cNvSpPr/>
             <p:nvPr/>
           </p:nvSpPr>
@@ -4563,7 +4532,7 @@
         </p:sp>
         <p:sp>
           <p:nvSpPr>
-            <p:cNvPr id="28" name="tx28"/>
+            <p:cNvPr id="27" name="tx27"/>
             <p:cNvSpPr/>
             <p:nvPr/>
           </p:nvSpPr>
@@ -4609,7 +4578,7 @@
         </p:sp>
         <p:sp>
           <p:nvSpPr>
-            <p:cNvPr id="29" name="tx29"/>
+            <p:cNvPr id="28" name="tx28"/>
             <p:cNvSpPr/>
             <p:nvPr/>
           </p:nvSpPr>
@@ -4655,7 +4624,7 @@
         </p:sp>
         <p:sp>
           <p:nvSpPr>
-            <p:cNvPr id="30" name="tx30"/>
+            <p:cNvPr id="29" name="tx29"/>
             <p:cNvSpPr/>
             <p:nvPr/>
           </p:nvSpPr>
@@ -4701,7 +4670,7 @@
         </p:sp>
         <p:sp>
           <p:nvSpPr>
-            <p:cNvPr id="31" name="tx31"/>
+            <p:cNvPr id="30" name="tx30"/>
             <p:cNvSpPr/>
             <p:nvPr/>
           </p:nvSpPr>
@@ -4747,14 +4716,14 @@
         </p:sp>
         <p:sp>
           <p:nvSpPr>
-            <p:cNvPr id="32" name="tx32"/>
+            <p:cNvPr id="31" name="tx31"/>
             <p:cNvSpPr/>
             <p:nvPr/>
           </p:nvSpPr>
           <p:spPr>
             <a:xfrm>
-              <a:off x="2423864" y="5785772"/>
-              <a:ext cx="155356" cy="80101"/>
+              <a:off x="2421884" y="5785772"/>
+              <a:ext cx="161574" cy="80101"/>
             </a:xfrm>
             <a:prstGeom prst="rect">
               <a:avLst/>
@@ -4786,21 +4755,21 @@
                   <a:latin typeface="Helvetica"/>
                   <a:cs typeface="Helvetica"/>
                 </a:rPr>
-                <a:t>0.8</a:t>
+                <a:t>-25</a:t>
               </a:r>
             </a:p>
           </p:txBody>
         </p:sp>
         <p:sp>
           <p:nvSpPr>
-            <p:cNvPr id="33" name="tx33"/>
+            <p:cNvPr id="32" name="tx32"/>
             <p:cNvSpPr/>
             <p:nvPr/>
           </p:nvSpPr>
           <p:spPr>
             <a:xfrm>
-              <a:off x="4196521" y="5785772"/>
-              <a:ext cx="155356" cy="80101"/>
+              <a:off x="4542539" y="5785772"/>
+              <a:ext cx="62179" cy="80101"/>
             </a:xfrm>
             <a:prstGeom prst="rect">
               <a:avLst/>
@@ -4832,21 +4801,21 @@
                   <a:latin typeface="Helvetica"/>
                   <a:cs typeface="Helvetica"/>
                 </a:rPr>
-                <a:t>1.0</a:t>
+                <a:t>0</a:t>
               </a:r>
             </a:p>
           </p:txBody>
         </p:sp>
         <p:sp>
           <p:nvSpPr>
-            <p:cNvPr id="34" name="tx34"/>
+            <p:cNvPr id="33" name="tx33"/>
             <p:cNvSpPr/>
             <p:nvPr/>
           </p:nvSpPr>
           <p:spPr>
             <a:xfrm>
-              <a:off x="5969179" y="5785772"/>
-              <a:ext cx="155356" cy="80101"/>
+              <a:off x="6582407" y="5785772"/>
+              <a:ext cx="124358" cy="80101"/>
             </a:xfrm>
             <a:prstGeom prst="rect">
               <a:avLst/>
@@ -4878,67 +4847,21 @@
                   <a:latin typeface="Helvetica"/>
                   <a:cs typeface="Helvetica"/>
                 </a:rPr>
-                <a:t>1.2</a:t>
+                <a:t>25</a:t>
               </a:r>
             </a:p>
           </p:txBody>
         </p:sp>
         <p:sp>
           <p:nvSpPr>
-            <p:cNvPr id="35" name="tx35"/>
+            <p:cNvPr id="34" name="tx34"/>
             <p:cNvSpPr/>
             <p:nvPr/>
           </p:nvSpPr>
           <p:spPr>
             <a:xfrm>
-              <a:off x="7741836" y="5785772"/>
-              <a:ext cx="155356" cy="80101"/>
-            </a:xfrm>
-            <a:prstGeom prst="rect">
-              <a:avLst/>
-            </a:prstGeom>
-            <a:noFill/>
-          </p:spPr>
-          <p:txBody>
-            <a:bodyPr lIns="0" rIns="0" tIns="0" bIns="0" anchorCtr="1" anchor="ctr" wrap="none"/>
-            <a:lstStyle/>
-            <a:p>
-              <a:pPr algn="l" marL="0" marR="0" indent="0">
-                <a:lnSpc>
-                  <a:spcPts val="880"/>
-                </a:lnSpc>
-                <a:spcBef>
-                  <a:spcPts val="0"/>
-                </a:spcBef>
-                <a:spcAft>
-                  <a:spcPts val="0"/>
-                </a:spcAft>
-              </a:pPr>
-              <a:r>
-                <a:rPr sz="880">
-                  <a:solidFill>
-                    <a:srgbClr val="4D4D4D">
-                      <a:alpha val="100000"/>
-                    </a:srgbClr>
-                  </a:solidFill>
-                  <a:latin typeface="Helvetica"/>
-                  <a:cs typeface="Helvetica"/>
-                </a:rPr>
-                <a:t>1.4</a:t>
-              </a:r>
-            </a:p>
-          </p:txBody>
-        </p:sp>
-        <p:sp>
-          <p:nvSpPr>
-            <p:cNvPr id="36" name="tx36"/>
-            <p:cNvSpPr/>
-            <p:nvPr/>
-          </p:nvSpPr>
-          <p:spPr>
-            <a:xfrm>
-              <a:off x="3879271" y="5925448"/>
-              <a:ext cx="1676186" cy="100218"/>
+              <a:off x="2928340" y="5925448"/>
+              <a:ext cx="3578047" cy="100218"/>
             </a:xfrm>
             <a:prstGeom prst="rect">
               <a:avLst/>
@@ -4970,14 +4893,14 @@
                   <a:latin typeface="Helvetica"/>
                   <a:cs typeface="Helvetica"/>
                 </a:rPr>
-                <a:t>CKD-EPI Cr-Cys / CG ratio</a:t>
+                <a:t>eGFR difference (%): 100 × (CKD-EPI Cr-Cys − CG) / CG</a:t>
               </a:r>
             </a:p>
           </p:txBody>
         </p:sp>
         <p:sp>
           <p:nvSpPr>
-            <p:cNvPr id="37" name="tx37"/>
+            <p:cNvPr id="35" name="tx35"/>
             <p:cNvSpPr/>
             <p:nvPr/>
           </p:nvSpPr>
@@ -5023,14 +4946,14 @@
         </p:sp>
         <p:sp>
           <p:nvSpPr>
-            <p:cNvPr id="38" name="tx38"/>
+            <p:cNvPr id="36" name="tx36"/>
             <p:cNvSpPr/>
             <p:nvPr/>
           </p:nvSpPr>
           <p:spPr>
             <a:xfrm>
               <a:off x="817517" y="1896563"/>
-              <a:ext cx="6232916" cy="82021"/>
+              <a:ext cx="6385163" cy="82021"/>
             </a:xfrm>
             <a:prstGeom prst="rect">
               <a:avLst/>
@@ -5062,14 +4985,14 @@
                   <a:latin typeface="Helvetica"/>
                   <a:cs typeface="Helvetica"/>
                 </a:rPr>
-                <a:t>subHR per 0.1 ratio decline: 1.45 (0.88-2.39), p = 0.140  |  per IQR decline (Δ = 0.30): 3.06 (0.69-13.55)  |  IQR: [0.85, 1.15]</a:t>
+                <a:t>subHR per 10 % decline: 1.45 (0.88-2.39), p = 0.140  |  per IQR decline (Δ = 29.9 %): 3.06 (0.69-13.55)  |  IQR: [-15.0, 14.9] %</a:t>
               </a:r>
             </a:p>
           </p:txBody>
         </p:sp>
         <p:sp>
           <p:nvSpPr>
-            <p:cNvPr id="39" name="tx39"/>
+            <p:cNvPr id="37" name="tx37"/>
             <p:cNvSpPr/>
             <p:nvPr/>
           </p:nvSpPr>

--- a/docs/pptx/carbo/jx-carbo-linsubhr-ratio-hosp4.pptx
+++ b/docs/pptx/carbo/jx-carbo-linsubhr-ratio-hosp4.pptx
@@ -2265,34 +2265,26 @@
         </p:sp>
         <p:sp>
           <p:nvSpPr>
-            <p:cNvPr id="4" name="pl4"/>
+            <p:cNvPr id="4" name="rc4"/>
             <p:cNvSpPr/>
             <p:nvPr/>
           </p:nvSpPr>
           <p:spPr>
             <a:xfrm>
-              <a:off x="817517" y="5142518"/>
-              <a:ext cx="7799693" cy="0"/>
+              <a:off x="457200" y="1600200"/>
+              <a:ext cx="8229600" cy="4525962"/>
             </a:xfrm>
-            <a:custGeom>
+            <a:prstGeom prst="rect">
               <a:avLst/>
-              <a:pathLst>
-                <a:path w="7799693" h="0">
-                  <a:moveTo>
-                    <a:pt x="0" y="0"/>
-                  </a:moveTo>
-                  <a:lnTo>
-                    <a:pt x="7799693" y="0"/>
-                  </a:lnTo>
-                  <a:lnTo>
-                    <a:pt x="7799693" y="0"/>
-                  </a:lnTo>
-                </a:path>
-              </a:pathLst>
-            </a:custGeom>
-            <a:ln w="6775" cap="flat">
+            </a:prstGeom>
+            <a:solidFill>
+              <a:srgbClr val="FFFFFF">
+                <a:alpha val="100000"/>
+              </a:srgbClr>
+            </a:solidFill>
+            <a:ln w="13550" cap="rnd">
               <a:solidFill>
-                <a:srgbClr val="EBEBEB">
+                <a:srgbClr val="FFFFFF">
                   <a:alpha val="100000"/>
                 </a:srgbClr>
               </a:solidFill>
@@ -2314,21 +2306,21 @@
           </p:nvSpPr>
           <p:spPr>
             <a:xfrm>
-              <a:off x="817517" y="4313054"/>
-              <a:ext cx="7799693" cy="0"/>
+              <a:off x="887106" y="3250627"/>
+              <a:ext cx="7660515" cy="0"/>
             </a:xfrm>
             <a:custGeom>
               <a:avLst/>
               <a:pathLst>
-                <a:path w="7799693" h="0">
+                <a:path w="7660515" h="0">
                   <a:moveTo>
                     <a:pt x="0" y="0"/>
                   </a:moveTo>
                   <a:lnTo>
-                    <a:pt x="7799693" y="0"/>
-                  </a:lnTo>
-                  <a:lnTo>
-                    <a:pt x="7799693" y="0"/>
+                    <a:pt x="7660515" y="0"/>
+                  </a:lnTo>
+                  <a:lnTo>
+                    <a:pt x="7660515" y="0"/>
                   </a:lnTo>
                 </a:path>
               </a:pathLst>
@@ -2357,21 +2349,21 @@
           </p:nvSpPr>
           <p:spPr>
             <a:xfrm>
-              <a:off x="817517" y="3483591"/>
-              <a:ext cx="7799693" cy="0"/>
+              <a:off x="887106" y="2951293"/>
+              <a:ext cx="7660515" cy="0"/>
             </a:xfrm>
             <a:custGeom>
               <a:avLst/>
               <a:pathLst>
-                <a:path w="7799693" h="0">
+                <a:path w="7660515" h="0">
                   <a:moveTo>
                     <a:pt x="0" y="0"/>
                   </a:moveTo>
                   <a:lnTo>
-                    <a:pt x="7799693" y="0"/>
-                  </a:lnTo>
-                  <a:lnTo>
-                    <a:pt x="7799693" y="0"/>
+                    <a:pt x="7660515" y="0"/>
+                  </a:lnTo>
+                  <a:lnTo>
+                    <a:pt x="7660515" y="0"/>
                   </a:lnTo>
                 </a:path>
               </a:pathLst>
@@ -2400,21 +2392,21 @@
           </p:nvSpPr>
           <p:spPr>
             <a:xfrm>
-              <a:off x="817517" y="2654127"/>
-              <a:ext cx="7799693" cy="0"/>
+              <a:off x="887106" y="2651959"/>
+              <a:ext cx="7660515" cy="0"/>
             </a:xfrm>
             <a:custGeom>
               <a:avLst/>
               <a:pathLst>
-                <a:path w="7799693" h="0">
+                <a:path w="7660515" h="0">
                   <a:moveTo>
                     <a:pt x="0" y="0"/>
                   </a:moveTo>
                   <a:lnTo>
-                    <a:pt x="7799693" y="0"/>
-                  </a:lnTo>
-                  <a:lnTo>
-                    <a:pt x="7799693" y="0"/>
+                    <a:pt x="7660515" y="0"/>
+                  </a:lnTo>
+                  <a:lnTo>
+                    <a:pt x="7660515" y="0"/>
                   </a:lnTo>
                 </a:path>
               </a:pathLst>
@@ -2443,21 +2435,21 @@
           </p:nvSpPr>
           <p:spPr>
             <a:xfrm>
-              <a:off x="1467192" y="2073503"/>
-              <a:ext cx="0" cy="3649639"/>
+              <a:off x="887106" y="2352625"/>
+              <a:ext cx="7660515" cy="0"/>
             </a:xfrm>
             <a:custGeom>
               <a:avLst/>
               <a:pathLst>
-                <a:path w="0" h="3649639">
+                <a:path w="7660515" h="0">
                   <a:moveTo>
-                    <a:pt x="0" y="3649639"/>
+                    <a:pt x="0" y="0"/>
                   </a:moveTo>
                   <a:lnTo>
-                    <a:pt x="0" y="0"/>
-                  </a:lnTo>
-                  <a:lnTo>
-                    <a:pt x="0" y="0"/>
+                    <a:pt x="7660515" y="0"/>
+                  </a:lnTo>
+                  <a:lnTo>
+                    <a:pt x="7660515" y="0"/>
                   </a:lnTo>
                 </a:path>
               </a:pathLst>
@@ -2486,15 +2478,15 @@
           </p:nvSpPr>
           <p:spPr>
             <a:xfrm>
-              <a:off x="3538150" y="2073503"/>
-              <a:ext cx="0" cy="3649639"/>
+              <a:off x="1525188" y="2143092"/>
+              <a:ext cx="0" cy="1317069"/>
             </a:xfrm>
             <a:custGeom>
               <a:avLst/>
               <a:pathLst>
-                <a:path w="0" h="3649639">
+                <a:path w="0" h="1317069">
                   <a:moveTo>
-                    <a:pt x="0" y="3649639"/>
+                    <a:pt x="0" y="1317069"/>
                   </a:moveTo>
                   <a:lnTo>
                     <a:pt x="0" y="0"/>
@@ -2529,15 +2521,15 @@
           </p:nvSpPr>
           <p:spPr>
             <a:xfrm>
-              <a:off x="5609107" y="2073503"/>
-              <a:ext cx="0" cy="3649639"/>
+              <a:off x="3559192" y="2143092"/>
+              <a:ext cx="0" cy="1317069"/>
             </a:xfrm>
             <a:custGeom>
               <a:avLst/>
               <a:pathLst>
-                <a:path w="0" h="3649639">
+                <a:path w="0" h="1317069">
                   <a:moveTo>
-                    <a:pt x="0" y="3649639"/>
+                    <a:pt x="0" y="1317069"/>
                   </a:moveTo>
                   <a:lnTo>
                     <a:pt x="0" y="0"/>
@@ -2572,15 +2564,15 @@
           </p:nvSpPr>
           <p:spPr>
             <a:xfrm>
-              <a:off x="7680065" y="2073503"/>
-              <a:ext cx="0" cy="3649639"/>
+              <a:off x="5593195" y="2143092"/>
+              <a:ext cx="0" cy="1317069"/>
             </a:xfrm>
             <a:custGeom>
               <a:avLst/>
               <a:pathLst>
-                <a:path w="0" h="3649639">
+                <a:path w="0" h="1317069">
                   <a:moveTo>
-                    <a:pt x="0" y="3649639"/>
+                    <a:pt x="0" y="1317069"/>
                   </a:moveTo>
                   <a:lnTo>
                     <a:pt x="0" y="0"/>
@@ -2615,26 +2607,26 @@
           </p:nvSpPr>
           <p:spPr>
             <a:xfrm>
-              <a:off x="817517" y="5557249"/>
-              <a:ext cx="7799693" cy="0"/>
+              <a:off x="7627198" y="2143092"/>
+              <a:ext cx="0" cy="1317069"/>
             </a:xfrm>
             <a:custGeom>
               <a:avLst/>
               <a:pathLst>
-                <a:path w="7799693" h="0">
+                <a:path w="0" h="1317069">
                   <a:moveTo>
+                    <a:pt x="0" y="1317069"/>
+                  </a:moveTo>
+                  <a:lnTo>
                     <a:pt x="0" y="0"/>
-                  </a:moveTo>
-                  <a:lnTo>
-                    <a:pt x="7799693" y="0"/>
-                  </a:lnTo>
-                  <a:lnTo>
-                    <a:pt x="7799693" y="0"/>
+                  </a:lnTo>
+                  <a:lnTo>
+                    <a:pt x="0" y="0"/>
                   </a:lnTo>
                 </a:path>
               </a:pathLst>
             </a:custGeom>
-            <a:ln w="13550" cap="flat">
+            <a:ln w="6775" cap="flat">
               <a:solidFill>
                 <a:srgbClr val="EBEBEB">
                   <a:alpha val="100000"/>
@@ -2658,21 +2650,21 @@
           </p:nvSpPr>
           <p:spPr>
             <a:xfrm>
-              <a:off x="817517" y="4727786"/>
-              <a:ext cx="7799693" cy="0"/>
+              <a:off x="887106" y="3400294"/>
+              <a:ext cx="7660515" cy="0"/>
             </a:xfrm>
             <a:custGeom>
               <a:avLst/>
               <a:pathLst>
-                <a:path w="7799693" h="0">
+                <a:path w="7660515" h="0">
                   <a:moveTo>
                     <a:pt x="0" y="0"/>
                   </a:moveTo>
                   <a:lnTo>
-                    <a:pt x="7799693" y="0"/>
-                  </a:lnTo>
-                  <a:lnTo>
-                    <a:pt x="7799693" y="0"/>
+                    <a:pt x="7660515" y="0"/>
+                  </a:lnTo>
+                  <a:lnTo>
+                    <a:pt x="7660515" y="0"/>
                   </a:lnTo>
                 </a:path>
               </a:pathLst>
@@ -2701,21 +2693,21 @@
           </p:nvSpPr>
           <p:spPr>
             <a:xfrm>
-              <a:off x="817517" y="3898322"/>
-              <a:ext cx="7799693" cy="0"/>
+              <a:off x="887106" y="3100960"/>
+              <a:ext cx="7660515" cy="0"/>
             </a:xfrm>
             <a:custGeom>
               <a:avLst/>
               <a:pathLst>
-                <a:path w="7799693" h="0">
+                <a:path w="7660515" h="0">
                   <a:moveTo>
                     <a:pt x="0" y="0"/>
                   </a:moveTo>
                   <a:lnTo>
-                    <a:pt x="7799693" y="0"/>
-                  </a:lnTo>
-                  <a:lnTo>
-                    <a:pt x="7799693" y="0"/>
+                    <a:pt x="7660515" y="0"/>
+                  </a:lnTo>
+                  <a:lnTo>
+                    <a:pt x="7660515" y="0"/>
                   </a:lnTo>
                 </a:path>
               </a:pathLst>
@@ -2744,21 +2736,21 @@
           </p:nvSpPr>
           <p:spPr>
             <a:xfrm>
-              <a:off x="817517" y="3068859"/>
-              <a:ext cx="7799693" cy="0"/>
+              <a:off x="887106" y="2801626"/>
+              <a:ext cx="7660515" cy="0"/>
             </a:xfrm>
             <a:custGeom>
               <a:avLst/>
               <a:pathLst>
-                <a:path w="7799693" h="0">
+                <a:path w="7660515" h="0">
                   <a:moveTo>
                     <a:pt x="0" y="0"/>
                   </a:moveTo>
                   <a:lnTo>
-                    <a:pt x="7799693" y="0"/>
-                  </a:lnTo>
-                  <a:lnTo>
-                    <a:pt x="7799693" y="0"/>
+                    <a:pt x="7660515" y="0"/>
+                  </a:lnTo>
+                  <a:lnTo>
+                    <a:pt x="7660515" y="0"/>
                   </a:lnTo>
                 </a:path>
               </a:pathLst>
@@ -2787,21 +2779,21 @@
           </p:nvSpPr>
           <p:spPr>
             <a:xfrm>
-              <a:off x="817517" y="2239395"/>
-              <a:ext cx="7799693" cy="0"/>
+              <a:off x="887106" y="2502292"/>
+              <a:ext cx="7660515" cy="0"/>
             </a:xfrm>
             <a:custGeom>
               <a:avLst/>
               <a:pathLst>
-                <a:path w="7799693" h="0">
+                <a:path w="7660515" h="0">
                   <a:moveTo>
                     <a:pt x="0" y="0"/>
                   </a:moveTo>
                   <a:lnTo>
-                    <a:pt x="7799693" y="0"/>
-                  </a:lnTo>
-                  <a:lnTo>
-                    <a:pt x="7799693" y="0"/>
+                    <a:pt x="7660515" y="0"/>
+                  </a:lnTo>
+                  <a:lnTo>
+                    <a:pt x="7660515" y="0"/>
                   </a:lnTo>
                 </a:path>
               </a:pathLst>
@@ -2830,21 +2822,21 @@
           </p:nvSpPr>
           <p:spPr>
             <a:xfrm>
-              <a:off x="2502671" y="2073503"/>
-              <a:ext cx="0" cy="3649639"/>
+              <a:off x="887106" y="2202958"/>
+              <a:ext cx="7660515" cy="0"/>
             </a:xfrm>
             <a:custGeom>
               <a:avLst/>
               <a:pathLst>
-                <a:path w="0" h="3649639">
+                <a:path w="7660515" h="0">
                   <a:moveTo>
-                    <a:pt x="0" y="3649639"/>
+                    <a:pt x="0" y="0"/>
                   </a:moveTo>
                   <a:lnTo>
-                    <a:pt x="0" y="0"/>
-                  </a:lnTo>
-                  <a:lnTo>
-                    <a:pt x="0" y="0"/>
+                    <a:pt x="7660515" y="0"/>
+                  </a:lnTo>
+                  <a:lnTo>
+                    <a:pt x="7660515" y="0"/>
                   </a:lnTo>
                 </a:path>
               </a:pathLst>
@@ -2873,15 +2865,15 @@
           </p:nvSpPr>
           <p:spPr>
             <a:xfrm>
-              <a:off x="4573628" y="2073503"/>
-              <a:ext cx="0" cy="3649639"/>
+              <a:off x="2542190" y="2143092"/>
+              <a:ext cx="0" cy="1317069"/>
             </a:xfrm>
             <a:custGeom>
               <a:avLst/>
               <a:pathLst>
-                <a:path w="0" h="3649639">
+                <a:path w="0" h="1317069">
                   <a:moveTo>
-                    <a:pt x="0" y="3649639"/>
+                    <a:pt x="0" y="1317069"/>
                   </a:moveTo>
                   <a:lnTo>
                     <a:pt x="0" y="0"/>
@@ -2916,15 +2908,15 @@
           </p:nvSpPr>
           <p:spPr>
             <a:xfrm>
-              <a:off x="6644586" y="2073503"/>
-              <a:ext cx="0" cy="3649639"/>
+              <a:off x="4576193" y="2143092"/>
+              <a:ext cx="0" cy="1317069"/>
             </a:xfrm>
             <a:custGeom>
               <a:avLst/>
               <a:pathLst>
-                <a:path w="0" h="3649639">
+                <a:path w="0" h="1317069">
                   <a:moveTo>
-                    <a:pt x="0" y="3649639"/>
+                    <a:pt x="0" y="1317069"/>
                   </a:moveTo>
                   <a:lnTo>
                     <a:pt x="0" y="0"/>
@@ -2953,537 +2945,580 @@
         </p:sp>
         <p:sp>
           <p:nvSpPr>
-            <p:cNvPr id="20" name="pg20"/>
+            <p:cNvPr id="20" name="pl20"/>
             <p:cNvSpPr/>
             <p:nvPr/>
           </p:nvSpPr>
           <p:spPr>
             <a:xfrm>
-              <a:off x="1172049" y="2073503"/>
-              <a:ext cx="7090630" cy="3467441"/>
+              <a:off x="6610197" y="2143092"/>
+              <a:ext cx="0" cy="1317069"/>
             </a:xfrm>
             <a:custGeom>
               <a:avLst/>
               <a:pathLst>
-                <a:path w="7090630" h="3467441">
+                <a:path w="0" h="1317069">
                   <a:moveTo>
-                    <a:pt x="1990964" y="0"/>
+                    <a:pt x="0" y="1317069"/>
                   </a:moveTo>
                   <a:lnTo>
-                    <a:pt x="2005430" y="54199"/>
-                  </a:lnTo>
-                  <a:lnTo>
-                    <a:pt x="2077053" y="303069"/>
-                  </a:lnTo>
-                  <a:lnTo>
-                    <a:pt x="2148675" y="533879"/>
-                  </a:lnTo>
-                  <a:lnTo>
-                    <a:pt x="2220298" y="747940"/>
-                  </a:lnTo>
-                  <a:lnTo>
-                    <a:pt x="2291920" y="946467"/>
-                  </a:lnTo>
-                  <a:lnTo>
-                    <a:pt x="2363543" y="1130588"/>
-                  </a:lnTo>
-                  <a:lnTo>
-                    <a:pt x="2435165" y="1301348"/>
-                  </a:lnTo>
-                  <a:lnTo>
-                    <a:pt x="2506788" y="1459717"/>
-                  </a:lnTo>
-                  <a:lnTo>
-                    <a:pt x="2578410" y="1606593"/>
-                  </a:lnTo>
-                  <a:lnTo>
-                    <a:pt x="2650033" y="1742811"/>
-                  </a:lnTo>
-                  <a:lnTo>
-                    <a:pt x="2721655" y="1869144"/>
-                  </a:lnTo>
-                  <a:lnTo>
-                    <a:pt x="2793278" y="1986310"/>
-                  </a:lnTo>
-                  <a:lnTo>
-                    <a:pt x="2864901" y="2094973"/>
-                  </a:lnTo>
-                  <a:lnTo>
-                    <a:pt x="2936523" y="2195751"/>
-                  </a:lnTo>
-                  <a:lnTo>
-                    <a:pt x="3008146" y="2289216"/>
-                  </a:lnTo>
-                  <a:lnTo>
-                    <a:pt x="3079768" y="2375899"/>
-                  </a:lnTo>
-                  <a:lnTo>
-                    <a:pt x="3151391" y="2456291"/>
-                  </a:lnTo>
-                  <a:lnTo>
-                    <a:pt x="3223013" y="2530850"/>
-                  </a:lnTo>
-                  <a:lnTo>
-                    <a:pt x="3294636" y="2599998"/>
-                  </a:lnTo>
-                  <a:lnTo>
-                    <a:pt x="3366258" y="2652888"/>
-                  </a:lnTo>
-                  <a:lnTo>
-                    <a:pt x="3437881" y="2644033"/>
-                  </a:lnTo>
-                  <a:lnTo>
-                    <a:pt x="3509503" y="2635084"/>
-                  </a:lnTo>
-                  <a:lnTo>
-                    <a:pt x="3581126" y="2626040"/>
-                  </a:lnTo>
-                  <a:lnTo>
-                    <a:pt x="3652748" y="2616899"/>
-                  </a:lnTo>
-                  <a:lnTo>
-                    <a:pt x="3724371" y="2607661"/>
-                  </a:lnTo>
-                  <a:lnTo>
-                    <a:pt x="3795993" y="2598325"/>
-                  </a:lnTo>
-                  <a:lnTo>
-                    <a:pt x="3867616" y="2588888"/>
-                  </a:lnTo>
-                  <a:lnTo>
-                    <a:pt x="3939238" y="2579352"/>
-                  </a:lnTo>
-                  <a:lnTo>
-                    <a:pt x="4010861" y="2569713"/>
-                  </a:lnTo>
-                  <a:lnTo>
-                    <a:pt x="4082483" y="2559972"/>
-                  </a:lnTo>
-                  <a:lnTo>
-                    <a:pt x="4154106" y="2550128"/>
-                  </a:lnTo>
-                  <a:lnTo>
-                    <a:pt x="4225729" y="2540178"/>
-                  </a:lnTo>
-                  <a:lnTo>
-                    <a:pt x="4297351" y="2530122"/>
-                  </a:lnTo>
-                  <a:lnTo>
-                    <a:pt x="4368974" y="2519959"/>
-                  </a:lnTo>
-                  <a:lnTo>
-                    <a:pt x="4440596" y="2509688"/>
-                  </a:lnTo>
-                  <a:lnTo>
-                    <a:pt x="4512219" y="2499307"/>
-                  </a:lnTo>
-                  <a:lnTo>
-                    <a:pt x="4583841" y="2488816"/>
-                  </a:lnTo>
-                  <a:lnTo>
-                    <a:pt x="4655464" y="2478213"/>
-                  </a:lnTo>
-                  <a:lnTo>
-                    <a:pt x="4727086" y="2467497"/>
-                  </a:lnTo>
-                  <a:lnTo>
-                    <a:pt x="4798709" y="2456666"/>
-                  </a:lnTo>
-                  <a:lnTo>
-                    <a:pt x="4870331" y="2445720"/>
-                  </a:lnTo>
-                  <a:lnTo>
-                    <a:pt x="4941954" y="2434658"/>
-                  </a:lnTo>
-                  <a:lnTo>
-                    <a:pt x="5013576" y="2423478"/>
-                  </a:lnTo>
-                  <a:lnTo>
-                    <a:pt x="5085199" y="2412178"/>
-                  </a:lnTo>
-                  <a:lnTo>
-                    <a:pt x="5156821" y="2400758"/>
-                  </a:lnTo>
-                  <a:lnTo>
-                    <a:pt x="5228444" y="2389217"/>
-                  </a:lnTo>
-                  <a:lnTo>
-                    <a:pt x="5300066" y="2377552"/>
-                  </a:lnTo>
-                  <a:lnTo>
-                    <a:pt x="5371689" y="2365763"/>
-                  </a:lnTo>
-                  <a:lnTo>
-                    <a:pt x="5443311" y="2353849"/>
-                  </a:lnTo>
-                  <a:lnTo>
-                    <a:pt x="5514934" y="2341807"/>
-                  </a:lnTo>
-                  <a:lnTo>
-                    <a:pt x="5586557" y="2329637"/>
-                  </a:lnTo>
-                  <a:lnTo>
-                    <a:pt x="5658179" y="2317338"/>
-                  </a:lnTo>
-                  <a:lnTo>
-                    <a:pt x="5729802" y="2304907"/>
-                  </a:lnTo>
-                  <a:lnTo>
-                    <a:pt x="5801424" y="2292344"/>
-                  </a:lnTo>
-                  <a:lnTo>
-                    <a:pt x="5873047" y="2279647"/>
-                  </a:lnTo>
-                  <a:lnTo>
-                    <a:pt x="5944669" y="2266815"/>
-                  </a:lnTo>
-                  <a:lnTo>
-                    <a:pt x="6016292" y="2253846"/>
-                  </a:lnTo>
-                  <a:lnTo>
-                    <a:pt x="6087914" y="2240738"/>
-                  </a:lnTo>
-                  <a:lnTo>
-                    <a:pt x="6159537" y="2227491"/>
-                  </a:lnTo>
-                  <a:lnTo>
-                    <a:pt x="6231159" y="2214103"/>
-                  </a:lnTo>
-                  <a:lnTo>
-                    <a:pt x="6302782" y="2200572"/>
-                  </a:lnTo>
-                  <a:lnTo>
-                    <a:pt x="6374404" y="2186897"/>
-                  </a:lnTo>
-                  <a:lnTo>
-                    <a:pt x="6446027" y="2173077"/>
-                  </a:lnTo>
-                  <a:lnTo>
-                    <a:pt x="6517649" y="2159109"/>
-                  </a:lnTo>
-                  <a:lnTo>
-                    <a:pt x="6589272" y="2144992"/>
-                  </a:lnTo>
-                  <a:lnTo>
-                    <a:pt x="6660894" y="2130724"/>
-                  </a:lnTo>
-                  <a:lnTo>
-                    <a:pt x="6732517" y="2116305"/>
-                  </a:lnTo>
-                  <a:lnTo>
-                    <a:pt x="6804139" y="2101732"/>
-                  </a:lnTo>
-                  <a:lnTo>
-                    <a:pt x="6875762" y="2087004"/>
-                  </a:lnTo>
-                  <a:lnTo>
-                    <a:pt x="6947385" y="2072118"/>
-                  </a:lnTo>
-                  <a:lnTo>
-                    <a:pt x="7019007" y="2057074"/>
-                  </a:lnTo>
-                  <a:lnTo>
-                    <a:pt x="7090630" y="2041870"/>
-                  </a:lnTo>
-                  <a:lnTo>
-                    <a:pt x="7090630" y="3467441"/>
-                  </a:lnTo>
-                  <a:lnTo>
-                    <a:pt x="7019007" y="3466166"/>
-                  </a:lnTo>
-                  <a:lnTo>
-                    <a:pt x="6947385" y="3464790"/>
-                  </a:lnTo>
-                  <a:lnTo>
-                    <a:pt x="6875762" y="3463307"/>
-                  </a:lnTo>
-                  <a:lnTo>
-                    <a:pt x="6804139" y="3461708"/>
-                  </a:lnTo>
-                  <a:lnTo>
-                    <a:pt x="6732517" y="3459983"/>
-                  </a:lnTo>
-                  <a:lnTo>
-                    <a:pt x="6660894" y="3458124"/>
-                  </a:lnTo>
-                  <a:lnTo>
-                    <a:pt x="6589272" y="3456119"/>
-                  </a:lnTo>
-                  <a:lnTo>
-                    <a:pt x="6517649" y="3453957"/>
-                  </a:lnTo>
-                  <a:lnTo>
-                    <a:pt x="6446027" y="3451626"/>
-                  </a:lnTo>
-                  <a:lnTo>
-                    <a:pt x="6374404" y="3449113"/>
-                  </a:lnTo>
-                  <a:lnTo>
-                    <a:pt x="6302782" y="3446403"/>
-                  </a:lnTo>
-                  <a:lnTo>
-                    <a:pt x="6231159" y="3443482"/>
-                  </a:lnTo>
-                  <a:lnTo>
-                    <a:pt x="6159537" y="3440331"/>
-                  </a:lnTo>
-                  <a:lnTo>
-                    <a:pt x="6087914" y="3436934"/>
-                  </a:lnTo>
-                  <a:lnTo>
-                    <a:pt x="6016292" y="3433271"/>
-                  </a:lnTo>
-                  <a:lnTo>
-                    <a:pt x="5944669" y="3429322"/>
-                  </a:lnTo>
-                  <a:lnTo>
-                    <a:pt x="5873047" y="3425063"/>
-                  </a:lnTo>
-                  <a:lnTo>
-                    <a:pt x="5801424" y="3420472"/>
-                  </a:lnTo>
-                  <a:lnTo>
-                    <a:pt x="5729802" y="3415521"/>
-                  </a:lnTo>
-                  <a:lnTo>
-                    <a:pt x="5658179" y="3410183"/>
-                  </a:lnTo>
-                  <a:lnTo>
-                    <a:pt x="5586557" y="3404427"/>
-                  </a:lnTo>
-                  <a:lnTo>
-                    <a:pt x="5514934" y="3398220"/>
-                  </a:lnTo>
-                  <a:lnTo>
-                    <a:pt x="5443311" y="3391529"/>
-                  </a:lnTo>
-                  <a:lnTo>
-                    <a:pt x="5371689" y="3384313"/>
-                  </a:lnTo>
-                  <a:lnTo>
-                    <a:pt x="5300066" y="3376533"/>
-                  </a:lnTo>
-                  <a:lnTo>
-                    <a:pt x="5228444" y="3368144"/>
-                  </a:lnTo>
-                  <a:lnTo>
-                    <a:pt x="5156821" y="3359099"/>
-                  </a:lnTo>
-                  <a:lnTo>
-                    <a:pt x="5085199" y="3349346"/>
-                  </a:lnTo>
-                  <a:lnTo>
-                    <a:pt x="5013576" y="3338830"/>
-                  </a:lnTo>
-                  <a:lnTo>
-                    <a:pt x="4941954" y="3327491"/>
-                  </a:lnTo>
-                  <a:lnTo>
-                    <a:pt x="4870331" y="3315265"/>
-                  </a:lnTo>
-                  <a:lnTo>
-                    <a:pt x="4798709" y="3302082"/>
-                  </a:lnTo>
-                  <a:lnTo>
-                    <a:pt x="4727086" y="3287868"/>
-                  </a:lnTo>
-                  <a:lnTo>
-                    <a:pt x="4655464" y="3272542"/>
-                  </a:lnTo>
-                  <a:lnTo>
-                    <a:pt x="4583841" y="3256016"/>
-                  </a:lnTo>
-                  <a:lnTo>
-                    <a:pt x="4512219" y="3238198"/>
-                  </a:lnTo>
-                  <a:lnTo>
-                    <a:pt x="4440596" y="3218985"/>
-                  </a:lnTo>
-                  <a:lnTo>
-                    <a:pt x="4368974" y="3198269"/>
-                  </a:lnTo>
-                  <a:lnTo>
-                    <a:pt x="4297351" y="3175932"/>
-                  </a:lnTo>
-                  <a:lnTo>
-                    <a:pt x="4225729" y="3151847"/>
-                  </a:lnTo>
-                  <a:lnTo>
-                    <a:pt x="4154106" y="3125878"/>
-                  </a:lnTo>
-                  <a:lnTo>
-                    <a:pt x="4082483" y="3097877"/>
-                  </a:lnTo>
-                  <a:lnTo>
-                    <a:pt x="4010861" y="3067685"/>
-                  </a:lnTo>
-                  <a:lnTo>
-                    <a:pt x="3939238" y="3035131"/>
-                  </a:lnTo>
-                  <a:lnTo>
-                    <a:pt x="3867616" y="3000029"/>
-                  </a:lnTo>
-                  <a:lnTo>
-                    <a:pt x="3795993" y="2962181"/>
-                  </a:lnTo>
-                  <a:lnTo>
-                    <a:pt x="3724371" y="2921372"/>
-                  </a:lnTo>
-                  <a:lnTo>
-                    <a:pt x="3652748" y="2877369"/>
-                  </a:lnTo>
-                  <a:lnTo>
-                    <a:pt x="3581126" y="2829924"/>
-                  </a:lnTo>
-                  <a:lnTo>
-                    <a:pt x="3509503" y="2778766"/>
-                  </a:lnTo>
-                  <a:lnTo>
-                    <a:pt x="3437881" y="2723605"/>
-                  </a:lnTo>
-                  <a:lnTo>
-                    <a:pt x="3366258" y="2664128"/>
-                  </a:lnTo>
-                  <a:lnTo>
-                    <a:pt x="3294636" y="2661649"/>
-                  </a:lnTo>
-                  <a:lnTo>
-                    <a:pt x="3223013" y="2670318"/>
-                  </a:lnTo>
-                  <a:lnTo>
-                    <a:pt x="3151391" y="2678895"/>
-                  </a:lnTo>
-                  <a:lnTo>
-                    <a:pt x="3079768" y="2687382"/>
-                  </a:lnTo>
-                  <a:lnTo>
-                    <a:pt x="3008146" y="2695780"/>
-                  </a:lnTo>
-                  <a:lnTo>
-                    <a:pt x="2936523" y="2704089"/>
-                  </a:lnTo>
-                  <a:lnTo>
-                    <a:pt x="2864901" y="2712310"/>
-                  </a:lnTo>
-                  <a:lnTo>
-                    <a:pt x="2793278" y="2720445"/>
-                  </a:lnTo>
-                  <a:lnTo>
-                    <a:pt x="2721655" y="2728494"/>
-                  </a:lnTo>
-                  <a:lnTo>
-                    <a:pt x="2650033" y="2736458"/>
-                  </a:lnTo>
-                  <a:lnTo>
-                    <a:pt x="2578410" y="2744338"/>
-                  </a:lnTo>
-                  <a:lnTo>
-                    <a:pt x="2506788" y="2752135"/>
-                  </a:lnTo>
-                  <a:lnTo>
-                    <a:pt x="2435165" y="2759849"/>
-                  </a:lnTo>
-                  <a:lnTo>
-                    <a:pt x="2363543" y="2767483"/>
-                  </a:lnTo>
-                  <a:lnTo>
-                    <a:pt x="2291920" y="2775036"/>
-                  </a:lnTo>
-                  <a:lnTo>
-                    <a:pt x="2220298" y="2782509"/>
-                  </a:lnTo>
-                  <a:lnTo>
-                    <a:pt x="2148675" y="2789903"/>
-                  </a:lnTo>
-                  <a:lnTo>
-                    <a:pt x="2077053" y="2797220"/>
-                  </a:lnTo>
-                  <a:lnTo>
-                    <a:pt x="2005430" y="2804459"/>
-                  </a:lnTo>
-                  <a:lnTo>
-                    <a:pt x="1933808" y="2811622"/>
-                  </a:lnTo>
-                  <a:lnTo>
-                    <a:pt x="1862185" y="2818709"/>
-                  </a:lnTo>
-                  <a:lnTo>
-                    <a:pt x="1790563" y="2825722"/>
-                  </a:lnTo>
-                  <a:lnTo>
-                    <a:pt x="1718940" y="2832661"/>
-                  </a:lnTo>
-                  <a:lnTo>
-                    <a:pt x="1647318" y="2839526"/>
-                  </a:lnTo>
-                  <a:lnTo>
-                    <a:pt x="1575695" y="2846319"/>
-                  </a:lnTo>
-                  <a:lnTo>
-                    <a:pt x="1504073" y="2853041"/>
-                  </a:lnTo>
-                  <a:lnTo>
-                    <a:pt x="1432450" y="2859692"/>
-                  </a:lnTo>
-                  <a:lnTo>
-                    <a:pt x="1360827" y="2866272"/>
-                  </a:lnTo>
-                  <a:lnTo>
-                    <a:pt x="1289205" y="2872783"/>
-                  </a:lnTo>
-                  <a:lnTo>
-                    <a:pt x="1217582" y="2879226"/>
-                  </a:lnTo>
-                  <a:lnTo>
-                    <a:pt x="1145960" y="2885600"/>
-                  </a:lnTo>
-                  <a:lnTo>
-                    <a:pt x="1074337" y="2891908"/>
-                  </a:lnTo>
-                  <a:lnTo>
-                    <a:pt x="1002715" y="2898149"/>
-                  </a:lnTo>
-                  <a:lnTo>
-                    <a:pt x="931092" y="2904324"/>
-                  </a:lnTo>
-                  <a:lnTo>
-                    <a:pt x="859470" y="2910433"/>
-                  </a:lnTo>
-                  <a:lnTo>
-                    <a:pt x="787847" y="2916479"/>
-                  </a:lnTo>
-                  <a:lnTo>
-                    <a:pt x="716225" y="2922461"/>
-                  </a:lnTo>
-                  <a:lnTo>
-                    <a:pt x="644602" y="2928379"/>
-                  </a:lnTo>
-                  <a:lnTo>
-                    <a:pt x="572980" y="2934236"/>
-                  </a:lnTo>
-                  <a:lnTo>
-                    <a:pt x="501357" y="2940030"/>
-                  </a:lnTo>
-                  <a:lnTo>
-                    <a:pt x="429735" y="2945763"/>
-                  </a:lnTo>
-                  <a:lnTo>
-                    <a:pt x="358112" y="2951436"/>
-                  </a:lnTo>
-                  <a:lnTo>
-                    <a:pt x="286490" y="2957049"/>
-                  </a:lnTo>
-                  <a:lnTo>
-                    <a:pt x="214867" y="2962603"/>
-                  </a:lnTo>
-                  <a:lnTo>
-                    <a:pt x="143245" y="2968099"/>
-                  </a:lnTo>
-                  <a:lnTo>
-                    <a:pt x="71622" y="2973536"/>
-                  </a:lnTo>
-                  <a:lnTo>
-                    <a:pt x="0" y="2978916"/>
+                    <a:pt x="0" y="0"/>
+                  </a:lnTo>
+                  <a:lnTo>
+                    <a:pt x="0" y="0"/>
+                  </a:lnTo>
+                </a:path>
+              </a:pathLst>
+            </a:custGeom>
+            <a:ln w="13550" cap="flat">
+              <a:solidFill>
+                <a:srgbClr val="EBEBEB">
+                  <a:alpha val="100000"/>
+                </a:srgbClr>
+              </a:solidFill>
+              <a:prstDash val="solid"/>
+              <a:round/>
+            </a:ln>
+          </p:spPr>
+          <p:txBody>
+            <a:bodyPr/>
+            <a:lstStyle/>
+            <a:p/>
+          </p:txBody>
+        </p:sp>
+        <p:sp>
+          <p:nvSpPr>
+            <p:cNvPr id="21" name="pg21"/>
+            <p:cNvSpPr/>
+            <p:nvPr/>
+          </p:nvSpPr>
+          <p:spPr>
+            <a:xfrm>
+              <a:off x="1235312" y="2143092"/>
+              <a:ext cx="6964104" cy="1251318"/>
+            </a:xfrm>
+            <a:custGeom>
+              <a:avLst/>
+              <a:pathLst>
+                <a:path w="6964104" h="1251318">
+                  <a:moveTo>
+                    <a:pt x="1955437" y="0"/>
+                  </a:moveTo>
+                  <a:lnTo>
+                    <a:pt x="1969645" y="19559"/>
+                  </a:lnTo>
+                  <a:lnTo>
+                    <a:pt x="2039990" y="109370"/>
+                  </a:lnTo>
+                  <a:lnTo>
+                    <a:pt x="2110334" y="192664"/>
+                  </a:lnTo>
+                  <a:lnTo>
+                    <a:pt x="2180679" y="269914"/>
+                  </a:lnTo>
+                  <a:lnTo>
+                    <a:pt x="2251023" y="341557"/>
+                  </a:lnTo>
+                  <a:lnTo>
+                    <a:pt x="2321368" y="408002"/>
+                  </a:lnTo>
+                  <a:lnTo>
+                    <a:pt x="2391712" y="469626"/>
+                  </a:lnTo>
+                  <a:lnTo>
+                    <a:pt x="2462057" y="526777"/>
+                  </a:lnTo>
+                  <a:lnTo>
+                    <a:pt x="2532401" y="579781"/>
+                  </a:lnTo>
+                  <a:lnTo>
+                    <a:pt x="2602746" y="628939"/>
+                  </a:lnTo>
+                  <a:lnTo>
+                    <a:pt x="2673090" y="674530"/>
+                  </a:lnTo>
+                  <a:lnTo>
+                    <a:pt x="2743435" y="716812"/>
+                  </a:lnTo>
+                  <a:lnTo>
+                    <a:pt x="2813779" y="756026"/>
+                  </a:lnTo>
+                  <a:lnTo>
+                    <a:pt x="2884124" y="792395"/>
+                  </a:lnTo>
+                  <a:lnTo>
+                    <a:pt x="2954468" y="826124"/>
+                  </a:lnTo>
+                  <a:lnTo>
+                    <a:pt x="3024813" y="857406"/>
+                  </a:lnTo>
+                  <a:lnTo>
+                    <a:pt x="3095157" y="886417"/>
+                  </a:lnTo>
+                  <a:lnTo>
+                    <a:pt x="3165502" y="913324"/>
+                  </a:lnTo>
+                  <a:lnTo>
+                    <a:pt x="3235846" y="938278"/>
+                  </a:lnTo>
+                  <a:lnTo>
+                    <a:pt x="3306191" y="957365"/>
+                  </a:lnTo>
+                  <a:lnTo>
+                    <a:pt x="3376535" y="954169"/>
+                  </a:lnTo>
+                  <a:lnTo>
+                    <a:pt x="3446880" y="950940"/>
+                  </a:lnTo>
+                  <a:lnTo>
+                    <a:pt x="3517224" y="947676"/>
+                  </a:lnTo>
+                  <a:lnTo>
+                    <a:pt x="3587569" y="944377"/>
+                  </a:lnTo>
+                  <a:lnTo>
+                    <a:pt x="3657913" y="941043"/>
+                  </a:lnTo>
+                  <a:lnTo>
+                    <a:pt x="3728257" y="937674"/>
+                  </a:lnTo>
+                  <a:lnTo>
+                    <a:pt x="3798602" y="934269"/>
+                  </a:lnTo>
+                  <a:lnTo>
+                    <a:pt x="3868946" y="930827"/>
+                  </a:lnTo>
+                  <a:lnTo>
+                    <a:pt x="3939291" y="927349"/>
+                  </a:lnTo>
+                  <a:lnTo>
+                    <a:pt x="4009635" y="923834"/>
+                  </a:lnTo>
+                  <a:lnTo>
+                    <a:pt x="4079980" y="920281"/>
+                  </a:lnTo>
+                  <a:lnTo>
+                    <a:pt x="4150324" y="916690"/>
+                  </a:lnTo>
+                  <a:lnTo>
+                    <a:pt x="4220669" y="913061"/>
+                  </a:lnTo>
+                  <a:lnTo>
+                    <a:pt x="4291013" y="909394"/>
+                  </a:lnTo>
+                  <a:lnTo>
+                    <a:pt x="4361358" y="905687"/>
+                  </a:lnTo>
+                  <a:lnTo>
+                    <a:pt x="4431702" y="901941"/>
+                  </a:lnTo>
+                  <a:lnTo>
+                    <a:pt x="4502047" y="898155"/>
+                  </a:lnTo>
+                  <a:lnTo>
+                    <a:pt x="4572391" y="894328"/>
+                  </a:lnTo>
+                  <a:lnTo>
+                    <a:pt x="4642736" y="890461"/>
+                  </a:lnTo>
+                  <a:lnTo>
+                    <a:pt x="4713080" y="886553"/>
+                  </a:lnTo>
+                  <a:lnTo>
+                    <a:pt x="4783425" y="882603"/>
+                  </a:lnTo>
+                  <a:lnTo>
+                    <a:pt x="4853769" y="878610"/>
+                  </a:lnTo>
+                  <a:lnTo>
+                    <a:pt x="4924114" y="874576"/>
+                  </a:lnTo>
+                  <a:lnTo>
+                    <a:pt x="4994458" y="870498"/>
+                  </a:lnTo>
+                  <a:lnTo>
+                    <a:pt x="5064803" y="866377"/>
+                  </a:lnTo>
+                  <a:lnTo>
+                    <a:pt x="5135147" y="862212"/>
+                  </a:lnTo>
+                  <a:lnTo>
+                    <a:pt x="5205492" y="858002"/>
+                  </a:lnTo>
+                  <a:lnTo>
+                    <a:pt x="5275836" y="853748"/>
+                  </a:lnTo>
+                  <a:lnTo>
+                    <a:pt x="5346181" y="849448"/>
+                  </a:lnTo>
+                  <a:lnTo>
+                    <a:pt x="5416525" y="845103"/>
+                  </a:lnTo>
+                  <a:lnTo>
+                    <a:pt x="5486870" y="840711"/>
+                  </a:lnTo>
+                  <a:lnTo>
+                    <a:pt x="5557214" y="836272"/>
+                  </a:lnTo>
+                  <a:lnTo>
+                    <a:pt x="5627559" y="831786"/>
+                  </a:lnTo>
+                  <a:lnTo>
+                    <a:pt x="5697903" y="827253"/>
+                  </a:lnTo>
+                  <a:lnTo>
+                    <a:pt x="5768248" y="822671"/>
+                  </a:lnTo>
+                  <a:lnTo>
+                    <a:pt x="5838592" y="818040"/>
+                  </a:lnTo>
+                  <a:lnTo>
+                    <a:pt x="5908937" y="813360"/>
+                  </a:lnTo>
+                  <a:lnTo>
+                    <a:pt x="5979281" y="808629"/>
+                  </a:lnTo>
+                  <a:lnTo>
+                    <a:pt x="6049626" y="803849"/>
+                  </a:lnTo>
+                  <a:lnTo>
+                    <a:pt x="6119970" y="799017"/>
+                  </a:lnTo>
+                  <a:lnTo>
+                    <a:pt x="6190315" y="794135"/>
+                  </a:lnTo>
+                  <a:lnTo>
+                    <a:pt x="6260659" y="789200"/>
+                  </a:lnTo>
+                  <a:lnTo>
+                    <a:pt x="6331004" y="784212"/>
+                  </a:lnTo>
+                  <a:lnTo>
+                    <a:pt x="6401348" y="779171"/>
+                  </a:lnTo>
+                  <a:lnTo>
+                    <a:pt x="6471693" y="774077"/>
+                  </a:lnTo>
+                  <a:lnTo>
+                    <a:pt x="6542037" y="768928"/>
+                  </a:lnTo>
+                  <a:lnTo>
+                    <a:pt x="6612382" y="763724"/>
+                  </a:lnTo>
+                  <a:lnTo>
+                    <a:pt x="6682726" y="758465"/>
+                  </a:lnTo>
+                  <a:lnTo>
+                    <a:pt x="6753071" y="753150"/>
+                  </a:lnTo>
+                  <a:lnTo>
+                    <a:pt x="6823415" y="747778"/>
+                  </a:lnTo>
+                  <a:lnTo>
+                    <a:pt x="6893760" y="742349"/>
+                  </a:lnTo>
+                  <a:lnTo>
+                    <a:pt x="6964104" y="736863"/>
+                  </a:lnTo>
+                  <a:lnTo>
+                    <a:pt x="6964104" y="1251318"/>
+                  </a:lnTo>
+                  <a:lnTo>
+                    <a:pt x="6893760" y="1250857"/>
+                  </a:lnTo>
+                  <a:lnTo>
+                    <a:pt x="6823415" y="1250361"/>
+                  </a:lnTo>
+                  <a:lnTo>
+                    <a:pt x="6753071" y="1249826"/>
+                  </a:lnTo>
+                  <a:lnTo>
+                    <a:pt x="6682726" y="1249248"/>
+                  </a:lnTo>
+                  <a:lnTo>
+                    <a:pt x="6612382" y="1248626"/>
+                  </a:lnTo>
+                  <a:lnTo>
+                    <a:pt x="6542037" y="1247955"/>
+                  </a:lnTo>
+                  <a:lnTo>
+                    <a:pt x="6471693" y="1247232"/>
+                  </a:lnTo>
+                  <a:lnTo>
+                    <a:pt x="6401348" y="1246452"/>
+                  </a:lnTo>
+                  <a:lnTo>
+                    <a:pt x="6331004" y="1245610"/>
+                  </a:lnTo>
+                  <a:lnTo>
+                    <a:pt x="6260659" y="1244704"/>
+                  </a:lnTo>
+                  <a:lnTo>
+                    <a:pt x="6190315" y="1243726"/>
+                  </a:lnTo>
+                  <a:lnTo>
+                    <a:pt x="6119970" y="1242671"/>
+                  </a:lnTo>
+                  <a:lnTo>
+                    <a:pt x="6049626" y="1241534"/>
+                  </a:lnTo>
+                  <a:lnTo>
+                    <a:pt x="5979281" y="1240308"/>
+                  </a:lnTo>
+                  <a:lnTo>
+                    <a:pt x="5908937" y="1238986"/>
+                  </a:lnTo>
+                  <a:lnTo>
+                    <a:pt x="5838592" y="1237561"/>
+                  </a:lnTo>
+                  <a:lnTo>
+                    <a:pt x="5768248" y="1236024"/>
+                  </a:lnTo>
+                  <a:lnTo>
+                    <a:pt x="5697903" y="1234367"/>
+                  </a:lnTo>
+                  <a:lnTo>
+                    <a:pt x="5627559" y="1232581"/>
+                  </a:lnTo>
+                  <a:lnTo>
+                    <a:pt x="5557214" y="1230654"/>
+                  </a:lnTo>
+                  <a:lnTo>
+                    <a:pt x="5486870" y="1228577"/>
+                  </a:lnTo>
+                  <a:lnTo>
+                    <a:pt x="5416525" y="1226338"/>
+                  </a:lnTo>
+                  <a:lnTo>
+                    <a:pt x="5346181" y="1223923"/>
+                  </a:lnTo>
+                  <a:lnTo>
+                    <a:pt x="5275836" y="1221319"/>
+                  </a:lnTo>
+                  <a:lnTo>
+                    <a:pt x="5205492" y="1218511"/>
+                  </a:lnTo>
+                  <a:lnTo>
+                    <a:pt x="5135147" y="1215484"/>
+                  </a:lnTo>
+                  <a:lnTo>
+                    <a:pt x="5064803" y="1212219"/>
+                  </a:lnTo>
+                  <a:lnTo>
+                    <a:pt x="4994458" y="1208700"/>
+                  </a:lnTo>
+                  <a:lnTo>
+                    <a:pt x="4924114" y="1204905"/>
+                  </a:lnTo>
+                  <a:lnTo>
+                    <a:pt x="4853769" y="1200813"/>
+                  </a:lnTo>
+                  <a:lnTo>
+                    <a:pt x="4783425" y="1196401"/>
+                  </a:lnTo>
+                  <a:lnTo>
+                    <a:pt x="4713080" y="1191644"/>
+                  </a:lnTo>
+                  <a:lnTo>
+                    <a:pt x="4642736" y="1186514"/>
+                  </a:lnTo>
+                  <a:lnTo>
+                    <a:pt x="4572391" y="1180983"/>
+                  </a:lnTo>
+                  <a:lnTo>
+                    <a:pt x="4502047" y="1175019"/>
+                  </a:lnTo>
+                  <a:lnTo>
+                    <a:pt x="4431702" y="1168589"/>
+                  </a:lnTo>
+                  <a:lnTo>
+                    <a:pt x="4361358" y="1161656"/>
+                  </a:lnTo>
+                  <a:lnTo>
+                    <a:pt x="4291013" y="1154180"/>
+                  </a:lnTo>
+                  <a:lnTo>
+                    <a:pt x="4220669" y="1146119"/>
+                  </a:lnTo>
+                  <a:lnTo>
+                    <a:pt x="4150324" y="1137427"/>
+                  </a:lnTo>
+                  <a:lnTo>
+                    <a:pt x="4079980" y="1128056"/>
+                  </a:lnTo>
+                  <a:lnTo>
+                    <a:pt x="4009635" y="1117951"/>
+                  </a:lnTo>
+                  <a:lnTo>
+                    <a:pt x="3939291" y="1107055"/>
+                  </a:lnTo>
+                  <a:lnTo>
+                    <a:pt x="3868946" y="1095307"/>
+                  </a:lnTo>
+                  <a:lnTo>
+                    <a:pt x="3798602" y="1082640"/>
+                  </a:lnTo>
+                  <a:lnTo>
+                    <a:pt x="3728257" y="1068981"/>
+                  </a:lnTo>
+                  <a:lnTo>
+                    <a:pt x="3657913" y="1054254"/>
+                  </a:lnTo>
+                  <a:lnTo>
+                    <a:pt x="3587569" y="1038374"/>
+                  </a:lnTo>
+                  <a:lnTo>
+                    <a:pt x="3517224" y="1021253"/>
+                  </a:lnTo>
+                  <a:lnTo>
+                    <a:pt x="3446880" y="1002791"/>
+                  </a:lnTo>
+                  <a:lnTo>
+                    <a:pt x="3376535" y="982885"/>
+                  </a:lnTo>
+                  <a:lnTo>
+                    <a:pt x="3306191" y="961421"/>
+                  </a:lnTo>
+                  <a:lnTo>
+                    <a:pt x="3235846" y="960526"/>
+                  </a:lnTo>
+                  <a:lnTo>
+                    <a:pt x="3165502" y="963655"/>
+                  </a:lnTo>
+                  <a:lnTo>
+                    <a:pt x="3095157" y="966750"/>
+                  </a:lnTo>
+                  <a:lnTo>
+                    <a:pt x="3024813" y="969813"/>
+                  </a:lnTo>
+                  <a:lnTo>
+                    <a:pt x="2954468" y="972843"/>
+                  </a:lnTo>
+                  <a:lnTo>
+                    <a:pt x="2884124" y="975842"/>
+                  </a:lnTo>
+                  <a:lnTo>
+                    <a:pt x="2813779" y="978809"/>
+                  </a:lnTo>
+                  <a:lnTo>
+                    <a:pt x="2743435" y="981744"/>
+                  </a:lnTo>
+                  <a:lnTo>
+                    <a:pt x="2673090" y="984649"/>
+                  </a:lnTo>
+                  <a:lnTo>
+                    <a:pt x="2602746" y="987523"/>
+                  </a:lnTo>
+                  <a:lnTo>
+                    <a:pt x="2532401" y="990367"/>
+                  </a:lnTo>
+                  <a:lnTo>
+                    <a:pt x="2462057" y="993180"/>
+                  </a:lnTo>
+                  <a:lnTo>
+                    <a:pt x="2391712" y="995964"/>
+                  </a:lnTo>
+                  <a:lnTo>
+                    <a:pt x="2321368" y="998719"/>
+                  </a:lnTo>
+                  <a:lnTo>
+                    <a:pt x="2251023" y="1001445"/>
+                  </a:lnTo>
+                  <a:lnTo>
+                    <a:pt x="2180679" y="1004142"/>
+                  </a:lnTo>
+                  <a:lnTo>
+                    <a:pt x="2110334" y="1006810"/>
+                  </a:lnTo>
+                  <a:lnTo>
+                    <a:pt x="2039990" y="1009450"/>
+                  </a:lnTo>
+                  <a:lnTo>
+                    <a:pt x="1969645" y="1012063"/>
+                  </a:lnTo>
+                  <a:lnTo>
+                    <a:pt x="1899301" y="1014648"/>
+                  </a:lnTo>
+                  <a:lnTo>
+                    <a:pt x="1828956" y="1017206"/>
+                  </a:lnTo>
+                  <a:lnTo>
+                    <a:pt x="1758612" y="1019736"/>
+                  </a:lnTo>
+                  <a:lnTo>
+                    <a:pt x="1688267" y="1022240"/>
+                  </a:lnTo>
+                  <a:lnTo>
+                    <a:pt x="1617923" y="1024718"/>
+                  </a:lnTo>
+                  <a:lnTo>
+                    <a:pt x="1547578" y="1027169"/>
+                  </a:lnTo>
+                  <a:lnTo>
+                    <a:pt x="1477234" y="1029595"/>
+                  </a:lnTo>
+                  <a:lnTo>
+                    <a:pt x="1406889" y="1031995"/>
+                  </a:lnTo>
+                  <a:lnTo>
+                    <a:pt x="1336545" y="1034370"/>
+                  </a:lnTo>
+                  <a:lnTo>
+                    <a:pt x="1266200" y="1036720"/>
+                  </a:lnTo>
+                  <a:lnTo>
+                    <a:pt x="1195856" y="1039045"/>
+                  </a:lnTo>
+                  <a:lnTo>
+                    <a:pt x="1125511" y="1041345"/>
+                  </a:lnTo>
+                  <a:lnTo>
+                    <a:pt x="1055167" y="1043621"/>
+                  </a:lnTo>
+                  <a:lnTo>
+                    <a:pt x="984822" y="1045873"/>
+                  </a:lnTo>
+                  <a:lnTo>
+                    <a:pt x="914478" y="1048102"/>
+                  </a:lnTo>
+                  <a:lnTo>
+                    <a:pt x="844133" y="1050307"/>
+                  </a:lnTo>
+                  <a:lnTo>
+                    <a:pt x="773789" y="1052488"/>
+                  </a:lnTo>
+                  <a:lnTo>
+                    <a:pt x="703444" y="1054647"/>
+                  </a:lnTo>
+                  <a:lnTo>
+                    <a:pt x="633100" y="1056783"/>
+                  </a:lnTo>
+                  <a:lnTo>
+                    <a:pt x="562755" y="1058896"/>
+                  </a:lnTo>
+                  <a:lnTo>
+                    <a:pt x="492411" y="1060987"/>
+                  </a:lnTo>
+                  <a:lnTo>
+                    <a:pt x="422066" y="1063056"/>
+                  </a:lnTo>
+                  <a:lnTo>
+                    <a:pt x="351722" y="1065104"/>
+                  </a:lnTo>
+                  <a:lnTo>
+                    <a:pt x="281377" y="1067129"/>
+                  </a:lnTo>
+                  <a:lnTo>
+                    <a:pt x="211033" y="1069134"/>
+                  </a:lnTo>
+                  <a:lnTo>
+                    <a:pt x="140688" y="1071117"/>
+                  </a:lnTo>
+                  <a:lnTo>
+                    <a:pt x="70344" y="1073079"/>
+                  </a:lnTo>
+                  <a:lnTo>
+                    <a:pt x="0" y="1075020"/>
                   </a:lnTo>
                   <a:close/>
                 </a:path>
@@ -3503,562 +3538,237 @@
         </p:sp>
         <p:sp>
           <p:nvSpPr>
-            <p:cNvPr id="21" name="pl21"/>
-            <p:cNvSpPr/>
-            <p:nvPr/>
-          </p:nvSpPr>
-          <p:spPr>
-            <a:xfrm>
-              <a:off x="3163013" y="2073503"/>
-              <a:ext cx="5099665" cy="2652888"/>
-            </a:xfrm>
-            <a:custGeom>
-              <a:avLst/>
-              <a:pathLst>
-                <a:path w="5099665" h="2652888">
-                  <a:moveTo>
-                    <a:pt x="0" y="0"/>
-                  </a:moveTo>
-                  <a:lnTo>
-                    <a:pt x="14466" y="54199"/>
-                  </a:lnTo>
-                  <a:lnTo>
-                    <a:pt x="86088" y="303069"/>
-                  </a:lnTo>
-                  <a:lnTo>
-                    <a:pt x="157711" y="533879"/>
-                  </a:lnTo>
-                  <a:lnTo>
-                    <a:pt x="229333" y="747940"/>
-                  </a:lnTo>
-                  <a:lnTo>
-                    <a:pt x="300956" y="946467"/>
-                  </a:lnTo>
-                  <a:lnTo>
-                    <a:pt x="372578" y="1130588"/>
-                  </a:lnTo>
-                  <a:lnTo>
-                    <a:pt x="444201" y="1301348"/>
-                  </a:lnTo>
-                  <a:lnTo>
-                    <a:pt x="515824" y="1459717"/>
-                  </a:lnTo>
-                  <a:lnTo>
-                    <a:pt x="587446" y="1606593"/>
-                  </a:lnTo>
-                  <a:lnTo>
-                    <a:pt x="659069" y="1742811"/>
-                  </a:lnTo>
-                  <a:lnTo>
-                    <a:pt x="730691" y="1869144"/>
-                  </a:lnTo>
-                  <a:lnTo>
-                    <a:pt x="802314" y="1986310"/>
-                  </a:lnTo>
-                  <a:lnTo>
-                    <a:pt x="873936" y="2094973"/>
-                  </a:lnTo>
-                  <a:lnTo>
-                    <a:pt x="945559" y="2195751"/>
-                  </a:lnTo>
-                  <a:lnTo>
-                    <a:pt x="1017181" y="2289216"/>
-                  </a:lnTo>
-                  <a:lnTo>
-                    <a:pt x="1088804" y="2375899"/>
-                  </a:lnTo>
-                  <a:lnTo>
-                    <a:pt x="1160426" y="2456291"/>
-                  </a:lnTo>
-                  <a:lnTo>
-                    <a:pt x="1232049" y="2530850"/>
-                  </a:lnTo>
-                  <a:lnTo>
-                    <a:pt x="1303671" y="2599998"/>
-                  </a:lnTo>
-                  <a:lnTo>
-                    <a:pt x="1375294" y="2652888"/>
-                  </a:lnTo>
-                  <a:lnTo>
-                    <a:pt x="1446916" y="2644033"/>
-                  </a:lnTo>
-                  <a:lnTo>
-                    <a:pt x="1518539" y="2635084"/>
-                  </a:lnTo>
-                  <a:lnTo>
-                    <a:pt x="1590161" y="2626040"/>
-                  </a:lnTo>
-                  <a:lnTo>
-                    <a:pt x="1661784" y="2616899"/>
-                  </a:lnTo>
-                  <a:lnTo>
-                    <a:pt x="1733406" y="2607661"/>
-                  </a:lnTo>
-                  <a:lnTo>
-                    <a:pt x="1805029" y="2598325"/>
-                  </a:lnTo>
-                  <a:lnTo>
-                    <a:pt x="1876652" y="2588888"/>
-                  </a:lnTo>
-                  <a:lnTo>
-                    <a:pt x="1948274" y="2579352"/>
-                  </a:lnTo>
-                  <a:lnTo>
-                    <a:pt x="2019897" y="2569713"/>
-                  </a:lnTo>
-                  <a:lnTo>
-                    <a:pt x="2091519" y="2559972"/>
-                  </a:lnTo>
-                  <a:lnTo>
-                    <a:pt x="2163142" y="2550128"/>
-                  </a:lnTo>
-                  <a:lnTo>
-                    <a:pt x="2234764" y="2540178"/>
-                  </a:lnTo>
-                  <a:lnTo>
-                    <a:pt x="2306387" y="2530122"/>
-                  </a:lnTo>
-                  <a:lnTo>
-                    <a:pt x="2378009" y="2519959"/>
-                  </a:lnTo>
-                  <a:lnTo>
-                    <a:pt x="2449632" y="2509688"/>
-                  </a:lnTo>
-                  <a:lnTo>
-                    <a:pt x="2521254" y="2499307"/>
-                  </a:lnTo>
-                  <a:lnTo>
-                    <a:pt x="2592877" y="2488816"/>
-                  </a:lnTo>
-                  <a:lnTo>
-                    <a:pt x="2664499" y="2478213"/>
-                  </a:lnTo>
-                  <a:lnTo>
-                    <a:pt x="2736122" y="2467497"/>
-                  </a:lnTo>
-                  <a:lnTo>
-                    <a:pt x="2807744" y="2456666"/>
-                  </a:lnTo>
-                  <a:lnTo>
-                    <a:pt x="2879367" y="2445720"/>
-                  </a:lnTo>
-                  <a:lnTo>
-                    <a:pt x="2950989" y="2434658"/>
-                  </a:lnTo>
-                  <a:lnTo>
-                    <a:pt x="3022612" y="2423478"/>
-                  </a:lnTo>
-                  <a:lnTo>
-                    <a:pt x="3094234" y="2412178"/>
-                  </a:lnTo>
-                  <a:lnTo>
-                    <a:pt x="3165857" y="2400758"/>
-                  </a:lnTo>
-                  <a:lnTo>
-                    <a:pt x="3237480" y="2389217"/>
-                  </a:lnTo>
-                  <a:lnTo>
-                    <a:pt x="3309102" y="2377552"/>
-                  </a:lnTo>
-                  <a:lnTo>
-                    <a:pt x="3380725" y="2365763"/>
-                  </a:lnTo>
-                  <a:lnTo>
-                    <a:pt x="3452347" y="2353849"/>
-                  </a:lnTo>
-                  <a:lnTo>
-                    <a:pt x="3523970" y="2341807"/>
-                  </a:lnTo>
-                  <a:lnTo>
-                    <a:pt x="3595592" y="2329637"/>
-                  </a:lnTo>
-                  <a:lnTo>
-                    <a:pt x="3667215" y="2317338"/>
-                  </a:lnTo>
-                  <a:lnTo>
-                    <a:pt x="3738837" y="2304907"/>
-                  </a:lnTo>
-                  <a:lnTo>
-                    <a:pt x="3810460" y="2292344"/>
-                  </a:lnTo>
-                  <a:lnTo>
-                    <a:pt x="3882082" y="2279647"/>
-                  </a:lnTo>
-                  <a:lnTo>
-                    <a:pt x="3953705" y="2266815"/>
-                  </a:lnTo>
-                  <a:lnTo>
-                    <a:pt x="4025327" y="2253846"/>
-                  </a:lnTo>
-                  <a:lnTo>
-                    <a:pt x="4096950" y="2240738"/>
-                  </a:lnTo>
-                  <a:lnTo>
-                    <a:pt x="4168572" y="2227491"/>
-                  </a:lnTo>
-                  <a:lnTo>
-                    <a:pt x="4240195" y="2214103"/>
-                  </a:lnTo>
-                  <a:lnTo>
-                    <a:pt x="4311817" y="2200572"/>
-                  </a:lnTo>
-                  <a:lnTo>
-                    <a:pt x="4383440" y="2186897"/>
-                  </a:lnTo>
-                  <a:lnTo>
-                    <a:pt x="4455062" y="2173077"/>
-                  </a:lnTo>
-                  <a:lnTo>
-                    <a:pt x="4526685" y="2159109"/>
-                  </a:lnTo>
-                  <a:lnTo>
-                    <a:pt x="4598308" y="2144992"/>
-                  </a:lnTo>
-                  <a:lnTo>
-                    <a:pt x="4669930" y="2130724"/>
-                  </a:lnTo>
-                  <a:lnTo>
-                    <a:pt x="4741553" y="2116305"/>
-                  </a:lnTo>
-                  <a:lnTo>
-                    <a:pt x="4813175" y="2101732"/>
-                  </a:lnTo>
-                  <a:lnTo>
-                    <a:pt x="4884798" y="2087004"/>
-                  </a:lnTo>
-                  <a:lnTo>
-                    <a:pt x="4956420" y="2072118"/>
-                  </a:lnTo>
-                  <a:lnTo>
-                    <a:pt x="5028043" y="2057074"/>
-                  </a:lnTo>
-                  <a:lnTo>
-                    <a:pt x="5099665" y="2041870"/>
-                  </a:lnTo>
-                </a:path>
-              </a:pathLst>
-            </a:custGeom>
-          </p:spPr>
-          <p:txBody>
-            <a:bodyPr/>
-            <a:lstStyle/>
-            <a:p/>
-          </p:txBody>
-        </p:sp>
-        <p:sp>
-          <p:nvSpPr>
             <p:cNvPr id="22" name="pl22"/>
             <p:cNvSpPr/>
             <p:nvPr/>
           </p:nvSpPr>
           <p:spPr>
             <a:xfrm>
-              <a:off x="1172049" y="4735152"/>
-              <a:ext cx="7090630" cy="805792"/>
+              <a:off x="3190749" y="2143092"/>
+              <a:ext cx="5008667" cy="957365"/>
             </a:xfrm>
             <a:custGeom>
               <a:avLst/>
               <a:pathLst>
-                <a:path w="7090630" h="805792">
+                <a:path w="5008667" h="957365">
                   <a:moveTo>
-                    <a:pt x="7090630" y="805792"/>
+                    <a:pt x="0" y="0"/>
                   </a:moveTo>
                   <a:lnTo>
-                    <a:pt x="7019007" y="804516"/>
-                  </a:lnTo>
-                  <a:lnTo>
-                    <a:pt x="6947385" y="803140"/>
-                  </a:lnTo>
-                  <a:lnTo>
-                    <a:pt x="6875762" y="801657"/>
-                  </a:lnTo>
-                  <a:lnTo>
-                    <a:pt x="6804139" y="800058"/>
-                  </a:lnTo>
-                  <a:lnTo>
-                    <a:pt x="6732517" y="798333"/>
-                  </a:lnTo>
-                  <a:lnTo>
-                    <a:pt x="6660894" y="796474"/>
-                  </a:lnTo>
-                  <a:lnTo>
-                    <a:pt x="6589272" y="794469"/>
-                  </a:lnTo>
-                  <a:lnTo>
-                    <a:pt x="6517649" y="792308"/>
-                  </a:lnTo>
-                  <a:lnTo>
-                    <a:pt x="6446027" y="789977"/>
-                  </a:lnTo>
-                  <a:lnTo>
-                    <a:pt x="6374404" y="787464"/>
-                  </a:lnTo>
-                  <a:lnTo>
-                    <a:pt x="6302782" y="784754"/>
-                  </a:lnTo>
-                  <a:lnTo>
-                    <a:pt x="6231159" y="781832"/>
-                  </a:lnTo>
-                  <a:lnTo>
-                    <a:pt x="6159537" y="778681"/>
-                  </a:lnTo>
-                  <a:lnTo>
-                    <a:pt x="6087914" y="775284"/>
-                  </a:lnTo>
-                  <a:lnTo>
-                    <a:pt x="6016292" y="771622"/>
-                  </a:lnTo>
-                  <a:lnTo>
-                    <a:pt x="5944669" y="767672"/>
-                  </a:lnTo>
-                  <a:lnTo>
-                    <a:pt x="5873047" y="763414"/>
-                  </a:lnTo>
-                  <a:lnTo>
-                    <a:pt x="5801424" y="758822"/>
-                  </a:lnTo>
-                  <a:lnTo>
-                    <a:pt x="5729802" y="753871"/>
-                  </a:lnTo>
-                  <a:lnTo>
-                    <a:pt x="5658179" y="748533"/>
-                  </a:lnTo>
-                  <a:lnTo>
-                    <a:pt x="5586557" y="742777"/>
-                  </a:lnTo>
-                  <a:lnTo>
-                    <a:pt x="5514934" y="736571"/>
-                  </a:lnTo>
-                  <a:lnTo>
-                    <a:pt x="5443311" y="729879"/>
-                  </a:lnTo>
-                  <a:lnTo>
-                    <a:pt x="5371689" y="722663"/>
-                  </a:lnTo>
-                  <a:lnTo>
-                    <a:pt x="5300066" y="714883"/>
-                  </a:lnTo>
-                  <a:lnTo>
-                    <a:pt x="5228444" y="706494"/>
-                  </a:lnTo>
-                  <a:lnTo>
-                    <a:pt x="5156821" y="697449"/>
-                  </a:lnTo>
-                  <a:lnTo>
-                    <a:pt x="5085199" y="687696"/>
-                  </a:lnTo>
-                  <a:lnTo>
-                    <a:pt x="5013576" y="677180"/>
-                  </a:lnTo>
-                  <a:lnTo>
-                    <a:pt x="4941954" y="665841"/>
-                  </a:lnTo>
-                  <a:lnTo>
-                    <a:pt x="4870331" y="653615"/>
-                  </a:lnTo>
-                  <a:lnTo>
-                    <a:pt x="4798709" y="640433"/>
-                  </a:lnTo>
-                  <a:lnTo>
-                    <a:pt x="4727086" y="626219"/>
-                  </a:lnTo>
-                  <a:lnTo>
-                    <a:pt x="4655464" y="610892"/>
-                  </a:lnTo>
-                  <a:lnTo>
-                    <a:pt x="4583841" y="594367"/>
-                  </a:lnTo>
-                  <a:lnTo>
-                    <a:pt x="4512219" y="576548"/>
-                  </a:lnTo>
-                  <a:lnTo>
-                    <a:pt x="4440596" y="557335"/>
-                  </a:lnTo>
-                  <a:lnTo>
-                    <a:pt x="4368974" y="536619"/>
-                  </a:lnTo>
-                  <a:lnTo>
-                    <a:pt x="4297351" y="514282"/>
-                  </a:lnTo>
-                  <a:lnTo>
-                    <a:pt x="4225729" y="490198"/>
-                  </a:lnTo>
-                  <a:lnTo>
-                    <a:pt x="4154106" y="464229"/>
-                  </a:lnTo>
-                  <a:lnTo>
-                    <a:pt x="4082483" y="436227"/>
-                  </a:lnTo>
-                  <a:lnTo>
-                    <a:pt x="4010861" y="406035"/>
-                  </a:lnTo>
-                  <a:lnTo>
-                    <a:pt x="3939238" y="373481"/>
-                  </a:lnTo>
-                  <a:lnTo>
-                    <a:pt x="3867616" y="338379"/>
-                  </a:lnTo>
-                  <a:lnTo>
-                    <a:pt x="3795993" y="300531"/>
-                  </a:lnTo>
-                  <a:lnTo>
-                    <a:pt x="3724371" y="259722"/>
-                  </a:lnTo>
-                  <a:lnTo>
-                    <a:pt x="3652748" y="215719"/>
-                  </a:lnTo>
-                  <a:lnTo>
-                    <a:pt x="3581126" y="168274"/>
-                  </a:lnTo>
-                  <a:lnTo>
-                    <a:pt x="3509503" y="117116"/>
-                  </a:lnTo>
-                  <a:lnTo>
-                    <a:pt x="3437881" y="61955"/>
-                  </a:lnTo>
-                  <a:lnTo>
-                    <a:pt x="3366258" y="2479"/>
-                  </a:lnTo>
-                  <a:lnTo>
-                    <a:pt x="3294636" y="0"/>
-                  </a:lnTo>
-                  <a:lnTo>
-                    <a:pt x="3223013" y="8668"/>
-                  </a:lnTo>
-                  <a:lnTo>
-                    <a:pt x="3151391" y="17246"/>
-                  </a:lnTo>
-                  <a:lnTo>
-                    <a:pt x="3079768" y="25733"/>
-                  </a:lnTo>
-                  <a:lnTo>
-                    <a:pt x="3008146" y="34130"/>
-                  </a:lnTo>
-                  <a:lnTo>
-                    <a:pt x="2936523" y="42439"/>
-                  </a:lnTo>
-                  <a:lnTo>
-                    <a:pt x="2864901" y="50661"/>
-                  </a:lnTo>
-                  <a:lnTo>
-                    <a:pt x="2793278" y="58795"/>
-                  </a:lnTo>
-                  <a:lnTo>
-                    <a:pt x="2721655" y="66844"/>
-                  </a:lnTo>
-                  <a:lnTo>
-                    <a:pt x="2650033" y="74808"/>
-                  </a:lnTo>
-                  <a:lnTo>
-                    <a:pt x="2578410" y="82688"/>
-                  </a:lnTo>
-                  <a:lnTo>
-                    <a:pt x="2506788" y="90485"/>
-                  </a:lnTo>
-                  <a:lnTo>
-                    <a:pt x="2435165" y="98200"/>
-                  </a:lnTo>
-                  <a:lnTo>
-                    <a:pt x="2363543" y="105833"/>
-                  </a:lnTo>
-                  <a:lnTo>
-                    <a:pt x="2291920" y="113386"/>
-                  </a:lnTo>
-                  <a:lnTo>
-                    <a:pt x="2220298" y="120859"/>
-                  </a:lnTo>
-                  <a:lnTo>
-                    <a:pt x="2148675" y="128254"/>
-                  </a:lnTo>
-                  <a:lnTo>
-                    <a:pt x="2077053" y="135570"/>
-                  </a:lnTo>
-                  <a:lnTo>
-                    <a:pt x="2005430" y="142809"/>
-                  </a:lnTo>
-                  <a:lnTo>
-                    <a:pt x="1933808" y="149972"/>
-                  </a:lnTo>
-                  <a:lnTo>
-                    <a:pt x="1862185" y="157060"/>
-                  </a:lnTo>
-                  <a:lnTo>
-                    <a:pt x="1790563" y="164072"/>
-                  </a:lnTo>
-                  <a:lnTo>
-                    <a:pt x="1718940" y="171011"/>
-                  </a:lnTo>
-                  <a:lnTo>
-                    <a:pt x="1647318" y="177877"/>
-                  </a:lnTo>
-                  <a:lnTo>
-                    <a:pt x="1575695" y="184670"/>
-                  </a:lnTo>
-                  <a:lnTo>
-                    <a:pt x="1504073" y="191391"/>
-                  </a:lnTo>
-                  <a:lnTo>
-                    <a:pt x="1432450" y="198042"/>
-                  </a:lnTo>
-                  <a:lnTo>
-                    <a:pt x="1360827" y="204623"/>
-                  </a:lnTo>
-                  <a:lnTo>
-                    <a:pt x="1289205" y="211134"/>
-                  </a:lnTo>
-                  <a:lnTo>
-                    <a:pt x="1217582" y="217576"/>
-                  </a:lnTo>
-                  <a:lnTo>
-                    <a:pt x="1145960" y="223951"/>
-                  </a:lnTo>
-                  <a:lnTo>
-                    <a:pt x="1074337" y="230258"/>
-                  </a:lnTo>
-                  <a:lnTo>
-                    <a:pt x="1002715" y="236499"/>
-                  </a:lnTo>
-                  <a:lnTo>
-                    <a:pt x="931092" y="242674"/>
-                  </a:lnTo>
-                  <a:lnTo>
-                    <a:pt x="859470" y="248784"/>
-                  </a:lnTo>
-                  <a:lnTo>
-                    <a:pt x="787847" y="254829"/>
-                  </a:lnTo>
-                  <a:lnTo>
-                    <a:pt x="716225" y="260811"/>
-                  </a:lnTo>
-                  <a:lnTo>
-                    <a:pt x="644602" y="266730"/>
-                  </a:lnTo>
-                  <a:lnTo>
-                    <a:pt x="572980" y="272586"/>
-                  </a:lnTo>
-                  <a:lnTo>
-                    <a:pt x="501357" y="278380"/>
-                  </a:lnTo>
-                  <a:lnTo>
-                    <a:pt x="429735" y="284114"/>
-                  </a:lnTo>
-                  <a:lnTo>
-                    <a:pt x="358112" y="289787"/>
-                  </a:lnTo>
-                  <a:lnTo>
-                    <a:pt x="286490" y="295400"/>
-                  </a:lnTo>
-                  <a:lnTo>
-                    <a:pt x="214867" y="300954"/>
-                  </a:lnTo>
-                  <a:lnTo>
-                    <a:pt x="143245" y="306449"/>
-                  </a:lnTo>
-                  <a:lnTo>
-                    <a:pt x="71622" y="311886"/>
-                  </a:lnTo>
-                  <a:lnTo>
-                    <a:pt x="0" y="317266"/>
+                    <a:pt x="14208" y="19559"/>
+                  </a:lnTo>
+                  <a:lnTo>
+                    <a:pt x="84552" y="109370"/>
+                  </a:lnTo>
+                  <a:lnTo>
+                    <a:pt x="154897" y="192664"/>
+                  </a:lnTo>
+                  <a:lnTo>
+                    <a:pt x="225241" y="269914"/>
+                  </a:lnTo>
+                  <a:lnTo>
+                    <a:pt x="295586" y="341557"/>
+                  </a:lnTo>
+                  <a:lnTo>
+                    <a:pt x="365930" y="408002"/>
+                  </a:lnTo>
+                  <a:lnTo>
+                    <a:pt x="436275" y="469626"/>
+                  </a:lnTo>
+                  <a:lnTo>
+                    <a:pt x="506619" y="526777"/>
+                  </a:lnTo>
+                  <a:lnTo>
+                    <a:pt x="576964" y="579781"/>
+                  </a:lnTo>
+                  <a:lnTo>
+                    <a:pt x="647308" y="628939"/>
+                  </a:lnTo>
+                  <a:lnTo>
+                    <a:pt x="717653" y="674530"/>
+                  </a:lnTo>
+                  <a:lnTo>
+                    <a:pt x="787997" y="716812"/>
+                  </a:lnTo>
+                  <a:lnTo>
+                    <a:pt x="858342" y="756026"/>
+                  </a:lnTo>
+                  <a:lnTo>
+                    <a:pt x="928686" y="792395"/>
+                  </a:lnTo>
+                  <a:lnTo>
+                    <a:pt x="999031" y="826124"/>
+                  </a:lnTo>
+                  <a:lnTo>
+                    <a:pt x="1069375" y="857406"/>
+                  </a:lnTo>
+                  <a:lnTo>
+                    <a:pt x="1139720" y="886417"/>
+                  </a:lnTo>
+                  <a:lnTo>
+                    <a:pt x="1210064" y="913324"/>
+                  </a:lnTo>
+                  <a:lnTo>
+                    <a:pt x="1280409" y="938278"/>
+                  </a:lnTo>
+                  <a:lnTo>
+                    <a:pt x="1350753" y="957365"/>
+                  </a:lnTo>
+                  <a:lnTo>
+                    <a:pt x="1421098" y="954169"/>
+                  </a:lnTo>
+                  <a:lnTo>
+                    <a:pt x="1491442" y="950940"/>
+                  </a:lnTo>
+                  <a:lnTo>
+                    <a:pt x="1561786" y="947676"/>
+                  </a:lnTo>
+                  <a:lnTo>
+                    <a:pt x="1632131" y="944377"/>
+                  </a:lnTo>
+                  <a:lnTo>
+                    <a:pt x="1702475" y="941043"/>
+                  </a:lnTo>
+                  <a:lnTo>
+                    <a:pt x="1772820" y="937674"/>
+                  </a:lnTo>
+                  <a:lnTo>
+                    <a:pt x="1843164" y="934269"/>
+                  </a:lnTo>
+                  <a:lnTo>
+                    <a:pt x="1913509" y="930827"/>
+                  </a:lnTo>
+                  <a:lnTo>
+                    <a:pt x="1983853" y="927349"/>
+                  </a:lnTo>
+                  <a:lnTo>
+                    <a:pt x="2054198" y="923834"/>
+                  </a:lnTo>
+                  <a:lnTo>
+                    <a:pt x="2124542" y="920281"/>
+                  </a:lnTo>
+                  <a:lnTo>
+                    <a:pt x="2194887" y="916690"/>
+                  </a:lnTo>
+                  <a:lnTo>
+                    <a:pt x="2265231" y="913061"/>
+                  </a:lnTo>
+                  <a:lnTo>
+                    <a:pt x="2335576" y="909394"/>
+                  </a:lnTo>
+                  <a:lnTo>
+                    <a:pt x="2405920" y="905687"/>
+                  </a:lnTo>
+                  <a:lnTo>
+                    <a:pt x="2476265" y="901941"/>
+                  </a:lnTo>
+                  <a:lnTo>
+                    <a:pt x="2546609" y="898155"/>
+                  </a:lnTo>
+                  <a:lnTo>
+                    <a:pt x="2616954" y="894328"/>
+                  </a:lnTo>
+                  <a:lnTo>
+                    <a:pt x="2687298" y="890461"/>
+                  </a:lnTo>
+                  <a:lnTo>
+                    <a:pt x="2757643" y="886553"/>
+                  </a:lnTo>
+                  <a:lnTo>
+                    <a:pt x="2827987" y="882603"/>
+                  </a:lnTo>
+                  <a:lnTo>
+                    <a:pt x="2898332" y="878610"/>
+                  </a:lnTo>
+                  <a:lnTo>
+                    <a:pt x="2968676" y="874576"/>
+                  </a:lnTo>
+                  <a:lnTo>
+                    <a:pt x="3039021" y="870498"/>
+                  </a:lnTo>
+                  <a:lnTo>
+                    <a:pt x="3109365" y="866377"/>
+                  </a:lnTo>
+                  <a:lnTo>
+                    <a:pt x="3179710" y="862212"/>
+                  </a:lnTo>
+                  <a:lnTo>
+                    <a:pt x="3250054" y="858002"/>
+                  </a:lnTo>
+                  <a:lnTo>
+                    <a:pt x="3320399" y="853748"/>
+                  </a:lnTo>
+                  <a:lnTo>
+                    <a:pt x="3390743" y="849448"/>
+                  </a:lnTo>
+                  <a:lnTo>
+                    <a:pt x="3461088" y="845103"/>
+                  </a:lnTo>
+                  <a:lnTo>
+                    <a:pt x="3531432" y="840711"/>
+                  </a:lnTo>
+                  <a:lnTo>
+                    <a:pt x="3601777" y="836272"/>
+                  </a:lnTo>
+                  <a:lnTo>
+                    <a:pt x="3672121" y="831786"/>
+                  </a:lnTo>
+                  <a:lnTo>
+                    <a:pt x="3742466" y="827253"/>
+                  </a:lnTo>
+                  <a:lnTo>
+                    <a:pt x="3812810" y="822671"/>
+                  </a:lnTo>
+                  <a:lnTo>
+                    <a:pt x="3883155" y="818040"/>
+                  </a:lnTo>
+                  <a:lnTo>
+                    <a:pt x="3953499" y="813360"/>
+                  </a:lnTo>
+                  <a:lnTo>
+                    <a:pt x="4023844" y="808629"/>
+                  </a:lnTo>
+                  <a:lnTo>
+                    <a:pt x="4094188" y="803849"/>
+                  </a:lnTo>
+                  <a:lnTo>
+                    <a:pt x="4164533" y="799017"/>
+                  </a:lnTo>
+                  <a:lnTo>
+                    <a:pt x="4234877" y="794135"/>
+                  </a:lnTo>
+                  <a:lnTo>
+                    <a:pt x="4305222" y="789200"/>
+                  </a:lnTo>
+                  <a:lnTo>
+                    <a:pt x="4375566" y="784212"/>
+                  </a:lnTo>
+                  <a:lnTo>
+                    <a:pt x="4445911" y="779171"/>
+                  </a:lnTo>
+                  <a:lnTo>
+                    <a:pt x="4516255" y="774077"/>
+                  </a:lnTo>
+                  <a:lnTo>
+                    <a:pt x="4586600" y="768928"/>
+                  </a:lnTo>
+                  <a:lnTo>
+                    <a:pt x="4656944" y="763724"/>
+                  </a:lnTo>
+                  <a:lnTo>
+                    <a:pt x="4727289" y="758465"/>
+                  </a:lnTo>
+                  <a:lnTo>
+                    <a:pt x="4797633" y="753150"/>
+                  </a:lnTo>
+                  <a:lnTo>
+                    <a:pt x="4867978" y="747778"/>
+                  </a:lnTo>
+                  <a:lnTo>
+                    <a:pt x="4938322" y="742349"/>
+                  </a:lnTo>
+                  <a:lnTo>
+                    <a:pt x="5008667" y="736863"/>
                   </a:lnTo>
                 </a:path>
               </a:pathLst>
@@ -4078,306 +3788,631 @@
           </p:nvSpPr>
           <p:spPr>
             <a:xfrm>
-              <a:off x="1351612" y="2073503"/>
-              <a:ext cx="6911066" cy="3330417"/>
+              <a:off x="1235312" y="3103618"/>
+              <a:ext cx="6964104" cy="290791"/>
             </a:xfrm>
             <a:custGeom>
               <a:avLst/>
               <a:pathLst>
-                <a:path w="6911066" h="3330417">
+                <a:path w="6964104" h="290791">
+                  <a:moveTo>
+                    <a:pt x="6964104" y="290791"/>
+                  </a:moveTo>
+                  <a:lnTo>
+                    <a:pt x="6893760" y="290331"/>
+                  </a:lnTo>
+                  <a:lnTo>
+                    <a:pt x="6823415" y="289834"/>
+                  </a:lnTo>
+                  <a:lnTo>
+                    <a:pt x="6753071" y="289299"/>
+                  </a:lnTo>
+                  <a:lnTo>
+                    <a:pt x="6682726" y="288722"/>
+                  </a:lnTo>
+                  <a:lnTo>
+                    <a:pt x="6612382" y="288099"/>
+                  </a:lnTo>
+                  <a:lnTo>
+                    <a:pt x="6542037" y="287428"/>
+                  </a:lnTo>
+                  <a:lnTo>
+                    <a:pt x="6471693" y="286705"/>
+                  </a:lnTo>
+                  <a:lnTo>
+                    <a:pt x="6401348" y="285925"/>
+                  </a:lnTo>
+                  <a:lnTo>
+                    <a:pt x="6331004" y="285084"/>
+                  </a:lnTo>
+                  <a:lnTo>
+                    <a:pt x="6260659" y="284177"/>
+                  </a:lnTo>
+                  <a:lnTo>
+                    <a:pt x="6190315" y="283199"/>
+                  </a:lnTo>
+                  <a:lnTo>
+                    <a:pt x="6119970" y="282144"/>
+                  </a:lnTo>
+                  <a:lnTo>
+                    <a:pt x="6049626" y="281007"/>
+                  </a:lnTo>
+                  <a:lnTo>
+                    <a:pt x="5979281" y="279782"/>
+                  </a:lnTo>
+                  <a:lnTo>
+                    <a:pt x="5908937" y="278460"/>
+                  </a:lnTo>
+                  <a:lnTo>
+                    <a:pt x="5838592" y="277034"/>
+                  </a:lnTo>
+                  <a:lnTo>
+                    <a:pt x="5768248" y="275498"/>
+                  </a:lnTo>
+                  <a:lnTo>
+                    <a:pt x="5697903" y="273841"/>
+                  </a:lnTo>
+                  <a:lnTo>
+                    <a:pt x="5627559" y="272054"/>
+                  </a:lnTo>
+                  <a:lnTo>
+                    <a:pt x="5557214" y="270128"/>
+                  </a:lnTo>
+                  <a:lnTo>
+                    <a:pt x="5486870" y="268050"/>
+                  </a:lnTo>
+                  <a:lnTo>
+                    <a:pt x="5416525" y="265811"/>
+                  </a:lnTo>
+                  <a:lnTo>
+                    <a:pt x="5346181" y="263396"/>
+                  </a:lnTo>
+                  <a:lnTo>
+                    <a:pt x="5275836" y="260792"/>
+                  </a:lnTo>
+                  <a:lnTo>
+                    <a:pt x="5205492" y="257984"/>
+                  </a:lnTo>
+                  <a:lnTo>
+                    <a:pt x="5135147" y="254957"/>
+                  </a:lnTo>
+                  <a:lnTo>
+                    <a:pt x="5064803" y="251693"/>
+                  </a:lnTo>
+                  <a:lnTo>
+                    <a:pt x="4994458" y="248173"/>
+                  </a:lnTo>
+                  <a:lnTo>
+                    <a:pt x="4924114" y="244378"/>
+                  </a:lnTo>
+                  <a:lnTo>
+                    <a:pt x="4853769" y="240286"/>
+                  </a:lnTo>
+                  <a:lnTo>
+                    <a:pt x="4783425" y="235874"/>
+                  </a:lnTo>
+                  <a:lnTo>
+                    <a:pt x="4713080" y="231117"/>
+                  </a:lnTo>
+                  <a:lnTo>
+                    <a:pt x="4642736" y="225987"/>
+                  </a:lnTo>
+                  <a:lnTo>
+                    <a:pt x="4572391" y="220456"/>
+                  </a:lnTo>
+                  <a:lnTo>
+                    <a:pt x="4502047" y="214493"/>
+                  </a:lnTo>
+                  <a:lnTo>
+                    <a:pt x="4431702" y="208062"/>
+                  </a:lnTo>
+                  <a:lnTo>
+                    <a:pt x="4361358" y="201129"/>
+                  </a:lnTo>
+                  <a:lnTo>
+                    <a:pt x="4291013" y="193653"/>
+                  </a:lnTo>
+                  <a:lnTo>
+                    <a:pt x="4220669" y="185592"/>
+                  </a:lnTo>
+                  <a:lnTo>
+                    <a:pt x="4150324" y="176900"/>
+                  </a:lnTo>
+                  <a:lnTo>
+                    <a:pt x="4079980" y="167529"/>
+                  </a:lnTo>
+                  <a:lnTo>
+                    <a:pt x="4009635" y="157424"/>
+                  </a:lnTo>
+                  <a:lnTo>
+                    <a:pt x="3939291" y="146528"/>
+                  </a:lnTo>
+                  <a:lnTo>
+                    <a:pt x="3868946" y="134780"/>
+                  </a:lnTo>
+                  <a:lnTo>
+                    <a:pt x="3798602" y="122113"/>
+                  </a:lnTo>
+                  <a:lnTo>
+                    <a:pt x="3728257" y="108454"/>
+                  </a:lnTo>
+                  <a:lnTo>
+                    <a:pt x="3657913" y="93727"/>
+                  </a:lnTo>
+                  <a:lnTo>
+                    <a:pt x="3587569" y="77848"/>
+                  </a:lnTo>
+                  <a:lnTo>
+                    <a:pt x="3517224" y="60726"/>
+                  </a:lnTo>
+                  <a:lnTo>
+                    <a:pt x="3446880" y="42264"/>
+                  </a:lnTo>
+                  <a:lnTo>
+                    <a:pt x="3376535" y="22358"/>
+                  </a:lnTo>
+                  <a:lnTo>
+                    <a:pt x="3306191" y="894"/>
+                  </a:lnTo>
+                  <a:lnTo>
+                    <a:pt x="3235846" y="0"/>
+                  </a:lnTo>
+                  <a:lnTo>
+                    <a:pt x="3165502" y="3128"/>
+                  </a:lnTo>
+                  <a:lnTo>
+                    <a:pt x="3095157" y="6223"/>
+                  </a:lnTo>
+                  <a:lnTo>
+                    <a:pt x="3024813" y="9286"/>
+                  </a:lnTo>
+                  <a:lnTo>
+                    <a:pt x="2954468" y="12316"/>
+                  </a:lnTo>
+                  <a:lnTo>
+                    <a:pt x="2884124" y="15315"/>
+                  </a:lnTo>
+                  <a:lnTo>
+                    <a:pt x="2813779" y="18282"/>
+                  </a:lnTo>
+                  <a:lnTo>
+                    <a:pt x="2743435" y="21217"/>
+                  </a:lnTo>
+                  <a:lnTo>
+                    <a:pt x="2673090" y="24122"/>
+                  </a:lnTo>
+                  <a:lnTo>
+                    <a:pt x="2602746" y="26996"/>
+                  </a:lnTo>
+                  <a:lnTo>
+                    <a:pt x="2532401" y="29840"/>
+                  </a:lnTo>
+                  <a:lnTo>
+                    <a:pt x="2462057" y="32654"/>
+                  </a:lnTo>
+                  <a:lnTo>
+                    <a:pt x="2391712" y="35438"/>
+                  </a:lnTo>
+                  <a:lnTo>
+                    <a:pt x="2321368" y="38192"/>
+                  </a:lnTo>
+                  <a:lnTo>
+                    <a:pt x="2251023" y="40918"/>
+                  </a:lnTo>
+                  <a:lnTo>
+                    <a:pt x="2180679" y="43615"/>
+                  </a:lnTo>
+                  <a:lnTo>
+                    <a:pt x="2110334" y="46283"/>
+                  </a:lnTo>
+                  <a:lnTo>
+                    <a:pt x="2039990" y="48924"/>
+                  </a:lnTo>
+                  <a:lnTo>
+                    <a:pt x="1969645" y="51536"/>
+                  </a:lnTo>
+                  <a:lnTo>
+                    <a:pt x="1899301" y="54121"/>
+                  </a:lnTo>
+                  <a:lnTo>
+                    <a:pt x="1828956" y="56679"/>
+                  </a:lnTo>
+                  <a:lnTo>
+                    <a:pt x="1758612" y="59210"/>
+                  </a:lnTo>
+                  <a:lnTo>
+                    <a:pt x="1688267" y="61714"/>
+                  </a:lnTo>
+                  <a:lnTo>
+                    <a:pt x="1617923" y="64191"/>
+                  </a:lnTo>
+                  <a:lnTo>
+                    <a:pt x="1547578" y="66643"/>
+                  </a:lnTo>
+                  <a:lnTo>
+                    <a:pt x="1477234" y="69068"/>
+                  </a:lnTo>
+                  <a:lnTo>
+                    <a:pt x="1406889" y="71468"/>
+                  </a:lnTo>
+                  <a:lnTo>
+                    <a:pt x="1336545" y="73843"/>
+                  </a:lnTo>
+                  <a:lnTo>
+                    <a:pt x="1266200" y="76193"/>
+                  </a:lnTo>
+                  <a:lnTo>
+                    <a:pt x="1195856" y="78518"/>
+                  </a:lnTo>
+                  <a:lnTo>
+                    <a:pt x="1125511" y="80818"/>
+                  </a:lnTo>
+                  <a:lnTo>
+                    <a:pt x="1055167" y="83094"/>
+                  </a:lnTo>
+                  <a:lnTo>
+                    <a:pt x="984822" y="85347"/>
+                  </a:lnTo>
+                  <a:lnTo>
+                    <a:pt x="914478" y="87575"/>
+                  </a:lnTo>
+                  <a:lnTo>
+                    <a:pt x="844133" y="89780"/>
+                  </a:lnTo>
+                  <a:lnTo>
+                    <a:pt x="773789" y="91962"/>
+                  </a:lnTo>
+                  <a:lnTo>
+                    <a:pt x="703444" y="94120"/>
+                  </a:lnTo>
+                  <a:lnTo>
+                    <a:pt x="633100" y="96256"/>
+                  </a:lnTo>
+                  <a:lnTo>
+                    <a:pt x="562755" y="98370"/>
+                  </a:lnTo>
+                  <a:lnTo>
+                    <a:pt x="492411" y="100461"/>
+                  </a:lnTo>
+                  <a:lnTo>
+                    <a:pt x="422066" y="102530"/>
+                  </a:lnTo>
+                  <a:lnTo>
+                    <a:pt x="351722" y="104577"/>
+                  </a:lnTo>
+                  <a:lnTo>
+                    <a:pt x="281377" y="106602"/>
+                  </a:lnTo>
+                  <a:lnTo>
+                    <a:pt x="211033" y="108607"/>
+                  </a:lnTo>
+                  <a:lnTo>
+                    <a:pt x="140688" y="110590"/>
+                  </a:lnTo>
+                  <a:lnTo>
+                    <a:pt x="70344" y="112552"/>
+                  </a:lnTo>
+                  <a:lnTo>
+                    <a:pt x="0" y="114494"/>
+                  </a:lnTo>
+                </a:path>
+              </a:pathLst>
+            </a:custGeom>
+          </p:spPr>
+          <p:txBody>
+            <a:bodyPr/>
+            <a:lstStyle/>
+            <a:p/>
+          </p:txBody>
+        </p:sp>
+        <p:sp>
+          <p:nvSpPr>
+            <p:cNvPr id="24" name="pl24"/>
+            <p:cNvSpPr/>
+            <p:nvPr/>
+          </p:nvSpPr>
+          <p:spPr>
+            <a:xfrm>
+              <a:off x="1411671" y="2143092"/>
+              <a:ext cx="6787745" cy="1201869"/>
+            </a:xfrm>
+            <a:custGeom>
+              <a:avLst/>
+              <a:pathLst>
+                <a:path w="6787745" h="1201869">
                   <a:moveTo>
                     <a:pt x="0" y="0"/>
                   </a:moveTo>
                   <a:lnTo>
-                    <a:pt x="35304" y="55588"/>
-                  </a:lnTo>
-                  <a:lnTo>
-                    <a:pt x="106926" y="164769"/>
-                  </a:lnTo>
-                  <a:lnTo>
-                    <a:pt x="178549" y="270473"/>
-                  </a:lnTo>
-                  <a:lnTo>
-                    <a:pt x="250171" y="372811"/>
-                  </a:lnTo>
-                  <a:lnTo>
-                    <a:pt x="321794" y="471889"/>
-                  </a:lnTo>
-                  <a:lnTo>
-                    <a:pt x="393417" y="567812"/>
-                  </a:lnTo>
-                  <a:lnTo>
-                    <a:pt x="465039" y="660680"/>
-                  </a:lnTo>
-                  <a:lnTo>
-                    <a:pt x="536662" y="750590"/>
-                  </a:lnTo>
-                  <a:lnTo>
-                    <a:pt x="608284" y="837637"/>
-                  </a:lnTo>
-                  <a:lnTo>
-                    <a:pt x="679907" y="921911"/>
-                  </a:lnTo>
-                  <a:lnTo>
-                    <a:pt x="751529" y="1003501"/>
-                  </a:lnTo>
-                  <a:lnTo>
-                    <a:pt x="823152" y="1082493"/>
-                  </a:lnTo>
-                  <a:lnTo>
-                    <a:pt x="894774" y="1158969"/>
-                  </a:lnTo>
-                  <a:lnTo>
-                    <a:pt x="966397" y="1233010"/>
-                  </a:lnTo>
-                  <a:lnTo>
-                    <a:pt x="1038019" y="1304692"/>
-                  </a:lnTo>
-                  <a:lnTo>
-                    <a:pt x="1109642" y="1374091"/>
-                  </a:lnTo>
-                  <a:lnTo>
-                    <a:pt x="1181264" y="1441280"/>
-                  </a:lnTo>
-                  <a:lnTo>
-                    <a:pt x="1252887" y="1506330"/>
-                  </a:lnTo>
-                  <a:lnTo>
-                    <a:pt x="1324509" y="1569307"/>
-                  </a:lnTo>
-                  <a:lnTo>
-                    <a:pt x="1396132" y="1630279"/>
-                  </a:lnTo>
-                  <a:lnTo>
-                    <a:pt x="1467754" y="1689309"/>
-                  </a:lnTo>
-                  <a:lnTo>
-                    <a:pt x="1539377" y="1746459"/>
-                  </a:lnTo>
-                  <a:lnTo>
-                    <a:pt x="1610999" y="1801789"/>
-                  </a:lnTo>
-                  <a:lnTo>
-                    <a:pt x="1682622" y="1855356"/>
-                  </a:lnTo>
-                  <a:lnTo>
-                    <a:pt x="1754245" y="1907218"/>
-                  </a:lnTo>
-                  <a:lnTo>
-                    <a:pt x="1825867" y="1957428"/>
-                  </a:lnTo>
-                  <a:lnTo>
-                    <a:pt x="1897490" y="2006039"/>
-                  </a:lnTo>
-                  <a:lnTo>
-                    <a:pt x="1969112" y="2053101"/>
-                  </a:lnTo>
-                  <a:lnTo>
-                    <a:pt x="2040735" y="2098665"/>
-                  </a:lnTo>
-                  <a:lnTo>
-                    <a:pt x="2112357" y="2142778"/>
-                  </a:lnTo>
-                  <a:lnTo>
-                    <a:pt x="2183980" y="2185485"/>
-                  </a:lnTo>
-                  <a:lnTo>
-                    <a:pt x="2255602" y="2226833"/>
-                  </a:lnTo>
-                  <a:lnTo>
-                    <a:pt x="2327225" y="2266864"/>
-                  </a:lnTo>
-                  <a:lnTo>
-                    <a:pt x="2398847" y="2305619"/>
-                  </a:lnTo>
-                  <a:lnTo>
-                    <a:pt x="2470470" y="2343141"/>
-                  </a:lnTo>
-                  <a:lnTo>
-                    <a:pt x="2542092" y="2379467"/>
-                  </a:lnTo>
-                  <a:lnTo>
-                    <a:pt x="2613715" y="2414637"/>
-                  </a:lnTo>
-                  <a:lnTo>
-                    <a:pt x="2685337" y="2448686"/>
-                  </a:lnTo>
-                  <a:lnTo>
-                    <a:pt x="2756960" y="2481651"/>
-                  </a:lnTo>
-                  <a:lnTo>
-                    <a:pt x="2828582" y="2513566"/>
-                  </a:lnTo>
-                  <a:lnTo>
-                    <a:pt x="2900205" y="2544465"/>
-                  </a:lnTo>
-                  <a:lnTo>
-                    <a:pt x="2971827" y="2574380"/>
-                  </a:lnTo>
-                  <a:lnTo>
-                    <a:pt x="3043450" y="2603341"/>
-                  </a:lnTo>
-                  <a:lnTo>
-                    <a:pt x="3115073" y="2631381"/>
-                  </a:lnTo>
-                  <a:lnTo>
-                    <a:pt x="3186695" y="2658527"/>
-                  </a:lnTo>
-                  <a:lnTo>
-                    <a:pt x="3258318" y="2684809"/>
-                  </a:lnTo>
-                  <a:lnTo>
-                    <a:pt x="3329940" y="2710254"/>
-                  </a:lnTo>
-                  <a:lnTo>
-                    <a:pt x="3401563" y="2734889"/>
-                  </a:lnTo>
-                  <a:lnTo>
-                    <a:pt x="3473185" y="2758739"/>
-                  </a:lnTo>
-                  <a:lnTo>
-                    <a:pt x="3544808" y="2781829"/>
-                  </a:lnTo>
-                  <a:lnTo>
-                    <a:pt x="3616430" y="2804184"/>
-                  </a:lnTo>
-                  <a:lnTo>
-                    <a:pt x="3688053" y="2825827"/>
-                  </a:lnTo>
-                  <a:lnTo>
-                    <a:pt x="3759675" y="2846780"/>
-                  </a:lnTo>
-                  <a:lnTo>
-                    <a:pt x="3831298" y="2867067"/>
-                  </a:lnTo>
-                  <a:lnTo>
-                    <a:pt x="3902920" y="2886707"/>
-                  </a:lnTo>
-                  <a:lnTo>
-                    <a:pt x="3974543" y="2905722"/>
-                  </a:lnTo>
-                  <a:lnTo>
-                    <a:pt x="4046165" y="2924131"/>
-                  </a:lnTo>
-                  <a:lnTo>
-                    <a:pt x="4117788" y="2941954"/>
-                  </a:lnTo>
-                  <a:lnTo>
-                    <a:pt x="4189410" y="2959209"/>
-                  </a:lnTo>
-                  <a:lnTo>
-                    <a:pt x="4261033" y="2975915"/>
-                  </a:lnTo>
-                  <a:lnTo>
-                    <a:pt x="4332655" y="2992088"/>
-                  </a:lnTo>
-                  <a:lnTo>
-                    <a:pt x="4404278" y="3007747"/>
-                  </a:lnTo>
-                  <a:lnTo>
-                    <a:pt x="4475901" y="3022907"/>
-                  </a:lnTo>
-                  <a:lnTo>
-                    <a:pt x="4547523" y="3037584"/>
-                  </a:lnTo>
-                  <a:lnTo>
-                    <a:pt x="4619146" y="3051793"/>
-                  </a:lnTo>
-                  <a:lnTo>
-                    <a:pt x="4690768" y="3065550"/>
-                  </a:lnTo>
-                  <a:lnTo>
-                    <a:pt x="4762391" y="3078869"/>
-                  </a:lnTo>
-                  <a:lnTo>
-                    <a:pt x="4834013" y="3091764"/>
-                  </a:lnTo>
-                  <a:lnTo>
-                    <a:pt x="4905636" y="3104248"/>
-                  </a:lnTo>
-                  <a:lnTo>
-                    <a:pt x="4977258" y="3116334"/>
-                  </a:lnTo>
-                  <a:lnTo>
-                    <a:pt x="5048881" y="3128036"/>
-                  </a:lnTo>
-                  <a:lnTo>
-                    <a:pt x="5120503" y="3139365"/>
-                  </a:lnTo>
-                  <a:lnTo>
-                    <a:pt x="5192126" y="3150333"/>
-                  </a:lnTo>
-                  <a:lnTo>
-                    <a:pt x="5263748" y="3160951"/>
-                  </a:lnTo>
-                  <a:lnTo>
-                    <a:pt x="5335371" y="3171232"/>
-                  </a:lnTo>
-                  <a:lnTo>
-                    <a:pt x="5406993" y="3181185"/>
-                  </a:lnTo>
-                  <a:lnTo>
-                    <a:pt x="5478616" y="3190821"/>
-                  </a:lnTo>
-                  <a:lnTo>
-                    <a:pt x="5550238" y="3200150"/>
-                  </a:lnTo>
-                  <a:lnTo>
-                    <a:pt x="5621861" y="3209182"/>
-                  </a:lnTo>
-                  <a:lnTo>
-                    <a:pt x="5693483" y="3217927"/>
-                  </a:lnTo>
-                  <a:lnTo>
-                    <a:pt x="5765106" y="3226393"/>
-                  </a:lnTo>
-                  <a:lnTo>
-                    <a:pt x="5836729" y="3234589"/>
-                  </a:lnTo>
-                  <a:lnTo>
-                    <a:pt x="5908351" y="3242524"/>
-                  </a:lnTo>
-                  <a:lnTo>
-                    <a:pt x="5979974" y="3250207"/>
-                  </a:lnTo>
-                  <a:lnTo>
-                    <a:pt x="6051596" y="3257645"/>
-                  </a:lnTo>
-                  <a:lnTo>
-                    <a:pt x="6123219" y="3264846"/>
-                  </a:lnTo>
-                  <a:lnTo>
-                    <a:pt x="6194841" y="3271817"/>
-                  </a:lnTo>
-                  <a:lnTo>
-                    <a:pt x="6266464" y="3278567"/>
-                  </a:lnTo>
-                  <a:lnTo>
-                    <a:pt x="6338086" y="3285101"/>
-                  </a:lnTo>
-                  <a:lnTo>
-                    <a:pt x="6409709" y="3291428"/>
-                  </a:lnTo>
-                  <a:lnTo>
-                    <a:pt x="6481331" y="3297553"/>
-                  </a:lnTo>
-                  <a:lnTo>
-                    <a:pt x="6552954" y="3303483"/>
-                  </a:lnTo>
-                  <a:lnTo>
-                    <a:pt x="6624576" y="3309224"/>
-                  </a:lnTo>
-                  <a:lnTo>
-                    <a:pt x="6696199" y="3314782"/>
-                  </a:lnTo>
-                  <a:lnTo>
-                    <a:pt x="6767821" y="3320164"/>
-                  </a:lnTo>
-                  <a:lnTo>
-                    <a:pt x="6839444" y="3325373"/>
-                  </a:lnTo>
-                  <a:lnTo>
-                    <a:pt x="6911066" y="3330417"/>
+                    <a:pt x="34674" y="20060"/>
+                  </a:lnTo>
+                  <a:lnTo>
+                    <a:pt x="105018" y="59461"/>
+                  </a:lnTo>
+                  <a:lnTo>
+                    <a:pt x="175363" y="97607"/>
+                  </a:lnTo>
+                  <a:lnTo>
+                    <a:pt x="245707" y="134538"/>
+                  </a:lnTo>
+                  <a:lnTo>
+                    <a:pt x="316052" y="170293"/>
+                  </a:lnTo>
+                  <a:lnTo>
+                    <a:pt x="386396" y="204910"/>
+                  </a:lnTo>
+                  <a:lnTo>
+                    <a:pt x="456741" y="238423"/>
+                  </a:lnTo>
+                  <a:lnTo>
+                    <a:pt x="527085" y="270870"/>
+                  </a:lnTo>
+                  <a:lnTo>
+                    <a:pt x="597430" y="302283"/>
+                  </a:lnTo>
+                  <a:lnTo>
+                    <a:pt x="667774" y="332696"/>
+                  </a:lnTo>
+                  <a:lnTo>
+                    <a:pt x="738119" y="362140"/>
+                  </a:lnTo>
+                  <a:lnTo>
+                    <a:pt x="808463" y="390646"/>
+                  </a:lnTo>
+                  <a:lnTo>
+                    <a:pt x="878808" y="418244"/>
+                  </a:lnTo>
+                  <a:lnTo>
+                    <a:pt x="949152" y="444964"/>
+                  </a:lnTo>
+                  <a:lnTo>
+                    <a:pt x="1019497" y="470832"/>
+                  </a:lnTo>
+                  <a:lnTo>
+                    <a:pt x="1089841" y="495877"/>
+                  </a:lnTo>
+                  <a:lnTo>
+                    <a:pt x="1160186" y="520124"/>
+                  </a:lnTo>
+                  <a:lnTo>
+                    <a:pt x="1230530" y="543599"/>
+                  </a:lnTo>
+                  <a:lnTo>
+                    <a:pt x="1300875" y="566326"/>
+                  </a:lnTo>
+                  <a:lnTo>
+                    <a:pt x="1371219" y="588329"/>
+                  </a:lnTo>
+                  <a:lnTo>
+                    <a:pt x="1441564" y="609632"/>
+                  </a:lnTo>
+                  <a:lnTo>
+                    <a:pt x="1511908" y="630256"/>
+                  </a:lnTo>
+                  <a:lnTo>
+                    <a:pt x="1582253" y="650223"/>
+                  </a:lnTo>
+                  <a:lnTo>
+                    <a:pt x="1652597" y="669554"/>
+                  </a:lnTo>
+                  <a:lnTo>
+                    <a:pt x="1722942" y="688270"/>
+                  </a:lnTo>
+                  <a:lnTo>
+                    <a:pt x="1793286" y="706389"/>
+                  </a:lnTo>
+                  <a:lnTo>
+                    <a:pt x="1863631" y="723932"/>
+                  </a:lnTo>
+                  <a:lnTo>
+                    <a:pt x="1933975" y="740916"/>
+                  </a:lnTo>
+                  <a:lnTo>
+                    <a:pt x="2004320" y="757359"/>
+                  </a:lnTo>
+                  <a:lnTo>
+                    <a:pt x="2074664" y="773278"/>
+                  </a:lnTo>
+                  <a:lnTo>
+                    <a:pt x="2145009" y="788690"/>
+                  </a:lnTo>
+                  <a:lnTo>
+                    <a:pt x="2215353" y="803611"/>
+                  </a:lnTo>
+                  <a:lnTo>
+                    <a:pt x="2285698" y="818057"/>
+                  </a:lnTo>
+                  <a:lnTo>
+                    <a:pt x="2356042" y="832043"/>
+                  </a:lnTo>
+                  <a:lnTo>
+                    <a:pt x="2426387" y="845584"/>
+                  </a:lnTo>
+                  <a:lnTo>
+                    <a:pt x="2496731" y="858693"/>
+                  </a:lnTo>
+                  <a:lnTo>
+                    <a:pt x="2567076" y="871385"/>
+                  </a:lnTo>
+                  <a:lnTo>
+                    <a:pt x="2637420" y="883673"/>
+                  </a:lnTo>
+                  <a:lnTo>
+                    <a:pt x="2707765" y="895569"/>
+                  </a:lnTo>
+                  <a:lnTo>
+                    <a:pt x="2778109" y="907087"/>
+                  </a:lnTo>
+                  <a:lnTo>
+                    <a:pt x="2848454" y="918237"/>
+                  </a:lnTo>
+                  <a:lnTo>
+                    <a:pt x="2918798" y="929033"/>
+                  </a:lnTo>
+                  <a:lnTo>
+                    <a:pt x="2989143" y="939484"/>
+                  </a:lnTo>
+                  <a:lnTo>
+                    <a:pt x="3059487" y="949603"/>
+                  </a:lnTo>
+                  <a:lnTo>
+                    <a:pt x="3129832" y="959400"/>
+                  </a:lnTo>
+                  <a:lnTo>
+                    <a:pt x="3200176" y="968884"/>
+                  </a:lnTo>
+                  <a:lnTo>
+                    <a:pt x="3270520" y="978067"/>
+                  </a:lnTo>
+                  <a:lnTo>
+                    <a:pt x="3340865" y="986957"/>
+                  </a:lnTo>
+                  <a:lnTo>
+                    <a:pt x="3411209" y="995564"/>
+                  </a:lnTo>
+                  <a:lnTo>
+                    <a:pt x="3481554" y="1003896"/>
+                  </a:lnTo>
+                  <a:lnTo>
+                    <a:pt x="3551898" y="1011964"/>
+                  </a:lnTo>
+                  <a:lnTo>
+                    <a:pt x="3622243" y="1019774"/>
+                  </a:lnTo>
+                  <a:lnTo>
+                    <a:pt x="3692587" y="1027336"/>
+                  </a:lnTo>
+                  <a:lnTo>
+                    <a:pt x="3762932" y="1034657"/>
+                  </a:lnTo>
+                  <a:lnTo>
+                    <a:pt x="3833276" y="1041744"/>
+                  </a:lnTo>
+                  <a:lnTo>
+                    <a:pt x="3903621" y="1048606"/>
+                  </a:lnTo>
+                  <a:lnTo>
+                    <a:pt x="3973965" y="1055250"/>
+                  </a:lnTo>
+                  <a:lnTo>
+                    <a:pt x="4044310" y="1061682"/>
+                  </a:lnTo>
+                  <a:lnTo>
+                    <a:pt x="4114654" y="1067909"/>
+                  </a:lnTo>
+                  <a:lnTo>
+                    <a:pt x="4184999" y="1073937"/>
+                  </a:lnTo>
+                  <a:lnTo>
+                    <a:pt x="4255343" y="1079774"/>
+                  </a:lnTo>
+                  <a:lnTo>
+                    <a:pt x="4325688" y="1085425"/>
+                  </a:lnTo>
+                  <a:lnTo>
+                    <a:pt x="4396032" y="1090896"/>
+                  </a:lnTo>
+                  <a:lnTo>
+                    <a:pt x="4466377" y="1096192"/>
+                  </a:lnTo>
+                  <a:lnTo>
+                    <a:pt x="4536721" y="1101320"/>
+                  </a:lnTo>
+                  <a:lnTo>
+                    <a:pt x="4607066" y="1106285"/>
+                  </a:lnTo>
+                  <a:lnTo>
+                    <a:pt x="4677410" y="1111091"/>
+                  </a:lnTo>
+                  <a:lnTo>
+                    <a:pt x="4747755" y="1115744"/>
+                  </a:lnTo>
+                  <a:lnTo>
+                    <a:pt x="4818099" y="1120250"/>
+                  </a:lnTo>
+                  <a:lnTo>
+                    <a:pt x="4888444" y="1124611"/>
+                  </a:lnTo>
+                  <a:lnTo>
+                    <a:pt x="4958788" y="1128834"/>
+                  </a:lnTo>
+                  <a:lnTo>
+                    <a:pt x="5029133" y="1132922"/>
+                  </a:lnTo>
+                  <a:lnTo>
+                    <a:pt x="5099477" y="1136881"/>
+                  </a:lnTo>
+                  <a:lnTo>
+                    <a:pt x="5169822" y="1140713"/>
+                  </a:lnTo>
+                  <a:lnTo>
+                    <a:pt x="5240166" y="1144423"/>
+                  </a:lnTo>
+                  <a:lnTo>
+                    <a:pt x="5310511" y="1148014"/>
+                  </a:lnTo>
+                  <a:lnTo>
+                    <a:pt x="5380855" y="1151492"/>
+                  </a:lnTo>
+                  <a:lnTo>
+                    <a:pt x="5451200" y="1154859"/>
+                  </a:lnTo>
+                  <a:lnTo>
+                    <a:pt x="5521544" y="1158118"/>
+                  </a:lnTo>
+                  <a:lnTo>
+                    <a:pt x="5591889" y="1161274"/>
+                  </a:lnTo>
+                  <a:lnTo>
+                    <a:pt x="5662233" y="1164329"/>
+                  </a:lnTo>
+                  <a:lnTo>
+                    <a:pt x="5732578" y="1167287"/>
+                  </a:lnTo>
+                  <a:lnTo>
+                    <a:pt x="5802922" y="1170150"/>
+                  </a:lnTo>
+                  <a:lnTo>
+                    <a:pt x="5873267" y="1172923"/>
+                  </a:lnTo>
+                  <a:lnTo>
+                    <a:pt x="5943611" y="1175607"/>
+                  </a:lnTo>
+                  <a:lnTo>
+                    <a:pt x="6013956" y="1178206"/>
+                  </a:lnTo>
+                  <a:lnTo>
+                    <a:pt x="6084300" y="1180722"/>
+                  </a:lnTo>
+                  <a:lnTo>
+                    <a:pt x="6154645" y="1183157"/>
+                  </a:lnTo>
+                  <a:lnTo>
+                    <a:pt x="6224989" y="1185515"/>
+                  </a:lnTo>
+                  <a:lnTo>
+                    <a:pt x="6295334" y="1187799"/>
+                  </a:lnTo>
+                  <a:lnTo>
+                    <a:pt x="6365678" y="1190009"/>
+                  </a:lnTo>
+                  <a:lnTo>
+                    <a:pt x="6436023" y="1192149"/>
+                  </a:lnTo>
+                  <a:lnTo>
+                    <a:pt x="6506367" y="1194221"/>
+                  </a:lnTo>
+                  <a:lnTo>
+                    <a:pt x="6576712" y="1196227"/>
+                  </a:lnTo>
+                  <a:lnTo>
+                    <a:pt x="6647056" y="1198169"/>
+                  </a:lnTo>
+                  <a:lnTo>
+                    <a:pt x="6717401" y="1200049"/>
+                  </a:lnTo>
+                  <a:lnTo>
+                    <a:pt x="6787745" y="1201869"/>
                   </a:lnTo>
                 </a:path>
               </a:pathLst>
@@ -4400,27 +4435,27 @@
         </p:sp>
         <p:sp>
           <p:nvSpPr>
-            <p:cNvPr id="24" name="pl24"/>
+            <p:cNvPr id="25" name="pl25"/>
             <p:cNvSpPr/>
             <p:nvPr/>
           </p:nvSpPr>
           <p:spPr>
             <a:xfrm>
-              <a:off x="817517" y="4727786"/>
-              <a:ext cx="7799693" cy="0"/>
+              <a:off x="887106" y="3100960"/>
+              <a:ext cx="7660515" cy="0"/>
             </a:xfrm>
             <a:custGeom>
               <a:avLst/>
               <a:pathLst>
-                <a:path w="7799693" h="0">
+                <a:path w="7660515" h="0">
                   <a:moveTo>
                     <a:pt x="0" y="0"/>
                   </a:moveTo>
                   <a:lnTo>
-                    <a:pt x="7799693" y="0"/>
-                  </a:lnTo>
-                  <a:lnTo>
-                    <a:pt x="7799693" y="0"/>
+                    <a:pt x="7660515" y="0"/>
+                  </a:lnTo>
+                  <a:lnTo>
+                    <a:pt x="7660515" y="0"/>
                   </a:lnTo>
                 </a:path>
               </a:pathLst>
@@ -4443,21 +4478,21 @@
         </p:sp>
         <p:sp>
           <p:nvSpPr>
-            <p:cNvPr id="25" name="pl25"/>
+            <p:cNvPr id="26" name="pl26"/>
             <p:cNvSpPr/>
             <p:nvPr/>
           </p:nvSpPr>
           <p:spPr>
             <a:xfrm>
-              <a:off x="4526955" y="2073503"/>
-              <a:ext cx="0" cy="3649639"/>
+              <a:off x="4530353" y="2143092"/>
+              <a:ext cx="0" cy="1317069"/>
             </a:xfrm>
             <a:custGeom>
               <a:avLst/>
               <a:pathLst>
-                <a:path w="0" h="3649639">
+                <a:path w="0" h="1317069">
                   <a:moveTo>
-                    <a:pt x="0" y="3649639"/>
+                    <a:pt x="0" y="1317069"/>
                   </a:moveTo>
                   <a:lnTo>
                     <a:pt x="0" y="0"/>
@@ -4486,13 +4521,13 @@
         </p:sp>
         <p:sp>
           <p:nvSpPr>
-            <p:cNvPr id="26" name="tx26"/>
+            <p:cNvPr id="27" name="tx27"/>
             <p:cNvSpPr/>
             <p:nvPr/>
           </p:nvSpPr>
           <p:spPr>
             <a:xfrm>
-              <a:off x="692708" y="5517199"/>
+              <a:off x="762297" y="3360243"/>
               <a:ext cx="62179" cy="80101"/>
             </a:xfrm>
             <a:prstGeom prst="rect">
@@ -4532,13 +4567,13 @@
         </p:sp>
         <p:sp>
           <p:nvSpPr>
-            <p:cNvPr id="27" name="tx27"/>
+            <p:cNvPr id="28" name="tx28"/>
             <p:cNvSpPr/>
             <p:nvPr/>
           </p:nvSpPr>
           <p:spPr>
             <a:xfrm>
-              <a:off x="692708" y="4687735"/>
+              <a:off x="762297" y="3060909"/>
               <a:ext cx="62179" cy="80101"/>
             </a:xfrm>
             <a:prstGeom prst="rect">
@@ -4578,13 +4613,13 @@
         </p:sp>
         <p:sp>
           <p:nvSpPr>
-            <p:cNvPr id="28" name="tx28"/>
+            <p:cNvPr id="29" name="tx29"/>
             <p:cNvSpPr/>
             <p:nvPr/>
           </p:nvSpPr>
           <p:spPr>
             <a:xfrm>
-              <a:off x="692708" y="3858272"/>
+              <a:off x="762297" y="2761575"/>
               <a:ext cx="62179" cy="80101"/>
             </a:xfrm>
             <a:prstGeom prst="rect">
@@ -4624,13 +4659,13 @@
         </p:sp>
         <p:sp>
           <p:nvSpPr>
-            <p:cNvPr id="29" name="tx29"/>
+            <p:cNvPr id="30" name="tx30"/>
             <p:cNvSpPr/>
             <p:nvPr/>
           </p:nvSpPr>
           <p:spPr>
             <a:xfrm>
-              <a:off x="692708" y="3028808"/>
+              <a:off x="762297" y="2462242"/>
               <a:ext cx="62179" cy="80101"/>
             </a:xfrm>
             <a:prstGeom prst="rect">
@@ -4670,13 +4705,13 @@
         </p:sp>
         <p:sp>
           <p:nvSpPr>
-            <p:cNvPr id="30" name="tx30"/>
+            <p:cNvPr id="31" name="tx31"/>
             <p:cNvSpPr/>
             <p:nvPr/>
           </p:nvSpPr>
           <p:spPr>
             <a:xfrm>
-              <a:off x="692708" y="2199345"/>
+              <a:off x="762297" y="2162908"/>
               <a:ext cx="62179" cy="80101"/>
             </a:xfrm>
             <a:prstGeom prst="rect">
@@ -4716,13 +4751,13 @@
         </p:sp>
         <p:sp>
           <p:nvSpPr>
-            <p:cNvPr id="31" name="tx31"/>
+            <p:cNvPr id="32" name="tx32"/>
             <p:cNvSpPr/>
             <p:nvPr/>
           </p:nvSpPr>
           <p:spPr>
             <a:xfrm>
-              <a:off x="2421884" y="5785772"/>
+              <a:off x="2461403" y="3522791"/>
               <a:ext cx="161574" cy="80101"/>
             </a:xfrm>
             <a:prstGeom prst="rect">
@@ -4762,13 +4797,13 @@
         </p:sp>
         <p:sp>
           <p:nvSpPr>
-            <p:cNvPr id="32" name="tx32"/>
+            <p:cNvPr id="33" name="tx33"/>
             <p:cNvSpPr/>
             <p:nvPr/>
           </p:nvSpPr>
           <p:spPr>
             <a:xfrm>
-              <a:off x="4542539" y="5785772"/>
+              <a:off x="4545104" y="3522791"/>
               <a:ext cx="62179" cy="80101"/>
             </a:xfrm>
             <a:prstGeom prst="rect">
@@ -4808,13 +4843,13 @@
         </p:sp>
         <p:sp>
           <p:nvSpPr>
-            <p:cNvPr id="33" name="tx33"/>
+            <p:cNvPr id="34" name="tx34"/>
             <p:cNvSpPr/>
             <p:nvPr/>
           </p:nvSpPr>
           <p:spPr>
             <a:xfrm>
-              <a:off x="6582407" y="5785772"/>
+              <a:off x="6548017" y="3522791"/>
               <a:ext cx="124358" cy="80101"/>
             </a:xfrm>
             <a:prstGeom prst="rect">
@@ -4854,13 +4889,13 @@
         </p:sp>
         <p:sp>
           <p:nvSpPr>
-            <p:cNvPr id="34" name="tx34"/>
+            <p:cNvPr id="35" name="tx35"/>
             <p:cNvSpPr/>
             <p:nvPr/>
           </p:nvSpPr>
           <p:spPr>
             <a:xfrm>
-              <a:off x="2928340" y="5925448"/>
+              <a:off x="2928340" y="3662467"/>
               <a:ext cx="3578047" cy="100218"/>
             </a:xfrm>
             <a:prstGeom prst="rect">
@@ -4900,13 +4935,13 @@
         </p:sp>
         <p:sp>
           <p:nvSpPr>
-            <p:cNvPr id="35" name="tx35"/>
+            <p:cNvPr id="36" name="tx36"/>
             <p:cNvSpPr/>
             <p:nvPr/>
           </p:nvSpPr>
           <p:spPr>
             <a:xfrm rot="-5400000">
-              <a:off x="68446" y="3848213"/>
+              <a:off x="138035" y="2751517"/>
               <a:ext cx="1016904" cy="100218"/>
             </a:xfrm>
             <a:prstGeom prst="rect">
@@ -4946,13 +4981,13 @@
         </p:sp>
         <p:sp>
           <p:nvSpPr>
-            <p:cNvPr id="36" name="tx36"/>
+            <p:cNvPr id="37" name="tx37"/>
             <p:cNvSpPr/>
             <p:nvPr/>
           </p:nvSpPr>
           <p:spPr>
             <a:xfrm>
-              <a:off x="817517" y="1896563"/>
+              <a:off x="887106" y="1966152"/>
               <a:ext cx="6385163" cy="82021"/>
             </a:xfrm>
             <a:prstGeom prst="rect">
@@ -4992,13 +5027,3578 @@
         </p:sp>
         <p:sp>
           <p:nvSpPr>
-            <p:cNvPr id="37" name="tx37"/>
+            <p:cNvPr id="38" name="tx38"/>
             <p:cNvSpPr/>
             <p:nvPr/>
           </p:nvSpPr>
           <p:spPr>
             <a:xfrm>
-              <a:off x="817517" y="1669789"/>
+              <a:off x="887106" y="1739378"/>
+              <a:ext cx="2858414" cy="120152"/>
+            </a:xfrm>
+            <a:prstGeom prst="rect">
+              <a:avLst/>
+            </a:prstGeom>
+            <a:noFill/>
+          </p:spPr>
+          <p:txBody>
+            <a:bodyPr lIns="0" rIns="0" tIns="0" bIns="0" anchorCtr="1" anchor="ctr" wrap="none"/>
+            <a:lstStyle/>
+            <a:p>
+              <a:pPr algn="l" marL="0" marR="0" indent="0">
+                <a:lnSpc>
+                  <a:spcPts val="1320"/>
+                </a:lnSpc>
+                <a:spcBef>
+                  <a:spcPts val="0"/>
+                </a:spcBef>
+                <a:spcAft>
+                  <a:spcPts val="0"/>
+                </a:spcAft>
+              </a:pPr>
+              <a:r>
+                <a:rPr sz="1320">
+                  <a:solidFill>
+                    <a:srgbClr val="000000">
+                      <a:alpha val="100000"/>
+                    </a:srgbClr>
+                  </a:solidFill>
+                  <a:latin typeface="Helvetica"/>
+                  <a:cs typeface="Helvetica"/>
+                </a:rPr>
+                <a:t>Electrolyte Abnormalities (Carboplatin)</a:t>
+              </a:r>
+            </a:p>
+          </p:txBody>
+        </p:sp>
+        <p:sp>
+          <p:nvSpPr>
+            <p:cNvPr id="39" name="pl39"/>
+            <p:cNvSpPr/>
+            <p:nvPr/>
+          </p:nvSpPr>
+          <p:spPr>
+            <a:xfrm>
+              <a:off x="887106" y="5444019"/>
+              <a:ext cx="7660515" cy="0"/>
+            </a:xfrm>
+            <a:custGeom>
+              <a:avLst/>
+              <a:pathLst>
+                <a:path w="7660515" h="0">
+                  <a:moveTo>
+                    <a:pt x="0" y="0"/>
+                  </a:moveTo>
+                  <a:lnTo>
+                    <a:pt x="7660515" y="0"/>
+                  </a:lnTo>
+                  <a:lnTo>
+                    <a:pt x="7660515" y="0"/>
+                  </a:lnTo>
+                </a:path>
+              </a:pathLst>
+            </a:custGeom>
+            <a:ln w="6775" cap="flat">
+              <a:solidFill>
+                <a:srgbClr val="EBEBEB">
+                  <a:alpha val="100000"/>
+                </a:srgbClr>
+              </a:solidFill>
+              <a:prstDash val="solid"/>
+              <a:round/>
+            </a:ln>
+          </p:spPr>
+          <p:txBody>
+            <a:bodyPr/>
+            <a:lstStyle/>
+            <a:p/>
+          </p:txBody>
+        </p:sp>
+        <p:sp>
+          <p:nvSpPr>
+            <p:cNvPr id="40" name="pl40"/>
+            <p:cNvSpPr/>
+            <p:nvPr/>
+          </p:nvSpPr>
+          <p:spPr>
+            <a:xfrm>
+              <a:off x="887106" y="5144686"/>
+              <a:ext cx="7660515" cy="0"/>
+            </a:xfrm>
+            <a:custGeom>
+              <a:avLst/>
+              <a:pathLst>
+                <a:path w="7660515" h="0">
+                  <a:moveTo>
+                    <a:pt x="0" y="0"/>
+                  </a:moveTo>
+                  <a:lnTo>
+                    <a:pt x="7660515" y="0"/>
+                  </a:lnTo>
+                  <a:lnTo>
+                    <a:pt x="7660515" y="0"/>
+                  </a:lnTo>
+                </a:path>
+              </a:pathLst>
+            </a:custGeom>
+            <a:ln w="6775" cap="flat">
+              <a:solidFill>
+                <a:srgbClr val="EBEBEB">
+                  <a:alpha val="100000"/>
+                </a:srgbClr>
+              </a:solidFill>
+              <a:prstDash val="solid"/>
+              <a:round/>
+            </a:ln>
+          </p:spPr>
+          <p:txBody>
+            <a:bodyPr/>
+            <a:lstStyle/>
+            <a:p/>
+          </p:txBody>
+        </p:sp>
+        <p:sp>
+          <p:nvSpPr>
+            <p:cNvPr id="41" name="pl41"/>
+            <p:cNvSpPr/>
+            <p:nvPr/>
+          </p:nvSpPr>
+          <p:spPr>
+            <a:xfrm>
+              <a:off x="887106" y="4845352"/>
+              <a:ext cx="7660515" cy="0"/>
+            </a:xfrm>
+            <a:custGeom>
+              <a:avLst/>
+              <a:pathLst>
+                <a:path w="7660515" h="0">
+                  <a:moveTo>
+                    <a:pt x="0" y="0"/>
+                  </a:moveTo>
+                  <a:lnTo>
+                    <a:pt x="7660515" y="0"/>
+                  </a:lnTo>
+                  <a:lnTo>
+                    <a:pt x="7660515" y="0"/>
+                  </a:lnTo>
+                </a:path>
+              </a:pathLst>
+            </a:custGeom>
+            <a:ln w="6775" cap="flat">
+              <a:solidFill>
+                <a:srgbClr val="EBEBEB">
+                  <a:alpha val="100000"/>
+                </a:srgbClr>
+              </a:solidFill>
+              <a:prstDash val="solid"/>
+              <a:round/>
+            </a:ln>
+          </p:spPr>
+          <p:txBody>
+            <a:bodyPr/>
+            <a:lstStyle/>
+            <a:p/>
+          </p:txBody>
+        </p:sp>
+        <p:sp>
+          <p:nvSpPr>
+            <p:cNvPr id="42" name="pl42"/>
+            <p:cNvSpPr/>
+            <p:nvPr/>
+          </p:nvSpPr>
+          <p:spPr>
+            <a:xfrm>
+              <a:off x="887106" y="4546018"/>
+              <a:ext cx="7660515" cy="0"/>
+            </a:xfrm>
+            <a:custGeom>
+              <a:avLst/>
+              <a:pathLst>
+                <a:path w="7660515" h="0">
+                  <a:moveTo>
+                    <a:pt x="0" y="0"/>
+                  </a:moveTo>
+                  <a:lnTo>
+                    <a:pt x="7660515" y="0"/>
+                  </a:lnTo>
+                  <a:lnTo>
+                    <a:pt x="7660515" y="0"/>
+                  </a:lnTo>
+                </a:path>
+              </a:pathLst>
+            </a:custGeom>
+            <a:ln w="6775" cap="flat">
+              <a:solidFill>
+                <a:srgbClr val="EBEBEB">
+                  <a:alpha val="100000"/>
+                </a:srgbClr>
+              </a:solidFill>
+              <a:prstDash val="solid"/>
+              <a:round/>
+            </a:ln>
+          </p:spPr>
+          <p:txBody>
+            <a:bodyPr/>
+            <a:lstStyle/>
+            <a:p/>
+          </p:txBody>
+        </p:sp>
+        <p:sp>
+          <p:nvSpPr>
+            <p:cNvPr id="43" name="pl43"/>
+            <p:cNvSpPr/>
+            <p:nvPr/>
+          </p:nvSpPr>
+          <p:spPr>
+            <a:xfrm>
+              <a:off x="914987" y="4336484"/>
+              <a:ext cx="0" cy="1317069"/>
+            </a:xfrm>
+            <a:custGeom>
+              <a:avLst/>
+              <a:pathLst>
+                <a:path w="0" h="1317069">
+                  <a:moveTo>
+                    <a:pt x="0" y="1317069"/>
+                  </a:moveTo>
+                  <a:lnTo>
+                    <a:pt x="0" y="0"/>
+                  </a:lnTo>
+                  <a:lnTo>
+                    <a:pt x="0" y="0"/>
+                  </a:lnTo>
+                </a:path>
+              </a:pathLst>
+            </a:custGeom>
+            <a:ln w="6775" cap="flat">
+              <a:solidFill>
+                <a:srgbClr val="EBEBEB">
+                  <a:alpha val="100000"/>
+                </a:srgbClr>
+              </a:solidFill>
+              <a:prstDash val="solid"/>
+              <a:round/>
+            </a:ln>
+          </p:spPr>
+          <p:txBody>
+            <a:bodyPr/>
+            <a:lstStyle/>
+            <a:p/>
+          </p:txBody>
+        </p:sp>
+        <p:sp>
+          <p:nvSpPr>
+            <p:cNvPr id="44" name="pl44"/>
+            <p:cNvSpPr/>
+            <p:nvPr/>
+          </p:nvSpPr>
+          <p:spPr>
+            <a:xfrm>
+              <a:off x="1728588" y="4336484"/>
+              <a:ext cx="0" cy="1317069"/>
+            </a:xfrm>
+            <a:custGeom>
+              <a:avLst/>
+              <a:pathLst>
+                <a:path w="0" h="1317069">
+                  <a:moveTo>
+                    <a:pt x="0" y="1317069"/>
+                  </a:moveTo>
+                  <a:lnTo>
+                    <a:pt x="0" y="0"/>
+                  </a:lnTo>
+                  <a:lnTo>
+                    <a:pt x="0" y="0"/>
+                  </a:lnTo>
+                </a:path>
+              </a:pathLst>
+            </a:custGeom>
+            <a:ln w="6775" cap="flat">
+              <a:solidFill>
+                <a:srgbClr val="EBEBEB">
+                  <a:alpha val="100000"/>
+                </a:srgbClr>
+              </a:solidFill>
+              <a:prstDash val="solid"/>
+              <a:round/>
+            </a:ln>
+          </p:spPr>
+          <p:txBody>
+            <a:bodyPr/>
+            <a:lstStyle/>
+            <a:p/>
+          </p:txBody>
+        </p:sp>
+        <p:sp>
+          <p:nvSpPr>
+            <p:cNvPr id="45" name="pl45"/>
+            <p:cNvSpPr/>
+            <p:nvPr/>
+          </p:nvSpPr>
+          <p:spPr>
+            <a:xfrm>
+              <a:off x="2542190" y="4336484"/>
+              <a:ext cx="0" cy="1317069"/>
+            </a:xfrm>
+            <a:custGeom>
+              <a:avLst/>
+              <a:pathLst>
+                <a:path w="0" h="1317069">
+                  <a:moveTo>
+                    <a:pt x="0" y="1317069"/>
+                  </a:moveTo>
+                  <a:lnTo>
+                    <a:pt x="0" y="0"/>
+                  </a:lnTo>
+                  <a:lnTo>
+                    <a:pt x="0" y="0"/>
+                  </a:lnTo>
+                </a:path>
+              </a:pathLst>
+            </a:custGeom>
+            <a:ln w="6775" cap="flat">
+              <a:solidFill>
+                <a:srgbClr val="EBEBEB">
+                  <a:alpha val="100000"/>
+                </a:srgbClr>
+              </a:solidFill>
+              <a:prstDash val="solid"/>
+              <a:round/>
+            </a:ln>
+          </p:spPr>
+          <p:txBody>
+            <a:bodyPr/>
+            <a:lstStyle/>
+            <a:p/>
+          </p:txBody>
+        </p:sp>
+        <p:sp>
+          <p:nvSpPr>
+            <p:cNvPr id="46" name="pl46"/>
+            <p:cNvSpPr/>
+            <p:nvPr/>
+          </p:nvSpPr>
+          <p:spPr>
+            <a:xfrm>
+              <a:off x="3355791" y="4336484"/>
+              <a:ext cx="0" cy="1317069"/>
+            </a:xfrm>
+            <a:custGeom>
+              <a:avLst/>
+              <a:pathLst>
+                <a:path w="0" h="1317069">
+                  <a:moveTo>
+                    <a:pt x="0" y="1317069"/>
+                  </a:moveTo>
+                  <a:lnTo>
+                    <a:pt x="0" y="0"/>
+                  </a:lnTo>
+                  <a:lnTo>
+                    <a:pt x="0" y="0"/>
+                  </a:lnTo>
+                </a:path>
+              </a:pathLst>
+            </a:custGeom>
+            <a:ln w="6775" cap="flat">
+              <a:solidFill>
+                <a:srgbClr val="EBEBEB">
+                  <a:alpha val="100000"/>
+                </a:srgbClr>
+              </a:solidFill>
+              <a:prstDash val="solid"/>
+              <a:round/>
+            </a:ln>
+          </p:spPr>
+          <p:txBody>
+            <a:bodyPr/>
+            <a:lstStyle/>
+            <a:p/>
+          </p:txBody>
+        </p:sp>
+        <p:sp>
+          <p:nvSpPr>
+            <p:cNvPr id="47" name="pl47"/>
+            <p:cNvSpPr/>
+            <p:nvPr/>
+          </p:nvSpPr>
+          <p:spPr>
+            <a:xfrm>
+              <a:off x="4169393" y="4336484"/>
+              <a:ext cx="0" cy="1317069"/>
+            </a:xfrm>
+            <a:custGeom>
+              <a:avLst/>
+              <a:pathLst>
+                <a:path w="0" h="1317069">
+                  <a:moveTo>
+                    <a:pt x="0" y="1317069"/>
+                  </a:moveTo>
+                  <a:lnTo>
+                    <a:pt x="0" y="0"/>
+                  </a:lnTo>
+                  <a:lnTo>
+                    <a:pt x="0" y="0"/>
+                  </a:lnTo>
+                </a:path>
+              </a:pathLst>
+            </a:custGeom>
+            <a:ln w="6775" cap="flat">
+              <a:solidFill>
+                <a:srgbClr val="EBEBEB">
+                  <a:alpha val="100000"/>
+                </a:srgbClr>
+              </a:solidFill>
+              <a:prstDash val="solid"/>
+              <a:round/>
+            </a:ln>
+          </p:spPr>
+          <p:txBody>
+            <a:bodyPr/>
+            <a:lstStyle/>
+            <a:p/>
+          </p:txBody>
+        </p:sp>
+        <p:sp>
+          <p:nvSpPr>
+            <p:cNvPr id="48" name="pl48"/>
+            <p:cNvSpPr/>
+            <p:nvPr/>
+          </p:nvSpPr>
+          <p:spPr>
+            <a:xfrm>
+              <a:off x="4982994" y="4336484"/>
+              <a:ext cx="0" cy="1317069"/>
+            </a:xfrm>
+            <a:custGeom>
+              <a:avLst/>
+              <a:pathLst>
+                <a:path w="0" h="1317069">
+                  <a:moveTo>
+                    <a:pt x="0" y="1317069"/>
+                  </a:moveTo>
+                  <a:lnTo>
+                    <a:pt x="0" y="0"/>
+                  </a:lnTo>
+                  <a:lnTo>
+                    <a:pt x="0" y="0"/>
+                  </a:lnTo>
+                </a:path>
+              </a:pathLst>
+            </a:custGeom>
+            <a:ln w="6775" cap="flat">
+              <a:solidFill>
+                <a:srgbClr val="EBEBEB">
+                  <a:alpha val="100000"/>
+                </a:srgbClr>
+              </a:solidFill>
+              <a:prstDash val="solid"/>
+              <a:round/>
+            </a:ln>
+          </p:spPr>
+          <p:txBody>
+            <a:bodyPr/>
+            <a:lstStyle/>
+            <a:p/>
+          </p:txBody>
+        </p:sp>
+        <p:sp>
+          <p:nvSpPr>
+            <p:cNvPr id="49" name="pl49"/>
+            <p:cNvSpPr/>
+            <p:nvPr/>
+          </p:nvSpPr>
+          <p:spPr>
+            <a:xfrm>
+              <a:off x="5796595" y="4336484"/>
+              <a:ext cx="0" cy="1317069"/>
+            </a:xfrm>
+            <a:custGeom>
+              <a:avLst/>
+              <a:pathLst>
+                <a:path w="0" h="1317069">
+                  <a:moveTo>
+                    <a:pt x="0" y="1317069"/>
+                  </a:moveTo>
+                  <a:lnTo>
+                    <a:pt x="0" y="0"/>
+                  </a:lnTo>
+                  <a:lnTo>
+                    <a:pt x="0" y="0"/>
+                  </a:lnTo>
+                </a:path>
+              </a:pathLst>
+            </a:custGeom>
+            <a:ln w="6775" cap="flat">
+              <a:solidFill>
+                <a:srgbClr val="EBEBEB">
+                  <a:alpha val="100000"/>
+                </a:srgbClr>
+              </a:solidFill>
+              <a:prstDash val="solid"/>
+              <a:round/>
+            </a:ln>
+          </p:spPr>
+          <p:txBody>
+            <a:bodyPr/>
+            <a:lstStyle/>
+            <a:p/>
+          </p:txBody>
+        </p:sp>
+        <p:sp>
+          <p:nvSpPr>
+            <p:cNvPr id="50" name="pl50"/>
+            <p:cNvSpPr/>
+            <p:nvPr/>
+          </p:nvSpPr>
+          <p:spPr>
+            <a:xfrm>
+              <a:off x="6610197" y="4336484"/>
+              <a:ext cx="0" cy="1317069"/>
+            </a:xfrm>
+            <a:custGeom>
+              <a:avLst/>
+              <a:pathLst>
+                <a:path w="0" h="1317069">
+                  <a:moveTo>
+                    <a:pt x="0" y="1317069"/>
+                  </a:moveTo>
+                  <a:lnTo>
+                    <a:pt x="0" y="0"/>
+                  </a:lnTo>
+                  <a:lnTo>
+                    <a:pt x="0" y="0"/>
+                  </a:lnTo>
+                </a:path>
+              </a:pathLst>
+            </a:custGeom>
+            <a:ln w="6775" cap="flat">
+              <a:solidFill>
+                <a:srgbClr val="EBEBEB">
+                  <a:alpha val="100000"/>
+                </a:srgbClr>
+              </a:solidFill>
+              <a:prstDash val="solid"/>
+              <a:round/>
+            </a:ln>
+          </p:spPr>
+          <p:txBody>
+            <a:bodyPr/>
+            <a:lstStyle/>
+            <a:p/>
+          </p:txBody>
+        </p:sp>
+        <p:sp>
+          <p:nvSpPr>
+            <p:cNvPr id="51" name="pl51"/>
+            <p:cNvSpPr/>
+            <p:nvPr/>
+          </p:nvSpPr>
+          <p:spPr>
+            <a:xfrm>
+              <a:off x="7423798" y="4336484"/>
+              <a:ext cx="0" cy="1317069"/>
+            </a:xfrm>
+            <a:custGeom>
+              <a:avLst/>
+              <a:pathLst>
+                <a:path w="0" h="1317069">
+                  <a:moveTo>
+                    <a:pt x="0" y="1317069"/>
+                  </a:moveTo>
+                  <a:lnTo>
+                    <a:pt x="0" y="0"/>
+                  </a:lnTo>
+                  <a:lnTo>
+                    <a:pt x="0" y="0"/>
+                  </a:lnTo>
+                </a:path>
+              </a:pathLst>
+            </a:custGeom>
+            <a:ln w="6775" cap="flat">
+              <a:solidFill>
+                <a:srgbClr val="EBEBEB">
+                  <a:alpha val="100000"/>
+                </a:srgbClr>
+              </a:solidFill>
+              <a:prstDash val="solid"/>
+              <a:round/>
+            </a:ln>
+          </p:spPr>
+          <p:txBody>
+            <a:bodyPr/>
+            <a:lstStyle/>
+            <a:p/>
+          </p:txBody>
+        </p:sp>
+        <p:sp>
+          <p:nvSpPr>
+            <p:cNvPr id="52" name="pl52"/>
+            <p:cNvSpPr/>
+            <p:nvPr/>
+          </p:nvSpPr>
+          <p:spPr>
+            <a:xfrm>
+              <a:off x="8237399" y="4336484"/>
+              <a:ext cx="0" cy="1317069"/>
+            </a:xfrm>
+            <a:custGeom>
+              <a:avLst/>
+              <a:pathLst>
+                <a:path w="0" h="1317069">
+                  <a:moveTo>
+                    <a:pt x="0" y="1317069"/>
+                  </a:moveTo>
+                  <a:lnTo>
+                    <a:pt x="0" y="0"/>
+                  </a:lnTo>
+                  <a:lnTo>
+                    <a:pt x="0" y="0"/>
+                  </a:lnTo>
+                </a:path>
+              </a:pathLst>
+            </a:custGeom>
+            <a:ln w="6775" cap="flat">
+              <a:solidFill>
+                <a:srgbClr val="EBEBEB">
+                  <a:alpha val="100000"/>
+                </a:srgbClr>
+              </a:solidFill>
+              <a:prstDash val="solid"/>
+              <a:round/>
+            </a:ln>
+          </p:spPr>
+          <p:txBody>
+            <a:bodyPr/>
+            <a:lstStyle/>
+            <a:p/>
+          </p:txBody>
+        </p:sp>
+        <p:sp>
+          <p:nvSpPr>
+            <p:cNvPr id="53" name="pl53"/>
+            <p:cNvSpPr/>
+            <p:nvPr/>
+          </p:nvSpPr>
+          <p:spPr>
+            <a:xfrm>
+              <a:off x="887106" y="5593686"/>
+              <a:ext cx="7660515" cy="0"/>
+            </a:xfrm>
+            <a:custGeom>
+              <a:avLst/>
+              <a:pathLst>
+                <a:path w="7660515" h="0">
+                  <a:moveTo>
+                    <a:pt x="0" y="0"/>
+                  </a:moveTo>
+                  <a:lnTo>
+                    <a:pt x="7660515" y="0"/>
+                  </a:lnTo>
+                  <a:lnTo>
+                    <a:pt x="7660515" y="0"/>
+                  </a:lnTo>
+                </a:path>
+              </a:pathLst>
+            </a:custGeom>
+            <a:ln w="13550" cap="flat">
+              <a:solidFill>
+                <a:srgbClr val="EBEBEB">
+                  <a:alpha val="100000"/>
+                </a:srgbClr>
+              </a:solidFill>
+              <a:prstDash val="solid"/>
+              <a:round/>
+            </a:ln>
+          </p:spPr>
+          <p:txBody>
+            <a:bodyPr/>
+            <a:lstStyle/>
+            <a:p/>
+          </p:txBody>
+        </p:sp>
+        <p:sp>
+          <p:nvSpPr>
+            <p:cNvPr id="54" name="pl54"/>
+            <p:cNvSpPr/>
+            <p:nvPr/>
+          </p:nvSpPr>
+          <p:spPr>
+            <a:xfrm>
+              <a:off x="887106" y="5294352"/>
+              <a:ext cx="7660515" cy="0"/>
+            </a:xfrm>
+            <a:custGeom>
+              <a:avLst/>
+              <a:pathLst>
+                <a:path w="7660515" h="0">
+                  <a:moveTo>
+                    <a:pt x="0" y="0"/>
+                  </a:moveTo>
+                  <a:lnTo>
+                    <a:pt x="7660515" y="0"/>
+                  </a:lnTo>
+                  <a:lnTo>
+                    <a:pt x="7660515" y="0"/>
+                  </a:lnTo>
+                </a:path>
+              </a:pathLst>
+            </a:custGeom>
+            <a:ln w="13550" cap="flat">
+              <a:solidFill>
+                <a:srgbClr val="EBEBEB">
+                  <a:alpha val="100000"/>
+                </a:srgbClr>
+              </a:solidFill>
+              <a:prstDash val="solid"/>
+              <a:round/>
+            </a:ln>
+          </p:spPr>
+          <p:txBody>
+            <a:bodyPr/>
+            <a:lstStyle/>
+            <a:p/>
+          </p:txBody>
+        </p:sp>
+        <p:sp>
+          <p:nvSpPr>
+            <p:cNvPr id="55" name="pl55"/>
+            <p:cNvSpPr/>
+            <p:nvPr/>
+          </p:nvSpPr>
+          <p:spPr>
+            <a:xfrm>
+              <a:off x="887106" y="4995019"/>
+              <a:ext cx="7660515" cy="0"/>
+            </a:xfrm>
+            <a:custGeom>
+              <a:avLst/>
+              <a:pathLst>
+                <a:path w="7660515" h="0">
+                  <a:moveTo>
+                    <a:pt x="0" y="0"/>
+                  </a:moveTo>
+                  <a:lnTo>
+                    <a:pt x="7660515" y="0"/>
+                  </a:lnTo>
+                  <a:lnTo>
+                    <a:pt x="7660515" y="0"/>
+                  </a:lnTo>
+                </a:path>
+              </a:pathLst>
+            </a:custGeom>
+            <a:ln w="13550" cap="flat">
+              <a:solidFill>
+                <a:srgbClr val="EBEBEB">
+                  <a:alpha val="100000"/>
+                </a:srgbClr>
+              </a:solidFill>
+              <a:prstDash val="solid"/>
+              <a:round/>
+            </a:ln>
+          </p:spPr>
+          <p:txBody>
+            <a:bodyPr/>
+            <a:lstStyle/>
+            <a:p/>
+          </p:txBody>
+        </p:sp>
+        <p:sp>
+          <p:nvSpPr>
+            <p:cNvPr id="56" name="pl56"/>
+            <p:cNvSpPr/>
+            <p:nvPr/>
+          </p:nvSpPr>
+          <p:spPr>
+            <a:xfrm>
+              <a:off x="887106" y="4695685"/>
+              <a:ext cx="7660515" cy="0"/>
+            </a:xfrm>
+            <a:custGeom>
+              <a:avLst/>
+              <a:pathLst>
+                <a:path w="7660515" h="0">
+                  <a:moveTo>
+                    <a:pt x="0" y="0"/>
+                  </a:moveTo>
+                  <a:lnTo>
+                    <a:pt x="7660515" y="0"/>
+                  </a:lnTo>
+                  <a:lnTo>
+                    <a:pt x="7660515" y="0"/>
+                  </a:lnTo>
+                </a:path>
+              </a:pathLst>
+            </a:custGeom>
+            <a:ln w="13550" cap="flat">
+              <a:solidFill>
+                <a:srgbClr val="EBEBEB">
+                  <a:alpha val="100000"/>
+                </a:srgbClr>
+              </a:solidFill>
+              <a:prstDash val="solid"/>
+              <a:round/>
+            </a:ln>
+          </p:spPr>
+          <p:txBody>
+            <a:bodyPr/>
+            <a:lstStyle/>
+            <a:p/>
+          </p:txBody>
+        </p:sp>
+        <p:sp>
+          <p:nvSpPr>
+            <p:cNvPr id="57" name="pl57"/>
+            <p:cNvSpPr/>
+            <p:nvPr/>
+          </p:nvSpPr>
+          <p:spPr>
+            <a:xfrm>
+              <a:off x="887106" y="4396351"/>
+              <a:ext cx="7660515" cy="0"/>
+            </a:xfrm>
+            <a:custGeom>
+              <a:avLst/>
+              <a:pathLst>
+                <a:path w="7660515" h="0">
+                  <a:moveTo>
+                    <a:pt x="0" y="0"/>
+                  </a:moveTo>
+                  <a:lnTo>
+                    <a:pt x="7660515" y="0"/>
+                  </a:lnTo>
+                  <a:lnTo>
+                    <a:pt x="7660515" y="0"/>
+                  </a:lnTo>
+                </a:path>
+              </a:pathLst>
+            </a:custGeom>
+            <a:ln w="13550" cap="flat">
+              <a:solidFill>
+                <a:srgbClr val="EBEBEB">
+                  <a:alpha val="100000"/>
+                </a:srgbClr>
+              </a:solidFill>
+              <a:prstDash val="solid"/>
+              <a:round/>
+            </a:ln>
+          </p:spPr>
+          <p:txBody>
+            <a:bodyPr/>
+            <a:lstStyle/>
+            <a:p/>
+          </p:txBody>
+        </p:sp>
+        <p:sp>
+          <p:nvSpPr>
+            <p:cNvPr id="58" name="pl58"/>
+            <p:cNvSpPr/>
+            <p:nvPr/>
+          </p:nvSpPr>
+          <p:spPr>
+            <a:xfrm>
+              <a:off x="1321788" y="4336484"/>
+              <a:ext cx="0" cy="1317069"/>
+            </a:xfrm>
+            <a:custGeom>
+              <a:avLst/>
+              <a:pathLst>
+                <a:path w="0" h="1317069">
+                  <a:moveTo>
+                    <a:pt x="0" y="1317069"/>
+                  </a:moveTo>
+                  <a:lnTo>
+                    <a:pt x="0" y="0"/>
+                  </a:lnTo>
+                  <a:lnTo>
+                    <a:pt x="0" y="0"/>
+                  </a:lnTo>
+                </a:path>
+              </a:pathLst>
+            </a:custGeom>
+            <a:ln w="13550" cap="flat">
+              <a:solidFill>
+                <a:srgbClr val="EBEBEB">
+                  <a:alpha val="100000"/>
+                </a:srgbClr>
+              </a:solidFill>
+              <a:prstDash val="solid"/>
+              <a:round/>
+            </a:ln>
+          </p:spPr>
+          <p:txBody>
+            <a:bodyPr/>
+            <a:lstStyle/>
+            <a:p/>
+          </p:txBody>
+        </p:sp>
+        <p:sp>
+          <p:nvSpPr>
+            <p:cNvPr id="59" name="pl59"/>
+            <p:cNvSpPr/>
+            <p:nvPr/>
+          </p:nvSpPr>
+          <p:spPr>
+            <a:xfrm>
+              <a:off x="2135389" y="4336484"/>
+              <a:ext cx="0" cy="1317069"/>
+            </a:xfrm>
+            <a:custGeom>
+              <a:avLst/>
+              <a:pathLst>
+                <a:path w="0" h="1317069">
+                  <a:moveTo>
+                    <a:pt x="0" y="1317069"/>
+                  </a:moveTo>
+                  <a:lnTo>
+                    <a:pt x="0" y="0"/>
+                  </a:lnTo>
+                  <a:lnTo>
+                    <a:pt x="0" y="0"/>
+                  </a:lnTo>
+                </a:path>
+              </a:pathLst>
+            </a:custGeom>
+            <a:ln w="13550" cap="flat">
+              <a:solidFill>
+                <a:srgbClr val="EBEBEB">
+                  <a:alpha val="100000"/>
+                </a:srgbClr>
+              </a:solidFill>
+              <a:prstDash val="solid"/>
+              <a:round/>
+            </a:ln>
+          </p:spPr>
+          <p:txBody>
+            <a:bodyPr/>
+            <a:lstStyle/>
+            <a:p/>
+          </p:txBody>
+        </p:sp>
+        <p:sp>
+          <p:nvSpPr>
+            <p:cNvPr id="60" name="pl60"/>
+            <p:cNvSpPr/>
+            <p:nvPr/>
+          </p:nvSpPr>
+          <p:spPr>
+            <a:xfrm>
+              <a:off x="2948991" y="4336484"/>
+              <a:ext cx="0" cy="1317069"/>
+            </a:xfrm>
+            <a:custGeom>
+              <a:avLst/>
+              <a:pathLst>
+                <a:path w="0" h="1317069">
+                  <a:moveTo>
+                    <a:pt x="0" y="1317069"/>
+                  </a:moveTo>
+                  <a:lnTo>
+                    <a:pt x="0" y="0"/>
+                  </a:lnTo>
+                  <a:lnTo>
+                    <a:pt x="0" y="0"/>
+                  </a:lnTo>
+                </a:path>
+              </a:pathLst>
+            </a:custGeom>
+            <a:ln w="13550" cap="flat">
+              <a:solidFill>
+                <a:srgbClr val="EBEBEB">
+                  <a:alpha val="100000"/>
+                </a:srgbClr>
+              </a:solidFill>
+              <a:prstDash val="solid"/>
+              <a:round/>
+            </a:ln>
+          </p:spPr>
+          <p:txBody>
+            <a:bodyPr/>
+            <a:lstStyle/>
+            <a:p/>
+          </p:txBody>
+        </p:sp>
+        <p:sp>
+          <p:nvSpPr>
+            <p:cNvPr id="61" name="pl61"/>
+            <p:cNvSpPr/>
+            <p:nvPr/>
+          </p:nvSpPr>
+          <p:spPr>
+            <a:xfrm>
+              <a:off x="3762592" y="4336484"/>
+              <a:ext cx="0" cy="1317069"/>
+            </a:xfrm>
+            <a:custGeom>
+              <a:avLst/>
+              <a:pathLst>
+                <a:path w="0" h="1317069">
+                  <a:moveTo>
+                    <a:pt x="0" y="1317069"/>
+                  </a:moveTo>
+                  <a:lnTo>
+                    <a:pt x="0" y="0"/>
+                  </a:lnTo>
+                  <a:lnTo>
+                    <a:pt x="0" y="0"/>
+                  </a:lnTo>
+                </a:path>
+              </a:pathLst>
+            </a:custGeom>
+            <a:ln w="13550" cap="flat">
+              <a:solidFill>
+                <a:srgbClr val="EBEBEB">
+                  <a:alpha val="100000"/>
+                </a:srgbClr>
+              </a:solidFill>
+              <a:prstDash val="solid"/>
+              <a:round/>
+            </a:ln>
+          </p:spPr>
+          <p:txBody>
+            <a:bodyPr/>
+            <a:lstStyle/>
+            <a:p/>
+          </p:txBody>
+        </p:sp>
+        <p:sp>
+          <p:nvSpPr>
+            <p:cNvPr id="62" name="pl62"/>
+            <p:cNvSpPr/>
+            <p:nvPr/>
+          </p:nvSpPr>
+          <p:spPr>
+            <a:xfrm>
+              <a:off x="4576193" y="4336484"/>
+              <a:ext cx="0" cy="1317069"/>
+            </a:xfrm>
+            <a:custGeom>
+              <a:avLst/>
+              <a:pathLst>
+                <a:path w="0" h="1317069">
+                  <a:moveTo>
+                    <a:pt x="0" y="1317069"/>
+                  </a:moveTo>
+                  <a:lnTo>
+                    <a:pt x="0" y="0"/>
+                  </a:lnTo>
+                  <a:lnTo>
+                    <a:pt x="0" y="0"/>
+                  </a:lnTo>
+                </a:path>
+              </a:pathLst>
+            </a:custGeom>
+            <a:ln w="13550" cap="flat">
+              <a:solidFill>
+                <a:srgbClr val="EBEBEB">
+                  <a:alpha val="100000"/>
+                </a:srgbClr>
+              </a:solidFill>
+              <a:prstDash val="solid"/>
+              <a:round/>
+            </a:ln>
+          </p:spPr>
+          <p:txBody>
+            <a:bodyPr/>
+            <a:lstStyle/>
+            <a:p/>
+          </p:txBody>
+        </p:sp>
+        <p:sp>
+          <p:nvSpPr>
+            <p:cNvPr id="63" name="pl63"/>
+            <p:cNvSpPr/>
+            <p:nvPr/>
+          </p:nvSpPr>
+          <p:spPr>
+            <a:xfrm>
+              <a:off x="5389795" y="4336484"/>
+              <a:ext cx="0" cy="1317069"/>
+            </a:xfrm>
+            <a:custGeom>
+              <a:avLst/>
+              <a:pathLst>
+                <a:path w="0" h="1317069">
+                  <a:moveTo>
+                    <a:pt x="0" y="1317069"/>
+                  </a:moveTo>
+                  <a:lnTo>
+                    <a:pt x="0" y="0"/>
+                  </a:lnTo>
+                  <a:lnTo>
+                    <a:pt x="0" y="0"/>
+                  </a:lnTo>
+                </a:path>
+              </a:pathLst>
+            </a:custGeom>
+            <a:ln w="13550" cap="flat">
+              <a:solidFill>
+                <a:srgbClr val="EBEBEB">
+                  <a:alpha val="100000"/>
+                </a:srgbClr>
+              </a:solidFill>
+              <a:prstDash val="solid"/>
+              <a:round/>
+            </a:ln>
+          </p:spPr>
+          <p:txBody>
+            <a:bodyPr/>
+            <a:lstStyle/>
+            <a:p/>
+          </p:txBody>
+        </p:sp>
+        <p:sp>
+          <p:nvSpPr>
+            <p:cNvPr id="64" name="pl64"/>
+            <p:cNvSpPr/>
+            <p:nvPr/>
+          </p:nvSpPr>
+          <p:spPr>
+            <a:xfrm>
+              <a:off x="6203396" y="4336484"/>
+              <a:ext cx="0" cy="1317069"/>
+            </a:xfrm>
+            <a:custGeom>
+              <a:avLst/>
+              <a:pathLst>
+                <a:path w="0" h="1317069">
+                  <a:moveTo>
+                    <a:pt x="0" y="1317069"/>
+                  </a:moveTo>
+                  <a:lnTo>
+                    <a:pt x="0" y="0"/>
+                  </a:lnTo>
+                  <a:lnTo>
+                    <a:pt x="0" y="0"/>
+                  </a:lnTo>
+                </a:path>
+              </a:pathLst>
+            </a:custGeom>
+            <a:ln w="13550" cap="flat">
+              <a:solidFill>
+                <a:srgbClr val="EBEBEB">
+                  <a:alpha val="100000"/>
+                </a:srgbClr>
+              </a:solidFill>
+              <a:prstDash val="solid"/>
+              <a:round/>
+            </a:ln>
+          </p:spPr>
+          <p:txBody>
+            <a:bodyPr/>
+            <a:lstStyle/>
+            <a:p/>
+          </p:txBody>
+        </p:sp>
+        <p:sp>
+          <p:nvSpPr>
+            <p:cNvPr id="65" name="pl65"/>
+            <p:cNvSpPr/>
+            <p:nvPr/>
+          </p:nvSpPr>
+          <p:spPr>
+            <a:xfrm>
+              <a:off x="7016997" y="4336484"/>
+              <a:ext cx="0" cy="1317069"/>
+            </a:xfrm>
+            <a:custGeom>
+              <a:avLst/>
+              <a:pathLst>
+                <a:path w="0" h="1317069">
+                  <a:moveTo>
+                    <a:pt x="0" y="1317069"/>
+                  </a:moveTo>
+                  <a:lnTo>
+                    <a:pt x="0" y="0"/>
+                  </a:lnTo>
+                  <a:lnTo>
+                    <a:pt x="0" y="0"/>
+                  </a:lnTo>
+                </a:path>
+              </a:pathLst>
+            </a:custGeom>
+            <a:ln w="13550" cap="flat">
+              <a:solidFill>
+                <a:srgbClr val="EBEBEB">
+                  <a:alpha val="100000"/>
+                </a:srgbClr>
+              </a:solidFill>
+              <a:prstDash val="solid"/>
+              <a:round/>
+            </a:ln>
+          </p:spPr>
+          <p:txBody>
+            <a:bodyPr/>
+            <a:lstStyle/>
+            <a:p/>
+          </p:txBody>
+        </p:sp>
+        <p:sp>
+          <p:nvSpPr>
+            <p:cNvPr id="66" name="pl66"/>
+            <p:cNvSpPr/>
+            <p:nvPr/>
+          </p:nvSpPr>
+          <p:spPr>
+            <a:xfrm>
+              <a:off x="7830599" y="4336484"/>
+              <a:ext cx="0" cy="1317069"/>
+            </a:xfrm>
+            <a:custGeom>
+              <a:avLst/>
+              <a:pathLst>
+                <a:path w="0" h="1317069">
+                  <a:moveTo>
+                    <a:pt x="0" y="1317069"/>
+                  </a:moveTo>
+                  <a:lnTo>
+                    <a:pt x="0" y="0"/>
+                  </a:lnTo>
+                  <a:lnTo>
+                    <a:pt x="0" y="0"/>
+                  </a:lnTo>
+                </a:path>
+              </a:pathLst>
+            </a:custGeom>
+            <a:ln w="13550" cap="flat">
+              <a:solidFill>
+                <a:srgbClr val="EBEBEB">
+                  <a:alpha val="100000"/>
+                </a:srgbClr>
+              </a:solidFill>
+              <a:prstDash val="solid"/>
+              <a:round/>
+            </a:ln>
+          </p:spPr>
+          <p:txBody>
+            <a:bodyPr/>
+            <a:lstStyle/>
+            <a:p/>
+          </p:txBody>
+        </p:sp>
+        <p:sp>
+          <p:nvSpPr>
+            <p:cNvPr id="67" name="pg67"/>
+            <p:cNvSpPr/>
+            <p:nvPr/>
+          </p:nvSpPr>
+          <p:spPr>
+            <a:xfrm>
+              <a:off x="1235312" y="4336484"/>
+              <a:ext cx="6964104" cy="1251318"/>
+            </a:xfrm>
+            <a:custGeom>
+              <a:avLst/>
+              <a:pathLst>
+                <a:path w="6964104" h="1251318">
+                  <a:moveTo>
+                    <a:pt x="1955437" y="0"/>
+                  </a:moveTo>
+                  <a:lnTo>
+                    <a:pt x="1969645" y="19559"/>
+                  </a:lnTo>
+                  <a:lnTo>
+                    <a:pt x="2039990" y="109370"/>
+                  </a:lnTo>
+                  <a:lnTo>
+                    <a:pt x="2110334" y="192664"/>
+                  </a:lnTo>
+                  <a:lnTo>
+                    <a:pt x="2180679" y="269914"/>
+                  </a:lnTo>
+                  <a:lnTo>
+                    <a:pt x="2251023" y="341557"/>
+                  </a:lnTo>
+                  <a:lnTo>
+                    <a:pt x="2321368" y="408002"/>
+                  </a:lnTo>
+                  <a:lnTo>
+                    <a:pt x="2391712" y="469626"/>
+                  </a:lnTo>
+                  <a:lnTo>
+                    <a:pt x="2462057" y="526777"/>
+                  </a:lnTo>
+                  <a:lnTo>
+                    <a:pt x="2532401" y="579781"/>
+                  </a:lnTo>
+                  <a:lnTo>
+                    <a:pt x="2602746" y="628939"/>
+                  </a:lnTo>
+                  <a:lnTo>
+                    <a:pt x="2673090" y="674530"/>
+                  </a:lnTo>
+                  <a:lnTo>
+                    <a:pt x="2743435" y="716812"/>
+                  </a:lnTo>
+                  <a:lnTo>
+                    <a:pt x="2813779" y="756026"/>
+                  </a:lnTo>
+                  <a:lnTo>
+                    <a:pt x="2884124" y="792395"/>
+                  </a:lnTo>
+                  <a:lnTo>
+                    <a:pt x="2954468" y="826124"/>
+                  </a:lnTo>
+                  <a:lnTo>
+                    <a:pt x="3024813" y="857406"/>
+                  </a:lnTo>
+                  <a:lnTo>
+                    <a:pt x="3095157" y="886417"/>
+                  </a:lnTo>
+                  <a:lnTo>
+                    <a:pt x="3165502" y="913324"/>
+                  </a:lnTo>
+                  <a:lnTo>
+                    <a:pt x="3235846" y="938278"/>
+                  </a:lnTo>
+                  <a:lnTo>
+                    <a:pt x="3306191" y="957365"/>
+                  </a:lnTo>
+                  <a:lnTo>
+                    <a:pt x="3376535" y="954169"/>
+                  </a:lnTo>
+                  <a:lnTo>
+                    <a:pt x="3446880" y="950940"/>
+                  </a:lnTo>
+                  <a:lnTo>
+                    <a:pt x="3517224" y="947676"/>
+                  </a:lnTo>
+                  <a:lnTo>
+                    <a:pt x="3587569" y="944377"/>
+                  </a:lnTo>
+                  <a:lnTo>
+                    <a:pt x="3657913" y="941043"/>
+                  </a:lnTo>
+                  <a:lnTo>
+                    <a:pt x="3728257" y="937674"/>
+                  </a:lnTo>
+                  <a:lnTo>
+                    <a:pt x="3798602" y="934269"/>
+                  </a:lnTo>
+                  <a:lnTo>
+                    <a:pt x="3868946" y="930827"/>
+                  </a:lnTo>
+                  <a:lnTo>
+                    <a:pt x="3939291" y="927349"/>
+                  </a:lnTo>
+                  <a:lnTo>
+                    <a:pt x="4009635" y="923834"/>
+                  </a:lnTo>
+                  <a:lnTo>
+                    <a:pt x="4079980" y="920281"/>
+                  </a:lnTo>
+                  <a:lnTo>
+                    <a:pt x="4150324" y="916690"/>
+                  </a:lnTo>
+                  <a:lnTo>
+                    <a:pt x="4220669" y="913061"/>
+                  </a:lnTo>
+                  <a:lnTo>
+                    <a:pt x="4291013" y="909394"/>
+                  </a:lnTo>
+                  <a:lnTo>
+                    <a:pt x="4361358" y="905687"/>
+                  </a:lnTo>
+                  <a:lnTo>
+                    <a:pt x="4431702" y="901941"/>
+                  </a:lnTo>
+                  <a:lnTo>
+                    <a:pt x="4502047" y="898155"/>
+                  </a:lnTo>
+                  <a:lnTo>
+                    <a:pt x="4572391" y="894328"/>
+                  </a:lnTo>
+                  <a:lnTo>
+                    <a:pt x="4642736" y="890461"/>
+                  </a:lnTo>
+                  <a:lnTo>
+                    <a:pt x="4713080" y="886553"/>
+                  </a:lnTo>
+                  <a:lnTo>
+                    <a:pt x="4783425" y="882603"/>
+                  </a:lnTo>
+                  <a:lnTo>
+                    <a:pt x="4853769" y="878610"/>
+                  </a:lnTo>
+                  <a:lnTo>
+                    <a:pt x="4924114" y="874576"/>
+                  </a:lnTo>
+                  <a:lnTo>
+                    <a:pt x="4994458" y="870498"/>
+                  </a:lnTo>
+                  <a:lnTo>
+                    <a:pt x="5064803" y="866377"/>
+                  </a:lnTo>
+                  <a:lnTo>
+                    <a:pt x="5135147" y="862212"/>
+                  </a:lnTo>
+                  <a:lnTo>
+                    <a:pt x="5205492" y="858002"/>
+                  </a:lnTo>
+                  <a:lnTo>
+                    <a:pt x="5275836" y="853748"/>
+                  </a:lnTo>
+                  <a:lnTo>
+                    <a:pt x="5346181" y="849448"/>
+                  </a:lnTo>
+                  <a:lnTo>
+                    <a:pt x="5416525" y="845103"/>
+                  </a:lnTo>
+                  <a:lnTo>
+                    <a:pt x="5486870" y="840711"/>
+                  </a:lnTo>
+                  <a:lnTo>
+                    <a:pt x="5557214" y="836272"/>
+                  </a:lnTo>
+                  <a:lnTo>
+                    <a:pt x="5627559" y="831786"/>
+                  </a:lnTo>
+                  <a:lnTo>
+                    <a:pt x="5697903" y="827253"/>
+                  </a:lnTo>
+                  <a:lnTo>
+                    <a:pt x="5768248" y="822671"/>
+                  </a:lnTo>
+                  <a:lnTo>
+                    <a:pt x="5838592" y="818040"/>
+                  </a:lnTo>
+                  <a:lnTo>
+                    <a:pt x="5908937" y="813360"/>
+                  </a:lnTo>
+                  <a:lnTo>
+                    <a:pt x="5979281" y="808629"/>
+                  </a:lnTo>
+                  <a:lnTo>
+                    <a:pt x="6049626" y="803849"/>
+                  </a:lnTo>
+                  <a:lnTo>
+                    <a:pt x="6119970" y="799017"/>
+                  </a:lnTo>
+                  <a:lnTo>
+                    <a:pt x="6190315" y="794135"/>
+                  </a:lnTo>
+                  <a:lnTo>
+                    <a:pt x="6260659" y="789200"/>
+                  </a:lnTo>
+                  <a:lnTo>
+                    <a:pt x="6331004" y="784212"/>
+                  </a:lnTo>
+                  <a:lnTo>
+                    <a:pt x="6401348" y="779171"/>
+                  </a:lnTo>
+                  <a:lnTo>
+                    <a:pt x="6471693" y="774077"/>
+                  </a:lnTo>
+                  <a:lnTo>
+                    <a:pt x="6542037" y="768928"/>
+                  </a:lnTo>
+                  <a:lnTo>
+                    <a:pt x="6612382" y="763724"/>
+                  </a:lnTo>
+                  <a:lnTo>
+                    <a:pt x="6682726" y="758465"/>
+                  </a:lnTo>
+                  <a:lnTo>
+                    <a:pt x="6753071" y="753150"/>
+                  </a:lnTo>
+                  <a:lnTo>
+                    <a:pt x="6823415" y="747778"/>
+                  </a:lnTo>
+                  <a:lnTo>
+                    <a:pt x="6893760" y="742349"/>
+                  </a:lnTo>
+                  <a:lnTo>
+                    <a:pt x="6964104" y="736863"/>
+                  </a:lnTo>
+                  <a:lnTo>
+                    <a:pt x="6964104" y="1251318"/>
+                  </a:lnTo>
+                  <a:lnTo>
+                    <a:pt x="6893760" y="1250857"/>
+                  </a:lnTo>
+                  <a:lnTo>
+                    <a:pt x="6823415" y="1250361"/>
+                  </a:lnTo>
+                  <a:lnTo>
+                    <a:pt x="6753071" y="1249826"/>
+                  </a:lnTo>
+                  <a:lnTo>
+                    <a:pt x="6682726" y="1249248"/>
+                  </a:lnTo>
+                  <a:lnTo>
+                    <a:pt x="6612382" y="1248626"/>
+                  </a:lnTo>
+                  <a:lnTo>
+                    <a:pt x="6542037" y="1247955"/>
+                  </a:lnTo>
+                  <a:lnTo>
+                    <a:pt x="6471693" y="1247232"/>
+                  </a:lnTo>
+                  <a:lnTo>
+                    <a:pt x="6401348" y="1246452"/>
+                  </a:lnTo>
+                  <a:lnTo>
+                    <a:pt x="6331004" y="1245610"/>
+                  </a:lnTo>
+                  <a:lnTo>
+                    <a:pt x="6260659" y="1244704"/>
+                  </a:lnTo>
+                  <a:lnTo>
+                    <a:pt x="6190315" y="1243726"/>
+                  </a:lnTo>
+                  <a:lnTo>
+                    <a:pt x="6119970" y="1242671"/>
+                  </a:lnTo>
+                  <a:lnTo>
+                    <a:pt x="6049626" y="1241534"/>
+                  </a:lnTo>
+                  <a:lnTo>
+                    <a:pt x="5979281" y="1240308"/>
+                  </a:lnTo>
+                  <a:lnTo>
+                    <a:pt x="5908937" y="1238986"/>
+                  </a:lnTo>
+                  <a:lnTo>
+                    <a:pt x="5838592" y="1237561"/>
+                  </a:lnTo>
+                  <a:lnTo>
+                    <a:pt x="5768248" y="1236024"/>
+                  </a:lnTo>
+                  <a:lnTo>
+                    <a:pt x="5697903" y="1234367"/>
+                  </a:lnTo>
+                  <a:lnTo>
+                    <a:pt x="5627559" y="1232581"/>
+                  </a:lnTo>
+                  <a:lnTo>
+                    <a:pt x="5557214" y="1230654"/>
+                  </a:lnTo>
+                  <a:lnTo>
+                    <a:pt x="5486870" y="1228577"/>
+                  </a:lnTo>
+                  <a:lnTo>
+                    <a:pt x="5416525" y="1226338"/>
+                  </a:lnTo>
+                  <a:lnTo>
+                    <a:pt x="5346181" y="1223923"/>
+                  </a:lnTo>
+                  <a:lnTo>
+                    <a:pt x="5275836" y="1221319"/>
+                  </a:lnTo>
+                  <a:lnTo>
+                    <a:pt x="5205492" y="1218511"/>
+                  </a:lnTo>
+                  <a:lnTo>
+                    <a:pt x="5135147" y="1215484"/>
+                  </a:lnTo>
+                  <a:lnTo>
+                    <a:pt x="5064803" y="1212219"/>
+                  </a:lnTo>
+                  <a:lnTo>
+                    <a:pt x="4994458" y="1208700"/>
+                  </a:lnTo>
+                  <a:lnTo>
+                    <a:pt x="4924114" y="1204905"/>
+                  </a:lnTo>
+                  <a:lnTo>
+                    <a:pt x="4853769" y="1200813"/>
+                  </a:lnTo>
+                  <a:lnTo>
+                    <a:pt x="4783425" y="1196401"/>
+                  </a:lnTo>
+                  <a:lnTo>
+                    <a:pt x="4713080" y="1191644"/>
+                  </a:lnTo>
+                  <a:lnTo>
+                    <a:pt x="4642736" y="1186514"/>
+                  </a:lnTo>
+                  <a:lnTo>
+                    <a:pt x="4572391" y="1180983"/>
+                  </a:lnTo>
+                  <a:lnTo>
+                    <a:pt x="4502047" y="1175019"/>
+                  </a:lnTo>
+                  <a:lnTo>
+                    <a:pt x="4431702" y="1168589"/>
+                  </a:lnTo>
+                  <a:lnTo>
+                    <a:pt x="4361358" y="1161656"/>
+                  </a:lnTo>
+                  <a:lnTo>
+                    <a:pt x="4291013" y="1154180"/>
+                  </a:lnTo>
+                  <a:lnTo>
+                    <a:pt x="4220669" y="1146119"/>
+                  </a:lnTo>
+                  <a:lnTo>
+                    <a:pt x="4150324" y="1137427"/>
+                  </a:lnTo>
+                  <a:lnTo>
+                    <a:pt x="4079980" y="1128056"/>
+                  </a:lnTo>
+                  <a:lnTo>
+                    <a:pt x="4009635" y="1117951"/>
+                  </a:lnTo>
+                  <a:lnTo>
+                    <a:pt x="3939291" y="1107055"/>
+                  </a:lnTo>
+                  <a:lnTo>
+                    <a:pt x="3868946" y="1095307"/>
+                  </a:lnTo>
+                  <a:lnTo>
+                    <a:pt x="3798602" y="1082640"/>
+                  </a:lnTo>
+                  <a:lnTo>
+                    <a:pt x="3728257" y="1068981"/>
+                  </a:lnTo>
+                  <a:lnTo>
+                    <a:pt x="3657913" y="1054254"/>
+                  </a:lnTo>
+                  <a:lnTo>
+                    <a:pt x="3587569" y="1038374"/>
+                  </a:lnTo>
+                  <a:lnTo>
+                    <a:pt x="3517224" y="1021253"/>
+                  </a:lnTo>
+                  <a:lnTo>
+                    <a:pt x="3446880" y="1002791"/>
+                  </a:lnTo>
+                  <a:lnTo>
+                    <a:pt x="3376535" y="982885"/>
+                  </a:lnTo>
+                  <a:lnTo>
+                    <a:pt x="3306191" y="961421"/>
+                  </a:lnTo>
+                  <a:lnTo>
+                    <a:pt x="3235846" y="960526"/>
+                  </a:lnTo>
+                  <a:lnTo>
+                    <a:pt x="3165502" y="963655"/>
+                  </a:lnTo>
+                  <a:lnTo>
+                    <a:pt x="3095157" y="966750"/>
+                  </a:lnTo>
+                  <a:lnTo>
+                    <a:pt x="3024813" y="969813"/>
+                  </a:lnTo>
+                  <a:lnTo>
+                    <a:pt x="2954468" y="972843"/>
+                  </a:lnTo>
+                  <a:lnTo>
+                    <a:pt x="2884124" y="975842"/>
+                  </a:lnTo>
+                  <a:lnTo>
+                    <a:pt x="2813779" y="978809"/>
+                  </a:lnTo>
+                  <a:lnTo>
+                    <a:pt x="2743435" y="981744"/>
+                  </a:lnTo>
+                  <a:lnTo>
+                    <a:pt x="2673090" y="984649"/>
+                  </a:lnTo>
+                  <a:lnTo>
+                    <a:pt x="2602746" y="987523"/>
+                  </a:lnTo>
+                  <a:lnTo>
+                    <a:pt x="2532401" y="990367"/>
+                  </a:lnTo>
+                  <a:lnTo>
+                    <a:pt x="2462057" y="993180"/>
+                  </a:lnTo>
+                  <a:lnTo>
+                    <a:pt x="2391712" y="995964"/>
+                  </a:lnTo>
+                  <a:lnTo>
+                    <a:pt x="2321368" y="998719"/>
+                  </a:lnTo>
+                  <a:lnTo>
+                    <a:pt x="2251023" y="1001445"/>
+                  </a:lnTo>
+                  <a:lnTo>
+                    <a:pt x="2180679" y="1004142"/>
+                  </a:lnTo>
+                  <a:lnTo>
+                    <a:pt x="2110334" y="1006810"/>
+                  </a:lnTo>
+                  <a:lnTo>
+                    <a:pt x="2039990" y="1009450"/>
+                  </a:lnTo>
+                  <a:lnTo>
+                    <a:pt x="1969645" y="1012063"/>
+                  </a:lnTo>
+                  <a:lnTo>
+                    <a:pt x="1899301" y="1014648"/>
+                  </a:lnTo>
+                  <a:lnTo>
+                    <a:pt x="1828956" y="1017206"/>
+                  </a:lnTo>
+                  <a:lnTo>
+                    <a:pt x="1758612" y="1019736"/>
+                  </a:lnTo>
+                  <a:lnTo>
+                    <a:pt x="1688267" y="1022240"/>
+                  </a:lnTo>
+                  <a:lnTo>
+                    <a:pt x="1617923" y="1024718"/>
+                  </a:lnTo>
+                  <a:lnTo>
+                    <a:pt x="1547578" y="1027169"/>
+                  </a:lnTo>
+                  <a:lnTo>
+                    <a:pt x="1477234" y="1029595"/>
+                  </a:lnTo>
+                  <a:lnTo>
+                    <a:pt x="1406889" y="1031995"/>
+                  </a:lnTo>
+                  <a:lnTo>
+                    <a:pt x="1336545" y="1034370"/>
+                  </a:lnTo>
+                  <a:lnTo>
+                    <a:pt x="1266200" y="1036720"/>
+                  </a:lnTo>
+                  <a:lnTo>
+                    <a:pt x="1195856" y="1039045"/>
+                  </a:lnTo>
+                  <a:lnTo>
+                    <a:pt x="1125511" y="1041345"/>
+                  </a:lnTo>
+                  <a:lnTo>
+                    <a:pt x="1055167" y="1043621"/>
+                  </a:lnTo>
+                  <a:lnTo>
+                    <a:pt x="984822" y="1045873"/>
+                  </a:lnTo>
+                  <a:lnTo>
+                    <a:pt x="914478" y="1048102"/>
+                  </a:lnTo>
+                  <a:lnTo>
+                    <a:pt x="844133" y="1050307"/>
+                  </a:lnTo>
+                  <a:lnTo>
+                    <a:pt x="773789" y="1052488"/>
+                  </a:lnTo>
+                  <a:lnTo>
+                    <a:pt x="703444" y="1054647"/>
+                  </a:lnTo>
+                  <a:lnTo>
+                    <a:pt x="633100" y="1056783"/>
+                  </a:lnTo>
+                  <a:lnTo>
+                    <a:pt x="562755" y="1058896"/>
+                  </a:lnTo>
+                  <a:lnTo>
+                    <a:pt x="492411" y="1060987"/>
+                  </a:lnTo>
+                  <a:lnTo>
+                    <a:pt x="422066" y="1063056"/>
+                  </a:lnTo>
+                  <a:lnTo>
+                    <a:pt x="351722" y="1065104"/>
+                  </a:lnTo>
+                  <a:lnTo>
+                    <a:pt x="281377" y="1067129"/>
+                  </a:lnTo>
+                  <a:lnTo>
+                    <a:pt x="211033" y="1069134"/>
+                  </a:lnTo>
+                  <a:lnTo>
+                    <a:pt x="140688" y="1071117"/>
+                  </a:lnTo>
+                  <a:lnTo>
+                    <a:pt x="70344" y="1073079"/>
+                  </a:lnTo>
+                  <a:lnTo>
+                    <a:pt x="0" y="1075020"/>
+                  </a:lnTo>
+                  <a:close/>
+                </a:path>
+              </a:pathLst>
+            </a:custGeom>
+            <a:solidFill>
+              <a:srgbClr val="FF8C00">
+                <a:alpha val="20000"/>
+              </a:srgbClr>
+            </a:solidFill>
+          </p:spPr>
+          <p:txBody>
+            <a:bodyPr/>
+            <a:lstStyle/>
+            <a:p/>
+          </p:txBody>
+        </p:sp>
+        <p:sp>
+          <p:nvSpPr>
+            <p:cNvPr id="68" name="pl68"/>
+            <p:cNvSpPr/>
+            <p:nvPr/>
+          </p:nvSpPr>
+          <p:spPr>
+            <a:xfrm>
+              <a:off x="3190749" y="4336484"/>
+              <a:ext cx="5008667" cy="957365"/>
+            </a:xfrm>
+            <a:custGeom>
+              <a:avLst/>
+              <a:pathLst>
+                <a:path w="5008667" h="957365">
+                  <a:moveTo>
+                    <a:pt x="0" y="0"/>
+                  </a:moveTo>
+                  <a:lnTo>
+                    <a:pt x="14208" y="19559"/>
+                  </a:lnTo>
+                  <a:lnTo>
+                    <a:pt x="84552" y="109370"/>
+                  </a:lnTo>
+                  <a:lnTo>
+                    <a:pt x="154897" y="192664"/>
+                  </a:lnTo>
+                  <a:lnTo>
+                    <a:pt x="225241" y="269914"/>
+                  </a:lnTo>
+                  <a:lnTo>
+                    <a:pt x="295586" y="341557"/>
+                  </a:lnTo>
+                  <a:lnTo>
+                    <a:pt x="365930" y="408002"/>
+                  </a:lnTo>
+                  <a:lnTo>
+                    <a:pt x="436275" y="469626"/>
+                  </a:lnTo>
+                  <a:lnTo>
+                    <a:pt x="506619" y="526777"/>
+                  </a:lnTo>
+                  <a:lnTo>
+                    <a:pt x="576964" y="579781"/>
+                  </a:lnTo>
+                  <a:lnTo>
+                    <a:pt x="647308" y="628939"/>
+                  </a:lnTo>
+                  <a:lnTo>
+                    <a:pt x="717653" y="674530"/>
+                  </a:lnTo>
+                  <a:lnTo>
+                    <a:pt x="787997" y="716812"/>
+                  </a:lnTo>
+                  <a:lnTo>
+                    <a:pt x="858342" y="756026"/>
+                  </a:lnTo>
+                  <a:lnTo>
+                    <a:pt x="928686" y="792395"/>
+                  </a:lnTo>
+                  <a:lnTo>
+                    <a:pt x="999031" y="826124"/>
+                  </a:lnTo>
+                  <a:lnTo>
+                    <a:pt x="1069375" y="857406"/>
+                  </a:lnTo>
+                  <a:lnTo>
+                    <a:pt x="1139720" y="886417"/>
+                  </a:lnTo>
+                  <a:lnTo>
+                    <a:pt x="1210064" y="913324"/>
+                  </a:lnTo>
+                  <a:lnTo>
+                    <a:pt x="1280409" y="938278"/>
+                  </a:lnTo>
+                  <a:lnTo>
+                    <a:pt x="1350753" y="957365"/>
+                  </a:lnTo>
+                  <a:lnTo>
+                    <a:pt x="1421098" y="954169"/>
+                  </a:lnTo>
+                  <a:lnTo>
+                    <a:pt x="1491442" y="950940"/>
+                  </a:lnTo>
+                  <a:lnTo>
+                    <a:pt x="1561786" y="947676"/>
+                  </a:lnTo>
+                  <a:lnTo>
+                    <a:pt x="1632131" y="944377"/>
+                  </a:lnTo>
+                  <a:lnTo>
+                    <a:pt x="1702475" y="941043"/>
+                  </a:lnTo>
+                  <a:lnTo>
+                    <a:pt x="1772820" y="937674"/>
+                  </a:lnTo>
+                  <a:lnTo>
+                    <a:pt x="1843164" y="934269"/>
+                  </a:lnTo>
+                  <a:lnTo>
+                    <a:pt x="1913509" y="930827"/>
+                  </a:lnTo>
+                  <a:lnTo>
+                    <a:pt x="1983853" y="927349"/>
+                  </a:lnTo>
+                  <a:lnTo>
+                    <a:pt x="2054198" y="923834"/>
+                  </a:lnTo>
+                  <a:lnTo>
+                    <a:pt x="2124542" y="920281"/>
+                  </a:lnTo>
+                  <a:lnTo>
+                    <a:pt x="2194887" y="916690"/>
+                  </a:lnTo>
+                  <a:lnTo>
+                    <a:pt x="2265231" y="913061"/>
+                  </a:lnTo>
+                  <a:lnTo>
+                    <a:pt x="2335576" y="909394"/>
+                  </a:lnTo>
+                  <a:lnTo>
+                    <a:pt x="2405920" y="905687"/>
+                  </a:lnTo>
+                  <a:lnTo>
+                    <a:pt x="2476265" y="901941"/>
+                  </a:lnTo>
+                  <a:lnTo>
+                    <a:pt x="2546609" y="898155"/>
+                  </a:lnTo>
+                  <a:lnTo>
+                    <a:pt x="2616954" y="894328"/>
+                  </a:lnTo>
+                  <a:lnTo>
+                    <a:pt x="2687298" y="890461"/>
+                  </a:lnTo>
+                  <a:lnTo>
+                    <a:pt x="2757643" y="886553"/>
+                  </a:lnTo>
+                  <a:lnTo>
+                    <a:pt x="2827987" y="882603"/>
+                  </a:lnTo>
+                  <a:lnTo>
+                    <a:pt x="2898332" y="878610"/>
+                  </a:lnTo>
+                  <a:lnTo>
+                    <a:pt x="2968676" y="874576"/>
+                  </a:lnTo>
+                  <a:lnTo>
+                    <a:pt x="3039021" y="870498"/>
+                  </a:lnTo>
+                  <a:lnTo>
+                    <a:pt x="3109365" y="866377"/>
+                  </a:lnTo>
+                  <a:lnTo>
+                    <a:pt x="3179710" y="862212"/>
+                  </a:lnTo>
+                  <a:lnTo>
+                    <a:pt x="3250054" y="858002"/>
+                  </a:lnTo>
+                  <a:lnTo>
+                    <a:pt x="3320399" y="853748"/>
+                  </a:lnTo>
+                  <a:lnTo>
+                    <a:pt x="3390743" y="849448"/>
+                  </a:lnTo>
+                  <a:lnTo>
+                    <a:pt x="3461088" y="845103"/>
+                  </a:lnTo>
+                  <a:lnTo>
+                    <a:pt x="3531432" y="840711"/>
+                  </a:lnTo>
+                  <a:lnTo>
+                    <a:pt x="3601777" y="836272"/>
+                  </a:lnTo>
+                  <a:lnTo>
+                    <a:pt x="3672121" y="831786"/>
+                  </a:lnTo>
+                  <a:lnTo>
+                    <a:pt x="3742466" y="827253"/>
+                  </a:lnTo>
+                  <a:lnTo>
+                    <a:pt x="3812810" y="822671"/>
+                  </a:lnTo>
+                  <a:lnTo>
+                    <a:pt x="3883155" y="818040"/>
+                  </a:lnTo>
+                  <a:lnTo>
+                    <a:pt x="3953499" y="813360"/>
+                  </a:lnTo>
+                  <a:lnTo>
+                    <a:pt x="4023844" y="808629"/>
+                  </a:lnTo>
+                  <a:lnTo>
+                    <a:pt x="4094188" y="803849"/>
+                  </a:lnTo>
+                  <a:lnTo>
+                    <a:pt x="4164533" y="799017"/>
+                  </a:lnTo>
+                  <a:lnTo>
+                    <a:pt x="4234877" y="794135"/>
+                  </a:lnTo>
+                  <a:lnTo>
+                    <a:pt x="4305222" y="789200"/>
+                  </a:lnTo>
+                  <a:lnTo>
+                    <a:pt x="4375566" y="784212"/>
+                  </a:lnTo>
+                  <a:lnTo>
+                    <a:pt x="4445911" y="779171"/>
+                  </a:lnTo>
+                  <a:lnTo>
+                    <a:pt x="4516255" y="774077"/>
+                  </a:lnTo>
+                  <a:lnTo>
+                    <a:pt x="4586600" y="768928"/>
+                  </a:lnTo>
+                  <a:lnTo>
+                    <a:pt x="4656944" y="763724"/>
+                  </a:lnTo>
+                  <a:lnTo>
+                    <a:pt x="4727289" y="758465"/>
+                  </a:lnTo>
+                  <a:lnTo>
+                    <a:pt x="4797633" y="753150"/>
+                  </a:lnTo>
+                  <a:lnTo>
+                    <a:pt x="4867978" y="747778"/>
+                  </a:lnTo>
+                  <a:lnTo>
+                    <a:pt x="4938322" y="742349"/>
+                  </a:lnTo>
+                  <a:lnTo>
+                    <a:pt x="5008667" y="736863"/>
+                  </a:lnTo>
+                </a:path>
+              </a:pathLst>
+            </a:custGeom>
+          </p:spPr>
+          <p:txBody>
+            <a:bodyPr/>
+            <a:lstStyle/>
+            <a:p/>
+          </p:txBody>
+        </p:sp>
+        <p:sp>
+          <p:nvSpPr>
+            <p:cNvPr id="69" name="pl69"/>
+            <p:cNvSpPr/>
+            <p:nvPr/>
+          </p:nvSpPr>
+          <p:spPr>
+            <a:xfrm>
+              <a:off x="1235312" y="5297011"/>
+              <a:ext cx="6964104" cy="290791"/>
+            </a:xfrm>
+            <a:custGeom>
+              <a:avLst/>
+              <a:pathLst>
+                <a:path w="6964104" h="290791">
+                  <a:moveTo>
+                    <a:pt x="6964104" y="290791"/>
+                  </a:moveTo>
+                  <a:lnTo>
+                    <a:pt x="6893760" y="290331"/>
+                  </a:lnTo>
+                  <a:lnTo>
+                    <a:pt x="6823415" y="289834"/>
+                  </a:lnTo>
+                  <a:lnTo>
+                    <a:pt x="6753071" y="289299"/>
+                  </a:lnTo>
+                  <a:lnTo>
+                    <a:pt x="6682726" y="288722"/>
+                  </a:lnTo>
+                  <a:lnTo>
+                    <a:pt x="6612382" y="288099"/>
+                  </a:lnTo>
+                  <a:lnTo>
+                    <a:pt x="6542037" y="287428"/>
+                  </a:lnTo>
+                  <a:lnTo>
+                    <a:pt x="6471693" y="286705"/>
+                  </a:lnTo>
+                  <a:lnTo>
+                    <a:pt x="6401348" y="285925"/>
+                  </a:lnTo>
+                  <a:lnTo>
+                    <a:pt x="6331004" y="285084"/>
+                  </a:lnTo>
+                  <a:lnTo>
+                    <a:pt x="6260659" y="284177"/>
+                  </a:lnTo>
+                  <a:lnTo>
+                    <a:pt x="6190315" y="283199"/>
+                  </a:lnTo>
+                  <a:lnTo>
+                    <a:pt x="6119970" y="282144"/>
+                  </a:lnTo>
+                  <a:lnTo>
+                    <a:pt x="6049626" y="281007"/>
+                  </a:lnTo>
+                  <a:lnTo>
+                    <a:pt x="5979281" y="279782"/>
+                  </a:lnTo>
+                  <a:lnTo>
+                    <a:pt x="5908937" y="278460"/>
+                  </a:lnTo>
+                  <a:lnTo>
+                    <a:pt x="5838592" y="277034"/>
+                  </a:lnTo>
+                  <a:lnTo>
+                    <a:pt x="5768248" y="275498"/>
+                  </a:lnTo>
+                  <a:lnTo>
+                    <a:pt x="5697903" y="273841"/>
+                  </a:lnTo>
+                  <a:lnTo>
+                    <a:pt x="5627559" y="272054"/>
+                  </a:lnTo>
+                  <a:lnTo>
+                    <a:pt x="5557214" y="270128"/>
+                  </a:lnTo>
+                  <a:lnTo>
+                    <a:pt x="5486870" y="268050"/>
+                  </a:lnTo>
+                  <a:lnTo>
+                    <a:pt x="5416525" y="265811"/>
+                  </a:lnTo>
+                  <a:lnTo>
+                    <a:pt x="5346181" y="263396"/>
+                  </a:lnTo>
+                  <a:lnTo>
+                    <a:pt x="5275836" y="260792"/>
+                  </a:lnTo>
+                  <a:lnTo>
+                    <a:pt x="5205492" y="257984"/>
+                  </a:lnTo>
+                  <a:lnTo>
+                    <a:pt x="5135147" y="254957"/>
+                  </a:lnTo>
+                  <a:lnTo>
+                    <a:pt x="5064803" y="251693"/>
+                  </a:lnTo>
+                  <a:lnTo>
+                    <a:pt x="4994458" y="248173"/>
+                  </a:lnTo>
+                  <a:lnTo>
+                    <a:pt x="4924114" y="244378"/>
+                  </a:lnTo>
+                  <a:lnTo>
+                    <a:pt x="4853769" y="240286"/>
+                  </a:lnTo>
+                  <a:lnTo>
+                    <a:pt x="4783425" y="235874"/>
+                  </a:lnTo>
+                  <a:lnTo>
+                    <a:pt x="4713080" y="231117"/>
+                  </a:lnTo>
+                  <a:lnTo>
+                    <a:pt x="4642736" y="225987"/>
+                  </a:lnTo>
+                  <a:lnTo>
+                    <a:pt x="4572391" y="220456"/>
+                  </a:lnTo>
+                  <a:lnTo>
+                    <a:pt x="4502047" y="214493"/>
+                  </a:lnTo>
+                  <a:lnTo>
+                    <a:pt x="4431702" y="208062"/>
+                  </a:lnTo>
+                  <a:lnTo>
+                    <a:pt x="4361358" y="201129"/>
+                  </a:lnTo>
+                  <a:lnTo>
+                    <a:pt x="4291013" y="193653"/>
+                  </a:lnTo>
+                  <a:lnTo>
+                    <a:pt x="4220669" y="185592"/>
+                  </a:lnTo>
+                  <a:lnTo>
+                    <a:pt x="4150324" y="176900"/>
+                  </a:lnTo>
+                  <a:lnTo>
+                    <a:pt x="4079980" y="167529"/>
+                  </a:lnTo>
+                  <a:lnTo>
+                    <a:pt x="4009635" y="157424"/>
+                  </a:lnTo>
+                  <a:lnTo>
+                    <a:pt x="3939291" y="146528"/>
+                  </a:lnTo>
+                  <a:lnTo>
+                    <a:pt x="3868946" y="134780"/>
+                  </a:lnTo>
+                  <a:lnTo>
+                    <a:pt x="3798602" y="122113"/>
+                  </a:lnTo>
+                  <a:lnTo>
+                    <a:pt x="3728257" y="108454"/>
+                  </a:lnTo>
+                  <a:lnTo>
+                    <a:pt x="3657913" y="93727"/>
+                  </a:lnTo>
+                  <a:lnTo>
+                    <a:pt x="3587569" y="77848"/>
+                  </a:lnTo>
+                  <a:lnTo>
+                    <a:pt x="3517224" y="60726"/>
+                  </a:lnTo>
+                  <a:lnTo>
+                    <a:pt x="3446880" y="42264"/>
+                  </a:lnTo>
+                  <a:lnTo>
+                    <a:pt x="3376535" y="22358"/>
+                  </a:lnTo>
+                  <a:lnTo>
+                    <a:pt x="3306191" y="894"/>
+                  </a:lnTo>
+                  <a:lnTo>
+                    <a:pt x="3235846" y="0"/>
+                  </a:lnTo>
+                  <a:lnTo>
+                    <a:pt x="3165502" y="3128"/>
+                  </a:lnTo>
+                  <a:lnTo>
+                    <a:pt x="3095157" y="6223"/>
+                  </a:lnTo>
+                  <a:lnTo>
+                    <a:pt x="3024813" y="9286"/>
+                  </a:lnTo>
+                  <a:lnTo>
+                    <a:pt x="2954468" y="12316"/>
+                  </a:lnTo>
+                  <a:lnTo>
+                    <a:pt x="2884124" y="15315"/>
+                  </a:lnTo>
+                  <a:lnTo>
+                    <a:pt x="2813779" y="18282"/>
+                  </a:lnTo>
+                  <a:lnTo>
+                    <a:pt x="2743435" y="21217"/>
+                  </a:lnTo>
+                  <a:lnTo>
+                    <a:pt x="2673090" y="24122"/>
+                  </a:lnTo>
+                  <a:lnTo>
+                    <a:pt x="2602746" y="26996"/>
+                  </a:lnTo>
+                  <a:lnTo>
+                    <a:pt x="2532401" y="29840"/>
+                  </a:lnTo>
+                  <a:lnTo>
+                    <a:pt x="2462057" y="32654"/>
+                  </a:lnTo>
+                  <a:lnTo>
+                    <a:pt x="2391712" y="35438"/>
+                  </a:lnTo>
+                  <a:lnTo>
+                    <a:pt x="2321368" y="38192"/>
+                  </a:lnTo>
+                  <a:lnTo>
+                    <a:pt x="2251023" y="40918"/>
+                  </a:lnTo>
+                  <a:lnTo>
+                    <a:pt x="2180679" y="43615"/>
+                  </a:lnTo>
+                  <a:lnTo>
+                    <a:pt x="2110334" y="46283"/>
+                  </a:lnTo>
+                  <a:lnTo>
+                    <a:pt x="2039990" y="48924"/>
+                  </a:lnTo>
+                  <a:lnTo>
+                    <a:pt x="1969645" y="51536"/>
+                  </a:lnTo>
+                  <a:lnTo>
+                    <a:pt x="1899301" y="54121"/>
+                  </a:lnTo>
+                  <a:lnTo>
+                    <a:pt x="1828956" y="56679"/>
+                  </a:lnTo>
+                  <a:lnTo>
+                    <a:pt x="1758612" y="59210"/>
+                  </a:lnTo>
+                  <a:lnTo>
+                    <a:pt x="1688267" y="61714"/>
+                  </a:lnTo>
+                  <a:lnTo>
+                    <a:pt x="1617923" y="64191"/>
+                  </a:lnTo>
+                  <a:lnTo>
+                    <a:pt x="1547578" y="66643"/>
+                  </a:lnTo>
+                  <a:lnTo>
+                    <a:pt x="1477234" y="69068"/>
+                  </a:lnTo>
+                  <a:lnTo>
+                    <a:pt x="1406889" y="71468"/>
+                  </a:lnTo>
+                  <a:lnTo>
+                    <a:pt x="1336545" y="73843"/>
+                  </a:lnTo>
+                  <a:lnTo>
+                    <a:pt x="1266200" y="76193"/>
+                  </a:lnTo>
+                  <a:lnTo>
+                    <a:pt x="1195856" y="78518"/>
+                  </a:lnTo>
+                  <a:lnTo>
+                    <a:pt x="1125511" y="80818"/>
+                  </a:lnTo>
+                  <a:lnTo>
+                    <a:pt x="1055167" y="83094"/>
+                  </a:lnTo>
+                  <a:lnTo>
+                    <a:pt x="984822" y="85347"/>
+                  </a:lnTo>
+                  <a:lnTo>
+                    <a:pt x="914478" y="87575"/>
+                  </a:lnTo>
+                  <a:lnTo>
+                    <a:pt x="844133" y="89780"/>
+                  </a:lnTo>
+                  <a:lnTo>
+                    <a:pt x="773789" y="91962"/>
+                  </a:lnTo>
+                  <a:lnTo>
+                    <a:pt x="703444" y="94120"/>
+                  </a:lnTo>
+                  <a:lnTo>
+                    <a:pt x="633100" y="96256"/>
+                  </a:lnTo>
+                  <a:lnTo>
+                    <a:pt x="562755" y="98370"/>
+                  </a:lnTo>
+                  <a:lnTo>
+                    <a:pt x="492411" y="100461"/>
+                  </a:lnTo>
+                  <a:lnTo>
+                    <a:pt x="422066" y="102530"/>
+                  </a:lnTo>
+                  <a:lnTo>
+                    <a:pt x="351722" y="104577"/>
+                  </a:lnTo>
+                  <a:lnTo>
+                    <a:pt x="281377" y="106602"/>
+                  </a:lnTo>
+                  <a:lnTo>
+                    <a:pt x="211033" y="108607"/>
+                  </a:lnTo>
+                  <a:lnTo>
+                    <a:pt x="140688" y="110590"/>
+                  </a:lnTo>
+                  <a:lnTo>
+                    <a:pt x="70344" y="112552"/>
+                  </a:lnTo>
+                  <a:lnTo>
+                    <a:pt x="0" y="114494"/>
+                  </a:lnTo>
+                </a:path>
+              </a:pathLst>
+            </a:custGeom>
+          </p:spPr>
+          <p:txBody>
+            <a:bodyPr/>
+            <a:lstStyle/>
+            <a:p/>
+          </p:txBody>
+        </p:sp>
+        <p:sp>
+          <p:nvSpPr>
+            <p:cNvPr id="70" name="pl70"/>
+            <p:cNvSpPr/>
+            <p:nvPr/>
+          </p:nvSpPr>
+          <p:spPr>
+            <a:xfrm>
+              <a:off x="1411671" y="4336484"/>
+              <a:ext cx="6787745" cy="1201869"/>
+            </a:xfrm>
+            <a:custGeom>
+              <a:avLst/>
+              <a:pathLst>
+                <a:path w="6787745" h="1201869">
+                  <a:moveTo>
+                    <a:pt x="0" y="0"/>
+                  </a:moveTo>
+                  <a:lnTo>
+                    <a:pt x="34674" y="20060"/>
+                  </a:lnTo>
+                  <a:lnTo>
+                    <a:pt x="105018" y="59461"/>
+                  </a:lnTo>
+                  <a:lnTo>
+                    <a:pt x="175363" y="97607"/>
+                  </a:lnTo>
+                  <a:lnTo>
+                    <a:pt x="245707" y="134538"/>
+                  </a:lnTo>
+                  <a:lnTo>
+                    <a:pt x="316052" y="170293"/>
+                  </a:lnTo>
+                  <a:lnTo>
+                    <a:pt x="386396" y="204910"/>
+                  </a:lnTo>
+                  <a:lnTo>
+                    <a:pt x="456741" y="238423"/>
+                  </a:lnTo>
+                  <a:lnTo>
+                    <a:pt x="527085" y="270870"/>
+                  </a:lnTo>
+                  <a:lnTo>
+                    <a:pt x="597430" y="302283"/>
+                  </a:lnTo>
+                  <a:lnTo>
+                    <a:pt x="667774" y="332696"/>
+                  </a:lnTo>
+                  <a:lnTo>
+                    <a:pt x="738119" y="362140"/>
+                  </a:lnTo>
+                  <a:lnTo>
+                    <a:pt x="808463" y="390646"/>
+                  </a:lnTo>
+                  <a:lnTo>
+                    <a:pt x="878808" y="418244"/>
+                  </a:lnTo>
+                  <a:lnTo>
+                    <a:pt x="949152" y="444964"/>
+                  </a:lnTo>
+                  <a:lnTo>
+                    <a:pt x="1019497" y="470832"/>
+                  </a:lnTo>
+                  <a:lnTo>
+                    <a:pt x="1089841" y="495877"/>
+                  </a:lnTo>
+                  <a:lnTo>
+                    <a:pt x="1160186" y="520124"/>
+                  </a:lnTo>
+                  <a:lnTo>
+                    <a:pt x="1230530" y="543599"/>
+                  </a:lnTo>
+                  <a:lnTo>
+                    <a:pt x="1300875" y="566326"/>
+                  </a:lnTo>
+                  <a:lnTo>
+                    <a:pt x="1371219" y="588329"/>
+                  </a:lnTo>
+                  <a:lnTo>
+                    <a:pt x="1441564" y="609632"/>
+                  </a:lnTo>
+                  <a:lnTo>
+                    <a:pt x="1511908" y="630256"/>
+                  </a:lnTo>
+                  <a:lnTo>
+                    <a:pt x="1582253" y="650223"/>
+                  </a:lnTo>
+                  <a:lnTo>
+                    <a:pt x="1652597" y="669554"/>
+                  </a:lnTo>
+                  <a:lnTo>
+                    <a:pt x="1722942" y="688270"/>
+                  </a:lnTo>
+                  <a:lnTo>
+                    <a:pt x="1793286" y="706389"/>
+                  </a:lnTo>
+                  <a:lnTo>
+                    <a:pt x="1863631" y="723932"/>
+                  </a:lnTo>
+                  <a:lnTo>
+                    <a:pt x="1933975" y="740916"/>
+                  </a:lnTo>
+                  <a:lnTo>
+                    <a:pt x="2004320" y="757359"/>
+                  </a:lnTo>
+                  <a:lnTo>
+                    <a:pt x="2074664" y="773278"/>
+                  </a:lnTo>
+                  <a:lnTo>
+                    <a:pt x="2145009" y="788690"/>
+                  </a:lnTo>
+                  <a:lnTo>
+                    <a:pt x="2215353" y="803611"/>
+                  </a:lnTo>
+                  <a:lnTo>
+                    <a:pt x="2285698" y="818057"/>
+                  </a:lnTo>
+                  <a:lnTo>
+                    <a:pt x="2356042" y="832043"/>
+                  </a:lnTo>
+                  <a:lnTo>
+                    <a:pt x="2426387" y="845584"/>
+                  </a:lnTo>
+                  <a:lnTo>
+                    <a:pt x="2496731" y="858693"/>
+                  </a:lnTo>
+                  <a:lnTo>
+                    <a:pt x="2567076" y="871385"/>
+                  </a:lnTo>
+                  <a:lnTo>
+                    <a:pt x="2637420" y="883673"/>
+                  </a:lnTo>
+                  <a:lnTo>
+                    <a:pt x="2707765" y="895569"/>
+                  </a:lnTo>
+                  <a:lnTo>
+                    <a:pt x="2778109" y="907087"/>
+                  </a:lnTo>
+                  <a:lnTo>
+                    <a:pt x="2848454" y="918237"/>
+                  </a:lnTo>
+                  <a:lnTo>
+                    <a:pt x="2918798" y="929033"/>
+                  </a:lnTo>
+                  <a:lnTo>
+                    <a:pt x="2989143" y="939484"/>
+                  </a:lnTo>
+                  <a:lnTo>
+                    <a:pt x="3059487" y="949603"/>
+                  </a:lnTo>
+                  <a:lnTo>
+                    <a:pt x="3129832" y="959400"/>
+                  </a:lnTo>
+                  <a:lnTo>
+                    <a:pt x="3200176" y="968884"/>
+                  </a:lnTo>
+                  <a:lnTo>
+                    <a:pt x="3270520" y="978067"/>
+                  </a:lnTo>
+                  <a:lnTo>
+                    <a:pt x="3340865" y="986957"/>
+                  </a:lnTo>
+                  <a:lnTo>
+                    <a:pt x="3411209" y="995564"/>
+                  </a:lnTo>
+                  <a:lnTo>
+                    <a:pt x="3481554" y="1003896"/>
+                  </a:lnTo>
+                  <a:lnTo>
+                    <a:pt x="3551898" y="1011964"/>
+                  </a:lnTo>
+                  <a:lnTo>
+                    <a:pt x="3622243" y="1019774"/>
+                  </a:lnTo>
+                  <a:lnTo>
+                    <a:pt x="3692587" y="1027336"/>
+                  </a:lnTo>
+                  <a:lnTo>
+                    <a:pt x="3762932" y="1034657"/>
+                  </a:lnTo>
+                  <a:lnTo>
+                    <a:pt x="3833276" y="1041744"/>
+                  </a:lnTo>
+                  <a:lnTo>
+                    <a:pt x="3903621" y="1048606"/>
+                  </a:lnTo>
+                  <a:lnTo>
+                    <a:pt x="3973965" y="1055250"/>
+                  </a:lnTo>
+                  <a:lnTo>
+                    <a:pt x="4044310" y="1061682"/>
+                  </a:lnTo>
+                  <a:lnTo>
+                    <a:pt x="4114654" y="1067909"/>
+                  </a:lnTo>
+                  <a:lnTo>
+                    <a:pt x="4184999" y="1073937"/>
+                  </a:lnTo>
+                  <a:lnTo>
+                    <a:pt x="4255343" y="1079774"/>
+                  </a:lnTo>
+                  <a:lnTo>
+                    <a:pt x="4325688" y="1085425"/>
+                  </a:lnTo>
+                  <a:lnTo>
+                    <a:pt x="4396032" y="1090896"/>
+                  </a:lnTo>
+                  <a:lnTo>
+                    <a:pt x="4466377" y="1096192"/>
+                  </a:lnTo>
+                  <a:lnTo>
+                    <a:pt x="4536721" y="1101320"/>
+                  </a:lnTo>
+                  <a:lnTo>
+                    <a:pt x="4607066" y="1106285"/>
+                  </a:lnTo>
+                  <a:lnTo>
+                    <a:pt x="4677410" y="1111091"/>
+                  </a:lnTo>
+                  <a:lnTo>
+                    <a:pt x="4747755" y="1115744"/>
+                  </a:lnTo>
+                  <a:lnTo>
+                    <a:pt x="4818099" y="1120250"/>
+                  </a:lnTo>
+                  <a:lnTo>
+                    <a:pt x="4888444" y="1124611"/>
+                  </a:lnTo>
+                  <a:lnTo>
+                    <a:pt x="4958788" y="1128834"/>
+                  </a:lnTo>
+                  <a:lnTo>
+                    <a:pt x="5029133" y="1132922"/>
+                  </a:lnTo>
+                  <a:lnTo>
+                    <a:pt x="5099477" y="1136881"/>
+                  </a:lnTo>
+                  <a:lnTo>
+                    <a:pt x="5169822" y="1140713"/>
+                  </a:lnTo>
+                  <a:lnTo>
+                    <a:pt x="5240166" y="1144423"/>
+                  </a:lnTo>
+                  <a:lnTo>
+                    <a:pt x="5310511" y="1148014"/>
+                  </a:lnTo>
+                  <a:lnTo>
+                    <a:pt x="5380855" y="1151492"/>
+                  </a:lnTo>
+                  <a:lnTo>
+                    <a:pt x="5451200" y="1154859"/>
+                  </a:lnTo>
+                  <a:lnTo>
+                    <a:pt x="5521544" y="1158118"/>
+                  </a:lnTo>
+                  <a:lnTo>
+                    <a:pt x="5591889" y="1161274"/>
+                  </a:lnTo>
+                  <a:lnTo>
+                    <a:pt x="5662233" y="1164329"/>
+                  </a:lnTo>
+                  <a:lnTo>
+                    <a:pt x="5732578" y="1167287"/>
+                  </a:lnTo>
+                  <a:lnTo>
+                    <a:pt x="5802922" y="1170150"/>
+                  </a:lnTo>
+                  <a:lnTo>
+                    <a:pt x="5873267" y="1172923"/>
+                  </a:lnTo>
+                  <a:lnTo>
+                    <a:pt x="5943611" y="1175607"/>
+                  </a:lnTo>
+                  <a:lnTo>
+                    <a:pt x="6013956" y="1178206"/>
+                  </a:lnTo>
+                  <a:lnTo>
+                    <a:pt x="6084300" y="1180722"/>
+                  </a:lnTo>
+                  <a:lnTo>
+                    <a:pt x="6154645" y="1183157"/>
+                  </a:lnTo>
+                  <a:lnTo>
+                    <a:pt x="6224989" y="1185515"/>
+                  </a:lnTo>
+                  <a:lnTo>
+                    <a:pt x="6295334" y="1187799"/>
+                  </a:lnTo>
+                  <a:lnTo>
+                    <a:pt x="6365678" y="1190009"/>
+                  </a:lnTo>
+                  <a:lnTo>
+                    <a:pt x="6436023" y="1192149"/>
+                  </a:lnTo>
+                  <a:lnTo>
+                    <a:pt x="6506367" y="1194221"/>
+                  </a:lnTo>
+                  <a:lnTo>
+                    <a:pt x="6576712" y="1196227"/>
+                  </a:lnTo>
+                  <a:lnTo>
+                    <a:pt x="6647056" y="1198169"/>
+                  </a:lnTo>
+                  <a:lnTo>
+                    <a:pt x="6717401" y="1200049"/>
+                  </a:lnTo>
+                  <a:lnTo>
+                    <a:pt x="6787745" y="1201869"/>
+                  </a:lnTo>
+                </a:path>
+              </a:pathLst>
+            </a:custGeom>
+            <a:ln w="27101" cap="flat">
+              <a:solidFill>
+                <a:srgbClr val="FF8C00">
+                  <a:alpha val="100000"/>
+                </a:srgbClr>
+              </a:solidFill>
+              <a:prstDash val="solid"/>
+              <a:round/>
+            </a:ln>
+          </p:spPr>
+          <p:txBody>
+            <a:bodyPr/>
+            <a:lstStyle/>
+            <a:p/>
+          </p:txBody>
+        </p:sp>
+        <p:sp>
+          <p:nvSpPr>
+            <p:cNvPr id="71" name="pl71"/>
+            <p:cNvSpPr/>
+            <p:nvPr/>
+          </p:nvSpPr>
+          <p:spPr>
+            <a:xfrm>
+              <a:off x="887106" y="5294352"/>
+              <a:ext cx="7660515" cy="0"/>
+            </a:xfrm>
+            <a:custGeom>
+              <a:avLst/>
+              <a:pathLst>
+                <a:path w="7660515" h="0">
+                  <a:moveTo>
+                    <a:pt x="0" y="0"/>
+                  </a:moveTo>
+                  <a:lnTo>
+                    <a:pt x="7660515" y="0"/>
+                  </a:lnTo>
+                  <a:lnTo>
+                    <a:pt x="7660515" y="0"/>
+                  </a:lnTo>
+                </a:path>
+              </a:pathLst>
+            </a:custGeom>
+            <a:ln w="13550" cap="flat">
+              <a:solidFill>
+                <a:srgbClr val="7F7F7F">
+                  <a:alpha val="100000"/>
+                </a:srgbClr>
+              </a:solidFill>
+              <a:prstDash val="dash"/>
+              <a:round/>
+            </a:ln>
+          </p:spPr>
+          <p:txBody>
+            <a:bodyPr/>
+            <a:lstStyle/>
+            <a:p/>
+          </p:txBody>
+        </p:sp>
+        <p:sp>
+          <p:nvSpPr>
+            <p:cNvPr id="72" name="pl72"/>
+            <p:cNvSpPr/>
+            <p:nvPr/>
+          </p:nvSpPr>
+          <p:spPr>
+            <a:xfrm>
+              <a:off x="4530353" y="4336484"/>
+              <a:ext cx="0" cy="1317069"/>
+            </a:xfrm>
+            <a:custGeom>
+              <a:avLst/>
+              <a:pathLst>
+                <a:path w="0" h="1317069">
+                  <a:moveTo>
+                    <a:pt x="0" y="1317069"/>
+                  </a:moveTo>
+                  <a:lnTo>
+                    <a:pt x="0" y="0"/>
+                  </a:lnTo>
+                  <a:lnTo>
+                    <a:pt x="0" y="0"/>
+                  </a:lnTo>
+                </a:path>
+              </a:pathLst>
+            </a:custGeom>
+            <a:ln w="13550" cap="flat">
+              <a:solidFill>
+                <a:srgbClr val="666666">
+                  <a:alpha val="100000"/>
+                </a:srgbClr>
+              </a:solidFill>
+              <a:prstDash val="dot"/>
+              <a:round/>
+            </a:ln>
+          </p:spPr>
+          <p:txBody>
+            <a:bodyPr/>
+            <a:lstStyle/>
+            <a:p/>
+          </p:txBody>
+        </p:sp>
+        <p:sp>
+          <p:nvSpPr>
+            <p:cNvPr id="73" name="tx73"/>
+            <p:cNvSpPr/>
+            <p:nvPr/>
+          </p:nvSpPr>
+          <p:spPr>
+            <a:xfrm>
+              <a:off x="762297" y="5553636"/>
+              <a:ext cx="62179" cy="80101"/>
+            </a:xfrm>
+            <a:prstGeom prst="rect">
+              <a:avLst/>
+            </a:prstGeom>
+            <a:noFill/>
+          </p:spPr>
+          <p:txBody>
+            <a:bodyPr lIns="0" rIns="0" tIns="0" bIns="0" anchorCtr="1" anchor="ctr" wrap="none"/>
+            <a:lstStyle/>
+            <a:p>
+              <a:pPr algn="l" marL="0" marR="0" indent="0">
+                <a:lnSpc>
+                  <a:spcPts val="880"/>
+                </a:lnSpc>
+                <a:spcBef>
+                  <a:spcPts val="0"/>
+                </a:spcBef>
+                <a:spcAft>
+                  <a:spcPts val="0"/>
+                </a:spcAft>
+              </a:pPr>
+              <a:r>
+                <a:rPr sz="880">
+                  <a:solidFill>
+                    <a:srgbClr val="4D4D4D">
+                      <a:alpha val="100000"/>
+                    </a:srgbClr>
+                  </a:solidFill>
+                  <a:latin typeface="Helvetica"/>
+                  <a:cs typeface="Helvetica"/>
+                </a:rPr>
+                <a:t>0</a:t>
+              </a:r>
+            </a:p>
+          </p:txBody>
+        </p:sp>
+        <p:sp>
+          <p:nvSpPr>
+            <p:cNvPr id="74" name="tx74"/>
+            <p:cNvSpPr/>
+            <p:nvPr/>
+          </p:nvSpPr>
+          <p:spPr>
+            <a:xfrm>
+              <a:off x="762297" y="5254302"/>
+              <a:ext cx="62179" cy="80101"/>
+            </a:xfrm>
+            <a:prstGeom prst="rect">
+              <a:avLst/>
+            </a:prstGeom>
+            <a:noFill/>
+          </p:spPr>
+          <p:txBody>
+            <a:bodyPr lIns="0" rIns="0" tIns="0" bIns="0" anchorCtr="1" anchor="ctr" wrap="none"/>
+            <a:lstStyle/>
+            <a:p>
+              <a:pPr algn="l" marL="0" marR="0" indent="0">
+                <a:lnSpc>
+                  <a:spcPts val="880"/>
+                </a:lnSpc>
+                <a:spcBef>
+                  <a:spcPts val="0"/>
+                </a:spcBef>
+                <a:spcAft>
+                  <a:spcPts val="0"/>
+                </a:spcAft>
+              </a:pPr>
+              <a:r>
+                <a:rPr sz="880">
+                  <a:solidFill>
+                    <a:srgbClr val="4D4D4D">
+                      <a:alpha val="100000"/>
+                    </a:srgbClr>
+                  </a:solidFill>
+                  <a:latin typeface="Helvetica"/>
+                  <a:cs typeface="Helvetica"/>
+                </a:rPr>
+                <a:t>1</a:t>
+              </a:r>
+            </a:p>
+          </p:txBody>
+        </p:sp>
+        <p:sp>
+          <p:nvSpPr>
+            <p:cNvPr id="75" name="tx75"/>
+            <p:cNvSpPr/>
+            <p:nvPr/>
+          </p:nvSpPr>
+          <p:spPr>
+            <a:xfrm>
+              <a:off x="762297" y="4954968"/>
+              <a:ext cx="62179" cy="80101"/>
+            </a:xfrm>
+            <a:prstGeom prst="rect">
+              <a:avLst/>
+            </a:prstGeom>
+            <a:noFill/>
+          </p:spPr>
+          <p:txBody>
+            <a:bodyPr lIns="0" rIns="0" tIns="0" bIns="0" anchorCtr="1" anchor="ctr" wrap="none"/>
+            <a:lstStyle/>
+            <a:p>
+              <a:pPr algn="l" marL="0" marR="0" indent="0">
+                <a:lnSpc>
+                  <a:spcPts val="880"/>
+                </a:lnSpc>
+                <a:spcBef>
+                  <a:spcPts val="0"/>
+                </a:spcBef>
+                <a:spcAft>
+                  <a:spcPts val="0"/>
+                </a:spcAft>
+              </a:pPr>
+              <a:r>
+                <a:rPr sz="880">
+                  <a:solidFill>
+                    <a:srgbClr val="4D4D4D">
+                      <a:alpha val="100000"/>
+                    </a:srgbClr>
+                  </a:solidFill>
+                  <a:latin typeface="Helvetica"/>
+                  <a:cs typeface="Helvetica"/>
+                </a:rPr>
+                <a:t>2</a:t>
+              </a:r>
+            </a:p>
+          </p:txBody>
+        </p:sp>
+        <p:sp>
+          <p:nvSpPr>
+            <p:cNvPr id="76" name="tx76"/>
+            <p:cNvSpPr/>
+            <p:nvPr/>
+          </p:nvSpPr>
+          <p:spPr>
+            <a:xfrm>
+              <a:off x="762297" y="4655634"/>
+              <a:ext cx="62179" cy="80101"/>
+            </a:xfrm>
+            <a:prstGeom prst="rect">
+              <a:avLst/>
+            </a:prstGeom>
+            <a:noFill/>
+          </p:spPr>
+          <p:txBody>
+            <a:bodyPr lIns="0" rIns="0" tIns="0" bIns="0" anchorCtr="1" anchor="ctr" wrap="none"/>
+            <a:lstStyle/>
+            <a:p>
+              <a:pPr algn="l" marL="0" marR="0" indent="0">
+                <a:lnSpc>
+                  <a:spcPts val="880"/>
+                </a:lnSpc>
+                <a:spcBef>
+                  <a:spcPts val="0"/>
+                </a:spcBef>
+                <a:spcAft>
+                  <a:spcPts val="0"/>
+                </a:spcAft>
+              </a:pPr>
+              <a:r>
+                <a:rPr sz="880">
+                  <a:solidFill>
+                    <a:srgbClr val="4D4D4D">
+                      <a:alpha val="100000"/>
+                    </a:srgbClr>
+                  </a:solidFill>
+                  <a:latin typeface="Helvetica"/>
+                  <a:cs typeface="Helvetica"/>
+                </a:rPr>
+                <a:t>3</a:t>
+              </a:r>
+            </a:p>
+          </p:txBody>
+        </p:sp>
+        <p:sp>
+          <p:nvSpPr>
+            <p:cNvPr id="77" name="tx77"/>
+            <p:cNvSpPr/>
+            <p:nvPr/>
+          </p:nvSpPr>
+          <p:spPr>
+            <a:xfrm>
+              <a:off x="762297" y="4356300"/>
+              <a:ext cx="62179" cy="80101"/>
+            </a:xfrm>
+            <a:prstGeom prst="rect">
+              <a:avLst/>
+            </a:prstGeom>
+            <a:noFill/>
+          </p:spPr>
+          <p:txBody>
+            <a:bodyPr lIns="0" rIns="0" tIns="0" bIns="0" anchorCtr="1" anchor="ctr" wrap="none"/>
+            <a:lstStyle/>
+            <a:p>
+              <a:pPr algn="l" marL="0" marR="0" indent="0">
+                <a:lnSpc>
+                  <a:spcPts val="880"/>
+                </a:lnSpc>
+                <a:spcBef>
+                  <a:spcPts val="0"/>
+                </a:spcBef>
+                <a:spcAft>
+                  <a:spcPts val="0"/>
+                </a:spcAft>
+              </a:pPr>
+              <a:r>
+                <a:rPr sz="880">
+                  <a:solidFill>
+                    <a:srgbClr val="4D4D4D">
+                      <a:alpha val="100000"/>
+                    </a:srgbClr>
+                  </a:solidFill>
+                  <a:latin typeface="Helvetica"/>
+                  <a:cs typeface="Helvetica"/>
+                </a:rPr>
+                <a:t>4</a:t>
+              </a:r>
+            </a:p>
+          </p:txBody>
+        </p:sp>
+        <p:sp>
+          <p:nvSpPr>
+            <p:cNvPr id="78" name="tx78"/>
+            <p:cNvSpPr/>
+            <p:nvPr/>
+          </p:nvSpPr>
+          <p:spPr>
+            <a:xfrm>
+              <a:off x="1241001" y="5716183"/>
+              <a:ext cx="161574" cy="80101"/>
+            </a:xfrm>
+            <a:prstGeom prst="rect">
+              <a:avLst/>
+            </a:prstGeom>
+            <a:noFill/>
+          </p:spPr>
+          <p:txBody>
+            <a:bodyPr lIns="0" rIns="0" tIns="0" bIns="0" anchorCtr="1" anchor="ctr" wrap="none"/>
+            <a:lstStyle/>
+            <a:p>
+              <a:pPr algn="l" marL="0" marR="0" indent="0">
+                <a:lnSpc>
+                  <a:spcPts val="880"/>
+                </a:lnSpc>
+                <a:spcBef>
+                  <a:spcPts val="0"/>
+                </a:spcBef>
+                <a:spcAft>
+                  <a:spcPts val="0"/>
+                </a:spcAft>
+              </a:pPr>
+              <a:r>
+                <a:rPr sz="880">
+                  <a:solidFill>
+                    <a:srgbClr val="4D4D4D">
+                      <a:alpha val="100000"/>
+                    </a:srgbClr>
+                  </a:solidFill>
+                  <a:latin typeface="Helvetica"/>
+                  <a:cs typeface="Helvetica"/>
+                </a:rPr>
+                <a:t>-40</a:t>
+              </a:r>
+            </a:p>
+          </p:txBody>
+        </p:sp>
+        <p:sp>
+          <p:nvSpPr>
+            <p:cNvPr id="79" name="tx79"/>
+            <p:cNvSpPr/>
+            <p:nvPr/>
+          </p:nvSpPr>
+          <p:spPr>
+            <a:xfrm>
+              <a:off x="2054602" y="5716183"/>
+              <a:ext cx="161574" cy="80101"/>
+            </a:xfrm>
+            <a:prstGeom prst="rect">
+              <a:avLst/>
+            </a:prstGeom>
+            <a:noFill/>
+          </p:spPr>
+          <p:txBody>
+            <a:bodyPr lIns="0" rIns="0" tIns="0" bIns="0" anchorCtr="1" anchor="ctr" wrap="none"/>
+            <a:lstStyle/>
+            <a:p>
+              <a:pPr algn="l" marL="0" marR="0" indent="0">
+                <a:lnSpc>
+                  <a:spcPts val="880"/>
+                </a:lnSpc>
+                <a:spcBef>
+                  <a:spcPts val="0"/>
+                </a:spcBef>
+                <a:spcAft>
+                  <a:spcPts val="0"/>
+                </a:spcAft>
+              </a:pPr>
+              <a:r>
+                <a:rPr sz="880">
+                  <a:solidFill>
+                    <a:srgbClr val="4D4D4D">
+                      <a:alpha val="100000"/>
+                    </a:srgbClr>
+                  </a:solidFill>
+                  <a:latin typeface="Helvetica"/>
+                  <a:cs typeface="Helvetica"/>
+                </a:rPr>
+                <a:t>-30</a:t>
+              </a:r>
+            </a:p>
+          </p:txBody>
+        </p:sp>
+        <p:sp>
+          <p:nvSpPr>
+            <p:cNvPr id="80" name="tx80"/>
+            <p:cNvSpPr/>
+            <p:nvPr/>
+          </p:nvSpPr>
+          <p:spPr>
+            <a:xfrm>
+              <a:off x="2868203" y="5716183"/>
+              <a:ext cx="161574" cy="80101"/>
+            </a:xfrm>
+            <a:prstGeom prst="rect">
+              <a:avLst/>
+            </a:prstGeom>
+            <a:noFill/>
+          </p:spPr>
+          <p:txBody>
+            <a:bodyPr lIns="0" rIns="0" tIns="0" bIns="0" anchorCtr="1" anchor="ctr" wrap="none"/>
+            <a:lstStyle/>
+            <a:p>
+              <a:pPr algn="l" marL="0" marR="0" indent="0">
+                <a:lnSpc>
+                  <a:spcPts val="880"/>
+                </a:lnSpc>
+                <a:spcBef>
+                  <a:spcPts val="0"/>
+                </a:spcBef>
+                <a:spcAft>
+                  <a:spcPts val="0"/>
+                </a:spcAft>
+              </a:pPr>
+              <a:r>
+                <a:rPr sz="880">
+                  <a:solidFill>
+                    <a:srgbClr val="4D4D4D">
+                      <a:alpha val="100000"/>
+                    </a:srgbClr>
+                  </a:solidFill>
+                  <a:latin typeface="Helvetica"/>
+                  <a:cs typeface="Helvetica"/>
+                </a:rPr>
+                <a:t>-20</a:t>
+              </a:r>
+            </a:p>
+          </p:txBody>
+        </p:sp>
+        <p:sp>
+          <p:nvSpPr>
+            <p:cNvPr id="81" name="tx81"/>
+            <p:cNvSpPr/>
+            <p:nvPr/>
+          </p:nvSpPr>
+          <p:spPr>
+            <a:xfrm>
+              <a:off x="3681805" y="5716183"/>
+              <a:ext cx="161574" cy="80101"/>
+            </a:xfrm>
+            <a:prstGeom prst="rect">
+              <a:avLst/>
+            </a:prstGeom>
+            <a:noFill/>
+          </p:spPr>
+          <p:txBody>
+            <a:bodyPr lIns="0" rIns="0" tIns="0" bIns="0" anchorCtr="1" anchor="ctr" wrap="none"/>
+            <a:lstStyle/>
+            <a:p>
+              <a:pPr algn="l" marL="0" marR="0" indent="0">
+                <a:lnSpc>
+                  <a:spcPts val="880"/>
+                </a:lnSpc>
+                <a:spcBef>
+                  <a:spcPts val="0"/>
+                </a:spcBef>
+                <a:spcAft>
+                  <a:spcPts val="0"/>
+                </a:spcAft>
+              </a:pPr>
+              <a:r>
+                <a:rPr sz="880">
+                  <a:solidFill>
+                    <a:srgbClr val="4D4D4D">
+                      <a:alpha val="100000"/>
+                    </a:srgbClr>
+                  </a:solidFill>
+                  <a:latin typeface="Helvetica"/>
+                  <a:cs typeface="Helvetica"/>
+                </a:rPr>
+                <a:t>-10</a:t>
+              </a:r>
+            </a:p>
+          </p:txBody>
+        </p:sp>
+        <p:sp>
+          <p:nvSpPr>
+            <p:cNvPr id="82" name="tx82"/>
+            <p:cNvSpPr/>
+            <p:nvPr/>
+          </p:nvSpPr>
+          <p:spPr>
+            <a:xfrm>
+              <a:off x="4545104" y="5716183"/>
+              <a:ext cx="62179" cy="80101"/>
+            </a:xfrm>
+            <a:prstGeom prst="rect">
+              <a:avLst/>
+            </a:prstGeom>
+            <a:noFill/>
+          </p:spPr>
+          <p:txBody>
+            <a:bodyPr lIns="0" rIns="0" tIns="0" bIns="0" anchorCtr="1" anchor="ctr" wrap="none"/>
+            <a:lstStyle/>
+            <a:p>
+              <a:pPr algn="l" marL="0" marR="0" indent="0">
+                <a:lnSpc>
+                  <a:spcPts val="880"/>
+                </a:lnSpc>
+                <a:spcBef>
+                  <a:spcPts val="0"/>
+                </a:spcBef>
+                <a:spcAft>
+                  <a:spcPts val="0"/>
+                </a:spcAft>
+              </a:pPr>
+              <a:r>
+                <a:rPr sz="880">
+                  <a:solidFill>
+                    <a:srgbClr val="4D4D4D">
+                      <a:alpha val="100000"/>
+                    </a:srgbClr>
+                  </a:solidFill>
+                  <a:latin typeface="Helvetica"/>
+                  <a:cs typeface="Helvetica"/>
+                </a:rPr>
+                <a:t>0</a:t>
+              </a:r>
+            </a:p>
+          </p:txBody>
+        </p:sp>
+        <p:sp>
+          <p:nvSpPr>
+            <p:cNvPr id="83" name="tx83"/>
+            <p:cNvSpPr/>
+            <p:nvPr/>
+          </p:nvSpPr>
+          <p:spPr>
+            <a:xfrm>
+              <a:off x="5327615" y="5716183"/>
+              <a:ext cx="124358" cy="80101"/>
+            </a:xfrm>
+            <a:prstGeom prst="rect">
+              <a:avLst/>
+            </a:prstGeom>
+            <a:noFill/>
+          </p:spPr>
+          <p:txBody>
+            <a:bodyPr lIns="0" rIns="0" tIns="0" bIns="0" anchorCtr="1" anchor="ctr" wrap="none"/>
+            <a:lstStyle/>
+            <a:p>
+              <a:pPr algn="l" marL="0" marR="0" indent="0">
+                <a:lnSpc>
+                  <a:spcPts val="880"/>
+                </a:lnSpc>
+                <a:spcBef>
+                  <a:spcPts val="0"/>
+                </a:spcBef>
+                <a:spcAft>
+                  <a:spcPts val="0"/>
+                </a:spcAft>
+              </a:pPr>
+              <a:r>
+                <a:rPr sz="880">
+                  <a:solidFill>
+                    <a:srgbClr val="4D4D4D">
+                      <a:alpha val="100000"/>
+                    </a:srgbClr>
+                  </a:solidFill>
+                  <a:latin typeface="Helvetica"/>
+                  <a:cs typeface="Helvetica"/>
+                </a:rPr>
+                <a:t>10</a:t>
+              </a:r>
+            </a:p>
+          </p:txBody>
+        </p:sp>
+        <p:sp>
+          <p:nvSpPr>
+            <p:cNvPr id="84" name="tx84"/>
+            <p:cNvSpPr/>
+            <p:nvPr/>
+          </p:nvSpPr>
+          <p:spPr>
+            <a:xfrm>
+              <a:off x="6141217" y="5716183"/>
+              <a:ext cx="124358" cy="80101"/>
+            </a:xfrm>
+            <a:prstGeom prst="rect">
+              <a:avLst/>
+            </a:prstGeom>
+            <a:noFill/>
+          </p:spPr>
+          <p:txBody>
+            <a:bodyPr lIns="0" rIns="0" tIns="0" bIns="0" anchorCtr="1" anchor="ctr" wrap="none"/>
+            <a:lstStyle/>
+            <a:p>
+              <a:pPr algn="l" marL="0" marR="0" indent="0">
+                <a:lnSpc>
+                  <a:spcPts val="880"/>
+                </a:lnSpc>
+                <a:spcBef>
+                  <a:spcPts val="0"/>
+                </a:spcBef>
+                <a:spcAft>
+                  <a:spcPts val="0"/>
+                </a:spcAft>
+              </a:pPr>
+              <a:r>
+                <a:rPr sz="880">
+                  <a:solidFill>
+                    <a:srgbClr val="4D4D4D">
+                      <a:alpha val="100000"/>
+                    </a:srgbClr>
+                  </a:solidFill>
+                  <a:latin typeface="Helvetica"/>
+                  <a:cs typeface="Helvetica"/>
+                </a:rPr>
+                <a:t>20</a:t>
+              </a:r>
+            </a:p>
+          </p:txBody>
+        </p:sp>
+        <p:sp>
+          <p:nvSpPr>
+            <p:cNvPr id="85" name="tx85"/>
+            <p:cNvSpPr/>
+            <p:nvPr/>
+          </p:nvSpPr>
+          <p:spPr>
+            <a:xfrm>
+              <a:off x="6954818" y="5716183"/>
+              <a:ext cx="124358" cy="80101"/>
+            </a:xfrm>
+            <a:prstGeom prst="rect">
+              <a:avLst/>
+            </a:prstGeom>
+            <a:noFill/>
+          </p:spPr>
+          <p:txBody>
+            <a:bodyPr lIns="0" rIns="0" tIns="0" bIns="0" anchorCtr="1" anchor="ctr" wrap="none"/>
+            <a:lstStyle/>
+            <a:p>
+              <a:pPr algn="l" marL="0" marR="0" indent="0">
+                <a:lnSpc>
+                  <a:spcPts val="880"/>
+                </a:lnSpc>
+                <a:spcBef>
+                  <a:spcPts val="0"/>
+                </a:spcBef>
+                <a:spcAft>
+                  <a:spcPts val="0"/>
+                </a:spcAft>
+              </a:pPr>
+              <a:r>
+                <a:rPr sz="880">
+                  <a:solidFill>
+                    <a:srgbClr val="4D4D4D">
+                      <a:alpha val="100000"/>
+                    </a:srgbClr>
+                  </a:solidFill>
+                  <a:latin typeface="Helvetica"/>
+                  <a:cs typeface="Helvetica"/>
+                </a:rPr>
+                <a:t>30</a:t>
+              </a:r>
+            </a:p>
+          </p:txBody>
+        </p:sp>
+        <p:sp>
+          <p:nvSpPr>
+            <p:cNvPr id="86" name="tx86"/>
+            <p:cNvSpPr/>
+            <p:nvPr/>
+          </p:nvSpPr>
+          <p:spPr>
+            <a:xfrm>
+              <a:off x="7768419" y="5716183"/>
+              <a:ext cx="124358" cy="80101"/>
+            </a:xfrm>
+            <a:prstGeom prst="rect">
+              <a:avLst/>
+            </a:prstGeom>
+            <a:noFill/>
+          </p:spPr>
+          <p:txBody>
+            <a:bodyPr lIns="0" rIns="0" tIns="0" bIns="0" anchorCtr="1" anchor="ctr" wrap="none"/>
+            <a:lstStyle/>
+            <a:p>
+              <a:pPr algn="l" marL="0" marR="0" indent="0">
+                <a:lnSpc>
+                  <a:spcPts val="880"/>
+                </a:lnSpc>
+                <a:spcBef>
+                  <a:spcPts val="0"/>
+                </a:spcBef>
+                <a:spcAft>
+                  <a:spcPts val="0"/>
+                </a:spcAft>
+              </a:pPr>
+              <a:r>
+                <a:rPr sz="880">
+                  <a:solidFill>
+                    <a:srgbClr val="4D4D4D">
+                      <a:alpha val="100000"/>
+                    </a:srgbClr>
+                  </a:solidFill>
+                  <a:latin typeface="Helvetica"/>
+                  <a:cs typeface="Helvetica"/>
+                </a:rPr>
+                <a:t>40</a:t>
+              </a:r>
+            </a:p>
+          </p:txBody>
+        </p:sp>
+        <p:sp>
+          <p:nvSpPr>
+            <p:cNvPr id="87" name="tx87"/>
+            <p:cNvSpPr/>
+            <p:nvPr/>
+          </p:nvSpPr>
+          <p:spPr>
+            <a:xfrm>
+              <a:off x="2928340" y="5855859"/>
+              <a:ext cx="3578047" cy="100218"/>
+            </a:xfrm>
+            <a:prstGeom prst="rect">
+              <a:avLst/>
+            </a:prstGeom>
+            <a:noFill/>
+          </p:spPr>
+          <p:txBody>
+            <a:bodyPr lIns="0" rIns="0" tIns="0" bIns="0" anchorCtr="1" anchor="ctr" wrap="none"/>
+            <a:lstStyle/>
+            <a:p>
+              <a:pPr algn="l" marL="0" marR="0" indent="0">
+                <a:lnSpc>
+                  <a:spcPts val="1100"/>
+                </a:lnSpc>
+                <a:spcBef>
+                  <a:spcPts val="0"/>
+                </a:spcBef>
+                <a:spcAft>
+                  <a:spcPts val="0"/>
+                </a:spcAft>
+              </a:pPr>
+              <a:r>
+                <a:rPr sz="1100">
+                  <a:solidFill>
+                    <a:srgbClr val="000000">
+                      <a:alpha val="100000"/>
+                    </a:srgbClr>
+                  </a:solidFill>
+                  <a:latin typeface="Helvetica"/>
+                  <a:cs typeface="Helvetica"/>
+                </a:rPr>
+                <a:t>eGFR difference (%): 100 × (CKD-EPI Cr-Cys − CG) / CG</a:t>
+              </a:r>
+            </a:p>
+          </p:txBody>
+        </p:sp>
+        <p:sp>
+          <p:nvSpPr>
+            <p:cNvPr id="88" name="tx88"/>
+            <p:cNvSpPr/>
+            <p:nvPr/>
+          </p:nvSpPr>
+          <p:spPr>
+            <a:xfrm rot="-5400000">
+              <a:off x="138035" y="4944909"/>
+              <a:ext cx="1016904" cy="100218"/>
+            </a:xfrm>
+            <a:prstGeom prst="rect">
+              <a:avLst/>
+            </a:prstGeom>
+            <a:noFill/>
+          </p:spPr>
+          <p:txBody>
+            <a:bodyPr lIns="0" rIns="0" tIns="0" bIns="0" anchorCtr="1" anchor="ctr" wrap="none"/>
+            <a:lstStyle/>
+            <a:p>
+              <a:pPr algn="l" marL="0" marR="0" indent="0">
+                <a:lnSpc>
+                  <a:spcPts val="1100"/>
+                </a:lnSpc>
+                <a:spcBef>
+                  <a:spcPts val="0"/>
+                </a:spcBef>
+                <a:spcAft>
+                  <a:spcPts val="0"/>
+                </a:spcAft>
+              </a:pPr>
+              <a:r>
+                <a:rPr sz="1100">
+                  <a:solidFill>
+                    <a:srgbClr val="000000">
+                      <a:alpha val="100000"/>
+                    </a:srgbClr>
+                  </a:solidFill>
+                  <a:latin typeface="Helvetica"/>
+                  <a:cs typeface="Helvetica"/>
+                </a:rPr>
+                <a:t>subHR (95% CI)</a:t>
+              </a:r>
+            </a:p>
+          </p:txBody>
+        </p:sp>
+        <p:sp>
+          <p:nvSpPr>
+            <p:cNvPr id="89" name="tx89"/>
+            <p:cNvSpPr/>
+            <p:nvPr/>
+          </p:nvSpPr>
+          <p:spPr>
+            <a:xfrm>
+              <a:off x="887106" y="4159544"/>
+              <a:ext cx="6385163" cy="82021"/>
+            </a:xfrm>
+            <a:prstGeom prst="rect">
+              <a:avLst/>
+            </a:prstGeom>
+            <a:noFill/>
+          </p:spPr>
+          <p:txBody>
+            <a:bodyPr lIns="0" rIns="0" tIns="0" bIns="0" anchorCtr="1" anchor="ctr" wrap="none"/>
+            <a:lstStyle/>
+            <a:p>
+              <a:pPr algn="l" marL="0" marR="0" indent="0">
+                <a:lnSpc>
+                  <a:spcPts val="900"/>
+                </a:lnSpc>
+                <a:spcBef>
+                  <a:spcPts val="0"/>
+                </a:spcBef>
+                <a:spcAft>
+                  <a:spcPts val="0"/>
+                </a:spcAft>
+              </a:pPr>
+              <a:r>
+                <a:rPr sz="900">
+                  <a:solidFill>
+                    <a:srgbClr val="404040">
+                      <a:alpha val="100000"/>
+                    </a:srgbClr>
+                  </a:solidFill>
+                  <a:latin typeface="Helvetica"/>
+                  <a:cs typeface="Helvetica"/>
+                </a:rPr>
+                <a:t>subHR per 10 % decline: 1.45 (0.88-2.39), p = 0.140  |  per IQR decline (Δ = 29.9 %): 3.06 (0.69-13.55)  |  IQR: [-15.0, 14.9] %</a:t>
+              </a:r>
+            </a:p>
+          </p:txBody>
+        </p:sp>
+        <p:sp>
+          <p:nvSpPr>
+            <p:cNvPr id="90" name="tx90"/>
+            <p:cNvSpPr/>
+            <p:nvPr/>
+          </p:nvSpPr>
+          <p:spPr>
+            <a:xfrm>
+              <a:off x="887106" y="3932770"/>
               <a:ext cx="2858414" cy="120152"/>
             </a:xfrm>
             <a:prstGeom prst="rect">
